--- a/slides/pptx/第09回_複数の工程をまとめて任せる.pptx
+++ b/slides/pptx/第09回_複数の工程をまとめて任せる.pptx
@@ -12,9 +12,14 @@
     <p:sldId id="260" r:id="rId6"/>
     <p:sldId id="261" r:id="rId7"/>
     <p:sldId id="262" r:id="rId8"/>
+    <p:sldId id="263" r:id="rId9"/>
+    <p:sldId id="264" r:id="rId10"/>
+    <p:sldId id="265" r:id="rId11"/>
+    <p:sldId id="266" r:id="rId12"/>
+    <p:sldId id="267" r:id="rId13"/>
   </p:sldIdLst>
   <p:notesMasterIdLst>
-    <p:notesMasterId r:id="rId9"/>
+    <p:notesMasterId r:id="rId14"/>
   </p:notesMasterIdLst>
   <p:sldSz cx="12192000" cy="6858000"/>
   <p:notesSz cx="6858000" cy="12192000"/>
@@ -508,8 +513,7 @@
           <a:p>
             <a:r>
               <a:rPr lang="en-US" dirty="0"/>
-              <a:t>単発の指示から、手順のある仕事へ。ここが分かれ目です。
-【ゴール】3工程以上ある仕事をAIに渡す設計ができるようにします。どこで人が止めるかを決めます。</a:t>
+              <a:t>前回の宿題（不足資料1件）を確認。埋まっていれば、何が分かったかを聞く。ここから今日の多工程の話に入ると自然につながる。</a:t>
             </a:r>
             <a:endParaRPr lang="en-US" dirty="0"/>
           </a:p>
@@ -533,6 +537,270 @@
             <a:fld id="{F7021451-1387-4CA6-816F-3879F97B5CBC}" type="slidenum">
               <a:rPr lang="en-US"/>
               <a:t>1</a:t>
+            </a:fld>
+            <a:endParaRPr lang="en-US"/>
+          </a:p>
+        </p:txBody>
+      </p:sp>
+    </p:spTree>
+    <p:extLst>
+      <p:ext uri="{BB962C8B-B14F-4D97-AF65-F5344CB8AC3E}">
+        <p14:creationId xmlns:p14="http://schemas.microsoft.com/office/powerpoint/2010/main" val="1024086991"/>
+      </p:ext>
+    </p:extLst>
+  </p:cSld>
+  <p:clrMapOvr>
+    <a:masterClrMapping/>
+  </p:clrMapOvr>
+</p:notes>
+</file>
+
+<file path=ppt/notesSlides/notesSlide10.xml><?xml version="1.0" encoding="utf-8"?>
+<p:notes xmlns:a="http://schemas.openxmlformats.org/drawingml/2006/main" xmlns:r="http://schemas.openxmlformats.org/officeDocument/2006/relationships" xmlns:p="http://schemas.openxmlformats.org/presentationml/2006/main">
+  <p:cSld>
+    <p:spTree>
+      <p:nvGrpSpPr>
+        <p:cNvPr id="1" name=""/>
+        <p:cNvGrpSpPr/>
+        <p:nvPr/>
+      </p:nvGrpSpPr>
+      <p:grpSpPr>
+        <a:xfrm>
+          <a:off x="0" y="0"/>
+          <a:ext cx="0" cy="0"/>
+          <a:chOff x="0" y="0"/>
+          <a:chExt cx="0" cy="0"/>
+        </a:xfrm>
+      </p:grpSpPr>
+      <p:sp>
+        <p:nvSpPr>
+          <p:cNvPr id="2" name="Slide Image Placeholder 1"/>
+          <p:cNvSpPr>
+            <a:spLocks noGrp="1" noRot="1" noChangeAspect="1"/>
+          </p:cNvSpPr>
+          <p:nvPr>
+            <p:ph type="sldImg"/>
+          </p:nvPr>
+        </p:nvSpPr>
+        <p:spPr/>
+      </p:sp>
+      <p:sp>
+        <p:nvSpPr>
+          <p:cNvPr id="3" name="Notes Placeholder 2"/>
+          <p:cNvSpPr>
+            <a:spLocks noGrp="1"/>
+          </p:cNvSpPr>
+          <p:nvPr>
+            <p:ph type="body" idx="1"/>
+          </p:nvPr>
+        </p:nvSpPr>
+        <p:spPr/>
+        <p:txBody>
+          <a:bodyPr/>
+          <a:lstStyle/>
+          <a:p>
+            <a:r>
+              <a:rPr lang="en-US" dirty="0"/>
+              <a:t>確認役を社長以外にできるかを検討する。ここで人に渡せると、第11回の体制設計が楽になる。</a:t>
+            </a:r>
+            <a:endParaRPr lang="en-US" dirty="0"/>
+          </a:p>
+        </p:txBody>
+      </p:sp>
+      <p:sp>
+        <p:nvSpPr>
+          <p:cNvPr id="4" name="Slide Number Placeholder 3"/>
+          <p:cNvSpPr>
+            <a:spLocks noGrp="1"/>
+          </p:cNvSpPr>
+          <p:nvPr>
+            <p:ph type="sldNum" sz="quarter" idx="10"/>
+          </p:nvPr>
+        </p:nvSpPr>
+        <p:spPr/>
+        <p:txBody>
+          <a:bodyPr/>
+          <a:lstStyle/>
+          <a:p>
+            <a:fld id="{F7021451-1387-4CA6-816F-3879F97B5CBC}" type="slidenum">
+              <a:rPr lang="en-US"/>
+              <a:t>10</a:t>
+            </a:fld>
+            <a:endParaRPr lang="en-US"/>
+          </a:p>
+        </p:txBody>
+      </p:sp>
+    </p:spTree>
+    <p:extLst>
+      <p:ext uri="{BB962C8B-B14F-4D97-AF65-F5344CB8AC3E}">
+        <p14:creationId xmlns:p14="http://schemas.microsoft.com/office/powerpoint/2010/main" val="1024086991"/>
+      </p:ext>
+    </p:extLst>
+  </p:cSld>
+  <p:clrMapOvr>
+    <a:masterClrMapping/>
+  </p:clrMapOvr>
+</p:notes>
+</file>
+
+<file path=ppt/notesSlides/notesSlide11.xml><?xml version="1.0" encoding="utf-8"?>
+<p:notes xmlns:a="http://schemas.openxmlformats.org/drawingml/2006/main" xmlns:r="http://schemas.openxmlformats.org/officeDocument/2006/relationships" xmlns:p="http://schemas.openxmlformats.org/presentationml/2006/main">
+  <p:cSld>
+    <p:spTree>
+      <p:nvGrpSpPr>
+        <p:cNvPr id="1" name=""/>
+        <p:cNvGrpSpPr/>
+        <p:nvPr/>
+      </p:nvGrpSpPr>
+      <p:grpSpPr>
+        <a:xfrm>
+          <a:off x="0" y="0"/>
+          <a:ext cx="0" cy="0"/>
+          <a:chOff x="0" y="0"/>
+          <a:chExt cx="0" cy="0"/>
+        </a:xfrm>
+      </p:grpSpPr>
+      <p:sp>
+        <p:nvSpPr>
+          <p:cNvPr id="2" name="Slide Image Placeholder 1"/>
+          <p:cNvSpPr>
+            <a:spLocks noGrp="1" noRot="1" noChangeAspect="1"/>
+          </p:cNvSpPr>
+          <p:nvPr>
+            <p:ph type="sldImg"/>
+          </p:nvPr>
+        </p:nvSpPr>
+        <p:spPr/>
+      </p:sp>
+      <p:sp>
+        <p:nvSpPr>
+          <p:cNvPr id="3" name="Notes Placeholder 2"/>
+          <p:cNvSpPr>
+            <a:spLocks noGrp="1"/>
+          </p:cNvSpPr>
+          <p:nvPr>
+            <p:ph type="body" idx="1"/>
+          </p:nvPr>
+        </p:nvSpPr>
+        <p:spPr/>
+        <p:txBody>
+          <a:bodyPr/>
+          <a:lstStyle/>
+          <a:p>
+            <a:r>
+              <a:rPr lang="en-US" dirty="0"/>
+              <a:t>「発注できるようになることが目的」を明言する。作れない自分を責める必要はない、というメッセージが効く。</a:t>
+            </a:r>
+            <a:endParaRPr lang="en-US" dirty="0"/>
+          </a:p>
+        </p:txBody>
+      </p:sp>
+      <p:sp>
+        <p:nvSpPr>
+          <p:cNvPr id="4" name="Slide Number Placeholder 3"/>
+          <p:cNvSpPr>
+            <a:spLocks noGrp="1"/>
+          </p:cNvSpPr>
+          <p:nvPr>
+            <p:ph type="sldNum" sz="quarter" idx="10"/>
+          </p:nvPr>
+        </p:nvSpPr>
+        <p:spPr/>
+        <p:txBody>
+          <a:bodyPr/>
+          <a:lstStyle/>
+          <a:p>
+            <a:fld id="{F7021451-1387-4CA6-816F-3879F97B5CBC}" type="slidenum">
+              <a:rPr lang="en-US"/>
+              <a:t>11</a:t>
+            </a:fld>
+            <a:endParaRPr lang="en-US"/>
+          </a:p>
+        </p:txBody>
+      </p:sp>
+    </p:spTree>
+    <p:extLst>
+      <p:ext uri="{BB962C8B-B14F-4D97-AF65-F5344CB8AC3E}">
+        <p14:creationId xmlns:p14="http://schemas.microsoft.com/office/powerpoint/2010/main" val="1024086991"/>
+      </p:ext>
+    </p:extLst>
+  </p:cSld>
+  <p:clrMapOvr>
+    <a:masterClrMapping/>
+  </p:clrMapOvr>
+</p:notes>
+</file>
+
+<file path=ppt/notesSlides/notesSlide12.xml><?xml version="1.0" encoding="utf-8"?>
+<p:notes xmlns:a="http://schemas.openxmlformats.org/drawingml/2006/main" xmlns:r="http://schemas.openxmlformats.org/officeDocument/2006/relationships" xmlns:p="http://schemas.openxmlformats.org/presentationml/2006/main">
+  <p:cSld>
+    <p:spTree>
+      <p:nvGrpSpPr>
+        <p:cNvPr id="1" name=""/>
+        <p:cNvGrpSpPr/>
+        <p:nvPr/>
+      </p:nvGrpSpPr>
+      <p:grpSpPr>
+        <a:xfrm>
+          <a:off x="0" y="0"/>
+          <a:ext cx="0" cy="0"/>
+          <a:chOff x="0" y="0"/>
+          <a:chExt cx="0" cy="0"/>
+        </a:xfrm>
+      </p:grpSpPr>
+      <p:sp>
+        <p:nvSpPr>
+          <p:cNvPr id="2" name="Slide Image Placeholder 1"/>
+          <p:cNvSpPr>
+            <a:spLocks noGrp="1" noRot="1" noChangeAspect="1"/>
+          </p:cNvSpPr>
+          <p:nvPr>
+            <p:ph type="sldImg"/>
+          </p:nvPr>
+        </p:nvSpPr>
+        <p:spPr/>
+      </p:sp>
+      <p:sp>
+        <p:nvSpPr>
+          <p:cNvPr id="3" name="Notes Placeholder 2"/>
+          <p:cNvSpPr>
+            <a:spLocks noGrp="1"/>
+          </p:cNvSpPr>
+          <p:nvPr>
+            <p:ph type="body" idx="1"/>
+          </p:nvPr>
+        </p:nvSpPr>
+        <p:spPr/>
+        <p:txBody>
+          <a:bodyPr/>
+          <a:lstStyle/>
+          <a:p>
+            <a:r>
+              <a:rPr lang="en-US" dirty="0"/>
+              <a:t>1回だけ、を強調する。運用に載せるのは確認ポイントが機能してから。</a:t>
+            </a:r>
+            <a:endParaRPr lang="en-US" dirty="0"/>
+          </a:p>
+        </p:txBody>
+      </p:sp>
+      <p:sp>
+        <p:nvSpPr>
+          <p:cNvPr id="4" name="Slide Number Placeholder 3"/>
+          <p:cNvSpPr>
+            <a:spLocks noGrp="1"/>
+          </p:cNvSpPr>
+          <p:nvPr>
+            <p:ph type="sldNum" sz="quarter" idx="10"/>
+          </p:nvPr>
+        </p:nvSpPr>
+        <p:spPr/>
+        <p:txBody>
+          <a:bodyPr/>
+          <a:lstStyle/>
+          <a:p>
+            <a:fld id="{F7021451-1387-4CA6-816F-3879F97B5CBC}" type="slidenum">
+              <a:rPr lang="en-US"/>
+              <a:t>12</a:t>
             </a:fld>
             <a:endParaRPr lang="en-US"/>
           </a:p>
@@ -597,7 +865,7 @@
           <a:p>
             <a:r>
               <a:rPr lang="en-US" dirty="0"/>
-              <a:t>ここは30秒で。今日の到達点だけ言って、すぐ本題へ。</a:t>
+              <a:t>「単発」と「多工程」の違いを、受講者の実業務で言い換える。見積、採用、月次処理あたりが例に使いやすい。</a:t>
             </a:r>
             <a:endParaRPr lang="en-US" dirty="0"/>
           </a:p>
@@ -685,7 +953,7 @@
           <a:p>
             <a:r>
               <a:rPr lang="en-US" dirty="0"/>
-              <a:t>先に結論を言わず、受講者の実物を題材にしてこの型に当てはめて見せる。</a:t>
+              <a:t>「決める比重が高い回」と先に断る。手を動かす時間が減ると満足度が下がりやすいので、工程図を一緒に描くことで手を動かし続ける。</a:t>
             </a:r>
             <a:endParaRPr lang="en-US" dirty="0"/>
           </a:p>
@@ -773,7 +1041,7 @@
           <a:p>
             <a:r>
               <a:rPr lang="en-US" dirty="0"/>
-              <a:t>必ず左（失敗例）から。自分の失敗として話す。うまくいく例だけ見せると、受講者は自分の失敗を言わなくなる。</a:t>
+              <a:t>「新人に3つの仕事をまとめて任せたときと同じ」という言い換えが、この回で最も効く。経営者は人に任せた経験があるので、一瞬で伝わる。</a:t>
             </a:r>
             <a:endParaRPr lang="en-US" dirty="0"/>
           </a:p>
@@ -861,7 +1129,7 @@
           <a:p>
             <a:r>
               <a:rPr lang="en-US" dirty="0"/>
-              <a:t>ここから講師は口頭指示のみ。画面を操作するのは必ず受講者。歯がゆくても手を出さない。</a:t>
+              <a:t>確認の位置（最上流）を指差して強調する。ここがこの回の核心。最後にだけ置く設計は、次のデモで否定する。</a:t>
             </a:r>
             <a:endParaRPr lang="en-US" dirty="0"/>
           </a:p>
@@ -949,7 +1217,7 @@
           <a:p>
             <a:r>
               <a:rPr lang="en-US" dirty="0"/>
-              <a:t>ここは資料を読み上げない。自分の言葉と、匿名事例で話す。</a:t>
+              <a:t>「整った出力ほど気づけない」は実感が湧きにくいので、実際に商品名を取り違えた稟議書を見せる。もっともらしいことを確認してもらう。</a:t>
             </a:r>
             <a:endParaRPr lang="en-US" dirty="0"/>
           </a:p>
@@ -1037,7 +1305,7 @@
           <a:p>
             <a:r>
               <a:rPr lang="en-US" dirty="0"/>
-              <a:t>その場でカレンダーに入れてもらう。口頭の約束で終わらせない。</a:t>
+              <a:t>確認の回数ではなく位置、と言い切る。手間が増えないことが分かると、受講者は素直に受け入れる。</a:t>
             </a:r>
             <a:endParaRPr lang="en-US" dirty="0"/>
           </a:p>
@@ -1061,6 +1329,182 @@
             <a:fld id="{F7021451-1387-4CA6-816F-3879F97B5CBC}" type="slidenum">
               <a:rPr lang="en-US"/>
               <a:t>7</a:t>
+            </a:fld>
+            <a:endParaRPr lang="en-US"/>
+          </a:p>
+        </p:txBody>
+      </p:sp>
+    </p:spTree>
+    <p:extLst>
+      <p:ext uri="{BB962C8B-B14F-4D97-AF65-F5344CB8AC3E}">
+        <p14:creationId xmlns:p14="http://schemas.microsoft.com/office/powerpoint/2010/main" val="1024086991"/>
+      </p:ext>
+    </p:extLst>
+  </p:cSld>
+  <p:clrMapOvr>
+    <a:masterClrMapping/>
+  </p:clrMapOvr>
+</p:notes>
+</file>
+
+<file path=ppt/notesSlides/notesSlide8.xml><?xml version="1.0" encoding="utf-8"?>
+<p:notes xmlns:a="http://schemas.openxmlformats.org/drawingml/2006/main" xmlns:r="http://schemas.openxmlformats.org/officeDocument/2006/relationships" xmlns:p="http://schemas.openxmlformats.org/presentationml/2006/main">
+  <p:cSld>
+    <p:spTree>
+      <p:nvGrpSpPr>
+        <p:cNvPr id="1" name=""/>
+        <p:cNvGrpSpPr/>
+        <p:nvPr/>
+      </p:nvGrpSpPr>
+      <p:grpSpPr>
+        <a:xfrm>
+          <a:off x="0" y="0"/>
+          <a:ext cx="0" cy="0"/>
+          <a:chOff x="0" y="0"/>
+          <a:chExt cx="0" cy="0"/>
+        </a:xfrm>
+      </p:grpSpPr>
+      <p:sp>
+        <p:nvSpPr>
+          <p:cNvPr id="2" name="Slide Image Placeholder 1"/>
+          <p:cNvSpPr>
+            <a:spLocks noGrp="1" noRot="1" noChangeAspect="1"/>
+          </p:cNvSpPr>
+          <p:nvPr>
+            <p:ph type="sldImg"/>
+          </p:nvPr>
+        </p:nvSpPr>
+        <p:spPr/>
+      </p:sp>
+      <p:sp>
+        <p:nvSpPr>
+          <p:cNvPr id="3" name="Notes Placeholder 2"/>
+          <p:cNvSpPr>
+            <a:spLocks noGrp="1"/>
+          </p:cNvSpPr>
+          <p:nvPr>
+            <p:ph type="body" idx="1"/>
+          </p:nvPr>
+        </p:nvSpPr>
+        <p:spPr/>
+        <p:txBody>
+          <a:bodyPr/>
+          <a:lstStyle/>
+          <a:p>
+            <a:r>
+              <a:rPr lang="en-US" dirty="0"/>
+              <a:t>1つ目が起きたら、必ずわざと壊す。うまく動いた状態で終わらせない。壊し方を知っている人だけが直せる。</a:t>
+            </a:r>
+            <a:endParaRPr lang="en-US" dirty="0"/>
+          </a:p>
+        </p:txBody>
+      </p:sp>
+      <p:sp>
+        <p:nvSpPr>
+          <p:cNvPr id="4" name="Slide Number Placeholder 3"/>
+          <p:cNvSpPr>
+            <a:spLocks noGrp="1"/>
+          </p:cNvSpPr>
+          <p:nvPr>
+            <p:ph type="sldNum" sz="quarter" idx="10"/>
+          </p:nvPr>
+        </p:nvSpPr>
+        <p:spPr/>
+        <p:txBody>
+          <a:bodyPr/>
+          <a:lstStyle/>
+          <a:p>
+            <a:fld id="{F7021451-1387-4CA6-816F-3879F97B5CBC}" type="slidenum">
+              <a:rPr lang="en-US"/>
+              <a:t>8</a:t>
+            </a:fld>
+            <a:endParaRPr lang="en-US"/>
+          </a:p>
+        </p:txBody>
+      </p:sp>
+    </p:spTree>
+    <p:extLst>
+      <p:ext uri="{BB962C8B-B14F-4D97-AF65-F5344CB8AC3E}">
+        <p14:creationId xmlns:p14="http://schemas.microsoft.com/office/powerpoint/2010/main" val="1024086991"/>
+      </p:ext>
+    </p:extLst>
+  </p:cSld>
+  <p:clrMapOvr>
+    <a:masterClrMapping/>
+  </p:clrMapOvr>
+</p:notes>
+</file>
+
+<file path=ppt/notesSlides/notesSlide9.xml><?xml version="1.0" encoding="utf-8"?>
+<p:notes xmlns:a="http://schemas.openxmlformats.org/drawingml/2006/main" xmlns:r="http://schemas.openxmlformats.org/officeDocument/2006/relationships" xmlns:p="http://schemas.openxmlformats.org/presentationml/2006/main">
+  <p:cSld>
+    <p:spTree>
+      <p:nvGrpSpPr>
+        <p:cNvPr id="1" name=""/>
+        <p:cNvGrpSpPr/>
+        <p:nvPr/>
+      </p:nvGrpSpPr>
+      <p:grpSpPr>
+        <a:xfrm>
+          <a:off x="0" y="0"/>
+          <a:ext cx="0" cy="0"/>
+          <a:chOff x="0" y="0"/>
+          <a:chExt cx="0" cy="0"/>
+        </a:xfrm>
+      </p:grpSpPr>
+      <p:sp>
+        <p:nvSpPr>
+          <p:cNvPr id="2" name="Slide Image Placeholder 1"/>
+          <p:cNvSpPr>
+            <a:spLocks noGrp="1" noRot="1" noChangeAspect="1"/>
+          </p:cNvSpPr>
+          <p:nvPr>
+            <p:ph type="sldImg"/>
+          </p:nvPr>
+        </p:nvSpPr>
+        <p:spPr/>
+      </p:sp>
+      <p:sp>
+        <p:nvSpPr>
+          <p:cNvPr id="3" name="Notes Placeholder 2"/>
+          <p:cNvSpPr>
+            <a:spLocks noGrp="1"/>
+          </p:cNvSpPr>
+          <p:nvPr>
+            <p:ph type="body" idx="1"/>
+          </p:nvPr>
+        </p:nvSpPr>
+        <p:spPr/>
+        <p:txBody>
+          <a:bodyPr/>
+          <a:lstStyle/>
+          <a:p>
+            <a:r>
+              <a:rPr lang="en-US" dirty="0"/>
+              <a:t>工程図は画面共有で一緒に描く。講師が描いてしまわない。受講者の手が止まると、この回は退屈になる。</a:t>
+            </a:r>
+            <a:endParaRPr lang="en-US" dirty="0"/>
+          </a:p>
+        </p:txBody>
+      </p:sp>
+      <p:sp>
+        <p:nvSpPr>
+          <p:cNvPr id="4" name="Slide Number Placeholder 3"/>
+          <p:cNvSpPr>
+            <a:spLocks noGrp="1"/>
+          </p:cNvSpPr>
+          <p:nvPr>
+            <p:ph type="sldNum" sz="quarter" idx="10"/>
+          </p:nvPr>
+        </p:nvSpPr>
+        <p:spPr/>
+        <p:txBody>
+          <a:bodyPr/>
+          <a:lstStyle/>
+          <a:p>
+            <a:fld id="{F7021451-1387-4CA6-816F-3879F97B5CBC}" type="slidenum">
+              <a:rPr lang="en-US"/>
+              <a:t>9</a:t>
             </a:fld>
             <a:endParaRPr lang="en-US"/>
           </a:p>
@@ -1680,6 +2124,1284 @@
 </p:sld>
 </file>
 
+<file path=ppt/slides/slide10.xml><?xml version="1.0" encoding="utf-8"?>
+<p:sld xmlns:a="http://schemas.openxmlformats.org/drawingml/2006/main" xmlns:r="http://schemas.openxmlformats.org/officeDocument/2006/relationships" xmlns:p="http://schemas.openxmlformats.org/presentationml/2006/main">
+  <p:cSld name="Slide 10">
+    <p:bg>
+      <p:bgPr>
+        <a:solidFill>
+          <a:srgbClr val="F6F2EA"/>
+        </a:solidFill>
+      </p:bgPr>
+    </p:bg>
+    <p:spTree>
+      <p:nvGrpSpPr>
+        <p:cNvPr id="1" name=""/>
+        <p:cNvGrpSpPr/>
+        <p:nvPr/>
+      </p:nvGrpSpPr>
+      <p:grpSpPr>
+        <a:xfrm>
+          <a:off x="0" y="0"/>
+          <a:ext cx="0" cy="0"/>
+          <a:chOff x="0" y="0"/>
+          <a:chExt cx="0" cy="0"/>
+        </a:xfrm>
+      </p:grpSpPr>
+      <p:sp>
+        <p:nvSpPr>
+          <p:cNvPr id="2" name="Text 0"/>
+          <p:cNvSpPr txBox="1"/>
+          <p:nvPr/>
+        </p:nvSpPr>
+        <p:spPr>
+          <a:xfrm>
+            <a:off x="777240" y="566928"/>
+            <a:ext cx="10607040" cy="274320"/>
+          </a:xfrm>
+          <a:prstGeom prst="rect">
+            <a:avLst/>
+          </a:prstGeom>
+          <a:noFill/>
+          <a:ln/>
+        </p:spPr>
+        <p:txBody>
+          <a:bodyPr wrap="square" lIns="0" tIns="0" rIns="0" bIns="0" rtlCol="0" anchor="ctr"/>
+          <a:lstStyle/>
+          <a:p>
+            <a:pPr indent="0" marL="0">
+              <a:buNone/>
+            </a:pPr>
+            <a:r>
+              <a:rPr lang="en-US" sz="1100" b="1" spc="250" kern="0" dirty="0">
+                <a:solidFill>
+                  <a:srgbClr val="3B6B4A"/>
+                </a:solidFill>
+                <a:latin typeface="Yu Gothic" pitchFamily="34" charset="0"/>
+                <a:ea typeface="Yu Gothic" pitchFamily="34" charset="-122"/>
+                <a:cs typeface="Yu Gothic" pitchFamily="34" charset="-120"/>
+              </a:rPr>
+              <a:t>業務への組み込み</a:t>
+            </a:r>
+            <a:endParaRPr lang="en-US" sz="1100" dirty="0"/>
+          </a:p>
+        </p:txBody>
+      </p:sp>
+      <p:sp>
+        <p:nvSpPr>
+          <p:cNvPr id="3" name="Text 1"/>
+          <p:cNvSpPr txBox="1"/>
+          <p:nvPr/>
+        </p:nvSpPr>
+        <p:spPr>
+          <a:xfrm>
+            <a:off x="777240" y="896112"/>
+            <a:ext cx="10607040" cy="640080"/>
+          </a:xfrm>
+          <a:prstGeom prst="rect">
+            <a:avLst/>
+          </a:prstGeom>
+          <a:noFill/>
+          <a:ln/>
+        </p:spPr>
+        <p:txBody>
+          <a:bodyPr wrap="square" lIns="0" tIns="0" rIns="0" bIns="0" rtlCol="0" anchor="ctr"/>
+          <a:lstStyle/>
+          <a:p>
+            <a:pPr indent="0" marL="0">
+              <a:buNone/>
+            </a:pPr>
+            <a:r>
+              <a:rPr lang="en-US" sz="2600" b="1" dirty="0">
+                <a:solidFill>
+                  <a:srgbClr val="23201D"/>
+                </a:solidFill>
+                <a:latin typeface="Yu Gothic" pitchFamily="34" charset="0"/>
+                <a:ea typeface="Yu Gothic" pitchFamily="34" charset="-122"/>
+                <a:cs typeface="Yu Gothic" pitchFamily="34" charset="-120"/>
+              </a:rPr>
+              <a:t>帰る前に決めること</a:t>
+            </a:r>
+            <a:endParaRPr lang="en-US" sz="2600" dirty="0"/>
+          </a:p>
+        </p:txBody>
+      </p:sp>
+      <p:sp>
+        <p:nvSpPr>
+          <p:cNvPr id="4" name="Text 2"/>
+          <p:cNvSpPr txBox="1"/>
+          <p:nvPr/>
+        </p:nvSpPr>
+        <p:spPr>
+          <a:xfrm>
+            <a:off x="777240" y="1572768"/>
+            <a:ext cx="10607040" cy="320040"/>
+          </a:xfrm>
+          <a:prstGeom prst="rect">
+            <a:avLst/>
+          </a:prstGeom>
+          <a:noFill/>
+          <a:ln/>
+        </p:spPr>
+        <p:txBody>
+          <a:bodyPr wrap="square" lIns="0" tIns="0" rIns="0" bIns="0" rtlCol="0" anchor="ctr"/>
+          <a:lstStyle/>
+          <a:p>
+            <a:pPr indent="0" marL="0">
+              <a:buNone/>
+            </a:pPr>
+            <a:r>
+              <a:rPr lang="en-US" sz="1250" b="1" dirty="0">
+                <a:solidFill>
+                  <a:srgbClr val="3B6B4A"/>
+                </a:solidFill>
+                <a:latin typeface="Yu Gothic" pitchFamily="34" charset="0"/>
+                <a:ea typeface="Yu Gothic" pitchFamily="34" charset="-122"/>
+                <a:cs typeface="Yu Gothic" pitchFamily="34" charset="-120"/>
+              </a:rPr>
+              <a:t>ここを決めないと、持ち帰っても使われません。紙に書きます。</a:t>
+            </a:r>
+            <a:endParaRPr lang="en-US" sz="1250" dirty="0"/>
+          </a:p>
+        </p:txBody>
+      </p:sp>
+      <p:sp>
+        <p:nvSpPr>
+          <p:cNvPr id="5" name="Shape 3"/>
+          <p:cNvSpPr/>
+          <p:nvPr/>
+        </p:nvSpPr>
+        <p:spPr>
+          <a:xfrm>
+            <a:off x="777240" y="2103120"/>
+            <a:ext cx="10607040" cy="914400"/>
+          </a:xfrm>
+          <a:prstGeom prst="rect">
+            <a:avLst/>
+          </a:prstGeom>
+          <a:solidFill>
+            <a:srgbClr val="FFFFFF"/>
+          </a:solidFill>
+          <a:ln w="12700">
+            <a:solidFill>
+              <a:srgbClr val="EDE7DB"/>
+            </a:solidFill>
+            <a:prstDash val="solid"/>
+          </a:ln>
+        </p:spPr>
+      </p:sp>
+      <p:sp>
+        <p:nvSpPr>
+          <p:cNvPr id="6" name="Shape 4"/>
+          <p:cNvSpPr/>
+          <p:nvPr/>
+        </p:nvSpPr>
+        <p:spPr>
+          <a:xfrm>
+            <a:off x="777240" y="2103120"/>
+            <a:ext cx="54864" cy="914400"/>
+          </a:xfrm>
+          <a:prstGeom prst="rect">
+            <a:avLst/>
+          </a:prstGeom>
+          <a:solidFill>
+            <a:srgbClr val="3B6B4A"/>
+          </a:solidFill>
+          <a:ln w="12700">
+            <a:solidFill>
+              <a:srgbClr val="333333"/>
+            </a:solidFill>
+            <a:prstDash val="solid"/>
+          </a:ln>
+        </p:spPr>
+      </p:sp>
+      <p:sp>
+        <p:nvSpPr>
+          <p:cNvPr id="7" name="Text 5"/>
+          <p:cNvSpPr txBox="1"/>
+          <p:nvPr/>
+        </p:nvSpPr>
+        <p:spPr>
+          <a:xfrm>
+            <a:off x="1143000" y="2176272"/>
+            <a:ext cx="2757830" cy="768096"/>
+          </a:xfrm>
+          <a:prstGeom prst="rect">
+            <a:avLst/>
+          </a:prstGeom>
+          <a:noFill/>
+          <a:ln/>
+        </p:spPr>
+        <p:txBody>
+          <a:bodyPr wrap="square" lIns="0" tIns="0" rIns="0" bIns="0" rtlCol="0" anchor="ctr"/>
+          <a:lstStyle/>
+          <a:p>
+            <a:pPr indent="0" marL="0">
+              <a:buNone/>
+            </a:pPr>
+            <a:r>
+              <a:rPr lang="en-US" sz="1400" b="1" dirty="0">
+                <a:solidFill>
+                  <a:srgbClr val="3B6B4A"/>
+                </a:solidFill>
+                <a:latin typeface="Yu Gothic" pitchFamily="34" charset="0"/>
+                <a:ea typeface="Yu Gothic" pitchFamily="34" charset="-122"/>
+                <a:cs typeface="Yu Gothic" pitchFamily="34" charset="-120"/>
+              </a:rPr>
+              <a:t>確認役は誰か</a:t>
+            </a:r>
+            <a:endParaRPr lang="en-US" sz="1400" dirty="0"/>
+          </a:p>
+        </p:txBody>
+      </p:sp>
+      <p:sp>
+        <p:nvSpPr>
+          <p:cNvPr id="8" name="Text 6"/>
+          <p:cNvSpPr txBox="1"/>
+          <p:nvPr/>
+        </p:nvSpPr>
+        <p:spPr>
+          <a:xfrm>
+            <a:off x="4006901" y="2176272"/>
+            <a:ext cx="7011619" cy="768096"/>
+          </a:xfrm>
+          <a:prstGeom prst="rect">
+            <a:avLst/>
+          </a:prstGeom>
+          <a:noFill/>
+          <a:ln/>
+        </p:spPr>
+        <p:txBody>
+          <a:bodyPr wrap="square" lIns="0" tIns="0" rIns="0" bIns="0" rtlCol="0" anchor="ctr"/>
+          <a:lstStyle/>
+          <a:p>
+            <a:pPr indent="0" marL="0">
+              <a:lnSpc>
+                <a:spcPct val="130000"/>
+              </a:lnSpc>
+              <a:buNone/>
+            </a:pPr>
+            <a:r>
+              <a:rPr lang="en-US" sz="1250" dirty="0">
+                <a:solidFill>
+                  <a:srgbClr val="3F3933"/>
+                </a:solidFill>
+                <a:latin typeface="Yu Gothic" pitchFamily="34" charset="0"/>
+                <a:ea typeface="Yu Gothic" pitchFamily="34" charset="-122"/>
+                <a:cs typeface="Yu Gothic" pitchFamily="34" charset="-120"/>
+              </a:rPr>
+              <a:t>最上流の確認を、誰がやるか。社長でなくても構いません</a:t>
+            </a:r>
+            <a:endParaRPr lang="en-US" sz="1250" dirty="0"/>
+          </a:p>
+        </p:txBody>
+      </p:sp>
+      <p:sp>
+        <p:nvSpPr>
+          <p:cNvPr id="9" name="Shape 7"/>
+          <p:cNvSpPr/>
+          <p:nvPr/>
+        </p:nvSpPr>
+        <p:spPr>
+          <a:xfrm>
+            <a:off x="777240" y="3154680"/>
+            <a:ext cx="10607040" cy="914400"/>
+          </a:xfrm>
+          <a:prstGeom prst="rect">
+            <a:avLst/>
+          </a:prstGeom>
+          <a:solidFill>
+            <a:srgbClr val="FFFFFF"/>
+          </a:solidFill>
+          <a:ln w="12700">
+            <a:solidFill>
+              <a:srgbClr val="EDE7DB"/>
+            </a:solidFill>
+            <a:prstDash val="solid"/>
+          </a:ln>
+        </p:spPr>
+      </p:sp>
+      <p:sp>
+        <p:nvSpPr>
+          <p:cNvPr id="10" name="Shape 8"/>
+          <p:cNvSpPr/>
+          <p:nvPr/>
+        </p:nvSpPr>
+        <p:spPr>
+          <a:xfrm>
+            <a:off x="777240" y="3154680"/>
+            <a:ext cx="54864" cy="914400"/>
+          </a:xfrm>
+          <a:prstGeom prst="rect">
+            <a:avLst/>
+          </a:prstGeom>
+          <a:solidFill>
+            <a:srgbClr val="3B6B4A"/>
+          </a:solidFill>
+          <a:ln w="12700">
+            <a:solidFill>
+              <a:srgbClr val="333333"/>
+            </a:solidFill>
+            <a:prstDash val="solid"/>
+          </a:ln>
+        </p:spPr>
+      </p:sp>
+      <p:sp>
+        <p:nvSpPr>
+          <p:cNvPr id="11" name="Text 9"/>
+          <p:cNvSpPr txBox="1"/>
+          <p:nvPr/>
+        </p:nvSpPr>
+        <p:spPr>
+          <a:xfrm>
+            <a:off x="1143000" y="3227832"/>
+            <a:ext cx="2757830" cy="768096"/>
+          </a:xfrm>
+          <a:prstGeom prst="rect">
+            <a:avLst/>
+          </a:prstGeom>
+          <a:noFill/>
+          <a:ln/>
+        </p:spPr>
+        <p:txBody>
+          <a:bodyPr wrap="square" lIns="0" tIns="0" rIns="0" bIns="0" rtlCol="0" anchor="ctr"/>
+          <a:lstStyle/>
+          <a:p>
+            <a:pPr indent="0" marL="0">
+              <a:buNone/>
+            </a:pPr>
+            <a:r>
+              <a:rPr lang="en-US" sz="1400" b="1" dirty="0">
+                <a:solidFill>
+                  <a:srgbClr val="3B6B4A"/>
+                </a:solidFill>
+                <a:latin typeface="Yu Gothic" pitchFamily="34" charset="0"/>
+                <a:ea typeface="Yu Gothic" pitchFamily="34" charset="-122"/>
+                <a:cs typeface="Yu Gothic" pitchFamily="34" charset="-120"/>
+              </a:rPr>
+              <a:t>いつ本番で流すか</a:t>
+            </a:r>
+            <a:endParaRPr lang="en-US" sz="1400" dirty="0"/>
+          </a:p>
+        </p:txBody>
+      </p:sp>
+      <p:sp>
+        <p:nvSpPr>
+          <p:cNvPr id="12" name="Text 10"/>
+          <p:cNvSpPr txBox="1"/>
+          <p:nvPr/>
+        </p:nvSpPr>
+        <p:spPr>
+          <a:xfrm>
+            <a:off x="4006901" y="3227832"/>
+            <a:ext cx="7011619" cy="768096"/>
+          </a:xfrm>
+          <a:prstGeom prst="rect">
+            <a:avLst/>
+          </a:prstGeom>
+          <a:noFill/>
+          <a:ln/>
+        </p:spPr>
+        <p:txBody>
+          <a:bodyPr wrap="square" lIns="0" tIns="0" rIns="0" bIns="0" rtlCol="0" anchor="ctr"/>
+          <a:lstStyle/>
+          <a:p>
+            <a:pPr indent="0" marL="0">
+              <a:lnSpc>
+                <a:spcPct val="130000"/>
+              </a:lnSpc>
+              <a:buNone/>
+            </a:pPr>
+            <a:r>
+              <a:rPr lang="en-US" sz="1250" dirty="0">
+                <a:solidFill>
+                  <a:srgbClr val="3F3933"/>
+                </a:solidFill>
+                <a:latin typeface="Yu Gothic" pitchFamily="34" charset="0"/>
+                <a:ea typeface="Yu Gothic" pitchFamily="34" charset="-122"/>
+                <a:cs typeface="Yu Gothic" pitchFamily="34" charset="-120"/>
+              </a:rPr>
+              <a:t>来週の実案件で1回。テストのままにしません</a:t>
+            </a:r>
+            <a:endParaRPr lang="en-US" sz="1250" dirty="0"/>
+          </a:p>
+        </p:txBody>
+      </p:sp>
+      <p:sp>
+        <p:nvSpPr>
+          <p:cNvPr id="13" name="Shape 11"/>
+          <p:cNvSpPr/>
+          <p:nvPr/>
+        </p:nvSpPr>
+        <p:spPr>
+          <a:xfrm>
+            <a:off x="777240" y="4206240"/>
+            <a:ext cx="10607040" cy="914400"/>
+          </a:xfrm>
+          <a:prstGeom prst="rect">
+            <a:avLst/>
+          </a:prstGeom>
+          <a:solidFill>
+            <a:srgbClr val="FFFFFF"/>
+          </a:solidFill>
+          <a:ln w="12700">
+            <a:solidFill>
+              <a:srgbClr val="EDE7DB"/>
+            </a:solidFill>
+            <a:prstDash val="solid"/>
+          </a:ln>
+        </p:spPr>
+      </p:sp>
+      <p:sp>
+        <p:nvSpPr>
+          <p:cNvPr id="14" name="Shape 12"/>
+          <p:cNvSpPr/>
+          <p:nvPr/>
+        </p:nvSpPr>
+        <p:spPr>
+          <a:xfrm>
+            <a:off x="777240" y="4206240"/>
+            <a:ext cx="54864" cy="914400"/>
+          </a:xfrm>
+          <a:prstGeom prst="rect">
+            <a:avLst/>
+          </a:prstGeom>
+          <a:solidFill>
+            <a:srgbClr val="3B6B4A"/>
+          </a:solidFill>
+          <a:ln w="12700">
+            <a:solidFill>
+              <a:srgbClr val="333333"/>
+            </a:solidFill>
+            <a:prstDash val="solid"/>
+          </a:ln>
+        </p:spPr>
+      </p:sp>
+      <p:sp>
+        <p:nvSpPr>
+          <p:cNvPr id="15" name="Text 13"/>
+          <p:cNvSpPr txBox="1"/>
+          <p:nvPr/>
+        </p:nvSpPr>
+        <p:spPr>
+          <a:xfrm>
+            <a:off x="1143000" y="4279392"/>
+            <a:ext cx="2757830" cy="768096"/>
+          </a:xfrm>
+          <a:prstGeom prst="rect">
+            <a:avLst/>
+          </a:prstGeom>
+          <a:noFill/>
+          <a:ln/>
+        </p:spPr>
+        <p:txBody>
+          <a:bodyPr wrap="square" lIns="0" tIns="0" rIns="0" bIns="0" rtlCol="0" anchor="ctr"/>
+          <a:lstStyle/>
+          <a:p>
+            <a:pPr indent="0" marL="0">
+              <a:buNone/>
+            </a:pPr>
+            <a:r>
+              <a:rPr lang="en-US" sz="1400" b="1" dirty="0">
+                <a:solidFill>
+                  <a:srgbClr val="3B6B4A"/>
+                </a:solidFill>
+                <a:latin typeface="Yu Gothic" pitchFamily="34" charset="0"/>
+                <a:ea typeface="Yu Gothic" pitchFamily="34" charset="-122"/>
+                <a:cs typeface="Yu Gothic" pitchFamily="34" charset="-120"/>
+              </a:rPr>
+              <a:t>壊れたらどうするか</a:t>
+            </a:r>
+            <a:endParaRPr lang="en-US" sz="1400" dirty="0"/>
+          </a:p>
+        </p:txBody>
+      </p:sp>
+      <p:sp>
+        <p:nvSpPr>
+          <p:cNvPr id="16" name="Text 14"/>
+          <p:cNvSpPr txBox="1"/>
+          <p:nvPr/>
+        </p:nvSpPr>
+        <p:spPr>
+          <a:xfrm>
+            <a:off x="4006901" y="4279392"/>
+            <a:ext cx="7011619" cy="768096"/>
+          </a:xfrm>
+          <a:prstGeom prst="rect">
+            <a:avLst/>
+          </a:prstGeom>
+          <a:noFill/>
+          <a:ln/>
+        </p:spPr>
+        <p:txBody>
+          <a:bodyPr wrap="square" lIns="0" tIns="0" rIns="0" bIns="0" rtlCol="0" anchor="ctr"/>
+          <a:lstStyle/>
+          <a:p>
+            <a:pPr indent="0" marL="0">
+              <a:lnSpc>
+                <a:spcPct val="130000"/>
+              </a:lnSpc>
+              <a:buNone/>
+            </a:pPr>
+            <a:r>
+              <a:rPr lang="en-US" sz="1250" dirty="0">
+                <a:solidFill>
+                  <a:srgbClr val="3F3933"/>
+                </a:solidFill>
+                <a:latin typeface="Yu Gothic" pitchFamily="34" charset="0"/>
+                <a:ea typeface="Yu Gothic" pitchFamily="34" charset="-122"/>
+                <a:cs typeface="Yu Gothic" pitchFamily="34" charset="-120"/>
+              </a:rPr>
+              <a:t>手動に戻す手順を、確認役の方に共有します</a:t>
+            </a:r>
+            <a:endParaRPr lang="en-US" sz="1250" dirty="0"/>
+          </a:p>
+        </p:txBody>
+      </p:sp>
+      <p:sp>
+        <p:nvSpPr>
+          <p:cNvPr id="17" name="Text 15"/>
+          <p:cNvSpPr txBox="1"/>
+          <p:nvPr/>
+        </p:nvSpPr>
+        <p:spPr>
+          <a:xfrm>
+            <a:off x="777240" y="6382512"/>
+            <a:ext cx="7424928" cy="256032"/>
+          </a:xfrm>
+          <a:prstGeom prst="rect">
+            <a:avLst/>
+          </a:prstGeom>
+          <a:noFill/>
+          <a:ln/>
+        </p:spPr>
+        <p:txBody>
+          <a:bodyPr wrap="square" lIns="0" tIns="0" rIns="0" bIns="0" rtlCol="0" anchor="ctr"/>
+          <a:lstStyle/>
+          <a:p>
+            <a:pPr indent="0" marL="0">
+              <a:buNone/>
+            </a:pPr>
+            <a:r>
+              <a:rPr lang="en-US" sz="900" dirty="0">
+                <a:solidFill>
+                  <a:srgbClr val="8A8177"/>
+                </a:solidFill>
+                <a:latin typeface="Yu Gothic" pitchFamily="34" charset="0"/>
+                <a:ea typeface="Yu Gothic" pitchFamily="34" charset="-122"/>
+                <a:cs typeface="Yu Gothic" pitchFamily="34" charset="-120"/>
+              </a:rPr>
+              <a:t>第9回　複数の工程をまとめて任せる</a:t>
+            </a:r>
+            <a:endParaRPr lang="en-US" sz="900" dirty="0"/>
+          </a:p>
+        </p:txBody>
+      </p:sp>
+      <p:sp>
+        <p:nvSpPr>
+          <p:cNvPr id="18" name="Text 16"/>
+          <p:cNvSpPr txBox="1"/>
+          <p:nvPr/>
+        </p:nvSpPr>
+        <p:spPr>
+          <a:xfrm>
+            <a:off x="8202168" y="6382512"/>
+            <a:ext cx="3182112" cy="256032"/>
+          </a:xfrm>
+          <a:prstGeom prst="rect">
+            <a:avLst/>
+          </a:prstGeom>
+          <a:noFill/>
+          <a:ln/>
+        </p:spPr>
+        <p:txBody>
+          <a:bodyPr wrap="square" lIns="0" tIns="0" rIns="0" bIns="0" rtlCol="0" anchor="ctr"/>
+          <a:lstStyle/>
+          <a:p>
+            <a:pPr algn="r" indent="0" marL="0">
+              <a:buNone/>
+            </a:pPr>
+            <a:r>
+              <a:rPr lang="en-US" sz="900" dirty="0">
+                <a:solidFill>
+                  <a:srgbClr val="8A8177"/>
+                </a:solidFill>
+                <a:latin typeface="Yu Gothic" pitchFamily="34" charset="0"/>
+                <a:ea typeface="Yu Gothic" pitchFamily="34" charset="-122"/>
+                <a:cs typeface="Yu Gothic" pitchFamily="34" charset="-120"/>
+              </a:rPr>
+              <a:t>組み込み</a:t>
+            </a:r>
+            <a:endParaRPr lang="en-US" sz="900" dirty="0"/>
+          </a:p>
+        </p:txBody>
+      </p:sp>
+    </p:spTree>
+  </p:cSld>
+  <p:clrMapOvr>
+    <a:masterClrMapping/>
+  </p:clrMapOvr>
+</p:sld>
+</file>
+
+<file path=ppt/slides/slide11.xml><?xml version="1.0" encoding="utf-8"?>
+<p:sld xmlns:a="http://schemas.openxmlformats.org/drawingml/2006/main" xmlns:r="http://schemas.openxmlformats.org/officeDocument/2006/relationships" xmlns:p="http://schemas.openxmlformats.org/presentationml/2006/main">
+  <p:cSld name="Slide 11">
+    <p:bg>
+      <p:bgPr>
+        <a:solidFill>
+          <a:srgbClr val="F6F2EA"/>
+        </a:solidFill>
+      </p:bgPr>
+    </p:bg>
+    <p:spTree>
+      <p:nvGrpSpPr>
+        <p:cNvPr id="1" name=""/>
+        <p:cNvGrpSpPr/>
+        <p:nvPr/>
+      </p:nvGrpSpPr>
+      <p:grpSpPr>
+        <a:xfrm>
+          <a:off x="0" y="0"/>
+          <a:ext cx="0" cy="0"/>
+          <a:chOff x="0" y="0"/>
+          <a:chExt cx="0" cy="0"/>
+        </a:xfrm>
+      </p:grpSpPr>
+      <p:sp>
+        <p:nvSpPr>
+          <p:cNvPr id="2" name="Text 0"/>
+          <p:cNvSpPr txBox="1"/>
+          <p:nvPr/>
+        </p:nvSpPr>
+        <p:spPr>
+          <a:xfrm>
+            <a:off x="777240" y="566928"/>
+            <a:ext cx="10607040" cy="274320"/>
+          </a:xfrm>
+          <a:prstGeom prst="rect">
+            <a:avLst/>
+          </a:prstGeom>
+          <a:noFill/>
+          <a:ln/>
+        </p:spPr>
+        <p:txBody>
+          <a:bodyPr wrap="square" lIns="0" tIns="0" rIns="0" bIns="0" rtlCol="0" anchor="ctr"/>
+          <a:lstStyle/>
+          <a:p>
+            <a:pPr indent="0" marL="0">
+              <a:buNone/>
+            </a:pPr>
+            <a:r>
+              <a:rPr lang="en-US" sz="1100" b="1" spc="250" kern="0" dirty="0">
+                <a:solidFill>
+                  <a:srgbClr val="B04A2F"/>
+                </a:solidFill>
+                <a:latin typeface="Yu Gothic" pitchFamily="34" charset="0"/>
+                <a:ea typeface="Yu Gothic" pitchFamily="34" charset="-122"/>
+                <a:cs typeface="Yu Gothic" pitchFamily="34" charset="-120"/>
+              </a:rPr>
+              <a:t>ここだけは</a:t>
+            </a:r>
+            <a:endParaRPr lang="en-US" sz="1100" dirty="0"/>
+          </a:p>
+        </p:txBody>
+      </p:sp>
+      <p:sp>
+        <p:nvSpPr>
+          <p:cNvPr id="3" name="Text 1"/>
+          <p:cNvSpPr txBox="1"/>
+          <p:nvPr/>
+        </p:nvSpPr>
+        <p:spPr>
+          <a:xfrm>
+            <a:off x="777240" y="1097280"/>
+            <a:ext cx="10607040" cy="640080"/>
+          </a:xfrm>
+          <a:prstGeom prst="rect">
+            <a:avLst/>
+          </a:prstGeom>
+          <a:noFill/>
+          <a:ln/>
+        </p:spPr>
+        <p:txBody>
+          <a:bodyPr wrap="square" lIns="0" tIns="0" rIns="0" bIns="0" rtlCol="0" anchor="ctr"/>
+          <a:lstStyle/>
+          <a:p>
+            <a:pPr indent="0" marL="0">
+              <a:buNone/>
+            </a:pPr>
+            <a:r>
+              <a:rPr lang="en-US" sz="2600" b="1" dirty="0">
+                <a:solidFill>
+                  <a:srgbClr val="23201D"/>
+                </a:solidFill>
+                <a:latin typeface="Yu Gothic" pitchFamily="34" charset="0"/>
+                <a:ea typeface="Yu Gothic" pitchFamily="34" charset="-122"/>
+                <a:cs typeface="Yu Gothic" pitchFamily="34" charset="-120"/>
+              </a:rPr>
+              <a:t>実装は、外に頼んでも構いません</a:t>
+            </a:r>
+            <a:endParaRPr lang="en-US" sz="2600" dirty="0"/>
+          </a:p>
+        </p:txBody>
+      </p:sp>
+      <p:sp>
+        <p:nvSpPr>
+          <p:cNvPr id="4" name="Shape 2"/>
+          <p:cNvSpPr/>
+          <p:nvPr/>
+        </p:nvSpPr>
+        <p:spPr>
+          <a:xfrm>
+            <a:off x="777240" y="2148840"/>
+            <a:ext cx="64008" cy="2194560"/>
+          </a:xfrm>
+          <a:prstGeom prst="rect">
+            <a:avLst/>
+          </a:prstGeom>
+          <a:solidFill>
+            <a:srgbClr val="B04A2F"/>
+          </a:solidFill>
+          <a:ln w="12700">
+            <a:solidFill>
+              <a:srgbClr val="333333"/>
+            </a:solidFill>
+            <a:prstDash val="solid"/>
+          </a:ln>
+        </p:spPr>
+      </p:sp>
+      <p:sp>
+        <p:nvSpPr>
+          <p:cNvPr id="5" name="Text 3"/>
+          <p:cNvSpPr txBox="1"/>
+          <p:nvPr/>
+        </p:nvSpPr>
+        <p:spPr>
+          <a:xfrm>
+            <a:off x="1188720" y="2148840"/>
+            <a:ext cx="9966960" cy="2194560"/>
+          </a:xfrm>
+          <a:prstGeom prst="rect">
+            <a:avLst/>
+          </a:prstGeom>
+          <a:noFill/>
+          <a:ln/>
+        </p:spPr>
+        <p:txBody>
+          <a:bodyPr wrap="square" lIns="0" tIns="0" rIns="0" bIns="0" rtlCol="0" anchor="ctr"/>
+          <a:lstStyle/>
+          <a:p>
+            <a:pPr indent="0" marL="0">
+              <a:lnSpc>
+                <a:spcPct val="160000"/>
+              </a:lnSpc>
+              <a:buNone/>
+            </a:pPr>
+            <a:r>
+              <a:rPr lang="en-US" sz="1650" dirty="0">
+                <a:solidFill>
+                  <a:srgbClr val="3F3933"/>
+                </a:solidFill>
+                <a:latin typeface="Yu Gothic" pitchFamily="34" charset="0"/>
+                <a:ea typeface="Yu Gothic" pitchFamily="34" charset="-122"/>
+                <a:cs typeface="Yu Gothic" pitchFamily="34" charset="-120"/>
+              </a:rPr>
+              <a:t>設計ができることが目的です。工程を分け、確認ポイントを置ける。それができれば、実装を外注する判断も正解のひとつです。むしろ、何をどう頼めばよいかが分かっている発注者は、外注先から見ても仕事がしやすい相手です。</a:t>
+            </a:r>
+            <a:endParaRPr lang="en-US" sz="1650" dirty="0"/>
+          </a:p>
+        </p:txBody>
+      </p:sp>
+      <p:sp>
+        <p:nvSpPr>
+          <p:cNvPr id="6" name="Shape 4"/>
+          <p:cNvSpPr/>
+          <p:nvPr/>
+        </p:nvSpPr>
+        <p:spPr>
+          <a:xfrm>
+            <a:off x="777240" y="4709160"/>
+            <a:ext cx="10607040" cy="960120"/>
+          </a:xfrm>
+          <a:prstGeom prst="rect">
+            <a:avLst/>
+          </a:prstGeom>
+          <a:solidFill>
+            <a:srgbClr val="EDE7DB"/>
+          </a:solidFill>
+          <a:ln w="12700">
+            <a:solidFill>
+              <a:srgbClr val="333333"/>
+            </a:solidFill>
+            <a:prstDash val="solid"/>
+          </a:ln>
+        </p:spPr>
+      </p:sp>
+      <p:sp>
+        <p:nvSpPr>
+          <p:cNvPr id="7" name="Text 5"/>
+          <p:cNvSpPr txBox="1"/>
+          <p:nvPr/>
+        </p:nvSpPr>
+        <p:spPr>
+          <a:xfrm>
+            <a:off x="1051560" y="4800600"/>
+            <a:ext cx="1463040" cy="256032"/>
+          </a:xfrm>
+          <a:prstGeom prst="rect">
+            <a:avLst/>
+          </a:prstGeom>
+          <a:noFill/>
+          <a:ln/>
+        </p:spPr>
+        <p:txBody>
+          <a:bodyPr wrap="square" lIns="0" tIns="0" rIns="0" bIns="0" rtlCol="0" anchor="ctr"/>
+          <a:lstStyle/>
+          <a:p>
+            <a:pPr indent="0" marL="0">
+              <a:buNone/>
+            </a:pPr>
+            <a:r>
+              <a:rPr lang="en-US" sz="900" b="1" spc="150" kern="0" dirty="0">
+                <a:solidFill>
+                  <a:srgbClr val="B04A2F"/>
+                </a:solidFill>
+                <a:latin typeface="Yu Gothic" pitchFamily="34" charset="0"/>
+                <a:ea typeface="Yu Gothic" pitchFamily="34" charset="-122"/>
+                <a:cs typeface="Yu Gothic" pitchFamily="34" charset="-120"/>
+              </a:rPr>
+              <a:t>他社では</a:t>
+            </a:r>
+            <a:endParaRPr lang="en-US" sz="900" dirty="0"/>
+          </a:p>
+        </p:txBody>
+      </p:sp>
+      <p:sp>
+        <p:nvSpPr>
+          <p:cNvPr id="8" name="Text 6"/>
+          <p:cNvSpPr txBox="1"/>
+          <p:nvPr/>
+        </p:nvSpPr>
+        <p:spPr>
+          <a:xfrm>
+            <a:off x="1051560" y="5029200"/>
+            <a:ext cx="10058400" cy="566928"/>
+          </a:xfrm>
+          <a:prstGeom prst="rect">
+            <a:avLst/>
+          </a:prstGeom>
+          <a:noFill/>
+          <a:ln/>
+        </p:spPr>
+        <p:txBody>
+          <a:bodyPr wrap="square" lIns="0" tIns="0" rIns="0" bIns="0" rtlCol="0" anchor="ctr"/>
+          <a:lstStyle/>
+          <a:p>
+            <a:pPr indent="0" marL="0">
+              <a:lnSpc>
+                <a:spcPct val="130000"/>
+              </a:lnSpc>
+              <a:buNone/>
+            </a:pPr>
+            <a:r>
+              <a:rPr lang="en-US" sz="1250" dirty="0">
+                <a:solidFill>
+                  <a:srgbClr val="3F3933"/>
+                </a:solidFill>
+                <a:latin typeface="Yu Gothic" pitchFamily="34" charset="0"/>
+                <a:ea typeface="Yu Gothic" pitchFamily="34" charset="-122"/>
+                <a:cs typeface="Yu Gothic" pitchFamily="34" charset="-120"/>
+              </a:rPr>
+              <a:t>見積作成を3工程に分けて任せた会社では、最初の版は工程1の商品名の取り違えが最後まで残り、危うく誤った金額を出すところでした。工程1の直後に確認を1つ置いただけで、以後は事故が起きていません。</a:t>
+            </a:r>
+            <a:endParaRPr lang="en-US" sz="1250" dirty="0"/>
+          </a:p>
+        </p:txBody>
+      </p:sp>
+      <p:sp>
+        <p:nvSpPr>
+          <p:cNvPr id="9" name="Text 7"/>
+          <p:cNvSpPr txBox="1"/>
+          <p:nvPr/>
+        </p:nvSpPr>
+        <p:spPr>
+          <a:xfrm>
+            <a:off x="777240" y="6382512"/>
+            <a:ext cx="7424928" cy="256032"/>
+          </a:xfrm>
+          <a:prstGeom prst="rect">
+            <a:avLst/>
+          </a:prstGeom>
+          <a:noFill/>
+          <a:ln/>
+        </p:spPr>
+        <p:txBody>
+          <a:bodyPr wrap="square" lIns="0" tIns="0" rIns="0" bIns="0" rtlCol="0" anchor="ctr"/>
+          <a:lstStyle/>
+          <a:p>
+            <a:pPr indent="0" marL="0">
+              <a:buNone/>
+            </a:pPr>
+            <a:r>
+              <a:rPr lang="en-US" sz="900" dirty="0">
+                <a:solidFill>
+                  <a:srgbClr val="8A8177"/>
+                </a:solidFill>
+                <a:latin typeface="Yu Gothic" pitchFamily="34" charset="0"/>
+                <a:ea typeface="Yu Gothic" pitchFamily="34" charset="-122"/>
+                <a:cs typeface="Yu Gothic" pitchFamily="34" charset="-120"/>
+              </a:rPr>
+              <a:t>第9回　複数の工程をまとめて任せる</a:t>
+            </a:r>
+            <a:endParaRPr lang="en-US" sz="900" dirty="0"/>
+          </a:p>
+        </p:txBody>
+      </p:sp>
+      <p:sp>
+        <p:nvSpPr>
+          <p:cNvPr id="10" name="Text 8"/>
+          <p:cNvSpPr txBox="1"/>
+          <p:nvPr/>
+        </p:nvSpPr>
+        <p:spPr>
+          <a:xfrm>
+            <a:off x="8202168" y="6382512"/>
+            <a:ext cx="3182112" cy="256032"/>
+          </a:xfrm>
+          <a:prstGeom prst="rect">
+            <a:avLst/>
+          </a:prstGeom>
+          <a:noFill/>
+          <a:ln/>
+        </p:spPr>
+        <p:txBody>
+          <a:bodyPr wrap="square" lIns="0" tIns="0" rIns="0" bIns="0" rtlCol="0" anchor="ctr"/>
+          <a:lstStyle/>
+          <a:p>
+            <a:pPr algn="r" indent="0" marL="0">
+              <a:buNone/>
+            </a:pPr>
+            <a:r>
+              <a:rPr lang="en-US" sz="900" dirty="0">
+                <a:solidFill>
+                  <a:srgbClr val="8A8177"/>
+                </a:solidFill>
+                <a:latin typeface="Yu Gothic" pitchFamily="34" charset="0"/>
+                <a:ea typeface="Yu Gothic" pitchFamily="34" charset="-122"/>
+                <a:cs typeface="Yu Gothic" pitchFamily="34" charset="-120"/>
+              </a:rPr>
+              <a:t>ここだけは</a:t>
+            </a:r>
+            <a:endParaRPr lang="en-US" sz="900" dirty="0"/>
+          </a:p>
+        </p:txBody>
+      </p:sp>
+    </p:spTree>
+  </p:cSld>
+  <p:clrMapOvr>
+    <a:masterClrMapping/>
+  </p:clrMapOvr>
+</p:sld>
+</file>
+
+<file path=ppt/slides/slide12.xml><?xml version="1.0" encoding="utf-8"?>
+<p:sld xmlns:a="http://schemas.openxmlformats.org/drawingml/2006/main" xmlns:r="http://schemas.openxmlformats.org/officeDocument/2006/relationships" xmlns:p="http://schemas.openxmlformats.org/presentationml/2006/main">
+  <p:cSld name="Slide 12">
+    <p:bg>
+      <p:bgPr>
+        <a:solidFill>
+          <a:srgbClr val="23201D"/>
+        </a:solidFill>
+      </p:bgPr>
+    </p:bg>
+    <p:spTree>
+      <p:nvGrpSpPr>
+        <p:cNvPr id="1" name=""/>
+        <p:cNvGrpSpPr/>
+        <p:nvPr/>
+      </p:nvGrpSpPr>
+      <p:grpSpPr>
+        <a:xfrm>
+          <a:off x="0" y="0"/>
+          <a:ext cx="0" cy="0"/>
+          <a:chOff x="0" y="0"/>
+          <a:chExt cx="0" cy="0"/>
+        </a:xfrm>
+      </p:grpSpPr>
+      <p:sp>
+        <p:nvSpPr>
+          <p:cNvPr id="2" name="Text 0"/>
+          <p:cNvSpPr txBox="1"/>
+          <p:nvPr/>
+        </p:nvSpPr>
+        <p:spPr>
+          <a:xfrm>
+            <a:off x="777240" y="1280160"/>
+            <a:ext cx="10607040" cy="365760"/>
+          </a:xfrm>
+          <a:prstGeom prst="rect">
+            <a:avLst/>
+          </a:prstGeom>
+          <a:noFill/>
+          <a:ln/>
+        </p:spPr>
+        <p:txBody>
+          <a:bodyPr wrap="square" lIns="0" tIns="0" rIns="0" bIns="0" rtlCol="0" anchor="ctr"/>
+          <a:lstStyle/>
+          <a:p>
+            <a:pPr indent="0" marL="0">
+              <a:buNone/>
+            </a:pPr>
+            <a:r>
+              <a:rPr lang="en-US" sz="1200" b="1" spc="300" kern="0" dirty="0">
+                <a:solidFill>
+                  <a:srgbClr val="B04A2F"/>
+                </a:solidFill>
+                <a:latin typeface="Yu Gothic" pitchFamily="34" charset="0"/>
+                <a:ea typeface="Yu Gothic" pitchFamily="34" charset="-122"/>
+                <a:cs typeface="Yu Gothic" pitchFamily="34" charset="-120"/>
+              </a:rPr>
+              <a:t>今日の宿題</a:t>
+            </a:r>
+            <a:endParaRPr lang="en-US" sz="1200" dirty="0"/>
+          </a:p>
+        </p:txBody>
+      </p:sp>
+      <p:sp>
+        <p:nvSpPr>
+          <p:cNvPr id="3" name="Text 1"/>
+          <p:cNvSpPr txBox="1"/>
+          <p:nvPr/>
+        </p:nvSpPr>
+        <p:spPr>
+          <a:xfrm>
+            <a:off x="777240" y="1691640"/>
+            <a:ext cx="10607040" cy="640080"/>
+          </a:xfrm>
+          <a:prstGeom prst="rect">
+            <a:avLst/>
+          </a:prstGeom>
+          <a:noFill/>
+          <a:ln/>
+        </p:spPr>
+        <p:txBody>
+          <a:bodyPr wrap="square" lIns="0" tIns="0" rIns="0" bIns="0" rtlCol="0" anchor="ctr"/>
+          <a:lstStyle/>
+          <a:p>
+            <a:pPr indent="0" marL="0">
+              <a:buNone/>
+            </a:pPr>
+            <a:r>
+              <a:rPr lang="en-US" sz="3200" b="1" dirty="0">
+                <a:solidFill>
+                  <a:srgbClr val="FFFFFF"/>
+                </a:solidFill>
+                <a:latin typeface="Yu Gothic" pitchFamily="34" charset="0"/>
+                <a:ea typeface="Yu Gothic" pitchFamily="34" charset="-122"/>
+                <a:cs typeface="Yu Gothic" pitchFamily="34" charset="-120"/>
+              </a:rPr>
+              <a:t>ひとつだけ</a:t>
+            </a:r>
+            <a:endParaRPr lang="en-US" sz="3200" dirty="0"/>
+          </a:p>
+        </p:txBody>
+      </p:sp>
+      <p:sp>
+        <p:nvSpPr>
+          <p:cNvPr id="4" name="Shape 2"/>
+          <p:cNvSpPr/>
+          <p:nvPr/>
+        </p:nvSpPr>
+        <p:spPr>
+          <a:xfrm>
+            <a:off x="777240" y="2651760"/>
+            <a:ext cx="10607040" cy="1371600"/>
+          </a:xfrm>
+          <a:prstGeom prst="rect">
+            <a:avLst/>
+          </a:prstGeom>
+          <a:solidFill>
+            <a:srgbClr val="2E2A26"/>
+          </a:solidFill>
+          <a:ln w="12700">
+            <a:solidFill>
+              <a:srgbClr val="B04A2F"/>
+            </a:solidFill>
+            <a:prstDash val="solid"/>
+          </a:ln>
+        </p:spPr>
+      </p:sp>
+      <p:sp>
+        <p:nvSpPr>
+          <p:cNvPr id="5" name="Text 3"/>
+          <p:cNvSpPr txBox="1"/>
+          <p:nvPr/>
+        </p:nvSpPr>
+        <p:spPr>
+          <a:xfrm>
+            <a:off x="1234440" y="2743200"/>
+            <a:ext cx="9692640" cy="1188720"/>
+          </a:xfrm>
+          <a:prstGeom prst="rect">
+            <a:avLst/>
+          </a:prstGeom>
+          <a:noFill/>
+          <a:ln/>
+        </p:spPr>
+        <p:txBody>
+          <a:bodyPr wrap="square" lIns="0" tIns="0" rIns="0" bIns="0" rtlCol="0" anchor="ctr"/>
+          <a:lstStyle/>
+          <a:p>
+            <a:pPr indent="0" marL="0">
+              <a:lnSpc>
+                <a:spcPct val="140000"/>
+              </a:lnSpc>
+              <a:buNone/>
+            </a:pPr>
+            <a:r>
+              <a:rPr lang="en-US" sz="1900" b="1" dirty="0">
+                <a:solidFill>
+                  <a:srgbClr val="FFFFFF"/>
+                </a:solidFill>
+                <a:latin typeface="Yu Gothic" pitchFamily="34" charset="0"/>
+                <a:ea typeface="Yu Gothic" pitchFamily="34" charset="-122"/>
+                <a:cs typeface="Yu Gothic" pitchFamily="34" charset="-120"/>
+              </a:rPr>
+              <a:t>設計した多工程の仕事を、1回だけ本番で流す。確認ポイントで必ず人が見る。</a:t>
+            </a:r>
+            <a:endParaRPr lang="en-US" sz="1900" dirty="0"/>
+          </a:p>
+        </p:txBody>
+      </p:sp>
+      <p:sp>
+        <p:nvSpPr>
+          <p:cNvPr id="6" name="Text 4"/>
+          <p:cNvSpPr txBox="1"/>
+          <p:nvPr/>
+        </p:nvSpPr>
+        <p:spPr>
+          <a:xfrm>
+            <a:off x="777240" y="4297680"/>
+            <a:ext cx="10607040" cy="274320"/>
+          </a:xfrm>
+          <a:prstGeom prst="rect">
+            <a:avLst/>
+          </a:prstGeom>
+          <a:noFill/>
+          <a:ln/>
+        </p:spPr>
+        <p:txBody>
+          <a:bodyPr wrap="square" lIns="0" tIns="0" rIns="0" bIns="0" rtlCol="0" anchor="ctr"/>
+          <a:lstStyle/>
+          <a:p>
+            <a:pPr indent="0" marL="0">
+              <a:buNone/>
+            </a:pPr>
+            <a:r>
+              <a:rPr lang="en-US" sz="1000" b="1" spc="200" kern="0" dirty="0">
+                <a:solidFill>
+                  <a:srgbClr val="B04A2F"/>
+                </a:solidFill>
+                <a:latin typeface="Yu Gothic" pitchFamily="34" charset="0"/>
+                <a:ea typeface="Yu Gothic" pitchFamily="34" charset="-122"/>
+                <a:cs typeface="Yu Gothic" pitchFamily="34" charset="-120"/>
+              </a:rPr>
+              <a:t>なぜこの宿題か</a:t>
+            </a:r>
+            <a:endParaRPr lang="en-US" sz="1000" dirty="0"/>
+          </a:p>
+        </p:txBody>
+      </p:sp>
+      <p:sp>
+        <p:nvSpPr>
+          <p:cNvPr id="7" name="Text 5"/>
+          <p:cNvSpPr txBox="1"/>
+          <p:nvPr/>
+        </p:nvSpPr>
+        <p:spPr>
+          <a:xfrm>
+            <a:off x="777240" y="4572000"/>
+            <a:ext cx="9546336" cy="914400"/>
+          </a:xfrm>
+          <a:prstGeom prst="rect">
+            <a:avLst/>
+          </a:prstGeom>
+          <a:noFill/>
+          <a:ln/>
+        </p:spPr>
+        <p:txBody>
+          <a:bodyPr wrap="square" lIns="0" tIns="0" rIns="0" bIns="0" rtlCol="0" anchor="ctr"/>
+          <a:lstStyle/>
+          <a:p>
+            <a:pPr indent="0" marL="0">
+              <a:lnSpc>
+                <a:spcPct val="145000"/>
+              </a:lnSpc>
+              <a:buNone/>
+            </a:pPr>
+            <a:r>
+              <a:rPr lang="en-US" sz="1350" dirty="0">
+                <a:solidFill>
+                  <a:srgbClr val="CFC6B8"/>
+                </a:solidFill>
+                <a:latin typeface="Yu Gothic" pitchFamily="34" charset="0"/>
+                <a:ea typeface="Yu Gothic" pitchFamily="34" charset="-122"/>
+                <a:cs typeface="Yu Gothic" pitchFamily="34" charset="-120"/>
+              </a:rPr>
+              <a:t>設計は、本番で1回流すまで机上の空論です。確認ポイントが実際に機能したかどうかを、次回お聞かせください。機能しなかった場合は、置く位置を変えます。</a:t>
+            </a:r>
+            <a:endParaRPr lang="en-US" sz="1350" dirty="0"/>
+          </a:p>
+        </p:txBody>
+      </p:sp>
+      <p:sp>
+        <p:nvSpPr>
+          <p:cNvPr id="8" name="Text 6"/>
+          <p:cNvSpPr txBox="1"/>
+          <p:nvPr/>
+        </p:nvSpPr>
+        <p:spPr>
+          <a:xfrm>
+            <a:off x="777240" y="6382512"/>
+            <a:ext cx="10607040" cy="256032"/>
+          </a:xfrm>
+          <a:prstGeom prst="rect">
+            <a:avLst/>
+          </a:prstGeom>
+          <a:noFill/>
+          <a:ln/>
+        </p:spPr>
+        <p:txBody>
+          <a:bodyPr wrap="square" lIns="0" tIns="0" rIns="0" bIns="0" rtlCol="0" anchor="ctr"/>
+          <a:lstStyle/>
+          <a:p>
+            <a:pPr indent="0" marL="0">
+              <a:buNone/>
+            </a:pPr>
+            <a:r>
+              <a:rPr lang="en-US" sz="900" dirty="0">
+                <a:solidFill>
+                  <a:srgbClr val="6E6558"/>
+                </a:solidFill>
+                <a:latin typeface="Yu Gothic" pitchFamily="34" charset="0"/>
+                <a:ea typeface="Yu Gothic" pitchFamily="34" charset="-122"/>
+                <a:cs typeface="Yu Gothic" pitchFamily="34" charset="-120"/>
+              </a:rPr>
+              <a:t>第9回　複数の工程をまとめて任せる</a:t>
+            </a:r>
+            <a:endParaRPr lang="en-US" sz="900" dirty="0"/>
+          </a:p>
+        </p:txBody>
+      </p:sp>
+    </p:spTree>
+  </p:cSld>
+  <p:clrMapOvr>
+    <a:masterClrMapping/>
+  </p:clrMapOvr>
+</p:sld>
+</file>
+
 <file path=ppt/slides/slide2.xml><?xml version="1.0" encoding="utf-8"?>
 <p:sld xmlns:a="http://schemas.openxmlformats.org/drawingml/2006/main" xmlns:r="http://schemas.openxmlformats.org/officeDocument/2006/relationships" xmlns:p="http://schemas.openxmlformats.org/presentationml/2006/main">
   <p:cSld name="Slide 2">
@@ -1712,7 +3434,7 @@
         </p:nvSpPr>
         <p:spPr>
           <a:xfrm>
-            <a:off x="777240" y="777240"/>
+            <a:off x="777240" y="566928"/>
             <a:ext cx="10607040" cy="274320"/>
           </a:xfrm>
           <a:prstGeom prst="rect">
@@ -1737,7 +3459,7 @@
                 <a:ea typeface="Yu Gothic" pitchFamily="34" charset="-122"/>
                 <a:cs typeface="Yu Gothic" pitchFamily="34" charset="-120"/>
               </a:rPr>
-              <a:t>今日のゴール</a:t>
+              <a:t>今日の出発点</a:t>
             </a:r>
             <a:endParaRPr lang="en-US" sz="1100" dirty="0"/>
           </a:p>
@@ -1751,27 +3473,24 @@
         </p:nvSpPr>
         <p:spPr>
           <a:xfrm>
-            <a:off x="777240" y="1280160"/>
-            <a:ext cx="9758477" cy="1828800"/>
-          </a:xfrm>
-          <a:prstGeom prst="rect">
-            <a:avLst/>
-          </a:prstGeom>
-          <a:noFill/>
-          <a:ln/>
-        </p:spPr>
-        <p:txBody>
-          <a:bodyPr wrap="square" lIns="0" tIns="0" rIns="0" bIns="0" rtlCol="0" anchor="ctr"/>
-          <a:lstStyle/>
-          <a:p>
-            <a:pPr indent="0" marL="0">
-              <a:lnSpc>
-                <a:spcPct val="145000"/>
-              </a:lnSpc>
-              <a:buNone/>
-            </a:pPr>
-            <a:r>
-              <a:rPr lang="en-US" sz="2800" b="1" dirty="0">
+            <a:off x="777240" y="896112"/>
+            <a:ext cx="10607040" cy="640080"/>
+          </a:xfrm>
+          <a:prstGeom prst="rect">
+            <a:avLst/>
+          </a:prstGeom>
+          <a:noFill/>
+          <a:ln/>
+        </p:spPr>
+        <p:txBody>
+          <a:bodyPr wrap="square" lIns="0" tIns="0" rIns="0" bIns="0" rtlCol="0" anchor="ctr"/>
+          <a:lstStyle/>
+          <a:p>
+            <a:pPr indent="0" marL="0">
+              <a:buNone/>
+            </a:pPr>
+            <a:r>
+              <a:rPr lang="en-US" sz="2600" b="1" dirty="0">
                 <a:solidFill>
                   <a:srgbClr val="23201D"/>
                 </a:solidFill>
@@ -1779,9 +3498,9 @@
                 <a:ea typeface="Yu Gothic" pitchFamily="34" charset="-122"/>
                 <a:cs typeface="Yu Gothic" pitchFamily="34" charset="-120"/>
               </a:rPr>
-              <a:t>3工程以上ある仕事をAIに渡す設計ができるようにします。どこで人が止めるかを決めます。</a:t>
-            </a:r>
-            <a:endParaRPr lang="en-US" sz="2800" dirty="0"/>
+              <a:t>単発の指示では、まだ「作業を手伝わせている」段階です。</a:t>
+            </a:r>
+            <a:endParaRPr lang="en-US" sz="2600" dirty="0"/>
           </a:p>
         </p:txBody>
       </p:sp>
@@ -1793,14 +3512,323 @@
         </p:nvSpPr>
         <p:spPr>
           <a:xfrm>
-            <a:off x="777240" y="3429000"/>
-            <a:ext cx="10607040" cy="18288"/>
+            <a:off x="777240" y="1783080"/>
+            <a:ext cx="10607040" cy="713232"/>
           </a:xfrm>
           <a:prstGeom prst="rect">
             <a:avLst/>
           </a:prstGeom>
           <a:solidFill>
-            <a:srgbClr val="EDE7DB"/>
+            <a:srgbClr val="FFFFFF"/>
+          </a:solidFill>
+          <a:ln w="12700">
+            <a:solidFill>
+              <a:srgbClr val="EDE7DB"/>
+            </a:solidFill>
+            <a:prstDash val="solid"/>
+          </a:ln>
+        </p:spPr>
+      </p:sp>
+      <p:sp>
+        <p:nvSpPr>
+          <p:cNvPr id="5" name="Text 3"/>
+          <p:cNvSpPr txBox="1"/>
+          <p:nvPr/>
+        </p:nvSpPr>
+        <p:spPr>
+          <a:xfrm>
+            <a:off x="1051560" y="1783080"/>
+            <a:ext cx="365760" cy="713232"/>
+          </a:xfrm>
+          <a:prstGeom prst="rect">
+            <a:avLst/>
+          </a:prstGeom>
+          <a:noFill/>
+          <a:ln/>
+        </p:spPr>
+        <p:txBody>
+          <a:bodyPr wrap="square" lIns="0" tIns="0" rIns="0" bIns="0" rtlCol="0" anchor="ctr"/>
+          <a:lstStyle/>
+          <a:p>
+            <a:pPr indent="0" marL="0">
+              <a:buNone/>
+            </a:pPr>
+            <a:r>
+              <a:rPr lang="en-US" sz="1400" dirty="0">
+                <a:solidFill>
+                  <a:srgbClr val="8A8177"/>
+                </a:solidFill>
+                <a:latin typeface="Yu Gothic" pitchFamily="34" charset="0"/>
+                <a:ea typeface="Yu Gothic" pitchFamily="34" charset="-122"/>
+                <a:cs typeface="Yu Gothic" pitchFamily="34" charset="-120"/>
+              </a:rPr>
+              <a:t>―</a:t>
+            </a:r>
+            <a:endParaRPr lang="en-US" sz="1400" dirty="0"/>
+          </a:p>
+        </p:txBody>
+      </p:sp>
+      <p:sp>
+        <p:nvSpPr>
+          <p:cNvPr id="6" name="Text 4"/>
+          <p:cNvSpPr txBox="1"/>
+          <p:nvPr/>
+        </p:nvSpPr>
+        <p:spPr>
+          <a:xfrm>
+            <a:off x="1508760" y="1783080"/>
+            <a:ext cx="9601200" cy="713232"/>
+          </a:xfrm>
+          <a:prstGeom prst="rect">
+            <a:avLst/>
+          </a:prstGeom>
+          <a:noFill/>
+          <a:ln/>
+        </p:spPr>
+        <p:txBody>
+          <a:bodyPr wrap="square" lIns="0" tIns="0" rIns="0" bIns="0" rtlCol="0" anchor="ctr"/>
+          <a:lstStyle/>
+          <a:p>
+            <a:pPr indent="0" marL="0">
+              <a:buNone/>
+            </a:pPr>
+            <a:r>
+              <a:rPr lang="en-US" sz="1500" dirty="0">
+                <a:solidFill>
+                  <a:srgbClr val="23201D"/>
+                </a:solidFill>
+                <a:latin typeface="Yu Gothic" pitchFamily="34" charset="0"/>
+                <a:ea typeface="Yu Gothic" pitchFamily="34" charset="-122"/>
+                <a:cs typeface="Yu Gothic" pitchFamily="34" charset="-120"/>
+              </a:rPr>
+              <a:t>「文章を書いて」は単発。1回で終わる</a:t>
+            </a:r>
+            <a:endParaRPr lang="en-US" sz="1500" dirty="0"/>
+          </a:p>
+        </p:txBody>
+      </p:sp>
+      <p:sp>
+        <p:nvSpPr>
+          <p:cNvPr id="7" name="Shape 5"/>
+          <p:cNvSpPr/>
+          <p:nvPr/>
+        </p:nvSpPr>
+        <p:spPr>
+          <a:xfrm>
+            <a:off x="777240" y="2624328"/>
+            <a:ext cx="10607040" cy="713232"/>
+          </a:xfrm>
+          <a:prstGeom prst="rect">
+            <a:avLst/>
+          </a:prstGeom>
+          <a:solidFill>
+            <a:srgbClr val="FFFFFF"/>
+          </a:solidFill>
+          <a:ln w="12700">
+            <a:solidFill>
+              <a:srgbClr val="EDE7DB"/>
+            </a:solidFill>
+            <a:prstDash val="solid"/>
+          </a:ln>
+        </p:spPr>
+      </p:sp>
+      <p:sp>
+        <p:nvSpPr>
+          <p:cNvPr id="8" name="Text 6"/>
+          <p:cNvSpPr txBox="1"/>
+          <p:nvPr/>
+        </p:nvSpPr>
+        <p:spPr>
+          <a:xfrm>
+            <a:off x="1051560" y="2624328"/>
+            <a:ext cx="365760" cy="713232"/>
+          </a:xfrm>
+          <a:prstGeom prst="rect">
+            <a:avLst/>
+          </a:prstGeom>
+          <a:noFill/>
+          <a:ln/>
+        </p:spPr>
+        <p:txBody>
+          <a:bodyPr wrap="square" lIns="0" tIns="0" rIns="0" bIns="0" rtlCol="0" anchor="ctr"/>
+          <a:lstStyle/>
+          <a:p>
+            <a:pPr indent="0" marL="0">
+              <a:buNone/>
+            </a:pPr>
+            <a:r>
+              <a:rPr lang="en-US" sz="1400" dirty="0">
+                <a:solidFill>
+                  <a:srgbClr val="8A8177"/>
+                </a:solidFill>
+                <a:latin typeface="Yu Gothic" pitchFamily="34" charset="0"/>
+                <a:ea typeface="Yu Gothic" pitchFamily="34" charset="-122"/>
+                <a:cs typeface="Yu Gothic" pitchFamily="34" charset="-120"/>
+              </a:rPr>
+              <a:t>―</a:t>
+            </a:r>
+            <a:endParaRPr lang="en-US" sz="1400" dirty="0"/>
+          </a:p>
+        </p:txBody>
+      </p:sp>
+      <p:sp>
+        <p:nvSpPr>
+          <p:cNvPr id="9" name="Text 7"/>
+          <p:cNvSpPr txBox="1"/>
+          <p:nvPr/>
+        </p:nvSpPr>
+        <p:spPr>
+          <a:xfrm>
+            <a:off x="1508760" y="2624328"/>
+            <a:ext cx="9601200" cy="713232"/>
+          </a:xfrm>
+          <a:prstGeom prst="rect">
+            <a:avLst/>
+          </a:prstGeom>
+          <a:noFill/>
+          <a:ln/>
+        </p:spPr>
+        <p:txBody>
+          <a:bodyPr wrap="square" lIns="0" tIns="0" rIns="0" bIns="0" rtlCol="0" anchor="ctr"/>
+          <a:lstStyle/>
+          <a:p>
+            <a:pPr indent="0" marL="0">
+              <a:buNone/>
+            </a:pPr>
+            <a:r>
+              <a:rPr lang="en-US" sz="1500" dirty="0">
+                <a:solidFill>
+                  <a:srgbClr val="23201D"/>
+                </a:solidFill>
+                <a:latin typeface="Yu Gothic" pitchFamily="34" charset="0"/>
+                <a:ea typeface="Yu Gothic" pitchFamily="34" charset="-122"/>
+                <a:cs typeface="Yu Gothic" pitchFamily="34" charset="-120"/>
+              </a:rPr>
+              <a:t>「見積を出して、根拠を集めて、稟議の形にして、確認を求めて」は多工程</a:t>
+            </a:r>
+            <a:endParaRPr lang="en-US" sz="1500" dirty="0"/>
+          </a:p>
+        </p:txBody>
+      </p:sp>
+      <p:sp>
+        <p:nvSpPr>
+          <p:cNvPr id="10" name="Shape 8"/>
+          <p:cNvSpPr/>
+          <p:nvPr/>
+        </p:nvSpPr>
+        <p:spPr>
+          <a:xfrm>
+            <a:off x="777240" y="3465576"/>
+            <a:ext cx="10607040" cy="713232"/>
+          </a:xfrm>
+          <a:prstGeom prst="rect">
+            <a:avLst/>
+          </a:prstGeom>
+          <a:solidFill>
+            <a:srgbClr val="FFFFFF"/>
+          </a:solidFill>
+          <a:ln w="12700">
+            <a:solidFill>
+              <a:srgbClr val="EDE7DB"/>
+            </a:solidFill>
+            <a:prstDash val="solid"/>
+          </a:ln>
+        </p:spPr>
+      </p:sp>
+      <p:sp>
+        <p:nvSpPr>
+          <p:cNvPr id="11" name="Text 9"/>
+          <p:cNvSpPr txBox="1"/>
+          <p:nvPr/>
+        </p:nvSpPr>
+        <p:spPr>
+          <a:xfrm>
+            <a:off x="1051560" y="3465576"/>
+            <a:ext cx="365760" cy="713232"/>
+          </a:xfrm>
+          <a:prstGeom prst="rect">
+            <a:avLst/>
+          </a:prstGeom>
+          <a:noFill/>
+          <a:ln/>
+        </p:spPr>
+        <p:txBody>
+          <a:bodyPr wrap="square" lIns="0" tIns="0" rIns="0" bIns="0" rtlCol="0" anchor="ctr"/>
+          <a:lstStyle/>
+          <a:p>
+            <a:pPr indent="0" marL="0">
+              <a:buNone/>
+            </a:pPr>
+            <a:r>
+              <a:rPr lang="en-US" sz="1400" dirty="0">
+                <a:solidFill>
+                  <a:srgbClr val="8A8177"/>
+                </a:solidFill>
+                <a:latin typeface="Yu Gothic" pitchFamily="34" charset="0"/>
+                <a:ea typeface="Yu Gothic" pitchFamily="34" charset="-122"/>
+                <a:cs typeface="Yu Gothic" pitchFamily="34" charset="-120"/>
+              </a:rPr>
+              <a:t>―</a:t>
+            </a:r>
+            <a:endParaRPr lang="en-US" sz="1400" dirty="0"/>
+          </a:p>
+        </p:txBody>
+      </p:sp>
+      <p:sp>
+        <p:nvSpPr>
+          <p:cNvPr id="12" name="Text 10"/>
+          <p:cNvSpPr txBox="1"/>
+          <p:nvPr/>
+        </p:nvSpPr>
+        <p:spPr>
+          <a:xfrm>
+            <a:off x="1508760" y="3465576"/>
+            <a:ext cx="9601200" cy="713232"/>
+          </a:xfrm>
+          <a:prstGeom prst="rect">
+            <a:avLst/>
+          </a:prstGeom>
+          <a:noFill/>
+          <a:ln/>
+        </p:spPr>
+        <p:txBody>
+          <a:bodyPr wrap="square" lIns="0" tIns="0" rIns="0" bIns="0" rtlCol="0" anchor="ctr"/>
+          <a:lstStyle/>
+          <a:p>
+            <a:pPr indent="0" marL="0">
+              <a:buNone/>
+            </a:pPr>
+            <a:r>
+              <a:rPr lang="en-US" sz="1500" dirty="0">
+                <a:solidFill>
+                  <a:srgbClr val="23201D"/>
+                </a:solidFill>
+                <a:latin typeface="Yu Gothic" pitchFamily="34" charset="0"/>
+                <a:ea typeface="Yu Gothic" pitchFamily="34" charset="-122"/>
+                <a:cs typeface="Yu Gothic" pitchFamily="34" charset="-120"/>
+              </a:rPr>
+              <a:t>後者は途中で判断が挟まるので、渡し方を設計しないと必ず壊れます</a:t>
+            </a:r>
+            <a:endParaRPr lang="en-US" sz="1500" dirty="0"/>
+          </a:p>
+        </p:txBody>
+      </p:sp>
+      <p:sp>
+        <p:nvSpPr>
+          <p:cNvPr id="13" name="Shape 11"/>
+          <p:cNvSpPr/>
+          <p:nvPr/>
+        </p:nvSpPr>
+        <p:spPr>
+          <a:xfrm>
+            <a:off x="777240" y="4526280"/>
+            <a:ext cx="10607040" cy="914400"/>
+          </a:xfrm>
+          <a:prstGeom prst="rect">
+            <a:avLst/>
+          </a:prstGeom>
+          <a:solidFill>
+            <a:srgbClr val="B04A2F"/>
           </a:solidFill>
           <a:ln w="12700">
             <a:solidFill>
@@ -1812,14 +3840,14 @@
       </p:sp>
       <p:sp>
         <p:nvSpPr>
-          <p:cNvPr id="5" name="Text 3"/>
-          <p:cNvSpPr txBox="1"/>
-          <p:nvPr/>
-        </p:nvSpPr>
-        <p:spPr>
-          <a:xfrm>
-            <a:off x="777240" y="3657600"/>
-            <a:ext cx="9015984" cy="822960"/>
+          <p:cNvPr id="14" name="Text 12"/>
+          <p:cNvSpPr txBox="1"/>
+          <p:nvPr/>
+        </p:nvSpPr>
+        <p:spPr>
+          <a:xfrm>
+            <a:off x="1143000" y="4526280"/>
+            <a:ext cx="9875520" cy="914400"/>
           </a:xfrm>
           <a:prstGeom prst="rect">
             <a:avLst/>
@@ -1833,84 +3861,59 @@
           <a:p>
             <a:pPr indent="0" marL="0">
               <a:lnSpc>
-                <a:spcPct val="140000"/>
+                <a:spcPct val="130000"/>
               </a:lnSpc>
               <a:buNone/>
             </a:pPr>
             <a:r>
-              <a:rPr lang="en-US" sz="1500" dirty="0">
-                <a:solidFill>
-                  <a:srgbClr val="5A534A"/>
-                </a:solidFill>
-                <a:latin typeface="Yu Gothic" pitchFamily="34" charset="0"/>
-                <a:ea typeface="Yu Gothic" pitchFamily="34" charset="-122"/>
-                <a:cs typeface="Yu Gothic" pitchFamily="34" charset="-120"/>
-              </a:rPr>
-              <a:t>単発の指示から、手順のある仕事へ。ここが分かれ目です。</a:t>
-            </a:r>
-            <a:endParaRPr lang="en-US" sz="1500" dirty="0"/>
-          </a:p>
-        </p:txBody>
-      </p:sp>
-      <p:sp>
-        <p:nvSpPr>
-          <p:cNvPr id="6" name="Shape 4"/>
-          <p:cNvSpPr/>
-          <p:nvPr/>
-        </p:nvSpPr>
-        <p:spPr>
-          <a:xfrm>
-            <a:off x="777240" y="4846320"/>
-            <a:ext cx="10607040" cy="777240"/>
-          </a:xfrm>
-          <a:prstGeom prst="rect">
-            <a:avLst/>
-          </a:prstGeom>
-          <a:solidFill>
-            <a:srgbClr val="EDE7DB"/>
-          </a:solidFill>
-          <a:ln w="12700">
-            <a:solidFill>
-              <a:srgbClr val="333333"/>
-            </a:solidFill>
-            <a:prstDash val="solid"/>
-          </a:ln>
-        </p:spPr>
-      </p:sp>
-      <p:sp>
-        <p:nvSpPr>
-          <p:cNvPr id="7" name="Text 5"/>
-          <p:cNvSpPr txBox="1"/>
-          <p:nvPr/>
-        </p:nvSpPr>
-        <p:spPr>
-          <a:xfrm>
-            <a:off x="960120" y="4956048"/>
-            <a:ext cx="1956816" cy="237744"/>
-          </a:xfrm>
-          <a:prstGeom prst="rect">
-            <a:avLst/>
-          </a:prstGeom>
-          <a:noFill/>
-          <a:ln/>
-        </p:spPr>
-        <p:txBody>
-          <a:bodyPr wrap="square" lIns="0" tIns="0" rIns="0" bIns="0" rtlCol="0" anchor="ctr"/>
-          <a:lstStyle/>
-          <a:p>
-            <a:pPr indent="0" marL="0">
-              <a:buNone/>
-            </a:pPr>
-            <a:r>
-              <a:rPr lang="en-US" sz="900" b="1" dirty="0">
-                <a:solidFill>
-                  <a:srgbClr val="B04A2F"/>
-                </a:solidFill>
-                <a:latin typeface="Yu Gothic" pitchFamily="34" charset="0"/>
-                <a:ea typeface="Yu Gothic" pitchFamily="34" charset="-122"/>
-                <a:cs typeface="Yu Gothic" pitchFamily="34" charset="-120"/>
-              </a:rPr>
-              <a:t>0-15分</a:t>
+              <a:rPr lang="en-US" sz="1800" b="1" dirty="0">
+                <a:solidFill>
+                  <a:srgbClr val="FFFFFF"/>
+                </a:solidFill>
+                <a:latin typeface="Yu Gothic" pitchFamily="34" charset="0"/>
+                <a:ea typeface="Yu Gothic" pitchFamily="34" charset="-122"/>
+                <a:cs typeface="Yu Gothic" pitchFamily="34" charset="-120"/>
+              </a:rPr>
+              <a:t>今日からは、手順のある仕事をまとめて渡します。任せ方の設計が要ります。</a:t>
+            </a:r>
+            <a:endParaRPr lang="en-US" sz="1800" dirty="0"/>
+          </a:p>
+        </p:txBody>
+      </p:sp>
+      <p:sp>
+        <p:nvSpPr>
+          <p:cNvPr id="15" name="Text 13"/>
+          <p:cNvSpPr txBox="1"/>
+          <p:nvPr/>
+        </p:nvSpPr>
+        <p:spPr>
+          <a:xfrm>
+            <a:off x="777240" y="6382512"/>
+            <a:ext cx="7424928" cy="256032"/>
+          </a:xfrm>
+          <a:prstGeom prst="rect">
+            <a:avLst/>
+          </a:prstGeom>
+          <a:noFill/>
+          <a:ln/>
+        </p:spPr>
+        <p:txBody>
+          <a:bodyPr wrap="square" lIns="0" tIns="0" rIns="0" bIns="0" rtlCol="0" anchor="ctr"/>
+          <a:lstStyle/>
+          <a:p>
+            <a:pPr indent="0" marL="0">
+              <a:buNone/>
+            </a:pPr>
+            <a:r>
+              <a:rPr lang="en-US" sz="900" dirty="0">
+                <a:solidFill>
+                  <a:srgbClr val="8A8177"/>
+                </a:solidFill>
+                <a:latin typeface="Yu Gothic" pitchFamily="34" charset="0"/>
+                <a:ea typeface="Yu Gothic" pitchFamily="34" charset="-122"/>
+                <a:cs typeface="Yu Gothic" pitchFamily="34" charset="-120"/>
+              </a:rPr>
+              <a:t>第9回　複数の工程をまとめて任せる</a:t>
             </a:r>
             <a:endParaRPr lang="en-US" sz="900" dirty="0"/>
           </a:p>
@@ -1918,377 +3921,26 @@
       </p:sp>
       <p:sp>
         <p:nvSpPr>
-          <p:cNvPr id="8" name="Text 6"/>
-          <p:cNvSpPr txBox="1"/>
-          <p:nvPr/>
-        </p:nvSpPr>
-        <p:spPr>
-          <a:xfrm>
-            <a:off x="960120" y="5193792"/>
-            <a:ext cx="1956816" cy="365760"/>
-          </a:xfrm>
-          <a:prstGeom prst="rect">
-            <a:avLst/>
-          </a:prstGeom>
-          <a:noFill/>
-          <a:ln/>
-        </p:spPr>
-        <p:txBody>
-          <a:bodyPr wrap="square" lIns="0" tIns="0" rIns="0" bIns="0" rtlCol="0" anchor="ctr"/>
-          <a:lstStyle/>
-          <a:p>
-            <a:pPr indent="0" marL="0">
-              <a:buNone/>
-            </a:pPr>
-            <a:r>
-              <a:rPr lang="en-US" sz="1100" dirty="0">
-                <a:solidFill>
-                  <a:srgbClr val="23201D"/>
-                </a:solidFill>
-                <a:latin typeface="Yu Gothic" pitchFamily="34" charset="0"/>
-                <a:ea typeface="Yu Gothic" pitchFamily="34" charset="-122"/>
-                <a:cs typeface="Yu Gothic" pitchFamily="34" charset="-120"/>
-              </a:rPr>
-              <a:t>前回の宿題を実物で</a:t>
-            </a:r>
-            <a:endParaRPr lang="en-US" sz="1100" dirty="0"/>
-          </a:p>
-        </p:txBody>
-      </p:sp>
-      <p:sp>
-        <p:nvSpPr>
-          <p:cNvPr id="9" name="Text 7"/>
-          <p:cNvSpPr txBox="1"/>
-          <p:nvPr/>
-        </p:nvSpPr>
-        <p:spPr>
-          <a:xfrm>
-            <a:off x="3008376" y="4956048"/>
-            <a:ext cx="1956816" cy="237744"/>
-          </a:xfrm>
-          <a:prstGeom prst="rect">
-            <a:avLst/>
-          </a:prstGeom>
-          <a:noFill/>
-          <a:ln/>
-        </p:spPr>
-        <p:txBody>
-          <a:bodyPr wrap="square" lIns="0" tIns="0" rIns="0" bIns="0" rtlCol="0" anchor="ctr"/>
-          <a:lstStyle/>
-          <a:p>
-            <a:pPr indent="0" marL="0">
-              <a:buNone/>
-            </a:pPr>
-            <a:r>
-              <a:rPr lang="en-US" sz="900" b="1" dirty="0">
-                <a:solidFill>
-                  <a:srgbClr val="B04A2F"/>
-                </a:solidFill>
-                <a:latin typeface="Yu Gothic" pitchFamily="34" charset="0"/>
-                <a:ea typeface="Yu Gothic" pitchFamily="34" charset="-122"/>
-                <a:cs typeface="Yu Gothic" pitchFamily="34" charset="-120"/>
-              </a:rPr>
-              <a:t>15-35分</a:t>
-            </a:r>
-            <a:endParaRPr lang="en-US" sz="900" dirty="0"/>
-          </a:p>
-        </p:txBody>
-      </p:sp>
-      <p:sp>
-        <p:nvSpPr>
-          <p:cNvPr id="10" name="Text 8"/>
-          <p:cNvSpPr txBox="1"/>
-          <p:nvPr/>
-        </p:nvSpPr>
-        <p:spPr>
-          <a:xfrm>
-            <a:off x="3008376" y="5193792"/>
-            <a:ext cx="1956816" cy="365760"/>
-          </a:xfrm>
-          <a:prstGeom prst="rect">
-            <a:avLst/>
-          </a:prstGeom>
-          <a:noFill/>
-          <a:ln/>
-        </p:spPr>
-        <p:txBody>
-          <a:bodyPr wrap="square" lIns="0" tIns="0" rIns="0" bIns="0" rtlCol="0" anchor="ctr"/>
-          <a:lstStyle/>
-          <a:p>
-            <a:pPr indent="0" marL="0">
-              <a:buNone/>
-            </a:pPr>
-            <a:r>
-              <a:rPr lang="en-US" sz="1100" dirty="0">
-                <a:solidFill>
-                  <a:srgbClr val="23201D"/>
-                </a:solidFill>
-                <a:latin typeface="Yu Gothic" pitchFamily="34" charset="0"/>
-                <a:ea typeface="Yu Gothic" pitchFamily="34" charset="-122"/>
-                <a:cs typeface="Yu Gothic" pitchFamily="34" charset="-120"/>
-              </a:rPr>
-              <a:t>テーマとデモ</a:t>
-            </a:r>
-            <a:endParaRPr lang="en-US" sz="1100" dirty="0"/>
-          </a:p>
-        </p:txBody>
-      </p:sp>
-      <p:sp>
-        <p:nvSpPr>
-          <p:cNvPr id="11" name="Text 9"/>
-          <p:cNvSpPr txBox="1"/>
-          <p:nvPr/>
-        </p:nvSpPr>
-        <p:spPr>
-          <a:xfrm>
-            <a:off x="5056632" y="4956048"/>
-            <a:ext cx="1956816" cy="237744"/>
-          </a:xfrm>
-          <a:prstGeom prst="rect">
-            <a:avLst/>
-          </a:prstGeom>
-          <a:noFill/>
-          <a:ln/>
-        </p:spPr>
-        <p:txBody>
-          <a:bodyPr wrap="square" lIns="0" tIns="0" rIns="0" bIns="0" rtlCol="0" anchor="ctr"/>
-          <a:lstStyle/>
-          <a:p>
-            <a:pPr indent="0" marL="0">
-              <a:buNone/>
-            </a:pPr>
-            <a:r>
-              <a:rPr lang="en-US" sz="900" b="1" dirty="0">
-                <a:solidFill>
-                  <a:srgbClr val="B04A2F"/>
-                </a:solidFill>
-                <a:latin typeface="Yu Gothic" pitchFamily="34" charset="0"/>
-                <a:ea typeface="Yu Gothic" pitchFamily="34" charset="-122"/>
-                <a:cs typeface="Yu Gothic" pitchFamily="34" charset="-120"/>
-              </a:rPr>
-              <a:t>35-90分</a:t>
-            </a:r>
-            <a:endParaRPr lang="en-US" sz="900" dirty="0"/>
-          </a:p>
-        </p:txBody>
-      </p:sp>
-      <p:sp>
-        <p:nvSpPr>
-          <p:cNvPr id="12" name="Text 10"/>
-          <p:cNvSpPr txBox="1"/>
-          <p:nvPr/>
-        </p:nvSpPr>
-        <p:spPr>
-          <a:xfrm>
-            <a:off x="5056632" y="5193792"/>
-            <a:ext cx="1956816" cy="365760"/>
-          </a:xfrm>
-          <a:prstGeom prst="rect">
-            <a:avLst/>
-          </a:prstGeom>
-          <a:noFill/>
-          <a:ln/>
-        </p:spPr>
-        <p:txBody>
-          <a:bodyPr wrap="square" lIns="0" tIns="0" rIns="0" bIns="0" rtlCol="0" anchor="ctr"/>
-          <a:lstStyle/>
-          <a:p>
-            <a:pPr indent="0" marL="0">
-              <a:buNone/>
-            </a:pPr>
-            <a:r>
-              <a:rPr lang="en-US" sz="1100" dirty="0">
-                <a:solidFill>
-                  <a:srgbClr val="23201D"/>
-                </a:solidFill>
-                <a:latin typeface="Yu Gothic" pitchFamily="34" charset="0"/>
-                <a:ea typeface="Yu Gothic" pitchFamily="34" charset="-122"/>
-                <a:cs typeface="Yu Gothic" pitchFamily="34" charset="-120"/>
-              </a:rPr>
-              <a:t>一緒に手を動かす</a:t>
-            </a:r>
-            <a:endParaRPr lang="en-US" sz="1100" dirty="0"/>
-          </a:p>
-        </p:txBody>
-      </p:sp>
-      <p:sp>
-        <p:nvSpPr>
-          <p:cNvPr id="13" name="Text 11"/>
-          <p:cNvSpPr txBox="1"/>
-          <p:nvPr/>
-        </p:nvSpPr>
-        <p:spPr>
-          <a:xfrm>
-            <a:off x="7104888" y="4956048"/>
-            <a:ext cx="1956816" cy="237744"/>
-          </a:xfrm>
-          <a:prstGeom prst="rect">
-            <a:avLst/>
-          </a:prstGeom>
-          <a:noFill/>
-          <a:ln/>
-        </p:spPr>
-        <p:txBody>
-          <a:bodyPr wrap="square" lIns="0" tIns="0" rIns="0" bIns="0" rtlCol="0" anchor="ctr"/>
-          <a:lstStyle/>
-          <a:p>
-            <a:pPr indent="0" marL="0">
-              <a:buNone/>
-            </a:pPr>
-            <a:r>
-              <a:rPr lang="en-US" sz="900" b="1" dirty="0">
-                <a:solidFill>
-                  <a:srgbClr val="B04A2F"/>
-                </a:solidFill>
-                <a:latin typeface="Yu Gothic" pitchFamily="34" charset="0"/>
-                <a:ea typeface="Yu Gothic" pitchFamily="34" charset="-122"/>
-                <a:cs typeface="Yu Gothic" pitchFamily="34" charset="-120"/>
-              </a:rPr>
-              <a:t>90-105分</a:t>
-            </a:r>
-            <a:endParaRPr lang="en-US" sz="900" dirty="0"/>
-          </a:p>
-        </p:txBody>
-      </p:sp>
-      <p:sp>
-        <p:nvSpPr>
-          <p:cNvPr id="14" name="Text 12"/>
-          <p:cNvSpPr txBox="1"/>
-          <p:nvPr/>
-        </p:nvSpPr>
-        <p:spPr>
-          <a:xfrm>
-            <a:off x="7104888" y="5193792"/>
-            <a:ext cx="1956816" cy="365760"/>
-          </a:xfrm>
-          <a:prstGeom prst="rect">
-            <a:avLst/>
-          </a:prstGeom>
-          <a:noFill/>
-          <a:ln/>
-        </p:spPr>
-        <p:txBody>
-          <a:bodyPr wrap="square" lIns="0" tIns="0" rIns="0" bIns="0" rtlCol="0" anchor="ctr"/>
-          <a:lstStyle/>
-          <a:p>
-            <a:pPr indent="0" marL="0">
-              <a:buNone/>
-            </a:pPr>
-            <a:r>
-              <a:rPr lang="en-US" sz="1100" dirty="0">
-                <a:solidFill>
-                  <a:srgbClr val="23201D"/>
-                </a:solidFill>
-                <a:latin typeface="Yu Gothic" pitchFamily="34" charset="0"/>
-                <a:ea typeface="Yu Gothic" pitchFamily="34" charset="-122"/>
-                <a:cs typeface="Yu Gothic" pitchFamily="34" charset="-120"/>
-              </a:rPr>
-              <a:t>業務への組み込み</a:t>
-            </a:r>
-            <a:endParaRPr lang="en-US" sz="1100" dirty="0"/>
-          </a:p>
-        </p:txBody>
-      </p:sp>
-      <p:sp>
-        <p:nvSpPr>
-          <p:cNvPr id="15" name="Text 13"/>
-          <p:cNvSpPr txBox="1"/>
-          <p:nvPr/>
-        </p:nvSpPr>
-        <p:spPr>
-          <a:xfrm>
-            <a:off x="9153144" y="4956048"/>
-            <a:ext cx="1956816" cy="237744"/>
-          </a:xfrm>
-          <a:prstGeom prst="rect">
-            <a:avLst/>
-          </a:prstGeom>
-          <a:noFill/>
-          <a:ln/>
-        </p:spPr>
-        <p:txBody>
-          <a:bodyPr wrap="square" lIns="0" tIns="0" rIns="0" bIns="0" rtlCol="0" anchor="ctr"/>
-          <a:lstStyle/>
-          <a:p>
-            <a:pPr indent="0" marL="0">
-              <a:buNone/>
-            </a:pPr>
-            <a:r>
-              <a:rPr lang="en-US" sz="900" b="1" dirty="0">
-                <a:solidFill>
-                  <a:srgbClr val="B04A2F"/>
-                </a:solidFill>
-                <a:latin typeface="Yu Gothic" pitchFamily="34" charset="0"/>
-                <a:ea typeface="Yu Gothic" pitchFamily="34" charset="-122"/>
-                <a:cs typeface="Yu Gothic" pitchFamily="34" charset="-120"/>
-              </a:rPr>
-              <a:t>105-120分</a:t>
-            </a:r>
-            <a:endParaRPr lang="en-US" sz="900" dirty="0"/>
-          </a:p>
-        </p:txBody>
-      </p:sp>
-      <p:sp>
-        <p:nvSpPr>
           <p:cNvPr id="16" name="Text 14"/>
           <p:cNvSpPr txBox="1"/>
           <p:nvPr/>
         </p:nvSpPr>
         <p:spPr>
           <a:xfrm>
-            <a:off x="9153144" y="5193792"/>
-            <a:ext cx="1956816" cy="365760"/>
-          </a:xfrm>
-          <a:prstGeom prst="rect">
-            <a:avLst/>
-          </a:prstGeom>
-          <a:noFill/>
-          <a:ln/>
-        </p:spPr>
-        <p:txBody>
-          <a:bodyPr wrap="square" lIns="0" tIns="0" rIns="0" bIns="0" rtlCol="0" anchor="ctr"/>
-          <a:lstStyle/>
-          <a:p>
-            <a:pPr indent="0" marL="0">
-              <a:buNone/>
-            </a:pPr>
-            <a:r>
-              <a:rPr lang="en-US" sz="1100" dirty="0">
-                <a:solidFill>
-                  <a:srgbClr val="23201D"/>
-                </a:solidFill>
-                <a:latin typeface="Yu Gothic" pitchFamily="34" charset="0"/>
-                <a:ea typeface="Yu Gothic" pitchFamily="34" charset="-122"/>
-                <a:cs typeface="Yu Gothic" pitchFamily="34" charset="-120"/>
-              </a:rPr>
-              <a:t>宿題・記録</a:t>
-            </a:r>
-            <a:endParaRPr lang="en-US" sz="1100" dirty="0"/>
-          </a:p>
-        </p:txBody>
-      </p:sp>
-      <p:sp>
-        <p:nvSpPr>
-          <p:cNvPr id="17" name="Text 15"/>
-          <p:cNvSpPr txBox="1"/>
-          <p:nvPr/>
-        </p:nvSpPr>
-        <p:spPr>
-          <a:xfrm>
-            <a:off x="777240" y="6355080"/>
-            <a:ext cx="7424928" cy="274320"/>
-          </a:xfrm>
-          <a:prstGeom prst="rect">
-            <a:avLst/>
-          </a:prstGeom>
-          <a:noFill/>
-          <a:ln/>
-        </p:spPr>
-        <p:txBody>
-          <a:bodyPr wrap="square" lIns="0" tIns="0" rIns="0" bIns="0" rtlCol="0" anchor="ctr"/>
-          <a:lstStyle/>
-          <a:p>
-            <a:pPr indent="0" marL="0">
+            <a:off x="8202168" y="6382512"/>
+            <a:ext cx="3182112" cy="256032"/>
+          </a:xfrm>
+          <a:prstGeom prst="rect">
+            <a:avLst/>
+          </a:prstGeom>
+          <a:noFill/>
+          <a:ln/>
+        </p:spPr>
+        <p:txBody>
+          <a:bodyPr wrap="square" lIns="0" tIns="0" rIns="0" bIns="0" rtlCol="0" anchor="ctr"/>
+          <a:lstStyle/>
+          <a:p>
+            <a:pPr algn="r" indent="0" marL="0">
               <a:buNone/>
             </a:pPr>
             <a:r>
@@ -2300,46 +3952,7 @@
                 <a:ea typeface="Yu Gothic" pitchFamily="34" charset="-122"/>
                 <a:cs typeface="Yu Gothic" pitchFamily="34" charset="-120"/>
               </a:rPr>
-              <a:t>第9回　複数の工程をまとめて任せる</a:t>
-            </a:r>
-            <a:endParaRPr lang="en-US" sz="900" dirty="0"/>
-          </a:p>
-        </p:txBody>
-      </p:sp>
-      <p:sp>
-        <p:nvSpPr>
-          <p:cNvPr id="18" name="Text 16"/>
-          <p:cNvSpPr txBox="1"/>
-          <p:nvPr/>
-        </p:nvSpPr>
-        <p:spPr>
-          <a:xfrm>
-            <a:off x="8202168" y="6355080"/>
-            <a:ext cx="3182112" cy="274320"/>
-          </a:xfrm>
-          <a:prstGeom prst="rect">
-            <a:avLst/>
-          </a:prstGeom>
-          <a:noFill/>
-          <a:ln/>
-        </p:spPr>
-        <p:txBody>
-          <a:bodyPr wrap="square" lIns="0" tIns="0" rIns="0" bIns="0" rtlCol="0" anchor="ctr"/>
-          <a:lstStyle/>
-          <a:p>
-            <a:pPr algn="r" indent="0" marL="0">
-              <a:buNone/>
-            </a:pPr>
-            <a:r>
-              <a:rPr lang="en-US" sz="900" dirty="0">
-                <a:solidFill>
-                  <a:srgbClr val="8A8177"/>
-                </a:solidFill>
-                <a:latin typeface="Yu Gothic" pitchFamily="34" charset="0"/>
-                <a:ea typeface="Yu Gothic" pitchFamily="34" charset="-122"/>
-                <a:cs typeface="Yu Gothic" pitchFamily="34" charset="-120"/>
-              </a:rPr>
-              <a:t>今日のゴール</a:t>
+              <a:t>出発点</a:t>
             </a:r>
             <a:endParaRPr lang="en-US" sz="900" dirty="0"/>
           </a:p>
@@ -2385,7 +3998,7 @@
         </p:nvSpPr>
         <p:spPr>
           <a:xfrm>
-            <a:off x="777240" y="640080"/>
+            <a:off x="777240" y="566928"/>
             <a:ext cx="10607040" cy="274320"/>
           </a:xfrm>
           <a:prstGeom prst="rect">
@@ -2410,7 +4023,7 @@
                 <a:ea typeface="Yu Gothic" pitchFamily="34" charset="-122"/>
                 <a:cs typeface="Yu Gothic" pitchFamily="34" charset="-120"/>
               </a:rPr>
-              <a:t>考え方</a:t>
+              <a:t>今日のゴール</a:t>
             </a:r>
             <a:endParaRPr lang="en-US" sz="1100" dirty="0"/>
           </a:p>
@@ -2424,24 +4037,27 @@
         </p:nvSpPr>
         <p:spPr>
           <a:xfrm>
-            <a:off x="777240" y="960120"/>
-            <a:ext cx="10607040" cy="640080"/>
-          </a:xfrm>
-          <a:prstGeom prst="rect">
-            <a:avLst/>
-          </a:prstGeom>
-          <a:noFill/>
-          <a:ln/>
-        </p:spPr>
-        <p:txBody>
-          <a:bodyPr wrap="square" lIns="0" tIns="0" rIns="0" bIns="0" rtlCol="0" anchor="ctr"/>
-          <a:lstStyle/>
-          <a:p>
-            <a:pPr indent="0" marL="0">
-              <a:buNone/>
-            </a:pPr>
-            <a:r>
-              <a:rPr lang="en-US" sz="2700" b="1" dirty="0">
+            <a:off x="777240" y="1143000"/>
+            <a:ext cx="9864547" cy="1645920"/>
+          </a:xfrm>
+          <a:prstGeom prst="rect">
+            <a:avLst/>
+          </a:prstGeom>
+          <a:noFill/>
+          <a:ln/>
+        </p:spPr>
+        <p:txBody>
+          <a:bodyPr wrap="square" lIns="0" tIns="0" rIns="0" bIns="0" rtlCol="0" anchor="ctr"/>
+          <a:lstStyle/>
+          <a:p>
+            <a:pPr indent="0" marL="0">
+              <a:lnSpc>
+                <a:spcPct val="145000"/>
+              </a:lnSpc>
+              <a:buNone/>
+            </a:pPr>
+            <a:r>
+              <a:rPr lang="en-US" sz="2600" b="1" dirty="0">
                 <a:solidFill>
                   <a:srgbClr val="23201D"/>
                 </a:solidFill>
@@ -2449,9 +4065,9 @@
                 <a:ea typeface="Yu Gothic" pitchFamily="34" charset="-122"/>
                 <a:cs typeface="Yu Gothic" pitchFamily="34" charset="-120"/>
               </a:rPr>
-              <a:t>多工程は、3通りの壊れ方をします</a:t>
-            </a:r>
-            <a:endParaRPr lang="en-US" sz="2700" dirty="0"/>
+              <a:t>3工程以上ある仕事をAIに渡す設計ができるようにします。どこで人が止めるかを決めます。</a:t>
+            </a:r>
+            <a:endParaRPr lang="en-US" sz="2600" dirty="0"/>
           </a:p>
         </p:txBody>
       </p:sp>
@@ -2463,18 +4079,18 @@
         </p:nvSpPr>
         <p:spPr>
           <a:xfrm>
-            <a:off x="777240" y="1783080"/>
-            <a:ext cx="10607040" cy="1167384"/>
+            <a:off x="777240" y="3063240"/>
+            <a:ext cx="10607040" cy="18288"/>
           </a:xfrm>
           <a:prstGeom prst="rect">
             <a:avLst/>
           </a:prstGeom>
           <a:solidFill>
-            <a:srgbClr val="FFFFFF"/>
+            <a:srgbClr val="EDE7DB"/>
           </a:solidFill>
           <a:ln w="12700">
             <a:solidFill>
-              <a:srgbClr val="EDE7DB"/>
+              <a:srgbClr val="333333"/>
             </a:solidFill>
             <a:prstDash val="solid"/>
           </a:ln>
@@ -2482,24 +4098,66 @@
       </p:sp>
       <p:sp>
         <p:nvSpPr>
-          <p:cNvPr id="5" name="Shape 3"/>
+          <p:cNvPr id="5" name="Text 3"/>
+          <p:cNvSpPr txBox="1"/>
+          <p:nvPr/>
+        </p:nvSpPr>
+        <p:spPr>
+          <a:xfrm>
+            <a:off x="777240" y="3291840"/>
+            <a:ext cx="9334195" cy="1005840"/>
+          </a:xfrm>
+          <a:prstGeom prst="rect">
+            <a:avLst/>
+          </a:prstGeom>
+          <a:noFill/>
+          <a:ln/>
+        </p:spPr>
+        <p:txBody>
+          <a:bodyPr wrap="square" lIns="0" tIns="0" rIns="0" bIns="0" rtlCol="0" anchor="ctr"/>
+          <a:lstStyle/>
+          <a:p>
+            <a:pPr indent="0" marL="0">
+              <a:lnSpc>
+                <a:spcPct val="140000"/>
+              </a:lnSpc>
+              <a:buNone/>
+            </a:pPr>
+            <a:r>
+              <a:rPr lang="en-US" sz="1450" dirty="0">
+                <a:solidFill>
+                  <a:srgbClr val="5A534A"/>
+                </a:solidFill>
+                <a:latin typeface="Yu Gothic" pitchFamily="34" charset="0"/>
+                <a:ea typeface="Yu Gothic" pitchFamily="34" charset="-122"/>
+                <a:cs typeface="Yu Gothic" pitchFamily="34" charset="-120"/>
+              </a:rPr>
+              <a:t>今日は「作る」より「決める」比重が高くなります。手が止まらないよう、工程図を一緒に描きながら進めます。</a:t>
+            </a:r>
+            <a:endParaRPr lang="en-US" sz="1450" dirty="0"/>
+          </a:p>
+        </p:txBody>
+      </p:sp>
+      <p:sp>
+        <p:nvSpPr>
+          <p:cNvPr id="6" name="Shape 4"/>
           <p:cNvSpPr/>
           <p:nvPr/>
         </p:nvSpPr>
         <p:spPr>
           <a:xfrm>
-            <a:off x="1033272" y="2174748"/>
-            <a:ext cx="384048" cy="384048"/>
-          </a:xfrm>
-          <a:prstGeom prst="ellipse">
+            <a:off x="777240" y="4754880"/>
+            <a:ext cx="10607040" cy="822960"/>
+          </a:xfrm>
+          <a:prstGeom prst="rect">
             <a:avLst/>
           </a:prstGeom>
           <a:solidFill>
-            <a:srgbClr val="B04A2F"/>
+            <a:srgbClr val="EDE7DB"/>
           </a:solidFill>
           <a:ln w="12700">
             <a:solidFill>
-              <a:srgbClr val="B04A2F"/>
+              <a:srgbClr val="333333"/>
             </a:solidFill>
             <a:prstDash val="solid"/>
           </a:ln>
@@ -2507,69 +4165,69 @@
       </p:sp>
       <p:sp>
         <p:nvSpPr>
-          <p:cNvPr id="6" name="Text 4"/>
-          <p:cNvSpPr txBox="1"/>
-          <p:nvPr/>
-        </p:nvSpPr>
-        <p:spPr>
-          <a:xfrm>
-            <a:off x="1033272" y="2174748"/>
-            <a:ext cx="384048" cy="384048"/>
-          </a:xfrm>
-          <a:prstGeom prst="rect">
-            <a:avLst/>
-          </a:prstGeom>
-          <a:noFill/>
-          <a:ln/>
-        </p:spPr>
-        <p:txBody>
-          <a:bodyPr wrap="square" lIns="0" tIns="0" rIns="0" bIns="0" rtlCol="0" anchor="ctr"/>
-          <a:lstStyle/>
-          <a:p>
-            <a:pPr algn="ctr" indent="0" marL="0">
-              <a:buNone/>
-            </a:pPr>
-            <a:r>
-              <a:rPr lang="en-US" sz="1400" b="1" dirty="0">
-                <a:solidFill>
-                  <a:srgbClr val="FFFFFF"/>
-                </a:solidFill>
-                <a:latin typeface="Yu Gothic" pitchFamily="34" charset="0"/>
-                <a:ea typeface="Yu Gothic" pitchFamily="34" charset="-122"/>
-                <a:cs typeface="Yu Gothic" pitchFamily="34" charset="-120"/>
-              </a:rPr>
-              <a:t>1</a:t>
-            </a:r>
-            <a:endParaRPr lang="en-US" sz="1400" dirty="0"/>
-          </a:p>
-        </p:txBody>
-      </p:sp>
-      <p:sp>
-        <p:nvSpPr>
           <p:cNvPr id="7" name="Text 5"/>
           <p:cNvSpPr txBox="1"/>
           <p:nvPr/>
         </p:nvSpPr>
         <p:spPr>
           <a:xfrm>
-            <a:off x="1645920" y="1874520"/>
-            <a:ext cx="3394253" cy="984504"/>
-          </a:xfrm>
-          <a:prstGeom prst="rect">
-            <a:avLst/>
-          </a:prstGeom>
-          <a:noFill/>
-          <a:ln/>
-        </p:spPr>
-        <p:txBody>
-          <a:bodyPr wrap="square" lIns="0" tIns="0" rIns="0" bIns="0" rtlCol="0" anchor="ctr"/>
-          <a:lstStyle/>
-          <a:p>
-            <a:pPr indent="0" marL="0">
-              <a:buNone/>
-            </a:pPr>
-            <a:r>
-              <a:rPr lang="en-US" sz="1500" b="1" dirty="0">
+            <a:off x="960120" y="4873752"/>
+            <a:ext cx="1956816" cy="237744"/>
+          </a:xfrm>
+          <a:prstGeom prst="rect">
+            <a:avLst/>
+          </a:prstGeom>
+          <a:noFill/>
+          <a:ln/>
+        </p:spPr>
+        <p:txBody>
+          <a:bodyPr wrap="square" lIns="0" tIns="0" rIns="0" bIns="0" rtlCol="0" anchor="ctr"/>
+          <a:lstStyle/>
+          <a:p>
+            <a:pPr indent="0" marL="0">
+              <a:buNone/>
+            </a:pPr>
+            <a:r>
+              <a:rPr lang="en-US" sz="900" b="1" dirty="0">
+                <a:solidFill>
+                  <a:srgbClr val="B04A2F"/>
+                </a:solidFill>
+                <a:latin typeface="Yu Gothic" pitchFamily="34" charset="0"/>
+                <a:ea typeface="Yu Gothic" pitchFamily="34" charset="-122"/>
+                <a:cs typeface="Yu Gothic" pitchFamily="34" charset="-120"/>
+              </a:rPr>
+              <a:t>0-15分</a:t>
+            </a:r>
+            <a:endParaRPr lang="en-US" sz="900" dirty="0"/>
+          </a:p>
+        </p:txBody>
+      </p:sp>
+      <p:sp>
+        <p:nvSpPr>
+          <p:cNvPr id="8" name="Text 6"/>
+          <p:cNvSpPr txBox="1"/>
+          <p:nvPr/>
+        </p:nvSpPr>
+        <p:spPr>
+          <a:xfrm>
+            <a:off x="960120" y="5111496"/>
+            <a:ext cx="1956816" cy="384048"/>
+          </a:xfrm>
+          <a:prstGeom prst="rect">
+            <a:avLst/>
+          </a:prstGeom>
+          <a:noFill/>
+          <a:ln/>
+        </p:spPr>
+        <p:txBody>
+          <a:bodyPr wrap="square" lIns="0" tIns="0" rIns="0" bIns="0" rtlCol="0" anchor="ctr"/>
+          <a:lstStyle/>
+          <a:p>
+            <a:pPr indent="0" marL="0">
+              <a:buNone/>
+            </a:pPr>
+            <a:r>
+              <a:rPr lang="en-US" sz="1100" dirty="0">
                 <a:solidFill>
                   <a:srgbClr val="23201D"/>
                 </a:solidFill>
@@ -2577,103 +4235,89 @@
                 <a:ea typeface="Yu Gothic" pitchFamily="34" charset="-122"/>
                 <a:cs typeface="Yu Gothic" pitchFamily="34" charset="-120"/>
               </a:rPr>
-              <a:t>前提の引き継ぎ漏れ</a:t>
-            </a:r>
-            <a:endParaRPr lang="en-US" sz="1500" dirty="0"/>
-          </a:p>
-        </p:txBody>
-      </p:sp>
-      <p:sp>
-        <p:nvSpPr>
-          <p:cNvPr id="8" name="Text 6"/>
-          <p:cNvSpPr txBox="1"/>
-          <p:nvPr/>
-        </p:nvSpPr>
-        <p:spPr>
-          <a:xfrm>
-            <a:off x="5146243" y="1874520"/>
-            <a:ext cx="5963717" cy="984504"/>
-          </a:xfrm>
-          <a:prstGeom prst="rect">
-            <a:avLst/>
-          </a:prstGeom>
-          <a:noFill/>
-          <a:ln/>
-        </p:spPr>
-        <p:txBody>
-          <a:bodyPr wrap="square" lIns="0" tIns="0" rIns="0" bIns="0" rtlCol="0" anchor="ctr"/>
-          <a:lstStyle/>
-          <a:p>
-            <a:pPr indent="0" marL="0">
-              <a:lnSpc>
-                <a:spcPct val="130000"/>
-              </a:lnSpc>
-              <a:buNone/>
-            </a:pPr>
-            <a:r>
-              <a:rPr lang="en-US" sz="1250" dirty="0">
-                <a:solidFill>
-                  <a:srgbClr val="5A534A"/>
-                </a:solidFill>
-                <a:latin typeface="Yu Gothic" pitchFamily="34" charset="0"/>
-                <a:ea typeface="Yu Gothic" pitchFamily="34" charset="-122"/>
-                <a:cs typeface="Yu Gothic" pitchFamily="34" charset="-120"/>
-              </a:rPr>
-              <a:t>工程2が、工程1の条件を忘れます</a:t>
-            </a:r>
-            <a:endParaRPr lang="en-US" sz="1250" dirty="0"/>
-          </a:p>
-        </p:txBody>
-      </p:sp>
-      <p:sp>
-        <p:nvSpPr>
-          <p:cNvPr id="9" name="Shape 7"/>
-          <p:cNvSpPr/>
-          <p:nvPr/>
-        </p:nvSpPr>
-        <p:spPr>
-          <a:xfrm>
-            <a:off x="777240" y="3096768"/>
-            <a:ext cx="10607040" cy="1167384"/>
-          </a:xfrm>
-          <a:prstGeom prst="rect">
-            <a:avLst/>
-          </a:prstGeom>
-          <a:solidFill>
-            <a:srgbClr val="FFFFFF"/>
-          </a:solidFill>
-          <a:ln w="12700">
-            <a:solidFill>
-              <a:srgbClr val="EDE7DB"/>
-            </a:solidFill>
-            <a:prstDash val="solid"/>
-          </a:ln>
-        </p:spPr>
-      </p:sp>
-      <p:sp>
-        <p:nvSpPr>
-          <p:cNvPr id="10" name="Shape 8"/>
-          <p:cNvSpPr/>
-          <p:nvPr/>
-        </p:nvSpPr>
-        <p:spPr>
-          <a:xfrm>
-            <a:off x="1033272" y="3488436"/>
-            <a:ext cx="384048" cy="384048"/>
-          </a:xfrm>
-          <a:prstGeom prst="ellipse">
-            <a:avLst/>
-          </a:prstGeom>
-          <a:solidFill>
-            <a:srgbClr val="B04A2F"/>
-          </a:solidFill>
-          <a:ln w="12700">
-            <a:solidFill>
-              <a:srgbClr val="B04A2F"/>
-            </a:solidFill>
-            <a:prstDash val="solid"/>
-          </a:ln>
-        </p:spPr>
+              <a:t>前回の宿題を実物で</a:t>
+            </a:r>
+            <a:endParaRPr lang="en-US" sz="1100" dirty="0"/>
+          </a:p>
+        </p:txBody>
+      </p:sp>
+      <p:sp>
+        <p:nvSpPr>
+          <p:cNvPr id="9" name="Text 7"/>
+          <p:cNvSpPr txBox="1"/>
+          <p:nvPr/>
+        </p:nvSpPr>
+        <p:spPr>
+          <a:xfrm>
+            <a:off x="3008376" y="4873752"/>
+            <a:ext cx="1956816" cy="237744"/>
+          </a:xfrm>
+          <a:prstGeom prst="rect">
+            <a:avLst/>
+          </a:prstGeom>
+          <a:noFill/>
+          <a:ln/>
+        </p:spPr>
+        <p:txBody>
+          <a:bodyPr wrap="square" lIns="0" tIns="0" rIns="0" bIns="0" rtlCol="0" anchor="ctr"/>
+          <a:lstStyle/>
+          <a:p>
+            <a:pPr indent="0" marL="0">
+              <a:buNone/>
+            </a:pPr>
+            <a:r>
+              <a:rPr lang="en-US" sz="900" b="1" dirty="0">
+                <a:solidFill>
+                  <a:srgbClr val="B04A2F"/>
+                </a:solidFill>
+                <a:latin typeface="Yu Gothic" pitchFamily="34" charset="0"/>
+                <a:ea typeface="Yu Gothic" pitchFamily="34" charset="-122"/>
+                <a:cs typeface="Yu Gothic" pitchFamily="34" charset="-120"/>
+              </a:rPr>
+              <a:t>15-35分</a:t>
+            </a:r>
+            <a:endParaRPr lang="en-US" sz="900" dirty="0"/>
+          </a:p>
+        </p:txBody>
+      </p:sp>
+      <p:sp>
+        <p:nvSpPr>
+          <p:cNvPr id="10" name="Text 8"/>
+          <p:cNvSpPr txBox="1"/>
+          <p:nvPr/>
+        </p:nvSpPr>
+        <p:spPr>
+          <a:xfrm>
+            <a:off x="3008376" y="5111496"/>
+            <a:ext cx="1956816" cy="384048"/>
+          </a:xfrm>
+          <a:prstGeom prst="rect">
+            <a:avLst/>
+          </a:prstGeom>
+          <a:noFill/>
+          <a:ln/>
+        </p:spPr>
+        <p:txBody>
+          <a:bodyPr wrap="square" lIns="0" tIns="0" rIns="0" bIns="0" rtlCol="0" anchor="ctr"/>
+          <a:lstStyle/>
+          <a:p>
+            <a:pPr indent="0" marL="0">
+              <a:buNone/>
+            </a:pPr>
+            <a:r>
+              <a:rPr lang="en-US" sz="1100" dirty="0">
+                <a:solidFill>
+                  <a:srgbClr val="23201D"/>
+                </a:solidFill>
+                <a:latin typeface="Yu Gothic" pitchFamily="34" charset="0"/>
+                <a:ea typeface="Yu Gothic" pitchFamily="34" charset="-122"/>
+                <a:cs typeface="Yu Gothic" pitchFamily="34" charset="-120"/>
+              </a:rPr>
+              <a:t>テーマとデモ</a:t>
+            </a:r>
+            <a:endParaRPr lang="en-US" sz="1100" dirty="0"/>
+          </a:p>
+        </p:txBody>
       </p:sp>
       <p:sp>
         <p:nvSpPr>
@@ -2683,34 +4327,34 @@
         </p:nvSpPr>
         <p:spPr>
           <a:xfrm>
-            <a:off x="1033272" y="3488436"/>
-            <a:ext cx="384048" cy="384048"/>
-          </a:xfrm>
-          <a:prstGeom prst="rect">
-            <a:avLst/>
-          </a:prstGeom>
-          <a:noFill/>
-          <a:ln/>
-        </p:spPr>
-        <p:txBody>
-          <a:bodyPr wrap="square" lIns="0" tIns="0" rIns="0" bIns="0" rtlCol="0" anchor="ctr"/>
-          <a:lstStyle/>
-          <a:p>
-            <a:pPr algn="ctr" indent="0" marL="0">
-              <a:buNone/>
-            </a:pPr>
-            <a:r>
-              <a:rPr lang="en-US" sz="1400" b="1" dirty="0">
-                <a:solidFill>
-                  <a:srgbClr val="FFFFFF"/>
-                </a:solidFill>
-                <a:latin typeface="Yu Gothic" pitchFamily="34" charset="0"/>
-                <a:ea typeface="Yu Gothic" pitchFamily="34" charset="-122"/>
-                <a:cs typeface="Yu Gothic" pitchFamily="34" charset="-120"/>
-              </a:rPr>
-              <a:t>2</a:t>
-            </a:r>
-            <a:endParaRPr lang="en-US" sz="1400" dirty="0"/>
+            <a:off x="5056632" y="4873752"/>
+            <a:ext cx="1956816" cy="237744"/>
+          </a:xfrm>
+          <a:prstGeom prst="rect">
+            <a:avLst/>
+          </a:prstGeom>
+          <a:noFill/>
+          <a:ln/>
+        </p:spPr>
+        <p:txBody>
+          <a:bodyPr wrap="square" lIns="0" tIns="0" rIns="0" bIns="0" rtlCol="0" anchor="ctr"/>
+          <a:lstStyle/>
+          <a:p>
+            <a:pPr indent="0" marL="0">
+              <a:buNone/>
+            </a:pPr>
+            <a:r>
+              <a:rPr lang="en-US" sz="900" b="1" dirty="0">
+                <a:solidFill>
+                  <a:srgbClr val="B04A2F"/>
+                </a:solidFill>
+                <a:latin typeface="Yu Gothic" pitchFamily="34" charset="0"/>
+                <a:ea typeface="Yu Gothic" pitchFamily="34" charset="-122"/>
+                <a:cs typeface="Yu Gothic" pitchFamily="34" charset="-120"/>
+              </a:rPr>
+              <a:t>35-90分</a:t>
+            </a:r>
+            <a:endParaRPr lang="en-US" sz="900" dirty="0"/>
           </a:p>
         </p:txBody>
       </p:sp>
@@ -2722,24 +4366,24 @@
         </p:nvSpPr>
         <p:spPr>
           <a:xfrm>
-            <a:off x="1645920" y="3188208"/>
-            <a:ext cx="3394253" cy="984504"/>
-          </a:xfrm>
-          <a:prstGeom prst="rect">
-            <a:avLst/>
-          </a:prstGeom>
-          <a:noFill/>
-          <a:ln/>
-        </p:spPr>
-        <p:txBody>
-          <a:bodyPr wrap="square" lIns="0" tIns="0" rIns="0" bIns="0" rtlCol="0" anchor="ctr"/>
-          <a:lstStyle/>
-          <a:p>
-            <a:pPr indent="0" marL="0">
-              <a:buNone/>
-            </a:pPr>
-            <a:r>
-              <a:rPr lang="en-US" sz="1500" b="1" dirty="0">
+            <a:off x="5056632" y="5111496"/>
+            <a:ext cx="1956816" cy="384048"/>
+          </a:xfrm>
+          <a:prstGeom prst="rect">
+            <a:avLst/>
+          </a:prstGeom>
+          <a:noFill/>
+          <a:ln/>
+        </p:spPr>
+        <p:txBody>
+          <a:bodyPr wrap="square" lIns="0" tIns="0" rIns="0" bIns="0" rtlCol="0" anchor="ctr"/>
+          <a:lstStyle/>
+          <a:p>
+            <a:pPr indent="0" marL="0">
+              <a:buNone/>
+            </a:pPr>
+            <a:r>
+              <a:rPr lang="en-US" sz="1100" dirty="0">
                 <a:solidFill>
                   <a:srgbClr val="23201D"/>
                 </a:solidFill>
@@ -2747,9 +4391,9 @@
                 <a:ea typeface="Yu Gothic" pitchFamily="34" charset="-122"/>
                 <a:cs typeface="Yu Gothic" pitchFamily="34" charset="-120"/>
               </a:rPr>
-              <a:t>誤りの増幅</a:t>
-            </a:r>
-            <a:endParaRPr lang="en-US" sz="1500" dirty="0"/>
+              <a:t>一緒に手を動かす</a:t>
+            </a:r>
+            <a:endParaRPr lang="en-US" sz="1100" dirty="0"/>
           </a:p>
         </p:txBody>
       </p:sp>
@@ -2761,89 +4405,114 @@
         </p:nvSpPr>
         <p:spPr>
           <a:xfrm>
-            <a:off x="5146243" y="3188208"/>
-            <a:ext cx="5963717" cy="984504"/>
-          </a:xfrm>
-          <a:prstGeom prst="rect">
-            <a:avLst/>
-          </a:prstGeom>
-          <a:noFill/>
-          <a:ln/>
-        </p:spPr>
-        <p:txBody>
-          <a:bodyPr wrap="square" lIns="0" tIns="0" rIns="0" bIns="0" rtlCol="0" anchor="ctr"/>
-          <a:lstStyle/>
-          <a:p>
-            <a:pPr indent="0" marL="0">
-              <a:lnSpc>
-                <a:spcPct val="130000"/>
-              </a:lnSpc>
-              <a:buNone/>
-            </a:pPr>
-            <a:r>
-              <a:rPr lang="en-US" sz="1250" dirty="0">
-                <a:solidFill>
-                  <a:srgbClr val="5A534A"/>
-                </a:solidFill>
-                <a:latin typeface="Yu Gothic" pitchFamily="34" charset="0"/>
-                <a:ea typeface="Yu Gothic" pitchFamily="34" charset="-122"/>
-                <a:cs typeface="Yu Gothic" pitchFamily="34" charset="-120"/>
-              </a:rPr>
-              <a:t>工程1の小さな誤りが、最後に致命傷になります</a:t>
-            </a:r>
-            <a:endParaRPr lang="en-US" sz="1250" dirty="0"/>
-          </a:p>
-        </p:txBody>
-      </p:sp>
-      <p:sp>
-        <p:nvSpPr>
-          <p:cNvPr id="14" name="Shape 12"/>
-          <p:cNvSpPr/>
-          <p:nvPr/>
-        </p:nvSpPr>
-        <p:spPr>
-          <a:xfrm>
-            <a:off x="777240" y="4410456"/>
-            <a:ext cx="10607040" cy="1167384"/>
-          </a:xfrm>
-          <a:prstGeom prst="rect">
-            <a:avLst/>
-          </a:prstGeom>
-          <a:solidFill>
-            <a:srgbClr val="FFFFFF"/>
-          </a:solidFill>
-          <a:ln w="12700">
-            <a:solidFill>
-              <a:srgbClr val="EDE7DB"/>
-            </a:solidFill>
-            <a:prstDash val="solid"/>
-          </a:ln>
-        </p:spPr>
-      </p:sp>
-      <p:sp>
-        <p:nvSpPr>
-          <p:cNvPr id="15" name="Shape 13"/>
-          <p:cNvSpPr/>
-          <p:nvPr/>
-        </p:nvSpPr>
-        <p:spPr>
-          <a:xfrm>
-            <a:off x="1033272" y="4802124"/>
-            <a:ext cx="384048" cy="384048"/>
-          </a:xfrm>
-          <a:prstGeom prst="ellipse">
-            <a:avLst/>
-          </a:prstGeom>
-          <a:solidFill>
-            <a:srgbClr val="B04A2F"/>
-          </a:solidFill>
-          <a:ln w="12700">
-            <a:solidFill>
-              <a:srgbClr val="B04A2F"/>
-            </a:solidFill>
-            <a:prstDash val="solid"/>
-          </a:ln>
-        </p:spPr>
+            <a:off x="7104888" y="4873752"/>
+            <a:ext cx="1956816" cy="237744"/>
+          </a:xfrm>
+          <a:prstGeom prst="rect">
+            <a:avLst/>
+          </a:prstGeom>
+          <a:noFill/>
+          <a:ln/>
+        </p:spPr>
+        <p:txBody>
+          <a:bodyPr wrap="square" lIns="0" tIns="0" rIns="0" bIns="0" rtlCol="0" anchor="ctr"/>
+          <a:lstStyle/>
+          <a:p>
+            <a:pPr indent="0" marL="0">
+              <a:buNone/>
+            </a:pPr>
+            <a:r>
+              <a:rPr lang="en-US" sz="900" b="1" dirty="0">
+                <a:solidFill>
+                  <a:srgbClr val="B04A2F"/>
+                </a:solidFill>
+                <a:latin typeface="Yu Gothic" pitchFamily="34" charset="0"/>
+                <a:ea typeface="Yu Gothic" pitchFamily="34" charset="-122"/>
+                <a:cs typeface="Yu Gothic" pitchFamily="34" charset="-120"/>
+              </a:rPr>
+              <a:t>90-105分</a:t>
+            </a:r>
+            <a:endParaRPr lang="en-US" sz="900" dirty="0"/>
+          </a:p>
+        </p:txBody>
+      </p:sp>
+      <p:sp>
+        <p:nvSpPr>
+          <p:cNvPr id="14" name="Text 12"/>
+          <p:cNvSpPr txBox="1"/>
+          <p:nvPr/>
+        </p:nvSpPr>
+        <p:spPr>
+          <a:xfrm>
+            <a:off x="7104888" y="5111496"/>
+            <a:ext cx="1956816" cy="384048"/>
+          </a:xfrm>
+          <a:prstGeom prst="rect">
+            <a:avLst/>
+          </a:prstGeom>
+          <a:noFill/>
+          <a:ln/>
+        </p:spPr>
+        <p:txBody>
+          <a:bodyPr wrap="square" lIns="0" tIns="0" rIns="0" bIns="0" rtlCol="0" anchor="ctr"/>
+          <a:lstStyle/>
+          <a:p>
+            <a:pPr indent="0" marL="0">
+              <a:buNone/>
+            </a:pPr>
+            <a:r>
+              <a:rPr lang="en-US" sz="1100" dirty="0">
+                <a:solidFill>
+                  <a:srgbClr val="23201D"/>
+                </a:solidFill>
+                <a:latin typeface="Yu Gothic" pitchFamily="34" charset="0"/>
+                <a:ea typeface="Yu Gothic" pitchFamily="34" charset="-122"/>
+                <a:cs typeface="Yu Gothic" pitchFamily="34" charset="-120"/>
+              </a:rPr>
+              <a:t>業務への組み込み</a:t>
+            </a:r>
+            <a:endParaRPr lang="en-US" sz="1100" dirty="0"/>
+          </a:p>
+        </p:txBody>
+      </p:sp>
+      <p:sp>
+        <p:nvSpPr>
+          <p:cNvPr id="15" name="Text 13"/>
+          <p:cNvSpPr txBox="1"/>
+          <p:nvPr/>
+        </p:nvSpPr>
+        <p:spPr>
+          <a:xfrm>
+            <a:off x="9153144" y="4873752"/>
+            <a:ext cx="1956816" cy="237744"/>
+          </a:xfrm>
+          <a:prstGeom prst="rect">
+            <a:avLst/>
+          </a:prstGeom>
+          <a:noFill/>
+          <a:ln/>
+        </p:spPr>
+        <p:txBody>
+          <a:bodyPr wrap="square" lIns="0" tIns="0" rIns="0" bIns="0" rtlCol="0" anchor="ctr"/>
+          <a:lstStyle/>
+          <a:p>
+            <a:pPr indent="0" marL="0">
+              <a:buNone/>
+            </a:pPr>
+            <a:r>
+              <a:rPr lang="en-US" sz="900" b="1" dirty="0">
+                <a:solidFill>
+                  <a:srgbClr val="B04A2F"/>
+                </a:solidFill>
+                <a:latin typeface="Yu Gothic" pitchFamily="34" charset="0"/>
+                <a:ea typeface="Yu Gothic" pitchFamily="34" charset="-122"/>
+                <a:cs typeface="Yu Gothic" pitchFamily="34" charset="-120"/>
+              </a:rPr>
+              <a:t>105-120分</a:t>
+            </a:r>
+            <a:endParaRPr lang="en-US" sz="900" dirty="0"/>
+          </a:p>
+        </p:txBody>
       </p:sp>
       <p:sp>
         <p:nvSpPr>
@@ -2853,34 +4522,34 @@
         </p:nvSpPr>
         <p:spPr>
           <a:xfrm>
-            <a:off x="1033272" y="4802124"/>
-            <a:ext cx="384048" cy="384048"/>
-          </a:xfrm>
-          <a:prstGeom prst="rect">
-            <a:avLst/>
-          </a:prstGeom>
-          <a:noFill/>
-          <a:ln/>
-        </p:spPr>
-        <p:txBody>
-          <a:bodyPr wrap="square" lIns="0" tIns="0" rIns="0" bIns="0" rtlCol="0" anchor="ctr"/>
-          <a:lstStyle/>
-          <a:p>
-            <a:pPr algn="ctr" indent="0" marL="0">
-              <a:buNone/>
-            </a:pPr>
-            <a:r>
-              <a:rPr lang="en-US" sz="1400" b="1" dirty="0">
-                <a:solidFill>
-                  <a:srgbClr val="FFFFFF"/>
-                </a:solidFill>
-                <a:latin typeface="Yu Gothic" pitchFamily="34" charset="0"/>
-                <a:ea typeface="Yu Gothic" pitchFamily="34" charset="-122"/>
-                <a:cs typeface="Yu Gothic" pitchFamily="34" charset="-120"/>
-              </a:rPr>
-              <a:t>3</a:t>
-            </a:r>
-            <a:endParaRPr lang="en-US" sz="1400" dirty="0"/>
+            <a:off x="9153144" y="5111496"/>
+            <a:ext cx="1956816" cy="384048"/>
+          </a:xfrm>
+          <a:prstGeom prst="rect">
+            <a:avLst/>
+          </a:prstGeom>
+          <a:noFill/>
+          <a:ln/>
+        </p:spPr>
+        <p:txBody>
+          <a:bodyPr wrap="square" lIns="0" tIns="0" rIns="0" bIns="0" rtlCol="0" anchor="ctr"/>
+          <a:lstStyle/>
+          <a:p>
+            <a:pPr indent="0" marL="0">
+              <a:buNone/>
+            </a:pPr>
+            <a:r>
+              <a:rPr lang="en-US" sz="1100" dirty="0">
+                <a:solidFill>
+                  <a:srgbClr val="23201D"/>
+                </a:solidFill>
+                <a:latin typeface="Yu Gothic" pitchFamily="34" charset="0"/>
+                <a:ea typeface="Yu Gothic" pitchFamily="34" charset="-122"/>
+                <a:cs typeface="Yu Gothic" pitchFamily="34" charset="-120"/>
+              </a:rPr>
+              <a:t>宿題・記録</a:t>
+            </a:r>
+            <a:endParaRPr lang="en-US" sz="1100" dirty="0"/>
           </a:p>
         </p:txBody>
       </p:sp>
@@ -2892,34 +4561,34 @@
         </p:nvSpPr>
         <p:spPr>
           <a:xfrm>
-            <a:off x="1645920" y="4501896"/>
-            <a:ext cx="3394253" cy="984504"/>
-          </a:xfrm>
-          <a:prstGeom prst="rect">
-            <a:avLst/>
-          </a:prstGeom>
-          <a:noFill/>
-          <a:ln/>
-        </p:spPr>
-        <p:txBody>
-          <a:bodyPr wrap="square" lIns="0" tIns="0" rIns="0" bIns="0" rtlCol="0" anchor="ctr"/>
-          <a:lstStyle/>
-          <a:p>
-            <a:pPr indent="0" marL="0">
-              <a:buNone/>
-            </a:pPr>
-            <a:r>
-              <a:rPr lang="en-US" sz="1500" b="1" dirty="0">
-                <a:solidFill>
-                  <a:srgbClr val="23201D"/>
-                </a:solidFill>
-                <a:latin typeface="Yu Gothic" pitchFamily="34" charset="0"/>
-                <a:ea typeface="Yu Gothic" pitchFamily="34" charset="-122"/>
-                <a:cs typeface="Yu Gothic" pitchFamily="34" charset="-120"/>
-              </a:rPr>
-              <a:t>勝手な範囲拡大</a:t>
-            </a:r>
-            <a:endParaRPr lang="en-US" sz="1500" dirty="0"/>
+            <a:off x="777240" y="6382512"/>
+            <a:ext cx="7424928" cy="256032"/>
+          </a:xfrm>
+          <a:prstGeom prst="rect">
+            <a:avLst/>
+          </a:prstGeom>
+          <a:noFill/>
+          <a:ln/>
+        </p:spPr>
+        <p:txBody>
+          <a:bodyPr wrap="square" lIns="0" tIns="0" rIns="0" bIns="0" rtlCol="0" anchor="ctr"/>
+          <a:lstStyle/>
+          <a:p>
+            <a:pPr indent="0" marL="0">
+              <a:buNone/>
+            </a:pPr>
+            <a:r>
+              <a:rPr lang="en-US" sz="900" dirty="0">
+                <a:solidFill>
+                  <a:srgbClr val="8A8177"/>
+                </a:solidFill>
+                <a:latin typeface="Yu Gothic" pitchFamily="34" charset="0"/>
+                <a:ea typeface="Yu Gothic" pitchFamily="34" charset="-122"/>
+                <a:cs typeface="Yu Gothic" pitchFamily="34" charset="-120"/>
+              </a:rPr>
+              <a:t>第9回　複数の工程をまとめて任せる</a:t>
+            </a:r>
+            <a:endParaRPr lang="en-US" sz="900" dirty="0"/>
           </a:p>
         </p:txBody>
       </p:sp>
@@ -2931,101 +4600,20 @@
         </p:nvSpPr>
         <p:spPr>
           <a:xfrm>
-            <a:off x="5146243" y="4501896"/>
-            <a:ext cx="5963717" cy="984504"/>
-          </a:xfrm>
-          <a:prstGeom prst="rect">
-            <a:avLst/>
-          </a:prstGeom>
-          <a:noFill/>
-          <a:ln/>
-        </p:spPr>
-        <p:txBody>
-          <a:bodyPr wrap="square" lIns="0" tIns="0" rIns="0" bIns="0" rtlCol="0" anchor="ctr"/>
-          <a:lstStyle/>
-          <a:p>
-            <a:pPr indent="0" marL="0">
-              <a:lnSpc>
-                <a:spcPct val="130000"/>
-              </a:lnSpc>
-              <a:buNone/>
-            </a:pPr>
-            <a:r>
-              <a:rPr lang="en-US" sz="1250" dirty="0">
-                <a:solidFill>
-                  <a:srgbClr val="5A534A"/>
-                </a:solidFill>
-                <a:latin typeface="Yu Gothic" pitchFamily="34" charset="0"/>
-                <a:ea typeface="Yu Gothic" pitchFamily="34" charset="-122"/>
-                <a:cs typeface="Yu Gothic" pitchFamily="34" charset="-120"/>
-              </a:rPr>
-              <a:t>頼んでいないことまでやります</a:t>
-            </a:r>
-            <a:endParaRPr lang="en-US" sz="1250" dirty="0"/>
-          </a:p>
-        </p:txBody>
-      </p:sp>
-      <p:sp>
-        <p:nvSpPr>
-          <p:cNvPr id="19" name="Text 17"/>
-          <p:cNvSpPr txBox="1"/>
-          <p:nvPr/>
-        </p:nvSpPr>
-        <p:spPr>
-          <a:xfrm>
-            <a:off x="777240" y="5715000"/>
-            <a:ext cx="10607040" cy="457200"/>
-          </a:xfrm>
-          <a:prstGeom prst="rect">
-            <a:avLst/>
-          </a:prstGeom>
-          <a:noFill/>
-          <a:ln/>
-        </p:spPr>
-        <p:txBody>
-          <a:bodyPr wrap="square" lIns="0" tIns="0" rIns="0" bIns="0" rtlCol="0" anchor="ctr"/>
-          <a:lstStyle/>
-          <a:p>
-            <a:pPr indent="0" marL="0">
-              <a:buNone/>
-            </a:pPr>
-            <a:r>
-              <a:rPr lang="en-US" sz="1200" b="1" dirty="0">
-                <a:solidFill>
-                  <a:srgbClr val="B04A2F"/>
-                </a:solidFill>
-                <a:latin typeface="Yu Gothic" pitchFamily="34" charset="0"/>
-                <a:ea typeface="Yu Gothic" pitchFamily="34" charset="-122"/>
-                <a:cs typeface="Yu Gothic" pitchFamily="34" charset="-120"/>
-              </a:rPr>
-              <a:t>新人に3つの仕事をまとめて任せたときに起きることと、まったく同じです。</a:t>
-            </a:r>
-            <a:endParaRPr lang="en-US" sz="1200" dirty="0"/>
-          </a:p>
-        </p:txBody>
-      </p:sp>
-      <p:sp>
-        <p:nvSpPr>
-          <p:cNvPr id="20" name="Text 18"/>
-          <p:cNvSpPr txBox="1"/>
-          <p:nvPr/>
-        </p:nvSpPr>
-        <p:spPr>
-          <a:xfrm>
-            <a:off x="777240" y="6355080"/>
-            <a:ext cx="7424928" cy="274320"/>
-          </a:xfrm>
-          <a:prstGeom prst="rect">
-            <a:avLst/>
-          </a:prstGeom>
-          <a:noFill/>
-          <a:ln/>
-        </p:spPr>
-        <p:txBody>
-          <a:bodyPr wrap="square" lIns="0" tIns="0" rIns="0" bIns="0" rtlCol="0" anchor="ctr"/>
-          <a:lstStyle/>
-          <a:p>
-            <a:pPr indent="0" marL="0">
+            <a:off x="8202168" y="6382512"/>
+            <a:ext cx="3182112" cy="256032"/>
+          </a:xfrm>
+          <a:prstGeom prst="rect">
+            <a:avLst/>
+          </a:prstGeom>
+          <a:noFill/>
+          <a:ln/>
+        </p:spPr>
+        <p:txBody>
+          <a:bodyPr wrap="square" lIns="0" tIns="0" rIns="0" bIns="0" rtlCol="0" anchor="ctr"/>
+          <a:lstStyle/>
+          <a:p>
+            <a:pPr algn="r" indent="0" marL="0">
               <a:buNone/>
             </a:pPr>
             <a:r>
@@ -3037,46 +4625,7 @@
                 <a:ea typeface="Yu Gothic" pitchFamily="34" charset="-122"/>
                 <a:cs typeface="Yu Gothic" pitchFamily="34" charset="-120"/>
               </a:rPr>
-              <a:t>第9回　複数の工程をまとめて任せる</a:t>
-            </a:r>
-            <a:endParaRPr lang="en-US" sz="900" dirty="0"/>
-          </a:p>
-        </p:txBody>
-      </p:sp>
-      <p:sp>
-        <p:nvSpPr>
-          <p:cNvPr id="21" name="Text 19"/>
-          <p:cNvSpPr txBox="1"/>
-          <p:nvPr/>
-        </p:nvSpPr>
-        <p:spPr>
-          <a:xfrm>
-            <a:off x="8202168" y="6355080"/>
-            <a:ext cx="3182112" cy="274320"/>
-          </a:xfrm>
-          <a:prstGeom prst="rect">
-            <a:avLst/>
-          </a:prstGeom>
-          <a:noFill/>
-          <a:ln/>
-        </p:spPr>
-        <p:txBody>
-          <a:bodyPr wrap="square" lIns="0" tIns="0" rIns="0" bIns="0" rtlCol="0" anchor="ctr"/>
-          <a:lstStyle/>
-          <a:p>
-            <a:pPr algn="r" indent="0" marL="0">
-              <a:buNone/>
-            </a:pPr>
-            <a:r>
-              <a:rPr lang="en-US" sz="900" dirty="0">
-                <a:solidFill>
-                  <a:srgbClr val="8A8177"/>
-                </a:solidFill>
-                <a:latin typeface="Yu Gothic" pitchFamily="34" charset="0"/>
-                <a:ea typeface="Yu Gothic" pitchFamily="34" charset="-122"/>
-                <a:cs typeface="Yu Gothic" pitchFamily="34" charset="-120"/>
-              </a:rPr>
-              <a:t>考え方</a:t>
+              <a:t>ゴール</a:t>
             </a:r>
             <a:endParaRPr lang="en-US" sz="900" dirty="0"/>
           </a:p>
@@ -3122,7 +4671,7 @@
         </p:nvSpPr>
         <p:spPr>
           <a:xfrm>
-            <a:off x="777240" y="640080"/>
+            <a:off x="777240" y="566928"/>
             <a:ext cx="10607040" cy="274320"/>
           </a:xfrm>
           <a:prstGeom prst="rect">
@@ -3147,7 +4696,7 @@
                 <a:ea typeface="Yu Gothic" pitchFamily="34" charset="-122"/>
                 <a:cs typeface="Yu Gothic" pitchFamily="34" charset="-120"/>
               </a:rPr>
-              <a:t>実演</a:t>
+              <a:t>考え方</a:t>
             </a:r>
             <a:endParaRPr lang="en-US" sz="1100" dirty="0"/>
           </a:p>
@@ -3161,7 +4710,7 @@
         </p:nvSpPr>
         <p:spPr>
           <a:xfrm>
-            <a:off x="777240" y="960120"/>
+            <a:off x="777240" y="896112"/>
             <a:ext cx="10607040" cy="640080"/>
           </a:xfrm>
           <a:prstGeom prst="rect">
@@ -3178,7 +4727,7 @@
               <a:buNone/>
             </a:pPr>
             <a:r>
-              <a:rPr lang="en-US" sz="2700" b="1" dirty="0">
+              <a:rPr lang="en-US" sz="2600" b="1" dirty="0">
                 <a:solidFill>
                   <a:srgbClr val="23201D"/>
                 </a:solidFill>
@@ -3186,9 +4735,9 @@
                 <a:ea typeface="Yu Gothic" pitchFamily="34" charset="-122"/>
                 <a:cs typeface="Yu Gothic" pitchFamily="34" charset="-120"/>
               </a:rPr>
-              <a:t>人の確認は、どこに置くか</a:t>
-            </a:r>
-            <a:endParaRPr lang="en-US" sz="2700" dirty="0"/>
+              <a:t>多工程は、3通りの壊れ方をします</a:t>
+            </a:r>
+            <a:endParaRPr lang="en-US" sz="2600" dirty="0"/>
           </a:p>
         </p:txBody>
       </p:sp>
@@ -3200,18 +4749,18 @@
         </p:nvSpPr>
         <p:spPr>
           <a:xfrm>
-            <a:off x="777240" y="1828800"/>
-            <a:ext cx="4983480" cy="3566160"/>
+            <a:off x="777240" y="1700784"/>
+            <a:ext cx="10607040" cy="1188720"/>
           </a:xfrm>
           <a:prstGeom prst="rect">
             <a:avLst/>
           </a:prstGeom>
           <a:solidFill>
-            <a:srgbClr val="EDE7DB"/>
+            <a:srgbClr val="FFFFFF"/>
           </a:solidFill>
-          <a:ln w="15875">
+          <a:ln w="12700">
             <a:solidFill>
-              <a:srgbClr val="8A8177"/>
+              <a:srgbClr val="EDE7DB"/>
             </a:solidFill>
             <a:prstDash val="solid"/>
           </a:ln>
@@ -3225,455 +4774,8 @@
         </p:nvSpPr>
         <p:spPr>
           <a:xfrm>
-            <a:off x="777240" y="1828800"/>
-            <a:ext cx="4983480" cy="566928"/>
-          </a:xfrm>
-          <a:prstGeom prst="rect">
-            <a:avLst/>
-          </a:prstGeom>
-          <a:solidFill>
-            <a:srgbClr val="8A8177"/>
-          </a:solidFill>
-          <a:ln w="12700">
-            <a:solidFill>
-              <a:srgbClr val="333333"/>
-            </a:solidFill>
-            <a:prstDash val="solid"/>
-          </a:ln>
-        </p:spPr>
-      </p:sp>
-      <p:sp>
-        <p:nvSpPr>
-          <p:cNvPr id="6" name="Text 4"/>
-          <p:cNvSpPr txBox="1"/>
-          <p:nvPr/>
-        </p:nvSpPr>
-        <p:spPr>
-          <a:xfrm>
-            <a:off x="1005840" y="1883664"/>
-            <a:ext cx="4526280" cy="457200"/>
-          </a:xfrm>
-          <a:prstGeom prst="rect">
-            <a:avLst/>
-          </a:prstGeom>
-          <a:noFill/>
-          <a:ln/>
-        </p:spPr>
-        <p:txBody>
-          <a:bodyPr wrap="square" lIns="0" tIns="0" rIns="0" bIns="0" rtlCol="0" anchor="ctr"/>
-          <a:lstStyle/>
-          <a:p>
-            <a:pPr indent="0" marL="0">
-              <a:buNone/>
-            </a:pPr>
-            <a:r>
-              <a:rPr lang="en-US" sz="1400" b="1" dirty="0">
-                <a:solidFill>
-                  <a:srgbClr val="FFFFFF"/>
-                </a:solidFill>
-                <a:latin typeface="Yu Gothic" pitchFamily="34" charset="0"/>
-                <a:ea typeface="Yu Gothic" pitchFamily="34" charset="-122"/>
-                <a:cs typeface="Yu Gothic" pitchFamily="34" charset="-120"/>
-              </a:rPr>
-              <a:t>よくある置き方</a:t>
-            </a:r>
-            <a:endParaRPr lang="en-US" sz="1400" dirty="0"/>
-          </a:p>
-        </p:txBody>
-      </p:sp>
-      <p:sp>
-        <p:nvSpPr>
-          <p:cNvPr id="7" name="Text 5"/>
-          <p:cNvSpPr txBox="1"/>
-          <p:nvPr/>
-        </p:nvSpPr>
-        <p:spPr>
-          <a:xfrm>
-            <a:off x="1097280" y="2606040"/>
-            <a:ext cx="4343400" cy="548640"/>
-          </a:xfrm>
-          <a:prstGeom prst="rect">
-            <a:avLst/>
-          </a:prstGeom>
-          <a:noFill/>
-          <a:ln/>
-        </p:spPr>
-        <p:txBody>
-          <a:bodyPr wrap="square" lIns="0" tIns="0" rIns="0" bIns="0" rtlCol="0" anchor="ctr"/>
-          <a:lstStyle/>
-          <a:p>
-            <a:pPr indent="0" marL="0">
-              <a:lnSpc>
-                <a:spcPct val="125000"/>
-              </a:lnSpc>
-              <a:buNone/>
-            </a:pPr>
-            <a:r>
-              <a:rPr lang="en-US" sz="1300" dirty="0">
-                <a:solidFill>
-                  <a:srgbClr val="23201D"/>
-                </a:solidFill>
-                <a:latin typeface="Yu Gothic" pitchFamily="34" charset="0"/>
-                <a:ea typeface="Yu Gothic" pitchFamily="34" charset="-122"/>
-                <a:cs typeface="Yu Gothic" pitchFamily="34" charset="-120"/>
-              </a:rPr>
-              <a:t>最後に、出てきたものを確認する</a:t>
-            </a:r>
-            <a:endParaRPr lang="en-US" sz="1300" dirty="0"/>
-          </a:p>
-        </p:txBody>
-      </p:sp>
-      <p:sp>
-        <p:nvSpPr>
-          <p:cNvPr id="8" name="Text 6"/>
-          <p:cNvSpPr txBox="1"/>
-          <p:nvPr/>
-        </p:nvSpPr>
-        <p:spPr>
-          <a:xfrm>
-            <a:off x="1097280" y="3172968"/>
-            <a:ext cx="4343400" cy="548640"/>
-          </a:xfrm>
-          <a:prstGeom prst="rect">
-            <a:avLst/>
-          </a:prstGeom>
-          <a:noFill/>
-          <a:ln/>
-        </p:spPr>
-        <p:txBody>
-          <a:bodyPr wrap="square" lIns="0" tIns="0" rIns="0" bIns="0" rtlCol="0" anchor="ctr"/>
-          <a:lstStyle/>
-          <a:p>
-            <a:pPr indent="0" marL="0">
-              <a:lnSpc>
-                <a:spcPct val="125000"/>
-              </a:lnSpc>
-              <a:buNone/>
-            </a:pPr>
-            <a:r>
-              <a:rPr lang="en-US" sz="1300" dirty="0">
-                <a:solidFill>
-                  <a:srgbClr val="23201D"/>
-                </a:solidFill>
-                <a:latin typeface="Yu Gothic" pitchFamily="34" charset="0"/>
-                <a:ea typeface="Yu Gothic" pitchFamily="34" charset="-122"/>
-                <a:cs typeface="Yu Gothic" pitchFamily="34" charset="-120"/>
-              </a:rPr>
-              <a:t>そこまでに誤りが増幅している</a:t>
-            </a:r>
-            <a:endParaRPr lang="en-US" sz="1300" dirty="0"/>
-          </a:p>
-        </p:txBody>
-      </p:sp>
-      <p:sp>
-        <p:nvSpPr>
-          <p:cNvPr id="9" name="Text 7"/>
-          <p:cNvSpPr txBox="1"/>
-          <p:nvPr/>
-        </p:nvSpPr>
-        <p:spPr>
-          <a:xfrm>
-            <a:off x="1097280" y="3739896"/>
-            <a:ext cx="4343400" cy="548640"/>
-          </a:xfrm>
-          <a:prstGeom prst="rect">
-            <a:avLst/>
-          </a:prstGeom>
-          <a:noFill/>
-          <a:ln/>
-        </p:spPr>
-        <p:txBody>
-          <a:bodyPr wrap="square" lIns="0" tIns="0" rIns="0" bIns="0" rtlCol="0" anchor="ctr"/>
-          <a:lstStyle/>
-          <a:p>
-            <a:pPr indent="0" marL="0">
-              <a:lnSpc>
-                <a:spcPct val="125000"/>
-              </a:lnSpc>
-              <a:buNone/>
-            </a:pPr>
-            <a:r>
-              <a:rPr lang="en-US" sz="1300" dirty="0">
-                <a:solidFill>
-                  <a:srgbClr val="23201D"/>
-                </a:solidFill>
-                <a:latin typeface="Yu Gothic" pitchFamily="34" charset="0"/>
-                <a:ea typeface="Yu Gothic" pitchFamily="34" charset="-122"/>
-                <a:cs typeface="Yu Gothic" pitchFamily="34" charset="-120"/>
-              </a:rPr>
-              <a:t>結局、全部やり直しになる</a:t>
-            </a:r>
-            <a:endParaRPr lang="en-US" sz="1300" dirty="0"/>
-          </a:p>
-        </p:txBody>
-      </p:sp>
-      <p:sp>
-        <p:nvSpPr>
-          <p:cNvPr id="10" name="Shape 8"/>
-          <p:cNvSpPr/>
-          <p:nvPr/>
-        </p:nvSpPr>
-        <p:spPr>
-          <a:xfrm>
-            <a:off x="6400800" y="1828800"/>
-            <a:ext cx="4983480" cy="3566160"/>
-          </a:xfrm>
-          <a:prstGeom prst="rect">
-            <a:avLst/>
-          </a:prstGeom>
-          <a:solidFill>
-            <a:srgbClr val="FFFFFF"/>
-          </a:solidFill>
-          <a:ln w="15875">
-            <a:solidFill>
-              <a:srgbClr val="3B6B4A"/>
-            </a:solidFill>
-            <a:prstDash val="solid"/>
-          </a:ln>
-        </p:spPr>
-      </p:sp>
-      <p:sp>
-        <p:nvSpPr>
-          <p:cNvPr id="11" name="Shape 9"/>
-          <p:cNvSpPr/>
-          <p:nvPr/>
-        </p:nvSpPr>
-        <p:spPr>
-          <a:xfrm>
-            <a:off x="6400800" y="1828800"/>
-            <a:ext cx="4983480" cy="566928"/>
-          </a:xfrm>
-          <a:prstGeom prst="rect">
-            <a:avLst/>
-          </a:prstGeom>
-          <a:solidFill>
-            <a:srgbClr val="3B6B4A"/>
-          </a:solidFill>
-          <a:ln w="12700">
-            <a:solidFill>
-              <a:srgbClr val="333333"/>
-            </a:solidFill>
-            <a:prstDash val="solid"/>
-          </a:ln>
-        </p:spPr>
-      </p:sp>
-      <p:sp>
-        <p:nvSpPr>
-          <p:cNvPr id="12" name="Text 10"/>
-          <p:cNvSpPr txBox="1"/>
-          <p:nvPr/>
-        </p:nvSpPr>
-        <p:spPr>
-          <a:xfrm>
-            <a:off x="6629400" y="1883664"/>
-            <a:ext cx="4526280" cy="457200"/>
-          </a:xfrm>
-          <a:prstGeom prst="rect">
-            <a:avLst/>
-          </a:prstGeom>
-          <a:noFill/>
-          <a:ln/>
-        </p:spPr>
-        <p:txBody>
-          <a:bodyPr wrap="square" lIns="0" tIns="0" rIns="0" bIns="0" rtlCol="0" anchor="ctr"/>
-          <a:lstStyle/>
-          <a:p>
-            <a:pPr indent="0" marL="0">
-              <a:buNone/>
-            </a:pPr>
-            <a:r>
-              <a:rPr lang="en-US" sz="1400" b="1" dirty="0">
-                <a:solidFill>
-                  <a:srgbClr val="FFFFFF"/>
-                </a:solidFill>
-                <a:latin typeface="Yu Gothic" pitchFamily="34" charset="0"/>
-                <a:ea typeface="Yu Gothic" pitchFamily="34" charset="-122"/>
-                <a:cs typeface="Yu Gothic" pitchFamily="34" charset="-120"/>
-              </a:rPr>
-              <a:t>最も上流に置く</a:t>
-            </a:r>
-            <a:endParaRPr lang="en-US" sz="1400" dirty="0"/>
-          </a:p>
-        </p:txBody>
-      </p:sp>
-      <p:sp>
-        <p:nvSpPr>
-          <p:cNvPr id="13" name="Text 11"/>
-          <p:cNvSpPr txBox="1"/>
-          <p:nvPr/>
-        </p:nvSpPr>
-        <p:spPr>
-          <a:xfrm>
-            <a:off x="6720840" y="2606040"/>
-            <a:ext cx="4343400" cy="548640"/>
-          </a:xfrm>
-          <a:prstGeom prst="rect">
-            <a:avLst/>
-          </a:prstGeom>
-          <a:noFill/>
-          <a:ln/>
-        </p:spPr>
-        <p:txBody>
-          <a:bodyPr wrap="square" lIns="0" tIns="0" rIns="0" bIns="0" rtlCol="0" anchor="ctr"/>
-          <a:lstStyle/>
-          <a:p>
-            <a:pPr indent="0" marL="0">
-              <a:lnSpc>
-                <a:spcPct val="125000"/>
-              </a:lnSpc>
-              <a:buNone/>
-            </a:pPr>
-            <a:r>
-              <a:rPr lang="en-US" sz="1300" dirty="0">
-                <a:solidFill>
-                  <a:srgbClr val="23201D"/>
-                </a:solidFill>
-                <a:latin typeface="Yu Gothic" pitchFamily="34" charset="0"/>
-                <a:ea typeface="Yu Gothic" pitchFamily="34" charset="-122"/>
-                <a:cs typeface="Yu Gothic" pitchFamily="34" charset="-120"/>
-              </a:rPr>
-              <a:t>金額が確定する前</a:t>
-            </a:r>
-            <a:endParaRPr lang="en-US" sz="1300" dirty="0"/>
-          </a:p>
-        </p:txBody>
-      </p:sp>
-      <p:sp>
-        <p:nvSpPr>
-          <p:cNvPr id="14" name="Text 12"/>
-          <p:cNvSpPr txBox="1"/>
-          <p:nvPr/>
-        </p:nvSpPr>
-        <p:spPr>
-          <a:xfrm>
-            <a:off x="6720840" y="3172968"/>
-            <a:ext cx="4343400" cy="548640"/>
-          </a:xfrm>
-          <a:prstGeom prst="rect">
-            <a:avLst/>
-          </a:prstGeom>
-          <a:noFill/>
-          <a:ln/>
-        </p:spPr>
-        <p:txBody>
-          <a:bodyPr wrap="square" lIns="0" tIns="0" rIns="0" bIns="0" rtlCol="0" anchor="ctr"/>
-          <a:lstStyle/>
-          <a:p>
-            <a:pPr indent="0" marL="0">
-              <a:lnSpc>
-                <a:spcPct val="125000"/>
-              </a:lnSpc>
-              <a:buNone/>
-            </a:pPr>
-            <a:r>
-              <a:rPr lang="en-US" sz="1300" dirty="0">
-                <a:solidFill>
-                  <a:srgbClr val="23201D"/>
-                </a:solidFill>
-                <a:latin typeface="Yu Gothic" pitchFamily="34" charset="0"/>
-                <a:ea typeface="Yu Gothic" pitchFamily="34" charset="-122"/>
-                <a:cs typeface="Yu Gothic" pitchFamily="34" charset="-120"/>
-              </a:rPr>
-              <a:t>社外に出る前</a:t>
-            </a:r>
-            <a:endParaRPr lang="en-US" sz="1300" dirty="0"/>
-          </a:p>
-        </p:txBody>
-      </p:sp>
-      <p:sp>
-        <p:nvSpPr>
-          <p:cNvPr id="15" name="Text 13"/>
-          <p:cNvSpPr txBox="1"/>
-          <p:nvPr/>
-        </p:nvSpPr>
-        <p:spPr>
-          <a:xfrm>
-            <a:off x="6720840" y="3739896"/>
-            <a:ext cx="4343400" cy="548640"/>
-          </a:xfrm>
-          <a:prstGeom prst="rect">
-            <a:avLst/>
-          </a:prstGeom>
-          <a:noFill/>
-          <a:ln/>
-        </p:spPr>
-        <p:txBody>
-          <a:bodyPr wrap="square" lIns="0" tIns="0" rIns="0" bIns="0" rtlCol="0" anchor="ctr"/>
-          <a:lstStyle/>
-          <a:p>
-            <a:pPr indent="0" marL="0">
-              <a:lnSpc>
-                <a:spcPct val="125000"/>
-              </a:lnSpc>
-              <a:buNone/>
-            </a:pPr>
-            <a:r>
-              <a:rPr lang="en-US" sz="1300" dirty="0">
-                <a:solidFill>
-                  <a:srgbClr val="23201D"/>
-                </a:solidFill>
-                <a:latin typeface="Yu Gothic" pitchFamily="34" charset="0"/>
-                <a:ea typeface="Yu Gothic" pitchFamily="34" charset="-122"/>
-                <a:cs typeface="Yu Gothic" pitchFamily="34" charset="-120"/>
-              </a:rPr>
-              <a:t>取り消せない操作の前</a:t>
-            </a:r>
-            <a:endParaRPr lang="en-US" sz="1300" dirty="0"/>
-          </a:p>
-        </p:txBody>
-      </p:sp>
-      <p:sp>
-        <p:nvSpPr>
-          <p:cNvPr id="16" name="Text 14"/>
-          <p:cNvSpPr txBox="1"/>
-          <p:nvPr/>
-        </p:nvSpPr>
-        <p:spPr>
-          <a:xfrm>
-            <a:off x="6720840" y="4306824"/>
-            <a:ext cx="4343400" cy="548640"/>
-          </a:xfrm>
-          <a:prstGeom prst="rect">
-            <a:avLst/>
-          </a:prstGeom>
-          <a:noFill/>
-          <a:ln/>
-        </p:spPr>
-        <p:txBody>
-          <a:bodyPr wrap="square" lIns="0" tIns="0" rIns="0" bIns="0" rtlCol="0" anchor="ctr"/>
-          <a:lstStyle/>
-          <a:p>
-            <a:pPr indent="0" marL="0">
-              <a:lnSpc>
-                <a:spcPct val="125000"/>
-              </a:lnSpc>
-              <a:buNone/>
-            </a:pPr>
-            <a:r>
-              <a:rPr lang="en-US" sz="1300" dirty="0">
-                <a:solidFill>
-                  <a:srgbClr val="23201D"/>
-                </a:solidFill>
-                <a:latin typeface="Yu Gothic" pitchFamily="34" charset="0"/>
-                <a:ea typeface="Yu Gothic" pitchFamily="34" charset="-122"/>
-                <a:cs typeface="Yu Gothic" pitchFamily="34" charset="-120"/>
-              </a:rPr>
-              <a:t>各工程に「やらないこと」も明記します</a:t>
-            </a:r>
-            <a:endParaRPr lang="en-US" sz="1300" dirty="0"/>
-          </a:p>
-        </p:txBody>
-      </p:sp>
-      <p:sp>
-        <p:nvSpPr>
-          <p:cNvPr id="17" name="Shape 15"/>
-          <p:cNvSpPr/>
-          <p:nvPr/>
-        </p:nvSpPr>
-        <p:spPr>
-          <a:xfrm>
-            <a:off x="5815584" y="3337560"/>
-            <a:ext cx="512064" cy="512064"/>
+            <a:off x="1014984" y="2112264"/>
+            <a:ext cx="365760" cy="365760"/>
           </a:xfrm>
           <a:prstGeom prst="ellipse">
             <a:avLst/>
@@ -3691,40 +4793,461 @@
       </p:sp>
       <p:sp>
         <p:nvSpPr>
+          <p:cNvPr id="6" name="Text 4"/>
+          <p:cNvSpPr txBox="1"/>
+          <p:nvPr/>
+        </p:nvSpPr>
+        <p:spPr>
+          <a:xfrm>
+            <a:off x="1014984" y="2112264"/>
+            <a:ext cx="365760" cy="365760"/>
+          </a:xfrm>
+          <a:prstGeom prst="rect">
+            <a:avLst/>
+          </a:prstGeom>
+          <a:noFill/>
+          <a:ln/>
+        </p:spPr>
+        <p:txBody>
+          <a:bodyPr wrap="square" lIns="0" tIns="0" rIns="0" bIns="0" rtlCol="0" anchor="ctr"/>
+          <a:lstStyle/>
+          <a:p>
+            <a:pPr algn="ctr" indent="0" marL="0">
+              <a:buNone/>
+            </a:pPr>
+            <a:r>
+              <a:rPr lang="en-US" sz="1300" b="1" dirty="0">
+                <a:solidFill>
+                  <a:srgbClr val="FFFFFF"/>
+                </a:solidFill>
+                <a:latin typeface="Yu Gothic" pitchFamily="34" charset="0"/>
+                <a:ea typeface="Yu Gothic" pitchFamily="34" charset="-122"/>
+                <a:cs typeface="Yu Gothic" pitchFamily="34" charset="-120"/>
+              </a:rPr>
+              <a:t>1</a:t>
+            </a:r>
+            <a:endParaRPr lang="en-US" sz="1300" dirty="0"/>
+          </a:p>
+        </p:txBody>
+      </p:sp>
+      <p:sp>
+        <p:nvSpPr>
+          <p:cNvPr id="7" name="Text 5"/>
+          <p:cNvSpPr txBox="1"/>
+          <p:nvPr/>
+        </p:nvSpPr>
+        <p:spPr>
+          <a:xfrm>
+            <a:off x="1600200" y="1773936"/>
+            <a:ext cx="3182112" cy="1042416"/>
+          </a:xfrm>
+          <a:prstGeom prst="rect">
+            <a:avLst/>
+          </a:prstGeom>
+          <a:noFill/>
+          <a:ln/>
+        </p:spPr>
+        <p:txBody>
+          <a:bodyPr wrap="square" lIns="0" tIns="0" rIns="0" bIns="0" rtlCol="0" anchor="ctr"/>
+          <a:lstStyle/>
+          <a:p>
+            <a:pPr indent="0" marL="0">
+              <a:buNone/>
+            </a:pPr>
+            <a:r>
+              <a:rPr lang="en-US" sz="1450" b="1" dirty="0">
+                <a:solidFill>
+                  <a:srgbClr val="23201D"/>
+                </a:solidFill>
+                <a:latin typeface="Yu Gothic" pitchFamily="34" charset="0"/>
+                <a:ea typeface="Yu Gothic" pitchFamily="34" charset="-122"/>
+                <a:cs typeface="Yu Gothic" pitchFamily="34" charset="-120"/>
+              </a:rPr>
+              <a:t>前提の引き継ぎ漏れ</a:t>
+            </a:r>
+            <a:endParaRPr lang="en-US" sz="1450" dirty="0"/>
+          </a:p>
+        </p:txBody>
+      </p:sp>
+      <p:sp>
+        <p:nvSpPr>
+          <p:cNvPr id="8" name="Text 6"/>
+          <p:cNvSpPr txBox="1"/>
+          <p:nvPr/>
+        </p:nvSpPr>
+        <p:spPr>
+          <a:xfrm>
+            <a:off x="4888382" y="1773936"/>
+            <a:ext cx="6267298" cy="1042416"/>
+          </a:xfrm>
+          <a:prstGeom prst="rect">
+            <a:avLst/>
+          </a:prstGeom>
+          <a:noFill/>
+          <a:ln/>
+        </p:spPr>
+        <p:txBody>
+          <a:bodyPr wrap="square" lIns="0" tIns="0" rIns="0" bIns="0" rtlCol="0" anchor="ctr"/>
+          <a:lstStyle/>
+          <a:p>
+            <a:pPr indent="0" marL="0">
+              <a:lnSpc>
+                <a:spcPct val="130000"/>
+              </a:lnSpc>
+              <a:buNone/>
+            </a:pPr>
+            <a:r>
+              <a:rPr lang="en-US" sz="1200" dirty="0">
+                <a:solidFill>
+                  <a:srgbClr val="5A534A"/>
+                </a:solidFill>
+                <a:latin typeface="Yu Gothic" pitchFamily="34" charset="0"/>
+                <a:ea typeface="Yu Gothic" pitchFamily="34" charset="-122"/>
+                <a:cs typeface="Yu Gothic" pitchFamily="34" charset="-120"/>
+              </a:rPr>
+              <a:t>工程2が、工程1の条件を忘れます。各工程の出力に前提を再掲させます</a:t>
+            </a:r>
+            <a:endParaRPr lang="en-US" sz="1200" dirty="0"/>
+          </a:p>
+        </p:txBody>
+      </p:sp>
+      <p:sp>
+        <p:nvSpPr>
+          <p:cNvPr id="9" name="Shape 7"/>
+          <p:cNvSpPr/>
+          <p:nvPr/>
+        </p:nvSpPr>
+        <p:spPr>
+          <a:xfrm>
+            <a:off x="777240" y="3017520"/>
+            <a:ext cx="10607040" cy="1188720"/>
+          </a:xfrm>
+          <a:prstGeom prst="rect">
+            <a:avLst/>
+          </a:prstGeom>
+          <a:solidFill>
+            <a:srgbClr val="FFFFFF"/>
+          </a:solidFill>
+          <a:ln w="12700">
+            <a:solidFill>
+              <a:srgbClr val="EDE7DB"/>
+            </a:solidFill>
+            <a:prstDash val="solid"/>
+          </a:ln>
+        </p:spPr>
+      </p:sp>
+      <p:sp>
+        <p:nvSpPr>
+          <p:cNvPr id="10" name="Shape 8"/>
+          <p:cNvSpPr/>
+          <p:nvPr/>
+        </p:nvSpPr>
+        <p:spPr>
+          <a:xfrm>
+            <a:off x="1014984" y="3429000"/>
+            <a:ext cx="365760" cy="365760"/>
+          </a:xfrm>
+          <a:prstGeom prst="ellipse">
+            <a:avLst/>
+          </a:prstGeom>
+          <a:solidFill>
+            <a:srgbClr val="B04A2F"/>
+          </a:solidFill>
+          <a:ln w="12700">
+            <a:solidFill>
+              <a:srgbClr val="333333"/>
+            </a:solidFill>
+            <a:prstDash val="solid"/>
+          </a:ln>
+        </p:spPr>
+      </p:sp>
+      <p:sp>
+        <p:nvSpPr>
+          <p:cNvPr id="11" name="Text 9"/>
+          <p:cNvSpPr txBox="1"/>
+          <p:nvPr/>
+        </p:nvSpPr>
+        <p:spPr>
+          <a:xfrm>
+            <a:off x="1014984" y="3429000"/>
+            <a:ext cx="365760" cy="365760"/>
+          </a:xfrm>
+          <a:prstGeom prst="rect">
+            <a:avLst/>
+          </a:prstGeom>
+          <a:noFill/>
+          <a:ln/>
+        </p:spPr>
+        <p:txBody>
+          <a:bodyPr wrap="square" lIns="0" tIns="0" rIns="0" bIns="0" rtlCol="0" anchor="ctr"/>
+          <a:lstStyle/>
+          <a:p>
+            <a:pPr algn="ctr" indent="0" marL="0">
+              <a:buNone/>
+            </a:pPr>
+            <a:r>
+              <a:rPr lang="en-US" sz="1300" b="1" dirty="0">
+                <a:solidFill>
+                  <a:srgbClr val="FFFFFF"/>
+                </a:solidFill>
+                <a:latin typeface="Yu Gothic" pitchFamily="34" charset="0"/>
+                <a:ea typeface="Yu Gothic" pitchFamily="34" charset="-122"/>
+                <a:cs typeface="Yu Gothic" pitchFamily="34" charset="-120"/>
+              </a:rPr>
+              <a:t>2</a:t>
+            </a:r>
+            <a:endParaRPr lang="en-US" sz="1300" dirty="0"/>
+          </a:p>
+        </p:txBody>
+      </p:sp>
+      <p:sp>
+        <p:nvSpPr>
+          <p:cNvPr id="12" name="Text 10"/>
+          <p:cNvSpPr txBox="1"/>
+          <p:nvPr/>
+        </p:nvSpPr>
+        <p:spPr>
+          <a:xfrm>
+            <a:off x="1600200" y="3090672"/>
+            <a:ext cx="3182112" cy="1042416"/>
+          </a:xfrm>
+          <a:prstGeom prst="rect">
+            <a:avLst/>
+          </a:prstGeom>
+          <a:noFill/>
+          <a:ln/>
+        </p:spPr>
+        <p:txBody>
+          <a:bodyPr wrap="square" lIns="0" tIns="0" rIns="0" bIns="0" rtlCol="0" anchor="ctr"/>
+          <a:lstStyle/>
+          <a:p>
+            <a:pPr indent="0" marL="0">
+              <a:buNone/>
+            </a:pPr>
+            <a:r>
+              <a:rPr lang="en-US" sz="1450" b="1" dirty="0">
+                <a:solidFill>
+                  <a:srgbClr val="23201D"/>
+                </a:solidFill>
+                <a:latin typeface="Yu Gothic" pitchFamily="34" charset="0"/>
+                <a:ea typeface="Yu Gothic" pitchFamily="34" charset="-122"/>
+                <a:cs typeface="Yu Gothic" pitchFamily="34" charset="-120"/>
+              </a:rPr>
+              <a:t>誤りの増幅</a:t>
+            </a:r>
+            <a:endParaRPr lang="en-US" sz="1450" dirty="0"/>
+          </a:p>
+        </p:txBody>
+      </p:sp>
+      <p:sp>
+        <p:nvSpPr>
+          <p:cNvPr id="13" name="Text 11"/>
+          <p:cNvSpPr txBox="1"/>
+          <p:nvPr/>
+        </p:nvSpPr>
+        <p:spPr>
+          <a:xfrm>
+            <a:off x="4888382" y="3090672"/>
+            <a:ext cx="6267298" cy="1042416"/>
+          </a:xfrm>
+          <a:prstGeom prst="rect">
+            <a:avLst/>
+          </a:prstGeom>
+          <a:noFill/>
+          <a:ln/>
+        </p:spPr>
+        <p:txBody>
+          <a:bodyPr wrap="square" lIns="0" tIns="0" rIns="0" bIns="0" rtlCol="0" anchor="ctr"/>
+          <a:lstStyle/>
+          <a:p>
+            <a:pPr indent="0" marL="0">
+              <a:lnSpc>
+                <a:spcPct val="130000"/>
+              </a:lnSpc>
+              <a:buNone/>
+            </a:pPr>
+            <a:r>
+              <a:rPr lang="en-US" sz="1200" dirty="0">
+                <a:solidFill>
+                  <a:srgbClr val="5A534A"/>
+                </a:solidFill>
+                <a:latin typeface="Yu Gothic" pitchFamily="34" charset="0"/>
+                <a:ea typeface="Yu Gothic" pitchFamily="34" charset="-122"/>
+                <a:cs typeface="Yu Gothic" pitchFamily="34" charset="-120"/>
+              </a:rPr>
+              <a:t>工程1の小さな誤りが、最後に致命傷になります。だから確認は最も上流に置きます</a:t>
+            </a:r>
+            <a:endParaRPr lang="en-US" sz="1200" dirty="0"/>
+          </a:p>
+        </p:txBody>
+      </p:sp>
+      <p:sp>
+        <p:nvSpPr>
+          <p:cNvPr id="14" name="Shape 12"/>
+          <p:cNvSpPr/>
+          <p:nvPr/>
+        </p:nvSpPr>
+        <p:spPr>
+          <a:xfrm>
+            <a:off x="777240" y="4334256"/>
+            <a:ext cx="10607040" cy="1188720"/>
+          </a:xfrm>
+          <a:prstGeom prst="rect">
+            <a:avLst/>
+          </a:prstGeom>
+          <a:solidFill>
+            <a:srgbClr val="FFFFFF"/>
+          </a:solidFill>
+          <a:ln w="12700">
+            <a:solidFill>
+              <a:srgbClr val="EDE7DB"/>
+            </a:solidFill>
+            <a:prstDash val="solid"/>
+          </a:ln>
+        </p:spPr>
+      </p:sp>
+      <p:sp>
+        <p:nvSpPr>
+          <p:cNvPr id="15" name="Shape 13"/>
+          <p:cNvSpPr/>
+          <p:nvPr/>
+        </p:nvSpPr>
+        <p:spPr>
+          <a:xfrm>
+            <a:off x="1014984" y="4745736"/>
+            <a:ext cx="365760" cy="365760"/>
+          </a:xfrm>
+          <a:prstGeom prst="ellipse">
+            <a:avLst/>
+          </a:prstGeom>
+          <a:solidFill>
+            <a:srgbClr val="B04A2F"/>
+          </a:solidFill>
+          <a:ln w="12700">
+            <a:solidFill>
+              <a:srgbClr val="333333"/>
+            </a:solidFill>
+            <a:prstDash val="solid"/>
+          </a:ln>
+        </p:spPr>
+      </p:sp>
+      <p:sp>
+        <p:nvSpPr>
+          <p:cNvPr id="16" name="Text 14"/>
+          <p:cNvSpPr txBox="1"/>
+          <p:nvPr/>
+        </p:nvSpPr>
+        <p:spPr>
+          <a:xfrm>
+            <a:off x="1014984" y="4745736"/>
+            <a:ext cx="365760" cy="365760"/>
+          </a:xfrm>
+          <a:prstGeom prst="rect">
+            <a:avLst/>
+          </a:prstGeom>
+          <a:noFill/>
+          <a:ln/>
+        </p:spPr>
+        <p:txBody>
+          <a:bodyPr wrap="square" lIns="0" tIns="0" rIns="0" bIns="0" rtlCol="0" anchor="ctr"/>
+          <a:lstStyle/>
+          <a:p>
+            <a:pPr algn="ctr" indent="0" marL="0">
+              <a:buNone/>
+            </a:pPr>
+            <a:r>
+              <a:rPr lang="en-US" sz="1300" b="1" dirty="0">
+                <a:solidFill>
+                  <a:srgbClr val="FFFFFF"/>
+                </a:solidFill>
+                <a:latin typeface="Yu Gothic" pitchFamily="34" charset="0"/>
+                <a:ea typeface="Yu Gothic" pitchFamily="34" charset="-122"/>
+                <a:cs typeface="Yu Gothic" pitchFamily="34" charset="-120"/>
+              </a:rPr>
+              <a:t>3</a:t>
+            </a:r>
+            <a:endParaRPr lang="en-US" sz="1300" dirty="0"/>
+          </a:p>
+        </p:txBody>
+      </p:sp>
+      <p:sp>
+        <p:nvSpPr>
+          <p:cNvPr id="17" name="Text 15"/>
+          <p:cNvSpPr txBox="1"/>
+          <p:nvPr/>
+        </p:nvSpPr>
+        <p:spPr>
+          <a:xfrm>
+            <a:off x="1600200" y="4407408"/>
+            <a:ext cx="3182112" cy="1042416"/>
+          </a:xfrm>
+          <a:prstGeom prst="rect">
+            <a:avLst/>
+          </a:prstGeom>
+          <a:noFill/>
+          <a:ln/>
+        </p:spPr>
+        <p:txBody>
+          <a:bodyPr wrap="square" lIns="0" tIns="0" rIns="0" bIns="0" rtlCol="0" anchor="ctr"/>
+          <a:lstStyle/>
+          <a:p>
+            <a:pPr indent="0" marL="0">
+              <a:buNone/>
+            </a:pPr>
+            <a:r>
+              <a:rPr lang="en-US" sz="1450" b="1" dirty="0">
+                <a:solidFill>
+                  <a:srgbClr val="23201D"/>
+                </a:solidFill>
+                <a:latin typeface="Yu Gothic" pitchFamily="34" charset="0"/>
+                <a:ea typeface="Yu Gothic" pitchFamily="34" charset="-122"/>
+                <a:cs typeface="Yu Gothic" pitchFamily="34" charset="-120"/>
+              </a:rPr>
+              <a:t>勝手な範囲拡大</a:t>
+            </a:r>
+            <a:endParaRPr lang="en-US" sz="1450" dirty="0"/>
+          </a:p>
+        </p:txBody>
+      </p:sp>
+      <p:sp>
+        <p:nvSpPr>
           <p:cNvPr id="18" name="Text 16"/>
           <p:cNvSpPr txBox="1"/>
           <p:nvPr/>
         </p:nvSpPr>
         <p:spPr>
           <a:xfrm>
-            <a:off x="5815584" y="3337560"/>
-            <a:ext cx="512064" cy="512064"/>
-          </a:xfrm>
-          <a:prstGeom prst="rect">
-            <a:avLst/>
-          </a:prstGeom>
-          <a:noFill/>
-          <a:ln/>
-        </p:spPr>
-        <p:txBody>
-          <a:bodyPr wrap="square" lIns="0" tIns="0" rIns="0" bIns="0" rtlCol="0" anchor="ctr"/>
-          <a:lstStyle/>
-          <a:p>
-            <a:pPr algn="ctr" indent="0" marL="0">
-              <a:buNone/>
-            </a:pPr>
-            <a:r>
-              <a:rPr lang="en-US" sz="1800" b="1" dirty="0">
-                <a:solidFill>
-                  <a:srgbClr val="FFFFFF"/>
-                </a:solidFill>
-                <a:latin typeface="Yu Gothic" pitchFamily="34" charset="0"/>
-                <a:ea typeface="Yu Gothic" pitchFamily="34" charset="-122"/>
-                <a:cs typeface="Yu Gothic" pitchFamily="34" charset="-120"/>
-              </a:rPr>
-              <a:t>→</a:t>
-            </a:r>
-            <a:endParaRPr lang="en-US" sz="1800" dirty="0"/>
+            <a:off x="4888382" y="4407408"/>
+            <a:ext cx="6267298" cy="1042416"/>
+          </a:xfrm>
+          <a:prstGeom prst="rect">
+            <a:avLst/>
+          </a:prstGeom>
+          <a:noFill/>
+          <a:ln/>
+        </p:spPr>
+        <p:txBody>
+          <a:bodyPr wrap="square" lIns="0" tIns="0" rIns="0" bIns="0" rtlCol="0" anchor="ctr"/>
+          <a:lstStyle/>
+          <a:p>
+            <a:pPr indent="0" marL="0">
+              <a:lnSpc>
+                <a:spcPct val="130000"/>
+              </a:lnSpc>
+              <a:buNone/>
+            </a:pPr>
+            <a:r>
+              <a:rPr lang="en-US" sz="1200" dirty="0">
+                <a:solidFill>
+                  <a:srgbClr val="5A534A"/>
+                </a:solidFill>
+                <a:latin typeface="Yu Gothic" pitchFamily="34" charset="0"/>
+                <a:ea typeface="Yu Gothic" pitchFamily="34" charset="-122"/>
+                <a:cs typeface="Yu Gothic" pitchFamily="34" charset="-120"/>
+              </a:rPr>
+              <a:t>頼んでいないことまでやります。各工程に「やらないこと」を書きます</a:t>
+            </a:r>
+            <a:endParaRPr lang="en-US" sz="1200" dirty="0"/>
           </a:p>
         </p:txBody>
       </p:sp>
@@ -3736,8 +5259,47 @@
         </p:nvSpPr>
         <p:spPr>
           <a:xfrm>
-            <a:off x="777240" y="6355080"/>
-            <a:ext cx="7424928" cy="274320"/>
+            <a:off x="777240" y="5669280"/>
+            <a:ext cx="10607040" cy="411480"/>
+          </a:xfrm>
+          <a:prstGeom prst="rect">
+            <a:avLst/>
+          </a:prstGeom>
+          <a:noFill/>
+          <a:ln/>
+        </p:spPr>
+        <p:txBody>
+          <a:bodyPr wrap="square" lIns="0" tIns="0" rIns="0" bIns="0" rtlCol="0" anchor="ctr"/>
+          <a:lstStyle/>
+          <a:p>
+            <a:pPr indent="0" marL="0">
+              <a:buNone/>
+            </a:pPr>
+            <a:r>
+              <a:rPr lang="en-US" sz="1200" b="1" dirty="0">
+                <a:solidFill>
+                  <a:srgbClr val="B04A2F"/>
+                </a:solidFill>
+                <a:latin typeface="Yu Gothic" pitchFamily="34" charset="0"/>
+                <a:ea typeface="Yu Gothic" pitchFamily="34" charset="-122"/>
+                <a:cs typeface="Yu Gothic" pitchFamily="34" charset="-120"/>
+              </a:rPr>
+              <a:t>新人に3つの仕事をまとめて任せたときに起きることと、まったく同じです。</a:t>
+            </a:r>
+            <a:endParaRPr lang="en-US" sz="1200" dirty="0"/>
+          </a:p>
+        </p:txBody>
+      </p:sp>
+      <p:sp>
+        <p:nvSpPr>
+          <p:cNvPr id="20" name="Text 18"/>
+          <p:cNvSpPr txBox="1"/>
+          <p:nvPr/>
+        </p:nvSpPr>
+        <p:spPr>
+          <a:xfrm>
+            <a:off x="777240" y="6382512"/>
+            <a:ext cx="7424928" cy="256032"/>
           </a:xfrm>
           <a:prstGeom prst="rect">
             <a:avLst/>
@@ -3769,14 +5331,14 @@
       </p:sp>
       <p:sp>
         <p:nvSpPr>
-          <p:cNvPr id="20" name="Text 18"/>
-          <p:cNvSpPr txBox="1"/>
-          <p:nvPr/>
-        </p:nvSpPr>
-        <p:spPr>
-          <a:xfrm>
-            <a:off x="8202168" y="6355080"/>
-            <a:ext cx="3182112" cy="274320"/>
+          <p:cNvPr id="21" name="Text 19"/>
+          <p:cNvSpPr txBox="1"/>
+          <p:nvPr/>
+        </p:nvSpPr>
+        <p:spPr>
+          <a:xfrm>
+            <a:off x="8202168" y="6382512"/>
+            <a:ext cx="3182112" cy="256032"/>
           </a:xfrm>
           <a:prstGeom prst="rect">
             <a:avLst/>
@@ -3800,7 +5362,7 @@
                 <a:ea typeface="Yu Gothic" pitchFamily="34" charset="-122"/>
                 <a:cs typeface="Yu Gothic" pitchFamily="34" charset="-120"/>
               </a:rPr>
-              <a:t>実演</a:t>
+              <a:t>考え方</a:t>
             </a:r>
             <a:endParaRPr lang="en-US" sz="900" dirty="0"/>
           </a:p>
@@ -3846,7 +5408,7 @@
         </p:nvSpPr>
         <p:spPr>
           <a:xfrm>
-            <a:off x="777240" y="640080"/>
+            <a:off x="777240" y="566928"/>
             <a:ext cx="10607040" cy="274320"/>
           </a:xfrm>
           <a:prstGeom prst="rect">
@@ -3871,7 +5433,7 @@
                 <a:ea typeface="Yu Gothic" pitchFamily="34" charset="-122"/>
                 <a:cs typeface="Yu Gothic" pitchFamily="34" charset="-120"/>
               </a:rPr>
-              <a:t>演習</a:t>
+              <a:t>あてはめ</a:t>
             </a:r>
             <a:endParaRPr lang="en-US" sz="1100" dirty="0"/>
           </a:p>
@@ -3885,7 +5447,7 @@
         </p:nvSpPr>
         <p:spPr>
           <a:xfrm>
-            <a:off x="777240" y="960120"/>
+            <a:off x="777240" y="896112"/>
             <a:ext cx="10607040" cy="640080"/>
           </a:xfrm>
           <a:prstGeom prst="rect">
@@ -3902,7 +5464,7 @@
               <a:buNone/>
             </a:pPr>
             <a:r>
-              <a:rPr lang="en-US" sz="2700" b="1" dirty="0">
+              <a:rPr lang="en-US" sz="2600" b="1" dirty="0">
                 <a:solidFill>
                   <a:srgbClr val="23201D"/>
                 </a:solidFill>
@@ -3910,61 +5472,22 @@
                 <a:ea typeface="Yu Gothic" pitchFamily="34" charset="-122"/>
                 <a:cs typeface="Yu Gothic" pitchFamily="34" charset="-120"/>
               </a:rPr>
-              <a:t>今日、一緒にやること</a:t>
-            </a:r>
-            <a:endParaRPr lang="en-US" sz="2700" dirty="0"/>
-          </a:p>
-        </p:txBody>
-      </p:sp>
-      <p:sp>
-        <p:nvSpPr>
-          <p:cNvPr id="4" name="Text 2"/>
-          <p:cNvSpPr txBox="1"/>
-          <p:nvPr/>
-        </p:nvSpPr>
-        <p:spPr>
-          <a:xfrm>
-            <a:off x="777240" y="1627632"/>
-            <a:ext cx="10607040" cy="320040"/>
-          </a:xfrm>
-          <a:prstGeom prst="rect">
-            <a:avLst/>
-          </a:prstGeom>
-          <a:noFill/>
-          <a:ln/>
-        </p:spPr>
-        <p:txBody>
-          <a:bodyPr wrap="square" lIns="0" tIns="0" rIns="0" bIns="0" rtlCol="0" anchor="ctr"/>
-          <a:lstStyle/>
-          <a:p>
-            <a:pPr indent="0" marL="0">
-              <a:buNone/>
-            </a:pPr>
-            <a:r>
-              <a:rPr lang="en-US" sz="1250" b="1" dirty="0">
-                <a:solidFill>
-                  <a:srgbClr val="2F4F6B"/>
-                </a:solidFill>
-                <a:latin typeface="Yu Gothic" pitchFamily="34" charset="0"/>
-                <a:ea typeface="Yu Gothic" pitchFamily="34" charset="-122"/>
-                <a:cs typeface="Yu Gothic" pitchFamily="34" charset="-120"/>
-              </a:rPr>
-              <a:t>55分。操作するのはご自身です。</a:t>
-            </a:r>
-            <a:endParaRPr lang="en-US" sz="1250" dirty="0"/>
-          </a:p>
-        </p:txBody>
-      </p:sp>
-      <p:sp>
-        <p:nvSpPr>
-          <p:cNvPr id="5" name="Shape 3"/>
+              <a:t>設計書は、この形で書きます</a:t>
+            </a:r>
+            <a:endParaRPr lang="en-US" sz="2600" dirty="0"/>
+          </a:p>
+        </p:txBody>
+      </p:sp>
+      <p:sp>
+        <p:nvSpPr>
+          <p:cNvPr id="4" name="Shape 2"/>
           <p:cNvSpPr/>
           <p:nvPr/>
         </p:nvSpPr>
         <p:spPr>
           <a:xfrm>
-            <a:off x="777240" y="2240280"/>
-            <a:ext cx="3383280" cy="2697480"/>
+            <a:off x="777240" y="1691640"/>
+            <a:ext cx="10607040" cy="3931920"/>
           </a:xfrm>
           <a:prstGeom prst="rect">
             <a:avLst/>
@@ -3972,9 +5495,9 @@
           <a:solidFill>
             <a:srgbClr val="FFFFFF"/>
           </a:solidFill>
-          <a:ln w="12700">
+          <a:ln w="15875">
             <a:solidFill>
-              <a:srgbClr val="EDE7DB"/>
+              <a:srgbClr val="2F4F6B"/>
             </a:solidFill>
             <a:prstDash val="solid"/>
           </a:ln>
@@ -3982,16 +5505,16 @@
       </p:sp>
       <p:sp>
         <p:nvSpPr>
-          <p:cNvPr id="6" name="Shape 4"/>
+          <p:cNvPr id="5" name="Shape 3"/>
           <p:cNvSpPr/>
           <p:nvPr/>
         </p:nvSpPr>
         <p:spPr>
           <a:xfrm>
-            <a:off x="1051560" y="2487168"/>
-            <a:ext cx="438912" cy="438912"/>
-          </a:xfrm>
-          <a:prstGeom prst="ellipse">
+            <a:off x="777240" y="1691640"/>
+            <a:ext cx="10607040" cy="457200"/>
+          </a:xfrm>
+          <a:prstGeom prst="rect">
             <a:avLst/>
           </a:prstGeom>
           <a:solidFill>
@@ -3999,7 +5522,7 @@
           </a:solidFill>
           <a:ln w="12700">
             <a:solidFill>
-              <a:srgbClr val="2F4F6B"/>
+              <a:srgbClr val="333333"/>
             </a:solidFill>
             <a:prstDash val="solid"/>
           </a:ln>
@@ -4007,40 +5530,82 @@
       </p:sp>
       <p:sp>
         <p:nvSpPr>
+          <p:cNvPr id="6" name="Text 4"/>
+          <p:cNvSpPr txBox="1"/>
+          <p:nvPr/>
+        </p:nvSpPr>
+        <p:spPr>
+          <a:xfrm>
+            <a:off x="1051560" y="1709928"/>
+            <a:ext cx="10058400" cy="420624"/>
+          </a:xfrm>
+          <a:prstGeom prst="rect">
+            <a:avLst/>
+          </a:prstGeom>
+          <a:noFill/>
+          <a:ln/>
+        </p:spPr>
+        <p:txBody>
+          <a:bodyPr wrap="square" lIns="0" tIns="0" rIns="0" bIns="0" rtlCol="0" anchor="ctr"/>
+          <a:lstStyle/>
+          <a:p>
+            <a:pPr indent="0" marL="0">
+              <a:buNone/>
+            </a:pPr>
+            <a:r>
+              <a:rPr lang="en-US" sz="1200" b="1" dirty="0">
+                <a:solidFill>
+                  <a:srgbClr val="FFFFFF"/>
+                </a:solidFill>
+                <a:latin typeface="Yu Gothic" pitchFamily="34" charset="0"/>
+                <a:ea typeface="Yu Gothic" pitchFamily="34" charset="-122"/>
+                <a:cs typeface="Yu Gothic" pitchFamily="34" charset="-120"/>
+              </a:rPr>
+              <a:t>多工程タスク設計書（記入例：見積の作成）</a:t>
+            </a:r>
+            <a:endParaRPr lang="en-US" sz="1200" dirty="0"/>
+          </a:p>
+        </p:txBody>
+      </p:sp>
+      <p:sp>
+        <p:nvSpPr>
           <p:cNvPr id="7" name="Text 5"/>
           <p:cNvSpPr txBox="1"/>
           <p:nvPr/>
         </p:nvSpPr>
         <p:spPr>
           <a:xfrm>
-            <a:off x="1051560" y="2487168"/>
-            <a:ext cx="438912" cy="438912"/>
-          </a:xfrm>
-          <a:prstGeom prst="rect">
-            <a:avLst/>
-          </a:prstGeom>
-          <a:noFill/>
-          <a:ln/>
-        </p:spPr>
-        <p:txBody>
-          <a:bodyPr wrap="square" lIns="0" tIns="0" rIns="0" bIns="0" rtlCol="0" anchor="ctr"/>
-          <a:lstStyle/>
-          <a:p>
-            <a:pPr algn="ctr" indent="0" marL="0">
-              <a:buNone/>
-            </a:pPr>
-            <a:r>
-              <a:rPr lang="en-US" sz="1400" b="1" dirty="0">
-                <a:solidFill>
-                  <a:srgbClr val="FFFFFF"/>
-                </a:solidFill>
-                <a:latin typeface="Yu Gothic" pitchFamily="34" charset="0"/>
-                <a:ea typeface="Yu Gothic" pitchFamily="34" charset="-122"/>
-                <a:cs typeface="Yu Gothic" pitchFamily="34" charset="-120"/>
-              </a:rPr>
-              <a:t>1</a:t>
-            </a:r>
-            <a:endParaRPr lang="en-US" sz="1400" dirty="0"/>
+            <a:off x="1097280" y="2331720"/>
+            <a:ext cx="2057400" cy="530352"/>
+          </a:xfrm>
+          <a:prstGeom prst="rect">
+            <a:avLst/>
+          </a:prstGeom>
+          <a:noFill/>
+          <a:ln/>
+        </p:spPr>
+        <p:txBody>
+          <a:bodyPr wrap="square" lIns="0" tIns="0" rIns="0" bIns="0" rtlCol="0" anchor="ctr"/>
+          <a:lstStyle/>
+          <a:p>
+            <a:pPr indent="0" marL="0">
+              <a:lnSpc>
+                <a:spcPct val="110000"/>
+              </a:lnSpc>
+              <a:buNone/>
+            </a:pPr>
+            <a:r>
+              <a:rPr lang="en-US" sz="1100" b="1" dirty="0">
+                <a:solidFill>
+                  <a:srgbClr val="2F4F6B"/>
+                </a:solidFill>
+                <a:latin typeface="Yu Gothic" pitchFamily="34" charset="0"/>
+                <a:ea typeface="Yu Gothic" pitchFamily="34" charset="-122"/>
+                <a:cs typeface="Yu Gothic" pitchFamily="34" charset="-120"/>
+              </a:rPr>
+              <a:t>工程1</a:t>
+            </a:r>
+            <a:endParaRPr lang="en-US" sz="1100" dirty="0"/>
           </a:p>
         </p:txBody>
       </p:sp>
@@ -4052,8 +5617,8 @@
         </p:nvSpPr>
         <p:spPr>
           <a:xfrm>
-            <a:off x="1051560" y="3035808"/>
-            <a:ext cx="2834640" cy="777240"/>
+            <a:off x="3291840" y="2331720"/>
+            <a:ext cx="7772400" cy="530352"/>
           </a:xfrm>
           <a:prstGeom prst="rect">
             <a:avLst/>
@@ -4067,22 +5632,22 @@
           <a:p>
             <a:pPr indent="0" marL="0">
               <a:lnSpc>
-                <a:spcPct val="125000"/>
+                <a:spcPct val="115000"/>
               </a:lnSpc>
               <a:buNone/>
             </a:pPr>
             <a:r>
-              <a:rPr lang="en-US" sz="1500" b="1" dirty="0">
+              <a:rPr lang="en-US" sz="1150" dirty="0">
                 <a:solidFill>
                   <a:srgbClr val="23201D"/>
                 </a:solidFill>
-                <a:latin typeface="Yu Gothic" pitchFamily="34" charset="0"/>
-                <a:ea typeface="Yu Gothic" pitchFamily="34" charset="-122"/>
-                <a:cs typeface="Yu Gothic" pitchFamily="34" charset="-120"/>
-              </a:rPr>
-              <a:t>工程図を描く</a:t>
-            </a:r>
-            <a:endParaRPr lang="en-US" sz="1500" dirty="0"/>
+                <a:latin typeface="Consolas" pitchFamily="34" charset="0"/>
+                <a:ea typeface="Consolas" pitchFamily="34" charset="-122"/>
+                <a:cs typeface="Consolas" pitchFamily="34" charset="-120"/>
+              </a:rPr>
+              <a:t>類似案件を過去実績から3件探す／やらないこと：金額の算出</a:t>
+            </a:r>
+            <a:endParaRPr lang="en-US" sz="1150" dirty="0"/>
           </a:p>
         </p:txBody>
       </p:sp>
@@ -4094,8 +5659,8 @@
         </p:nvSpPr>
         <p:spPr>
           <a:xfrm>
-            <a:off x="1051560" y="3822192"/>
-            <a:ext cx="2834640" cy="960120"/>
+            <a:off x="1097280" y="2862072"/>
+            <a:ext cx="2057400" cy="530352"/>
           </a:xfrm>
           <a:prstGeom prst="rect">
             <a:avLst/>
@@ -4109,12 +5674,432 @@
           <a:p>
             <a:pPr indent="0" marL="0">
               <a:lnSpc>
-                <a:spcPct val="130000"/>
+                <a:spcPct val="110000"/>
               </a:lnSpc>
               <a:buNone/>
             </a:pPr>
             <a:r>
-              <a:rPr lang="en-US" sz="1200" dirty="0">
+              <a:rPr lang="en-US" sz="1100" b="1" dirty="0">
+                <a:solidFill>
+                  <a:srgbClr val="2F4F6B"/>
+                </a:solidFill>
+                <a:latin typeface="Yu Gothic" pitchFamily="34" charset="0"/>
+                <a:ea typeface="Yu Gothic" pitchFamily="34" charset="-122"/>
+                <a:cs typeface="Yu Gothic" pitchFamily="34" charset="-120"/>
+              </a:rPr>
+              <a:t>└ 人の確認</a:t>
+            </a:r>
+            <a:endParaRPr lang="en-US" sz="1100" dirty="0"/>
+          </a:p>
+        </p:txBody>
+      </p:sp>
+      <p:sp>
+        <p:nvSpPr>
+          <p:cNvPr id="10" name="Text 8"/>
+          <p:cNvSpPr txBox="1"/>
+          <p:nvPr/>
+        </p:nvSpPr>
+        <p:spPr>
+          <a:xfrm>
+            <a:off x="3291840" y="2862072"/>
+            <a:ext cx="7772400" cy="530352"/>
+          </a:xfrm>
+          <a:prstGeom prst="rect">
+            <a:avLst/>
+          </a:prstGeom>
+          <a:noFill/>
+          <a:ln/>
+        </p:spPr>
+        <p:txBody>
+          <a:bodyPr wrap="square" lIns="0" tIns="0" rIns="0" bIns="0" rtlCol="0" anchor="ctr"/>
+          <a:lstStyle/>
+          <a:p>
+            <a:pPr indent="0" marL="0">
+              <a:lnSpc>
+                <a:spcPct val="115000"/>
+              </a:lnSpc>
+              <a:buNone/>
+            </a:pPr>
+            <a:r>
+              <a:rPr lang="en-US" sz="1150" dirty="0">
+                <a:solidFill>
+                  <a:srgbClr val="23201D"/>
+                </a:solidFill>
+                <a:latin typeface="Consolas" pitchFamily="34" charset="0"/>
+                <a:ea typeface="Consolas" pitchFamily="34" charset="-122"/>
+                <a:cs typeface="Consolas" pitchFamily="34" charset="-120"/>
+              </a:rPr>
+              <a:t>要。社長が案件の妥当性を見る（← ここが最上流）</a:t>
+            </a:r>
+            <a:endParaRPr lang="en-US" sz="1150" dirty="0"/>
+          </a:p>
+        </p:txBody>
+      </p:sp>
+      <p:sp>
+        <p:nvSpPr>
+          <p:cNvPr id="11" name="Text 9"/>
+          <p:cNvSpPr txBox="1"/>
+          <p:nvPr/>
+        </p:nvSpPr>
+        <p:spPr>
+          <a:xfrm>
+            <a:off x="1097280" y="3392424"/>
+            <a:ext cx="2057400" cy="530352"/>
+          </a:xfrm>
+          <a:prstGeom prst="rect">
+            <a:avLst/>
+          </a:prstGeom>
+          <a:noFill/>
+          <a:ln/>
+        </p:spPr>
+        <p:txBody>
+          <a:bodyPr wrap="square" lIns="0" tIns="0" rIns="0" bIns="0" rtlCol="0" anchor="ctr"/>
+          <a:lstStyle/>
+          <a:p>
+            <a:pPr indent="0" marL="0">
+              <a:lnSpc>
+                <a:spcPct val="110000"/>
+              </a:lnSpc>
+              <a:buNone/>
+            </a:pPr>
+            <a:r>
+              <a:rPr lang="en-US" sz="1100" b="1" dirty="0">
+                <a:solidFill>
+                  <a:srgbClr val="2F4F6B"/>
+                </a:solidFill>
+                <a:latin typeface="Yu Gothic" pitchFamily="34" charset="0"/>
+                <a:ea typeface="Yu Gothic" pitchFamily="34" charset="-122"/>
+                <a:cs typeface="Yu Gothic" pitchFamily="34" charset="-120"/>
+              </a:rPr>
+              <a:t>工程2</a:t>
+            </a:r>
+            <a:endParaRPr lang="en-US" sz="1100" dirty="0"/>
+          </a:p>
+        </p:txBody>
+      </p:sp>
+      <p:sp>
+        <p:nvSpPr>
+          <p:cNvPr id="12" name="Text 10"/>
+          <p:cNvSpPr txBox="1"/>
+          <p:nvPr/>
+        </p:nvSpPr>
+        <p:spPr>
+          <a:xfrm>
+            <a:off x="3291840" y="3392424"/>
+            <a:ext cx="7772400" cy="530352"/>
+          </a:xfrm>
+          <a:prstGeom prst="rect">
+            <a:avLst/>
+          </a:prstGeom>
+          <a:noFill/>
+          <a:ln/>
+        </p:spPr>
+        <p:txBody>
+          <a:bodyPr wrap="square" lIns="0" tIns="0" rIns="0" bIns="0" rtlCol="0" anchor="ctr"/>
+          <a:lstStyle/>
+          <a:p>
+            <a:pPr indent="0" marL="0">
+              <a:lnSpc>
+                <a:spcPct val="115000"/>
+              </a:lnSpc>
+              <a:buNone/>
+            </a:pPr>
+            <a:r>
+              <a:rPr lang="en-US" sz="1150" dirty="0">
+                <a:solidFill>
+                  <a:srgbClr val="23201D"/>
+                </a:solidFill>
+                <a:latin typeface="Consolas" pitchFamily="34" charset="0"/>
+                <a:ea typeface="Consolas" pitchFamily="34" charset="-122"/>
+                <a:cs typeface="Consolas" pitchFamily="34" charset="-120"/>
+              </a:rPr>
+              <a:t>材料費と工数から概算を出す／やらないこと：値引きの判断</a:t>
+            </a:r>
+            <a:endParaRPr lang="en-US" sz="1150" dirty="0"/>
+          </a:p>
+        </p:txBody>
+      </p:sp>
+      <p:sp>
+        <p:nvSpPr>
+          <p:cNvPr id="13" name="Text 11"/>
+          <p:cNvSpPr txBox="1"/>
+          <p:nvPr/>
+        </p:nvSpPr>
+        <p:spPr>
+          <a:xfrm>
+            <a:off x="1097280" y="3922776"/>
+            <a:ext cx="2057400" cy="530352"/>
+          </a:xfrm>
+          <a:prstGeom prst="rect">
+            <a:avLst/>
+          </a:prstGeom>
+          <a:noFill/>
+          <a:ln/>
+        </p:spPr>
+        <p:txBody>
+          <a:bodyPr wrap="square" lIns="0" tIns="0" rIns="0" bIns="0" rtlCol="0" anchor="ctr"/>
+          <a:lstStyle/>
+          <a:p>
+            <a:pPr indent="0" marL="0">
+              <a:lnSpc>
+                <a:spcPct val="110000"/>
+              </a:lnSpc>
+              <a:buNone/>
+            </a:pPr>
+            <a:r>
+              <a:rPr lang="en-US" sz="1100" b="1" dirty="0">
+                <a:solidFill>
+                  <a:srgbClr val="2F4F6B"/>
+                </a:solidFill>
+                <a:latin typeface="Yu Gothic" pitchFamily="34" charset="0"/>
+                <a:ea typeface="Yu Gothic" pitchFamily="34" charset="-122"/>
+                <a:cs typeface="Yu Gothic" pitchFamily="34" charset="-120"/>
+              </a:rPr>
+              <a:t>└ 人の確認</a:t>
+            </a:r>
+            <a:endParaRPr lang="en-US" sz="1100" dirty="0"/>
+          </a:p>
+        </p:txBody>
+      </p:sp>
+      <p:sp>
+        <p:nvSpPr>
+          <p:cNvPr id="14" name="Text 12"/>
+          <p:cNvSpPr txBox="1"/>
+          <p:nvPr/>
+        </p:nvSpPr>
+        <p:spPr>
+          <a:xfrm>
+            <a:off x="3291840" y="3922776"/>
+            <a:ext cx="7772400" cy="530352"/>
+          </a:xfrm>
+          <a:prstGeom prst="rect">
+            <a:avLst/>
+          </a:prstGeom>
+          <a:noFill/>
+          <a:ln/>
+        </p:spPr>
+        <p:txBody>
+          <a:bodyPr wrap="square" lIns="0" tIns="0" rIns="0" bIns="0" rtlCol="0" anchor="ctr"/>
+          <a:lstStyle/>
+          <a:p>
+            <a:pPr indent="0" marL="0">
+              <a:lnSpc>
+                <a:spcPct val="115000"/>
+              </a:lnSpc>
+              <a:buNone/>
+            </a:pPr>
+            <a:r>
+              <a:rPr lang="en-US" sz="1150" dirty="0">
+                <a:solidFill>
+                  <a:srgbClr val="23201D"/>
+                </a:solidFill>
+                <a:latin typeface="Consolas" pitchFamily="34" charset="0"/>
+                <a:ea typeface="Consolas" pitchFamily="34" charset="-122"/>
+                <a:cs typeface="Consolas" pitchFamily="34" charset="-120"/>
+              </a:rPr>
+              <a:t>不要（工程3で最終確認するため）</a:t>
+            </a:r>
+            <a:endParaRPr lang="en-US" sz="1150" dirty="0"/>
+          </a:p>
+        </p:txBody>
+      </p:sp>
+      <p:sp>
+        <p:nvSpPr>
+          <p:cNvPr id="15" name="Text 13"/>
+          <p:cNvSpPr txBox="1"/>
+          <p:nvPr/>
+        </p:nvSpPr>
+        <p:spPr>
+          <a:xfrm>
+            <a:off x="1097280" y="4453128"/>
+            <a:ext cx="2057400" cy="530352"/>
+          </a:xfrm>
+          <a:prstGeom prst="rect">
+            <a:avLst/>
+          </a:prstGeom>
+          <a:noFill/>
+          <a:ln/>
+        </p:spPr>
+        <p:txBody>
+          <a:bodyPr wrap="square" lIns="0" tIns="0" rIns="0" bIns="0" rtlCol="0" anchor="ctr"/>
+          <a:lstStyle/>
+          <a:p>
+            <a:pPr indent="0" marL="0">
+              <a:lnSpc>
+                <a:spcPct val="110000"/>
+              </a:lnSpc>
+              <a:buNone/>
+            </a:pPr>
+            <a:r>
+              <a:rPr lang="en-US" sz="1100" b="1" dirty="0">
+                <a:solidFill>
+                  <a:srgbClr val="2F4F6B"/>
+                </a:solidFill>
+                <a:latin typeface="Yu Gothic" pitchFamily="34" charset="0"/>
+                <a:ea typeface="Yu Gothic" pitchFamily="34" charset="-122"/>
+                <a:cs typeface="Yu Gothic" pitchFamily="34" charset="-120"/>
+              </a:rPr>
+              <a:t>工程3</a:t>
+            </a:r>
+            <a:endParaRPr lang="en-US" sz="1100" dirty="0"/>
+          </a:p>
+        </p:txBody>
+      </p:sp>
+      <p:sp>
+        <p:nvSpPr>
+          <p:cNvPr id="16" name="Text 14"/>
+          <p:cNvSpPr txBox="1"/>
+          <p:nvPr/>
+        </p:nvSpPr>
+        <p:spPr>
+          <a:xfrm>
+            <a:off x="3291840" y="4453128"/>
+            <a:ext cx="7772400" cy="530352"/>
+          </a:xfrm>
+          <a:prstGeom prst="rect">
+            <a:avLst/>
+          </a:prstGeom>
+          <a:noFill/>
+          <a:ln/>
+        </p:spPr>
+        <p:txBody>
+          <a:bodyPr wrap="square" lIns="0" tIns="0" rIns="0" bIns="0" rtlCol="0" anchor="ctr"/>
+          <a:lstStyle/>
+          <a:p>
+            <a:pPr indent="0" marL="0">
+              <a:lnSpc>
+                <a:spcPct val="115000"/>
+              </a:lnSpc>
+              <a:buNone/>
+            </a:pPr>
+            <a:r>
+              <a:rPr lang="en-US" sz="1150" dirty="0">
+                <a:solidFill>
+                  <a:srgbClr val="23201D"/>
+                </a:solidFill>
+                <a:latin typeface="Consolas" pitchFamily="34" charset="0"/>
+                <a:ea typeface="Consolas" pitchFamily="34" charset="-122"/>
+                <a:cs typeface="Consolas" pitchFamily="34" charset="-120"/>
+              </a:rPr>
+              <a:t>稟議の形式に整える／やらないこと：送信</a:t>
+            </a:r>
+            <a:endParaRPr lang="en-US" sz="1150" dirty="0"/>
+          </a:p>
+        </p:txBody>
+      </p:sp>
+      <p:sp>
+        <p:nvSpPr>
+          <p:cNvPr id="17" name="Text 15"/>
+          <p:cNvSpPr txBox="1"/>
+          <p:nvPr/>
+        </p:nvSpPr>
+        <p:spPr>
+          <a:xfrm>
+            <a:off x="1097280" y="4983480"/>
+            <a:ext cx="2057400" cy="530352"/>
+          </a:xfrm>
+          <a:prstGeom prst="rect">
+            <a:avLst/>
+          </a:prstGeom>
+          <a:noFill/>
+          <a:ln/>
+        </p:spPr>
+        <p:txBody>
+          <a:bodyPr wrap="square" lIns="0" tIns="0" rIns="0" bIns="0" rtlCol="0" anchor="ctr"/>
+          <a:lstStyle/>
+          <a:p>
+            <a:pPr indent="0" marL="0">
+              <a:lnSpc>
+                <a:spcPct val="110000"/>
+              </a:lnSpc>
+              <a:buNone/>
+            </a:pPr>
+            <a:r>
+              <a:rPr lang="en-US" sz="1100" b="1" dirty="0">
+                <a:solidFill>
+                  <a:srgbClr val="2F4F6B"/>
+                </a:solidFill>
+                <a:latin typeface="Yu Gothic" pitchFamily="34" charset="0"/>
+                <a:ea typeface="Yu Gothic" pitchFamily="34" charset="-122"/>
+                <a:cs typeface="Yu Gothic" pitchFamily="34" charset="-120"/>
+              </a:rPr>
+              <a:t>└ 人の確認</a:t>
+            </a:r>
+            <a:endParaRPr lang="en-US" sz="1100" dirty="0"/>
+          </a:p>
+        </p:txBody>
+      </p:sp>
+      <p:sp>
+        <p:nvSpPr>
+          <p:cNvPr id="18" name="Text 16"/>
+          <p:cNvSpPr txBox="1"/>
+          <p:nvPr/>
+        </p:nvSpPr>
+        <p:spPr>
+          <a:xfrm>
+            <a:off x="3291840" y="4983480"/>
+            <a:ext cx="7772400" cy="530352"/>
+          </a:xfrm>
+          <a:prstGeom prst="rect">
+            <a:avLst/>
+          </a:prstGeom>
+          <a:noFill/>
+          <a:ln/>
+        </p:spPr>
+        <p:txBody>
+          <a:bodyPr wrap="square" lIns="0" tIns="0" rIns="0" bIns="0" rtlCol="0" anchor="ctr"/>
+          <a:lstStyle/>
+          <a:p>
+            <a:pPr indent="0" marL="0">
+              <a:lnSpc>
+                <a:spcPct val="115000"/>
+              </a:lnSpc>
+              <a:buNone/>
+            </a:pPr>
+            <a:r>
+              <a:rPr lang="en-US" sz="1150" dirty="0">
+                <a:solidFill>
+                  <a:srgbClr val="23201D"/>
+                </a:solidFill>
+                <a:latin typeface="Consolas" pitchFamily="34" charset="0"/>
+                <a:ea typeface="Consolas" pitchFamily="34" charset="-122"/>
+                <a:cs typeface="Consolas" pitchFamily="34" charset="-120"/>
+              </a:rPr>
+              <a:t>要。金額が確定するため、社長が承認してから提出</a:t>
+            </a:r>
+            <a:endParaRPr lang="en-US" sz="1150" dirty="0"/>
+          </a:p>
+        </p:txBody>
+      </p:sp>
+      <p:sp>
+        <p:nvSpPr>
+          <p:cNvPr id="19" name="Text 17"/>
+          <p:cNvSpPr txBox="1"/>
+          <p:nvPr/>
+        </p:nvSpPr>
+        <p:spPr>
+          <a:xfrm>
+            <a:off x="777240" y="5769864"/>
+            <a:ext cx="10607040" cy="548640"/>
+          </a:xfrm>
+          <a:prstGeom prst="rect">
+            <a:avLst/>
+          </a:prstGeom>
+          <a:noFill/>
+          <a:ln/>
+        </p:spPr>
+        <p:txBody>
+          <a:bodyPr wrap="square" lIns="0" tIns="0" rIns="0" bIns="0" rtlCol="0" anchor="ctr"/>
+          <a:lstStyle/>
+          <a:p>
+            <a:pPr indent="0" marL="0">
+              <a:lnSpc>
+                <a:spcPct val="135000"/>
+              </a:lnSpc>
+              <a:buNone/>
+            </a:pPr>
+            <a:r>
+              <a:rPr lang="en-US" sz="1250" dirty="0">
                 <a:solidFill>
                   <a:srgbClr val="5A534A"/>
                 </a:solidFill>
@@ -4122,355 +6107,9 @@
                 <a:ea typeface="Yu Gothic" pitchFamily="34" charset="-122"/>
                 <a:cs typeface="Yu Gothic" pitchFamily="34" charset="-120"/>
               </a:rPr>
-              <a:t>AIに任せる／人が確認する／人がやる、に仕分けます</a:t>
-            </a:r>
-            <a:endParaRPr lang="en-US" sz="1200" dirty="0"/>
-          </a:p>
-        </p:txBody>
-      </p:sp>
-      <p:sp>
-        <p:nvSpPr>
-          <p:cNvPr id="10" name="Shape 8"/>
-          <p:cNvSpPr/>
-          <p:nvPr/>
-        </p:nvSpPr>
-        <p:spPr>
-          <a:xfrm>
-            <a:off x="4389120" y="2240280"/>
-            <a:ext cx="3383280" cy="2697480"/>
-          </a:xfrm>
-          <a:prstGeom prst="rect">
-            <a:avLst/>
-          </a:prstGeom>
-          <a:solidFill>
-            <a:srgbClr val="FFFFFF"/>
-          </a:solidFill>
-          <a:ln w="12700">
-            <a:solidFill>
-              <a:srgbClr val="EDE7DB"/>
-            </a:solidFill>
-            <a:prstDash val="solid"/>
-          </a:ln>
-        </p:spPr>
-      </p:sp>
-      <p:sp>
-        <p:nvSpPr>
-          <p:cNvPr id="11" name="Shape 9"/>
-          <p:cNvSpPr/>
-          <p:nvPr/>
-        </p:nvSpPr>
-        <p:spPr>
-          <a:xfrm>
-            <a:off x="4663440" y="2487168"/>
-            <a:ext cx="438912" cy="438912"/>
-          </a:xfrm>
-          <a:prstGeom prst="ellipse">
-            <a:avLst/>
-          </a:prstGeom>
-          <a:solidFill>
-            <a:srgbClr val="2F4F6B"/>
-          </a:solidFill>
-          <a:ln w="12700">
-            <a:solidFill>
-              <a:srgbClr val="2F4F6B"/>
-            </a:solidFill>
-            <a:prstDash val="solid"/>
-          </a:ln>
-        </p:spPr>
-      </p:sp>
-      <p:sp>
-        <p:nvSpPr>
-          <p:cNvPr id="12" name="Text 10"/>
-          <p:cNvSpPr txBox="1"/>
-          <p:nvPr/>
-        </p:nvSpPr>
-        <p:spPr>
-          <a:xfrm>
-            <a:off x="4663440" y="2487168"/>
-            <a:ext cx="438912" cy="438912"/>
-          </a:xfrm>
-          <a:prstGeom prst="rect">
-            <a:avLst/>
-          </a:prstGeom>
-          <a:noFill/>
-          <a:ln/>
-        </p:spPr>
-        <p:txBody>
-          <a:bodyPr wrap="square" lIns="0" tIns="0" rIns="0" bIns="0" rtlCol="0" anchor="ctr"/>
-          <a:lstStyle/>
-          <a:p>
-            <a:pPr algn="ctr" indent="0" marL="0">
-              <a:buNone/>
-            </a:pPr>
-            <a:r>
-              <a:rPr lang="en-US" sz="1400" b="1" dirty="0">
-                <a:solidFill>
-                  <a:srgbClr val="FFFFFF"/>
-                </a:solidFill>
-                <a:latin typeface="Yu Gothic" pitchFamily="34" charset="0"/>
-                <a:ea typeface="Yu Gothic" pitchFamily="34" charset="-122"/>
-                <a:cs typeface="Yu Gothic" pitchFamily="34" charset="-120"/>
-              </a:rPr>
-              <a:t>2</a:t>
-            </a:r>
-            <a:endParaRPr lang="en-US" sz="1400" dirty="0"/>
-          </a:p>
-        </p:txBody>
-      </p:sp>
-      <p:sp>
-        <p:nvSpPr>
-          <p:cNvPr id="13" name="Text 11"/>
-          <p:cNvSpPr txBox="1"/>
-          <p:nvPr/>
-        </p:nvSpPr>
-        <p:spPr>
-          <a:xfrm>
-            <a:off x="4663440" y="3035808"/>
-            <a:ext cx="2834640" cy="777240"/>
-          </a:xfrm>
-          <a:prstGeom prst="rect">
-            <a:avLst/>
-          </a:prstGeom>
-          <a:noFill/>
-          <a:ln/>
-        </p:spPr>
-        <p:txBody>
-          <a:bodyPr wrap="square" lIns="0" tIns="0" rIns="0" bIns="0" rtlCol="0" anchor="ctr"/>
-          <a:lstStyle/>
-          <a:p>
-            <a:pPr indent="0" marL="0">
-              <a:lnSpc>
-                <a:spcPct val="125000"/>
-              </a:lnSpc>
-              <a:buNone/>
-            </a:pPr>
-            <a:r>
-              <a:rPr lang="en-US" sz="1500" b="1" dirty="0">
-                <a:solidFill>
-                  <a:srgbClr val="23201D"/>
-                </a:solidFill>
-                <a:latin typeface="Yu Gothic" pitchFamily="34" charset="0"/>
-                <a:ea typeface="Yu Gothic" pitchFamily="34" charset="-122"/>
-                <a:cs typeface="Yu Gothic" pitchFamily="34" charset="-120"/>
-              </a:rPr>
-              <a:t>実際に流す</a:t>
-            </a:r>
-            <a:endParaRPr lang="en-US" sz="1500" dirty="0"/>
-          </a:p>
-        </p:txBody>
-      </p:sp>
-      <p:sp>
-        <p:nvSpPr>
-          <p:cNvPr id="14" name="Text 12"/>
-          <p:cNvSpPr txBox="1"/>
-          <p:nvPr/>
-        </p:nvSpPr>
-        <p:spPr>
-          <a:xfrm>
-            <a:off x="4663440" y="3822192"/>
-            <a:ext cx="2834640" cy="960120"/>
-          </a:xfrm>
-          <a:prstGeom prst="rect">
-            <a:avLst/>
-          </a:prstGeom>
-          <a:noFill/>
-          <a:ln/>
-        </p:spPr>
-        <p:txBody>
-          <a:bodyPr wrap="square" lIns="0" tIns="0" rIns="0" bIns="0" rtlCol="0" anchor="ctr"/>
-          <a:lstStyle/>
-          <a:p>
-            <a:pPr indent="0" marL="0">
-              <a:lnSpc>
-                <a:spcPct val="130000"/>
-              </a:lnSpc>
-              <a:buNone/>
-            </a:pPr>
-            <a:r>
-              <a:rPr lang="en-US" sz="1200" dirty="0">
-                <a:solidFill>
-                  <a:srgbClr val="5A534A"/>
-                </a:solidFill>
-                <a:latin typeface="Yu Gothic" pitchFamily="34" charset="0"/>
-                <a:ea typeface="Yu Gothic" pitchFamily="34" charset="-122"/>
-                <a:cs typeface="Yu Gothic" pitchFamily="34" charset="-120"/>
-              </a:rPr>
-              <a:t>動かしてみます</a:t>
-            </a:r>
-            <a:endParaRPr lang="en-US" sz="1200" dirty="0"/>
-          </a:p>
-        </p:txBody>
-      </p:sp>
-      <p:sp>
-        <p:nvSpPr>
-          <p:cNvPr id="15" name="Shape 13"/>
-          <p:cNvSpPr/>
-          <p:nvPr/>
-        </p:nvSpPr>
-        <p:spPr>
-          <a:xfrm>
-            <a:off x="8001000" y="2240280"/>
-            <a:ext cx="3383280" cy="2697480"/>
-          </a:xfrm>
-          <a:prstGeom prst="rect">
-            <a:avLst/>
-          </a:prstGeom>
-          <a:solidFill>
-            <a:srgbClr val="FFFFFF"/>
-          </a:solidFill>
-          <a:ln w="12700">
-            <a:solidFill>
-              <a:srgbClr val="EDE7DB"/>
-            </a:solidFill>
-            <a:prstDash val="solid"/>
-          </a:ln>
-        </p:spPr>
-      </p:sp>
-      <p:sp>
-        <p:nvSpPr>
-          <p:cNvPr id="16" name="Shape 14"/>
-          <p:cNvSpPr/>
-          <p:nvPr/>
-        </p:nvSpPr>
-        <p:spPr>
-          <a:xfrm>
-            <a:off x="8275320" y="2487168"/>
-            <a:ext cx="438912" cy="438912"/>
-          </a:xfrm>
-          <a:prstGeom prst="ellipse">
-            <a:avLst/>
-          </a:prstGeom>
-          <a:solidFill>
-            <a:srgbClr val="2F4F6B"/>
-          </a:solidFill>
-          <a:ln w="12700">
-            <a:solidFill>
-              <a:srgbClr val="2F4F6B"/>
-            </a:solidFill>
-            <a:prstDash val="solid"/>
-          </a:ln>
-        </p:spPr>
-      </p:sp>
-      <p:sp>
-        <p:nvSpPr>
-          <p:cNvPr id="17" name="Text 15"/>
-          <p:cNvSpPr txBox="1"/>
-          <p:nvPr/>
-        </p:nvSpPr>
-        <p:spPr>
-          <a:xfrm>
-            <a:off x="8275320" y="2487168"/>
-            <a:ext cx="438912" cy="438912"/>
-          </a:xfrm>
-          <a:prstGeom prst="rect">
-            <a:avLst/>
-          </a:prstGeom>
-          <a:noFill/>
-          <a:ln/>
-        </p:spPr>
-        <p:txBody>
-          <a:bodyPr wrap="square" lIns="0" tIns="0" rIns="0" bIns="0" rtlCol="0" anchor="ctr"/>
-          <a:lstStyle/>
-          <a:p>
-            <a:pPr algn="ctr" indent="0" marL="0">
-              <a:buNone/>
-            </a:pPr>
-            <a:r>
-              <a:rPr lang="en-US" sz="1400" b="1" dirty="0">
-                <a:solidFill>
-                  <a:srgbClr val="FFFFFF"/>
-                </a:solidFill>
-                <a:latin typeface="Yu Gothic" pitchFamily="34" charset="0"/>
-                <a:ea typeface="Yu Gothic" pitchFamily="34" charset="-122"/>
-                <a:cs typeface="Yu Gothic" pitchFamily="34" charset="-120"/>
-              </a:rPr>
-              <a:t>3</a:t>
-            </a:r>
-            <a:endParaRPr lang="en-US" sz="1400" dirty="0"/>
-          </a:p>
-        </p:txBody>
-      </p:sp>
-      <p:sp>
-        <p:nvSpPr>
-          <p:cNvPr id="18" name="Text 16"/>
-          <p:cNvSpPr txBox="1"/>
-          <p:nvPr/>
-        </p:nvSpPr>
-        <p:spPr>
-          <a:xfrm>
-            <a:off x="8275320" y="3035808"/>
-            <a:ext cx="2834640" cy="777240"/>
-          </a:xfrm>
-          <a:prstGeom prst="rect">
-            <a:avLst/>
-          </a:prstGeom>
-          <a:noFill/>
-          <a:ln/>
-        </p:spPr>
-        <p:txBody>
-          <a:bodyPr wrap="square" lIns="0" tIns="0" rIns="0" bIns="0" rtlCol="0" anchor="ctr"/>
-          <a:lstStyle/>
-          <a:p>
-            <a:pPr indent="0" marL="0">
-              <a:lnSpc>
-                <a:spcPct val="125000"/>
-              </a:lnSpc>
-              <a:buNone/>
-            </a:pPr>
-            <a:r>
-              <a:rPr lang="en-US" sz="1500" b="1" dirty="0">
-                <a:solidFill>
-                  <a:srgbClr val="23201D"/>
-                </a:solidFill>
-                <a:latin typeface="Yu Gothic" pitchFamily="34" charset="0"/>
-                <a:ea typeface="Yu Gothic" pitchFamily="34" charset="-122"/>
-                <a:cs typeface="Yu Gothic" pitchFamily="34" charset="-120"/>
-              </a:rPr>
-              <a:t>わざと壊す</a:t>
-            </a:r>
-            <a:endParaRPr lang="en-US" sz="1500" dirty="0"/>
-          </a:p>
-        </p:txBody>
-      </p:sp>
-      <p:sp>
-        <p:nvSpPr>
-          <p:cNvPr id="19" name="Text 17"/>
-          <p:cNvSpPr txBox="1"/>
-          <p:nvPr/>
-        </p:nvSpPr>
-        <p:spPr>
-          <a:xfrm>
-            <a:off x="8275320" y="3822192"/>
-            <a:ext cx="2834640" cy="960120"/>
-          </a:xfrm>
-          <a:prstGeom prst="rect">
-            <a:avLst/>
-          </a:prstGeom>
-          <a:noFill/>
-          <a:ln/>
-        </p:spPr>
-        <p:txBody>
-          <a:bodyPr wrap="square" lIns="0" tIns="0" rIns="0" bIns="0" rtlCol="0" anchor="ctr"/>
-          <a:lstStyle/>
-          <a:p>
-            <a:pPr indent="0" marL="0">
-              <a:lnSpc>
-                <a:spcPct val="130000"/>
-              </a:lnSpc>
-              <a:buNone/>
-            </a:pPr>
-            <a:r>
-              <a:rPr lang="en-US" sz="1200" dirty="0">
-                <a:solidFill>
-                  <a:srgbClr val="5A534A"/>
-                </a:solidFill>
-                <a:latin typeface="Yu Gothic" pitchFamily="34" charset="0"/>
-                <a:ea typeface="Yu Gothic" pitchFamily="34" charset="-122"/>
-                <a:cs typeface="Yu Gothic" pitchFamily="34" charset="-120"/>
-              </a:rPr>
-              <a:t>入力を1つ欠けさせます。壊れ方を見ていない設計は、本番で壊れます</a:t>
-            </a:r>
-            <a:endParaRPr lang="en-US" sz="1200" dirty="0"/>
+              <a:t>確認を最後にだけ置くと、そこまでに誤りが増幅しています。上流に1つ置くほうが、結果的に手間が減ります。</a:t>
+            </a:r>
+            <a:endParaRPr lang="en-US" sz="1250" dirty="0"/>
           </a:p>
         </p:txBody>
       </p:sp>
@@ -4482,8 +6121,8 @@
         </p:nvSpPr>
         <p:spPr>
           <a:xfrm>
-            <a:off x="777240" y="6355080"/>
-            <a:ext cx="7424928" cy="274320"/>
+            <a:off x="777240" y="6382512"/>
+            <a:ext cx="7424928" cy="256032"/>
           </a:xfrm>
           <a:prstGeom prst="rect">
             <a:avLst/>
@@ -4521,8 +6160,8 @@
         </p:nvSpPr>
         <p:spPr>
           <a:xfrm>
-            <a:off x="8202168" y="6355080"/>
-            <a:ext cx="3182112" cy="274320"/>
+            <a:off x="8202168" y="6382512"/>
+            <a:ext cx="3182112" cy="256032"/>
           </a:xfrm>
           <a:prstGeom prst="rect">
             <a:avLst/>
@@ -4546,7 +6185,7 @@
                 <a:ea typeface="Yu Gothic" pitchFamily="34" charset="-122"/>
                 <a:cs typeface="Yu Gothic" pitchFamily="34" charset="-120"/>
               </a:rPr>
-              <a:t>演習</a:t>
+              <a:t>あてはめ</a:t>
             </a:r>
             <a:endParaRPr lang="en-US" sz="900" dirty="0"/>
           </a:p>
@@ -4592,7 +6231,7 @@
         </p:nvSpPr>
         <p:spPr>
           <a:xfrm>
-            <a:off x="777240" y="822960"/>
+            <a:off x="777240" y="566928"/>
             <a:ext cx="10607040" cy="274320"/>
           </a:xfrm>
           <a:prstGeom prst="rect">
@@ -4611,13 +6250,13 @@
             <a:r>
               <a:rPr lang="en-US" sz="1100" b="1" spc="250" kern="0" dirty="0">
                 <a:solidFill>
-                  <a:srgbClr val="B04A2F"/>
-                </a:solidFill>
-                <a:latin typeface="Yu Gothic" pitchFamily="34" charset="0"/>
-                <a:ea typeface="Yu Gothic" pitchFamily="34" charset="-122"/>
-                <a:cs typeface="Yu Gothic" pitchFamily="34" charset="-120"/>
-              </a:rPr>
-              <a:t>ここだけは</a:t>
+                  <a:srgbClr val="8A8177"/>
+                </a:solidFill>
+                <a:latin typeface="Yu Gothic" pitchFamily="34" charset="0"/>
+                <a:ea typeface="Yu Gothic" pitchFamily="34" charset="-122"/>
+                <a:cs typeface="Yu Gothic" pitchFamily="34" charset="-120"/>
+              </a:rPr>
+              <a:t>実演 ①</a:t>
             </a:r>
             <a:endParaRPr lang="en-US" sz="1100" dirty="0"/>
           </a:p>
@@ -4631,24 +6270,24 @@
         </p:nvSpPr>
         <p:spPr>
           <a:xfrm>
-            <a:off x="777240" y="1188720"/>
-            <a:ext cx="9546336" cy="822960"/>
-          </a:xfrm>
-          <a:prstGeom prst="rect">
-            <a:avLst/>
-          </a:prstGeom>
-          <a:noFill/>
-          <a:ln/>
-        </p:spPr>
-        <p:txBody>
-          <a:bodyPr wrap="square" lIns="0" tIns="0" rIns="0" bIns="0" rtlCol="0" anchor="ctr"/>
-          <a:lstStyle/>
-          <a:p>
-            <a:pPr indent="0" marL="0">
-              <a:buNone/>
-            </a:pPr>
-            <a:r>
-              <a:rPr lang="en-US" sz="3000" b="1" dirty="0">
+            <a:off x="777240" y="896112"/>
+            <a:ext cx="10607040" cy="640080"/>
+          </a:xfrm>
+          <a:prstGeom prst="rect">
+            <a:avLst/>
+          </a:prstGeom>
+          <a:noFill/>
+          <a:ln/>
+        </p:spPr>
+        <p:txBody>
+          <a:bodyPr wrap="square" lIns="0" tIns="0" rIns="0" bIns="0" rtlCol="0" anchor="ctr"/>
+          <a:lstStyle/>
+          <a:p>
+            <a:pPr indent="0" marL="0">
+              <a:buNone/>
+            </a:pPr>
+            <a:r>
+              <a:rPr lang="en-US" sz="2600" b="1" dirty="0">
                 <a:solidFill>
                   <a:srgbClr val="23201D"/>
                 </a:solidFill>
@@ -4656,9 +6295,9 @@
                 <a:ea typeface="Yu Gothic" pitchFamily="34" charset="-122"/>
                 <a:cs typeface="Yu Gothic" pitchFamily="34" charset="-120"/>
               </a:rPr>
-              <a:t>実装は外に頼んでも構いません</a:t>
-            </a:r>
-            <a:endParaRPr lang="en-US" sz="3000" dirty="0"/>
+              <a:t>確認を最後にだけ置いた場合</a:t>
+            </a:r>
+            <a:endParaRPr lang="en-US" sz="2600" dirty="0"/>
           </a:p>
         </p:txBody>
       </p:sp>
@@ -4670,14 +6309,352 @@
         </p:nvSpPr>
         <p:spPr>
           <a:xfrm>
-            <a:off x="777240" y="2331720"/>
-            <a:ext cx="64008" cy="2011680"/>
+            <a:off x="777240" y="1691640"/>
+            <a:ext cx="4879238" cy="1371600"/>
           </a:xfrm>
           <a:prstGeom prst="rect">
             <a:avLst/>
           </a:prstGeom>
           <a:solidFill>
-            <a:srgbClr val="B04A2F"/>
+            <a:srgbClr val="EDE7DB"/>
+          </a:solidFill>
+          <a:ln w="15875">
+            <a:solidFill>
+              <a:srgbClr val="8A8177"/>
+            </a:solidFill>
+            <a:prstDash val="solid"/>
+          </a:ln>
+        </p:spPr>
+      </p:sp>
+      <p:sp>
+        <p:nvSpPr>
+          <p:cNvPr id="5" name="Text 3"/>
+          <p:cNvSpPr txBox="1"/>
+          <p:nvPr/>
+        </p:nvSpPr>
+        <p:spPr>
+          <a:xfrm>
+            <a:off x="1005840" y="1783080"/>
+            <a:ext cx="1828800" cy="274320"/>
+          </a:xfrm>
+          <a:prstGeom prst="rect">
+            <a:avLst/>
+          </a:prstGeom>
+          <a:noFill/>
+          <a:ln/>
+        </p:spPr>
+        <p:txBody>
+          <a:bodyPr wrap="square" lIns="0" tIns="0" rIns="0" bIns="0" rtlCol="0" anchor="ctr"/>
+          <a:lstStyle/>
+          <a:p>
+            <a:pPr indent="0" marL="0">
+              <a:buNone/>
+            </a:pPr>
+            <a:r>
+              <a:rPr lang="en-US" sz="1000" b="1" spc="200" kern="0" dirty="0">
+                <a:solidFill>
+                  <a:srgbClr val="8A8177"/>
+                </a:solidFill>
+                <a:latin typeface="Yu Gothic" pitchFamily="34" charset="0"/>
+                <a:ea typeface="Yu Gothic" pitchFamily="34" charset="-122"/>
+                <a:cs typeface="Yu Gothic" pitchFamily="34" charset="-120"/>
+              </a:rPr>
+              <a:t>入力</a:t>
+            </a:r>
+            <a:endParaRPr lang="en-US" sz="1000" dirty="0"/>
+          </a:p>
+        </p:txBody>
+      </p:sp>
+      <p:sp>
+        <p:nvSpPr>
+          <p:cNvPr id="6" name="Text 4"/>
+          <p:cNvSpPr txBox="1"/>
+          <p:nvPr/>
+        </p:nvSpPr>
+        <p:spPr>
+          <a:xfrm>
+            <a:off x="1005840" y="2084832"/>
+            <a:ext cx="4422038" cy="868680"/>
+          </a:xfrm>
+          <a:prstGeom prst="rect">
+            <a:avLst/>
+          </a:prstGeom>
+          <a:noFill/>
+          <a:ln/>
+        </p:spPr>
+        <p:txBody>
+          <a:bodyPr wrap="square" lIns="0" tIns="0" rIns="0" bIns="0" rtlCol="0" anchor="ctr"/>
+          <a:lstStyle/>
+          <a:p>
+            <a:pPr indent="0" marL="0">
+              <a:lnSpc>
+                <a:spcPct val="125000"/>
+              </a:lnSpc>
+              <a:buNone/>
+            </a:pPr>
+            <a:r>
+              <a:rPr lang="en-US" sz="1200" dirty="0">
+                <a:solidFill>
+                  <a:srgbClr val="23201D"/>
+                </a:solidFill>
+                <a:latin typeface="Consolas" pitchFamily="34" charset="0"/>
+                <a:ea typeface="Consolas" pitchFamily="34" charset="-122"/>
+                <a:cs typeface="Consolas" pitchFamily="34" charset="-120"/>
+              </a:rPr>
+              <a:t>工程1→2→3を通しで実行し、出てきたものを最後に確認</a:t>
+            </a:r>
+            <a:endParaRPr lang="en-US" sz="1200" dirty="0"/>
+          </a:p>
+        </p:txBody>
+      </p:sp>
+      <p:sp>
+        <p:nvSpPr>
+          <p:cNvPr id="7" name="Shape 5"/>
+          <p:cNvSpPr/>
+          <p:nvPr/>
+        </p:nvSpPr>
+        <p:spPr>
+          <a:xfrm>
+            <a:off x="6080760" y="1691640"/>
+            <a:ext cx="5303520" cy="3017520"/>
+          </a:xfrm>
+          <a:prstGeom prst="rect">
+            <a:avLst/>
+          </a:prstGeom>
+          <a:solidFill>
+            <a:srgbClr val="FFFFFF"/>
+          </a:solidFill>
+          <a:ln w="12700">
+            <a:solidFill>
+              <a:srgbClr val="EDE7DB"/>
+            </a:solidFill>
+            <a:prstDash val="solid"/>
+          </a:ln>
+        </p:spPr>
+      </p:sp>
+      <p:sp>
+        <p:nvSpPr>
+          <p:cNvPr id="8" name="Text 6"/>
+          <p:cNvSpPr txBox="1"/>
+          <p:nvPr/>
+        </p:nvSpPr>
+        <p:spPr>
+          <a:xfrm>
+            <a:off x="6309360" y="1783080"/>
+            <a:ext cx="2743200" cy="274320"/>
+          </a:xfrm>
+          <a:prstGeom prst="rect">
+            <a:avLst/>
+          </a:prstGeom>
+          <a:noFill/>
+          <a:ln/>
+        </p:spPr>
+        <p:txBody>
+          <a:bodyPr wrap="square" lIns="0" tIns="0" rIns="0" bIns="0" rtlCol="0" anchor="ctr"/>
+          <a:lstStyle/>
+          <a:p>
+            <a:pPr indent="0" marL="0">
+              <a:buNone/>
+            </a:pPr>
+            <a:r>
+              <a:rPr lang="en-US" sz="1000" b="1" spc="200" kern="0" dirty="0">
+                <a:solidFill>
+                  <a:srgbClr val="8A8177"/>
+                </a:solidFill>
+                <a:latin typeface="Yu Gothic" pitchFamily="34" charset="0"/>
+                <a:ea typeface="Yu Gothic" pitchFamily="34" charset="-122"/>
+                <a:cs typeface="Yu Gothic" pitchFamily="34" charset="-120"/>
+              </a:rPr>
+              <a:t>出てくるもの</a:t>
+            </a:r>
+            <a:endParaRPr lang="en-US" sz="1000" dirty="0"/>
+          </a:p>
+        </p:txBody>
+      </p:sp>
+      <p:sp>
+        <p:nvSpPr>
+          <p:cNvPr id="9" name="Text 7"/>
+          <p:cNvSpPr txBox="1"/>
+          <p:nvPr/>
+        </p:nvSpPr>
+        <p:spPr>
+          <a:xfrm>
+            <a:off x="6309360" y="2148840"/>
+            <a:ext cx="4846320" cy="566928"/>
+          </a:xfrm>
+          <a:prstGeom prst="rect">
+            <a:avLst/>
+          </a:prstGeom>
+          <a:noFill/>
+          <a:ln/>
+        </p:spPr>
+        <p:txBody>
+          <a:bodyPr wrap="square" lIns="0" tIns="0" rIns="0" bIns="0" rtlCol="0" anchor="ctr"/>
+          <a:lstStyle/>
+          <a:p>
+            <a:pPr indent="0" marL="0">
+              <a:lnSpc>
+                <a:spcPct val="125000"/>
+              </a:lnSpc>
+              <a:buNone/>
+            </a:pPr>
+            <a:r>
+              <a:rPr lang="en-US" sz="1250" dirty="0">
+                <a:solidFill>
+                  <a:srgbClr val="23201D"/>
+                </a:solidFill>
+                <a:latin typeface="Yu Gothic" pitchFamily="34" charset="0"/>
+                <a:ea typeface="Yu Gothic" pitchFamily="34" charset="-122"/>
+                <a:cs typeface="Yu Gothic" pitchFamily="34" charset="-120"/>
+              </a:rPr>
+              <a:t>・工程1で商品名を取り違えている</a:t>
+            </a:r>
+            <a:endParaRPr lang="en-US" sz="1250" dirty="0"/>
+          </a:p>
+        </p:txBody>
+      </p:sp>
+      <p:sp>
+        <p:nvSpPr>
+          <p:cNvPr id="10" name="Text 8"/>
+          <p:cNvSpPr txBox="1"/>
+          <p:nvPr/>
+        </p:nvSpPr>
+        <p:spPr>
+          <a:xfrm>
+            <a:off x="6309360" y="2752344"/>
+            <a:ext cx="4846320" cy="566928"/>
+          </a:xfrm>
+          <a:prstGeom prst="rect">
+            <a:avLst/>
+          </a:prstGeom>
+          <a:noFill/>
+          <a:ln/>
+        </p:spPr>
+        <p:txBody>
+          <a:bodyPr wrap="square" lIns="0" tIns="0" rIns="0" bIns="0" rtlCol="0" anchor="ctr"/>
+          <a:lstStyle/>
+          <a:p>
+            <a:pPr indent="0" marL="0">
+              <a:lnSpc>
+                <a:spcPct val="125000"/>
+              </a:lnSpc>
+              <a:buNone/>
+            </a:pPr>
+            <a:r>
+              <a:rPr lang="en-US" sz="1250" dirty="0">
+                <a:solidFill>
+                  <a:srgbClr val="23201D"/>
+                </a:solidFill>
+                <a:latin typeface="Yu Gothic" pitchFamily="34" charset="0"/>
+                <a:ea typeface="Yu Gothic" pitchFamily="34" charset="-122"/>
+                <a:cs typeface="Yu Gothic" pitchFamily="34" charset="-120"/>
+              </a:rPr>
+              <a:t>・その前提で工程2が金額を計算する</a:t>
+            </a:r>
+            <a:endParaRPr lang="en-US" sz="1250" dirty="0"/>
+          </a:p>
+        </p:txBody>
+      </p:sp>
+      <p:sp>
+        <p:nvSpPr>
+          <p:cNvPr id="11" name="Text 9"/>
+          <p:cNvSpPr txBox="1"/>
+          <p:nvPr/>
+        </p:nvSpPr>
+        <p:spPr>
+          <a:xfrm>
+            <a:off x="6309360" y="3355848"/>
+            <a:ext cx="4846320" cy="566928"/>
+          </a:xfrm>
+          <a:prstGeom prst="rect">
+            <a:avLst/>
+          </a:prstGeom>
+          <a:noFill/>
+          <a:ln/>
+        </p:spPr>
+        <p:txBody>
+          <a:bodyPr wrap="square" lIns="0" tIns="0" rIns="0" bIns="0" rtlCol="0" anchor="ctr"/>
+          <a:lstStyle/>
+          <a:p>
+            <a:pPr indent="0" marL="0">
+              <a:lnSpc>
+                <a:spcPct val="125000"/>
+              </a:lnSpc>
+              <a:buNone/>
+            </a:pPr>
+            <a:r>
+              <a:rPr lang="en-US" sz="1250" dirty="0">
+                <a:solidFill>
+                  <a:srgbClr val="23201D"/>
+                </a:solidFill>
+                <a:latin typeface="Yu Gothic" pitchFamily="34" charset="0"/>
+                <a:ea typeface="Yu Gothic" pitchFamily="34" charset="-122"/>
+                <a:cs typeface="Yu Gothic" pitchFamily="34" charset="-120"/>
+              </a:rPr>
+              <a:t>・工程3が、それらしい稟議書に仕上げる</a:t>
+            </a:r>
+            <a:endParaRPr lang="en-US" sz="1250" dirty="0"/>
+          </a:p>
+        </p:txBody>
+      </p:sp>
+      <p:sp>
+        <p:nvSpPr>
+          <p:cNvPr id="12" name="Text 10"/>
+          <p:cNvSpPr txBox="1"/>
+          <p:nvPr/>
+        </p:nvSpPr>
+        <p:spPr>
+          <a:xfrm>
+            <a:off x="6309360" y="3959352"/>
+            <a:ext cx="4846320" cy="566928"/>
+          </a:xfrm>
+          <a:prstGeom prst="rect">
+            <a:avLst/>
+          </a:prstGeom>
+          <a:noFill/>
+          <a:ln/>
+        </p:spPr>
+        <p:txBody>
+          <a:bodyPr wrap="square" lIns="0" tIns="0" rIns="0" bIns="0" rtlCol="0" anchor="ctr"/>
+          <a:lstStyle/>
+          <a:p>
+            <a:pPr indent="0" marL="0">
+              <a:lnSpc>
+                <a:spcPct val="125000"/>
+              </a:lnSpc>
+              <a:buNone/>
+            </a:pPr>
+            <a:r>
+              <a:rPr lang="en-US" sz="1250" dirty="0">
+                <a:solidFill>
+                  <a:srgbClr val="23201D"/>
+                </a:solidFill>
+                <a:latin typeface="Yu Gothic" pitchFamily="34" charset="0"/>
+                <a:ea typeface="Yu Gothic" pitchFamily="34" charset="-122"/>
+                <a:cs typeface="Yu Gothic" pitchFamily="34" charset="-120"/>
+              </a:rPr>
+              <a:t>・最後に見ても、もっともらしいので気づけない</a:t>
+            </a:r>
+            <a:endParaRPr lang="en-US" sz="1250" dirty="0"/>
+          </a:p>
+        </p:txBody>
+      </p:sp>
+      <p:sp>
+        <p:nvSpPr>
+          <p:cNvPr id="13" name="Shape 11"/>
+          <p:cNvSpPr/>
+          <p:nvPr/>
+        </p:nvSpPr>
+        <p:spPr>
+          <a:xfrm>
+            <a:off x="777240" y="3291840"/>
+            <a:ext cx="4879238" cy="1417320"/>
+          </a:xfrm>
+          <a:prstGeom prst="rect">
+            <a:avLst/>
+          </a:prstGeom>
+          <a:solidFill>
+            <a:srgbClr val="E4DFD5"/>
           </a:solidFill>
           <a:ln w="12700">
             <a:solidFill>
@@ -4689,14 +6666,14 @@
       </p:sp>
       <p:sp>
         <p:nvSpPr>
-          <p:cNvPr id="5" name="Text 3"/>
-          <p:cNvSpPr txBox="1"/>
-          <p:nvPr/>
-        </p:nvSpPr>
-        <p:spPr>
-          <a:xfrm>
-            <a:off x="1188720" y="2331720"/>
-            <a:ext cx="9966960" cy="2011680"/>
+          <p:cNvPr id="14" name="Text 12"/>
+          <p:cNvSpPr txBox="1"/>
+          <p:nvPr/>
+        </p:nvSpPr>
+        <p:spPr>
+          <a:xfrm>
+            <a:off x="1005840" y="3383280"/>
+            <a:ext cx="4422038" cy="1234440"/>
           </a:xfrm>
           <a:prstGeom prst="rect">
             <a:avLst/>
@@ -4710,12 +6687,12 @@
           <a:p>
             <a:pPr indent="0" marL="0">
               <a:lnSpc>
-                <a:spcPct val="160000"/>
+                <a:spcPct val="135000"/>
               </a:lnSpc>
               <a:buNone/>
             </a:pPr>
             <a:r>
-              <a:rPr lang="en-US" sz="1700" dirty="0">
+              <a:rPr lang="en-US" sz="1250" dirty="0">
                 <a:solidFill>
                   <a:srgbClr val="3F3933"/>
                 </a:solidFill>
@@ -4723,22 +6700,86 @@
                 <a:ea typeface="Yu Gothic" pitchFamily="34" charset="-122"/>
                 <a:cs typeface="Yu Gothic" pitchFamily="34" charset="-120"/>
               </a:rPr>
-              <a:t>設計ができることが目的です。自分で組むか、外に頼むかの判断ができるようになれば、それで十分です。</a:t>
-            </a:r>
-            <a:endParaRPr lang="en-US" sz="1700" dirty="0"/>
-          </a:p>
-        </p:txBody>
-      </p:sp>
-      <p:sp>
-        <p:nvSpPr>
-          <p:cNvPr id="6" name="Text 4"/>
-          <p:cNvSpPr txBox="1"/>
-          <p:nvPr/>
-        </p:nvSpPr>
-        <p:spPr>
-          <a:xfrm>
-            <a:off x="777240" y="6355080"/>
-            <a:ext cx="7424928" cy="274320"/>
+              <a:t>最後の出力は整っています。整っているからこそ、上流の誤りに気づけません。</a:t>
+            </a:r>
+            <a:endParaRPr lang="en-US" sz="1250" dirty="0"/>
+          </a:p>
+        </p:txBody>
+      </p:sp>
+      <p:sp>
+        <p:nvSpPr>
+          <p:cNvPr id="15" name="Shape 13"/>
+          <p:cNvSpPr/>
+          <p:nvPr/>
+        </p:nvSpPr>
+        <p:spPr>
+          <a:xfrm>
+            <a:off x="777240" y="4983480"/>
+            <a:ext cx="10607040" cy="685800"/>
+          </a:xfrm>
+          <a:prstGeom prst="rect">
+            <a:avLst/>
+          </a:prstGeom>
+          <a:solidFill>
+            <a:srgbClr val="8A8177"/>
+          </a:solidFill>
+          <a:ln w="12700">
+            <a:solidFill>
+              <a:srgbClr val="333333"/>
+            </a:solidFill>
+            <a:prstDash val="solid"/>
+          </a:ln>
+        </p:spPr>
+      </p:sp>
+      <p:sp>
+        <p:nvSpPr>
+          <p:cNvPr id="16" name="Text 14"/>
+          <p:cNvSpPr txBox="1"/>
+          <p:nvPr/>
+        </p:nvSpPr>
+        <p:spPr>
+          <a:xfrm>
+            <a:off x="1097280" y="4983480"/>
+            <a:ext cx="9966960" cy="685800"/>
+          </a:xfrm>
+          <a:prstGeom prst="rect">
+            <a:avLst/>
+          </a:prstGeom>
+          <a:noFill/>
+          <a:ln/>
+        </p:spPr>
+        <p:txBody>
+          <a:bodyPr wrap="square" lIns="0" tIns="0" rIns="0" bIns="0" rtlCol="0" anchor="ctr"/>
+          <a:lstStyle/>
+          <a:p>
+            <a:pPr indent="0" marL="0">
+              <a:buNone/>
+            </a:pPr>
+            <a:r>
+              <a:rPr lang="en-US" sz="1450" b="1" dirty="0">
+                <a:solidFill>
+                  <a:srgbClr val="FFFFFF"/>
+                </a:solidFill>
+                <a:latin typeface="Yu Gothic" pitchFamily="34" charset="0"/>
+                <a:ea typeface="Yu Gothic" pitchFamily="34" charset="-122"/>
+                <a:cs typeface="Yu Gothic" pitchFamily="34" charset="-120"/>
+              </a:rPr>
+              <a:t>整った出力ほど、上流の誤りが見えなくなります</a:t>
+            </a:r>
+            <a:endParaRPr lang="en-US" sz="1450" dirty="0"/>
+          </a:p>
+        </p:txBody>
+      </p:sp>
+      <p:sp>
+        <p:nvSpPr>
+          <p:cNvPr id="17" name="Text 15"/>
+          <p:cNvSpPr txBox="1"/>
+          <p:nvPr/>
+        </p:nvSpPr>
+        <p:spPr>
+          <a:xfrm>
+            <a:off x="777240" y="6382512"/>
+            <a:ext cx="7424928" cy="256032"/>
           </a:xfrm>
           <a:prstGeom prst="rect">
             <a:avLst/>
@@ -4770,14 +6811,14 @@
       </p:sp>
       <p:sp>
         <p:nvSpPr>
-          <p:cNvPr id="7" name="Text 5"/>
-          <p:cNvSpPr txBox="1"/>
-          <p:nvPr/>
-        </p:nvSpPr>
-        <p:spPr>
-          <a:xfrm>
-            <a:off x="8202168" y="6355080"/>
-            <a:ext cx="3182112" cy="274320"/>
+          <p:cNvPr id="18" name="Text 16"/>
+          <p:cNvSpPr txBox="1"/>
+          <p:nvPr/>
+        </p:nvSpPr>
+        <p:spPr>
+          <a:xfrm>
+            <a:off x="8202168" y="6382512"/>
+            <a:ext cx="3182112" cy="256032"/>
           </a:xfrm>
           <a:prstGeom prst="rect">
             <a:avLst/>
@@ -4801,7 +6842,7 @@
                 <a:ea typeface="Yu Gothic" pitchFamily="34" charset="-122"/>
                 <a:cs typeface="Yu Gothic" pitchFamily="34" charset="-120"/>
               </a:rPr>
-              <a:t>ここだけは</a:t>
+              <a:t>実演 ①</a:t>
             </a:r>
             <a:endParaRPr lang="en-US" sz="900" dirty="0"/>
           </a:p>
@@ -4821,7 +6862,7 @@
     <p:bg>
       <p:bgPr>
         <a:solidFill>
-          <a:srgbClr val="23201D"/>
+          <a:srgbClr val="F6F2EA"/>
         </a:solidFill>
       </p:bgPr>
     </p:bg>
@@ -4847,34 +6888,34 @@
         </p:nvSpPr>
         <p:spPr>
           <a:xfrm>
-            <a:off x="777240" y="1371600"/>
-            <a:ext cx="10607040" cy="365760"/>
-          </a:xfrm>
-          <a:prstGeom prst="rect">
-            <a:avLst/>
-          </a:prstGeom>
-          <a:noFill/>
-          <a:ln/>
-        </p:spPr>
-        <p:txBody>
-          <a:bodyPr wrap="square" lIns="0" tIns="0" rIns="0" bIns="0" rtlCol="0" anchor="ctr"/>
-          <a:lstStyle/>
-          <a:p>
-            <a:pPr indent="0" marL="0">
-              <a:buNone/>
-            </a:pPr>
-            <a:r>
-              <a:rPr lang="en-US" sz="1200" b="1" spc="300" kern="0" dirty="0">
-                <a:solidFill>
-                  <a:srgbClr val="B04A2F"/>
-                </a:solidFill>
-                <a:latin typeface="Yu Gothic" pitchFamily="34" charset="0"/>
-                <a:ea typeface="Yu Gothic" pitchFamily="34" charset="-122"/>
-                <a:cs typeface="Yu Gothic" pitchFamily="34" charset="-120"/>
-              </a:rPr>
-              <a:t>今日の宿題</a:t>
-            </a:r>
-            <a:endParaRPr lang="en-US" sz="1200" dirty="0"/>
+            <a:off x="777240" y="566928"/>
+            <a:ext cx="10607040" cy="274320"/>
+          </a:xfrm>
+          <a:prstGeom prst="rect">
+            <a:avLst/>
+          </a:prstGeom>
+          <a:noFill/>
+          <a:ln/>
+        </p:spPr>
+        <p:txBody>
+          <a:bodyPr wrap="square" lIns="0" tIns="0" rIns="0" bIns="0" rtlCol="0" anchor="ctr"/>
+          <a:lstStyle/>
+          <a:p>
+            <a:pPr indent="0" marL="0">
+              <a:buNone/>
+            </a:pPr>
+            <a:r>
+              <a:rPr lang="en-US" sz="1100" b="1" spc="250" kern="0" dirty="0">
+                <a:solidFill>
+                  <a:srgbClr val="3B6B4A"/>
+                </a:solidFill>
+                <a:latin typeface="Yu Gothic" pitchFamily="34" charset="0"/>
+                <a:ea typeface="Yu Gothic" pitchFamily="34" charset="-122"/>
+                <a:cs typeface="Yu Gothic" pitchFamily="34" charset="-120"/>
+              </a:rPr>
+              <a:t>実演 ②</a:t>
+            </a:r>
+            <a:endParaRPr lang="en-US" sz="1100" dirty="0"/>
           </a:p>
         </p:txBody>
       </p:sp>
@@ -4886,7 +6927,7 @@
         </p:nvSpPr>
         <p:spPr>
           <a:xfrm>
-            <a:off x="777240" y="1783080"/>
+            <a:off x="777240" y="896112"/>
             <a:ext cx="10607040" cy="640080"/>
           </a:xfrm>
           <a:prstGeom prst="rect">
@@ -4903,17 +6944,17 @@
               <a:buNone/>
             </a:pPr>
             <a:r>
-              <a:rPr lang="en-US" sz="3200" b="1" dirty="0">
-                <a:solidFill>
-                  <a:srgbClr val="FFFFFF"/>
-                </a:solidFill>
-                <a:latin typeface="Yu Gothic" pitchFamily="34" charset="0"/>
-                <a:ea typeface="Yu Gothic" pitchFamily="34" charset="-122"/>
-                <a:cs typeface="Yu Gothic" pitchFamily="34" charset="-120"/>
-              </a:rPr>
-              <a:t>ひとつだけ</a:t>
-            </a:r>
-            <a:endParaRPr lang="en-US" sz="3200" dirty="0"/>
+              <a:rPr lang="en-US" sz="2600" b="1" dirty="0">
+                <a:solidFill>
+                  <a:srgbClr val="23201D"/>
+                </a:solidFill>
+                <a:latin typeface="Yu Gothic" pitchFamily="34" charset="0"/>
+                <a:ea typeface="Yu Gothic" pitchFamily="34" charset="-122"/>
+                <a:cs typeface="Yu Gothic" pitchFamily="34" charset="-120"/>
+              </a:rPr>
+              <a:t>確認を最上流に置いた場合</a:t>
+            </a:r>
+            <a:endParaRPr lang="en-US" sz="2600" dirty="0"/>
           </a:p>
         </p:txBody>
       </p:sp>
@@ -4925,18 +6966,124 @@
         </p:nvSpPr>
         <p:spPr>
           <a:xfrm>
-            <a:off x="777240" y="2743200"/>
-            <a:ext cx="10607040" cy="1463040"/>
+            <a:off x="777240" y="1691640"/>
+            <a:ext cx="4879238" cy="1371600"/>
           </a:xfrm>
           <a:prstGeom prst="rect">
             <a:avLst/>
           </a:prstGeom>
           <a:solidFill>
-            <a:srgbClr val="2E2A26"/>
+            <a:srgbClr val="FFFFFF"/>
+          </a:solidFill>
+          <a:ln w="15875">
+            <a:solidFill>
+              <a:srgbClr val="3B6B4A"/>
+            </a:solidFill>
+            <a:prstDash val="solid"/>
+          </a:ln>
+        </p:spPr>
+      </p:sp>
+      <p:sp>
+        <p:nvSpPr>
+          <p:cNvPr id="5" name="Text 3"/>
+          <p:cNvSpPr txBox="1"/>
+          <p:nvPr/>
+        </p:nvSpPr>
+        <p:spPr>
+          <a:xfrm>
+            <a:off x="1005840" y="1783080"/>
+            <a:ext cx="1828800" cy="274320"/>
+          </a:xfrm>
+          <a:prstGeom prst="rect">
+            <a:avLst/>
+          </a:prstGeom>
+          <a:noFill/>
+          <a:ln/>
+        </p:spPr>
+        <p:txBody>
+          <a:bodyPr wrap="square" lIns="0" tIns="0" rIns="0" bIns="0" rtlCol="0" anchor="ctr"/>
+          <a:lstStyle/>
+          <a:p>
+            <a:pPr indent="0" marL="0">
+              <a:buNone/>
+            </a:pPr>
+            <a:r>
+              <a:rPr lang="en-US" sz="1000" b="1" spc="200" kern="0" dirty="0">
+                <a:solidFill>
+                  <a:srgbClr val="3B6B4A"/>
+                </a:solidFill>
+                <a:latin typeface="Yu Gothic" pitchFamily="34" charset="0"/>
+                <a:ea typeface="Yu Gothic" pitchFamily="34" charset="-122"/>
+                <a:cs typeface="Yu Gothic" pitchFamily="34" charset="-120"/>
+              </a:rPr>
+              <a:t>入力</a:t>
+            </a:r>
+            <a:endParaRPr lang="en-US" sz="1000" dirty="0"/>
+          </a:p>
+        </p:txBody>
+      </p:sp>
+      <p:sp>
+        <p:nvSpPr>
+          <p:cNvPr id="6" name="Text 4"/>
+          <p:cNvSpPr txBox="1"/>
+          <p:nvPr/>
+        </p:nvSpPr>
+        <p:spPr>
+          <a:xfrm>
+            <a:off x="1005840" y="2084832"/>
+            <a:ext cx="4422038" cy="868680"/>
+          </a:xfrm>
+          <a:prstGeom prst="rect">
+            <a:avLst/>
+          </a:prstGeom>
+          <a:noFill/>
+          <a:ln/>
+        </p:spPr>
+        <p:txBody>
+          <a:bodyPr wrap="square" lIns="0" tIns="0" rIns="0" bIns="0" rtlCol="0" anchor="ctr"/>
+          <a:lstStyle/>
+          <a:p>
+            <a:pPr indent="0" marL="0">
+              <a:lnSpc>
+                <a:spcPct val="125000"/>
+              </a:lnSpc>
+              <a:buNone/>
+            </a:pPr>
+            <a:r>
+              <a:rPr lang="en-US" sz="1200" dirty="0">
+                <a:solidFill>
+                  <a:srgbClr val="23201D"/>
+                </a:solidFill>
+                <a:latin typeface="Consolas" pitchFamily="34" charset="0"/>
+                <a:ea typeface="Consolas" pitchFamily="34" charset="-122"/>
+                <a:cs typeface="Consolas" pitchFamily="34" charset="-120"/>
+              </a:rPr>
+              <a:t>工程1の直後に人が1回見る。以降は通しで実行</a:t>
+            </a:r>
+            <a:endParaRPr lang="en-US" sz="1200" dirty="0"/>
+          </a:p>
+        </p:txBody>
+      </p:sp>
+      <p:sp>
+        <p:nvSpPr>
+          <p:cNvPr id="7" name="Shape 5"/>
+          <p:cNvSpPr/>
+          <p:nvPr/>
+        </p:nvSpPr>
+        <p:spPr>
+          <a:xfrm>
+            <a:off x="6080760" y="1691640"/>
+            <a:ext cx="5303520" cy="3017520"/>
+          </a:xfrm>
+          <a:prstGeom prst="rect">
+            <a:avLst/>
+          </a:prstGeom>
+          <a:solidFill>
+            <a:srgbClr val="FFFFFF"/>
           </a:solidFill>
           <a:ln w="12700">
             <a:solidFill>
-              <a:srgbClr val="B04A2F"/>
+              <a:srgbClr val="EDE7DB"/>
             </a:solidFill>
             <a:prstDash val="solid"/>
           </a:ln>
@@ -4944,14 +7091,604 @@
       </p:sp>
       <p:sp>
         <p:nvSpPr>
+          <p:cNvPr id="8" name="Text 6"/>
+          <p:cNvSpPr txBox="1"/>
+          <p:nvPr/>
+        </p:nvSpPr>
+        <p:spPr>
+          <a:xfrm>
+            <a:off x="6309360" y="1783080"/>
+            <a:ext cx="2743200" cy="274320"/>
+          </a:xfrm>
+          <a:prstGeom prst="rect">
+            <a:avLst/>
+          </a:prstGeom>
+          <a:noFill/>
+          <a:ln/>
+        </p:spPr>
+        <p:txBody>
+          <a:bodyPr wrap="square" lIns="0" tIns="0" rIns="0" bIns="0" rtlCol="0" anchor="ctr"/>
+          <a:lstStyle/>
+          <a:p>
+            <a:pPr indent="0" marL="0">
+              <a:buNone/>
+            </a:pPr>
+            <a:r>
+              <a:rPr lang="en-US" sz="1000" b="1" spc="200" kern="0" dirty="0">
+                <a:solidFill>
+                  <a:srgbClr val="8A8177"/>
+                </a:solidFill>
+                <a:latin typeface="Yu Gothic" pitchFamily="34" charset="0"/>
+                <a:ea typeface="Yu Gothic" pitchFamily="34" charset="-122"/>
+                <a:cs typeface="Yu Gothic" pitchFamily="34" charset="-120"/>
+              </a:rPr>
+              <a:t>出てくるもの</a:t>
+            </a:r>
+            <a:endParaRPr lang="en-US" sz="1000" dirty="0"/>
+          </a:p>
+        </p:txBody>
+      </p:sp>
+      <p:sp>
+        <p:nvSpPr>
+          <p:cNvPr id="9" name="Text 7"/>
+          <p:cNvSpPr txBox="1"/>
+          <p:nvPr/>
+        </p:nvSpPr>
+        <p:spPr>
+          <a:xfrm>
+            <a:off x="6309360" y="2148840"/>
+            <a:ext cx="4846320" cy="566928"/>
+          </a:xfrm>
+          <a:prstGeom prst="rect">
+            <a:avLst/>
+          </a:prstGeom>
+          <a:noFill/>
+          <a:ln/>
+        </p:spPr>
+        <p:txBody>
+          <a:bodyPr wrap="square" lIns="0" tIns="0" rIns="0" bIns="0" rtlCol="0" anchor="ctr"/>
+          <a:lstStyle/>
+          <a:p>
+            <a:pPr indent="0" marL="0">
+              <a:lnSpc>
+                <a:spcPct val="125000"/>
+              </a:lnSpc>
+              <a:buNone/>
+            </a:pPr>
+            <a:r>
+              <a:rPr lang="en-US" sz="1250" dirty="0">
+                <a:solidFill>
+                  <a:srgbClr val="23201D"/>
+                </a:solidFill>
+                <a:latin typeface="Yu Gothic" pitchFamily="34" charset="0"/>
+                <a:ea typeface="Yu Gothic" pitchFamily="34" charset="-122"/>
+                <a:cs typeface="Yu Gothic" pitchFamily="34" charset="-120"/>
+              </a:rPr>
+              <a:t>・取り違えが、30秒で見つかる</a:t>
+            </a:r>
+            <a:endParaRPr lang="en-US" sz="1250" dirty="0"/>
+          </a:p>
+        </p:txBody>
+      </p:sp>
+      <p:sp>
+        <p:nvSpPr>
+          <p:cNvPr id="10" name="Text 8"/>
+          <p:cNvSpPr txBox="1"/>
+          <p:nvPr/>
+        </p:nvSpPr>
+        <p:spPr>
+          <a:xfrm>
+            <a:off x="6309360" y="2752344"/>
+            <a:ext cx="4846320" cy="566928"/>
+          </a:xfrm>
+          <a:prstGeom prst="rect">
+            <a:avLst/>
+          </a:prstGeom>
+          <a:noFill/>
+          <a:ln/>
+        </p:spPr>
+        <p:txBody>
+          <a:bodyPr wrap="square" lIns="0" tIns="0" rIns="0" bIns="0" rtlCol="0" anchor="ctr"/>
+          <a:lstStyle/>
+          <a:p>
+            <a:pPr indent="0" marL="0">
+              <a:lnSpc>
+                <a:spcPct val="125000"/>
+              </a:lnSpc>
+              <a:buNone/>
+            </a:pPr>
+            <a:r>
+              <a:rPr lang="en-US" sz="1250" dirty="0">
+                <a:solidFill>
+                  <a:srgbClr val="23201D"/>
+                </a:solidFill>
+                <a:latin typeface="Yu Gothic" pitchFamily="34" charset="0"/>
+                <a:ea typeface="Yu Gothic" pitchFamily="34" charset="-122"/>
+                <a:cs typeface="Yu Gothic" pitchFamily="34" charset="-120"/>
+              </a:rPr>
+              <a:t>・以降の工程はすべて正しい前提で動く</a:t>
+            </a:r>
+            <a:endParaRPr lang="en-US" sz="1250" dirty="0"/>
+          </a:p>
+        </p:txBody>
+      </p:sp>
+      <p:sp>
+        <p:nvSpPr>
+          <p:cNvPr id="11" name="Text 9"/>
+          <p:cNvSpPr txBox="1"/>
+          <p:nvPr/>
+        </p:nvSpPr>
+        <p:spPr>
+          <a:xfrm>
+            <a:off x="6309360" y="3355848"/>
+            <a:ext cx="4846320" cy="566928"/>
+          </a:xfrm>
+          <a:prstGeom prst="rect">
+            <a:avLst/>
+          </a:prstGeom>
+          <a:noFill/>
+          <a:ln/>
+        </p:spPr>
+        <p:txBody>
+          <a:bodyPr wrap="square" lIns="0" tIns="0" rIns="0" bIns="0" rtlCol="0" anchor="ctr"/>
+          <a:lstStyle/>
+          <a:p>
+            <a:pPr indent="0" marL="0">
+              <a:lnSpc>
+                <a:spcPct val="125000"/>
+              </a:lnSpc>
+              <a:buNone/>
+            </a:pPr>
+            <a:r>
+              <a:rPr lang="en-US" sz="1250" dirty="0">
+                <a:solidFill>
+                  <a:srgbClr val="23201D"/>
+                </a:solidFill>
+                <a:latin typeface="Yu Gothic" pitchFamily="34" charset="0"/>
+                <a:ea typeface="Yu Gothic" pitchFamily="34" charset="-122"/>
+                <a:cs typeface="Yu Gothic" pitchFamily="34" charset="-120"/>
+              </a:rPr>
+              <a:t>・確認は1回だけで済む</a:t>
+            </a:r>
+            <a:endParaRPr lang="en-US" sz="1250" dirty="0"/>
+          </a:p>
+        </p:txBody>
+      </p:sp>
+      <p:sp>
+        <p:nvSpPr>
+          <p:cNvPr id="12" name="Text 10"/>
+          <p:cNvSpPr txBox="1"/>
+          <p:nvPr/>
+        </p:nvSpPr>
+        <p:spPr>
+          <a:xfrm>
+            <a:off x="6309360" y="3959352"/>
+            <a:ext cx="4846320" cy="566928"/>
+          </a:xfrm>
+          <a:prstGeom prst="rect">
+            <a:avLst/>
+          </a:prstGeom>
+          <a:noFill/>
+          <a:ln/>
+        </p:spPr>
+        <p:txBody>
+          <a:bodyPr wrap="square" lIns="0" tIns="0" rIns="0" bIns="0" rtlCol="0" anchor="ctr"/>
+          <a:lstStyle/>
+          <a:p>
+            <a:pPr indent="0" marL="0">
+              <a:lnSpc>
+                <a:spcPct val="125000"/>
+              </a:lnSpc>
+              <a:buNone/>
+            </a:pPr>
+            <a:r>
+              <a:rPr lang="en-US" sz="1250" dirty="0">
+                <a:solidFill>
+                  <a:srgbClr val="23201D"/>
+                </a:solidFill>
+                <a:latin typeface="Yu Gothic" pitchFamily="34" charset="0"/>
+                <a:ea typeface="Yu Gothic" pitchFamily="34" charset="-122"/>
+                <a:cs typeface="Yu Gothic" pitchFamily="34" charset="-120"/>
+              </a:rPr>
+              <a:t>・事故が起きなくなる</a:t>
+            </a:r>
+            <a:endParaRPr lang="en-US" sz="1250" dirty="0"/>
+          </a:p>
+        </p:txBody>
+      </p:sp>
+      <p:sp>
+        <p:nvSpPr>
+          <p:cNvPr id="13" name="Shape 11"/>
+          <p:cNvSpPr/>
+          <p:nvPr/>
+        </p:nvSpPr>
+        <p:spPr>
+          <a:xfrm>
+            <a:off x="777240" y="3291840"/>
+            <a:ext cx="4879238" cy="1417320"/>
+          </a:xfrm>
+          <a:prstGeom prst="rect">
+            <a:avLst/>
+          </a:prstGeom>
+          <a:solidFill>
+            <a:srgbClr val="E7F0E9"/>
+          </a:solidFill>
+          <a:ln w="12700">
+            <a:solidFill>
+              <a:srgbClr val="333333"/>
+            </a:solidFill>
+            <a:prstDash val="solid"/>
+          </a:ln>
+        </p:spPr>
+      </p:sp>
+      <p:sp>
+        <p:nvSpPr>
+          <p:cNvPr id="14" name="Text 12"/>
+          <p:cNvSpPr txBox="1"/>
+          <p:nvPr/>
+        </p:nvSpPr>
+        <p:spPr>
+          <a:xfrm>
+            <a:off x="1005840" y="3383280"/>
+            <a:ext cx="4422038" cy="1234440"/>
+          </a:xfrm>
+          <a:prstGeom prst="rect">
+            <a:avLst/>
+          </a:prstGeom>
+          <a:noFill/>
+          <a:ln/>
+        </p:spPr>
+        <p:txBody>
+          <a:bodyPr wrap="square" lIns="0" tIns="0" rIns="0" bIns="0" rtlCol="0" anchor="ctr"/>
+          <a:lstStyle/>
+          <a:p>
+            <a:pPr indent="0" marL="0">
+              <a:lnSpc>
+                <a:spcPct val="135000"/>
+              </a:lnSpc>
+              <a:buNone/>
+            </a:pPr>
+            <a:r>
+              <a:rPr lang="en-US" sz="1250" dirty="0">
+                <a:solidFill>
+                  <a:srgbClr val="3F3933"/>
+                </a:solidFill>
+                <a:latin typeface="Yu Gothic" pitchFamily="34" charset="0"/>
+                <a:ea typeface="Yu Gothic" pitchFamily="34" charset="-122"/>
+                <a:cs typeface="Yu Gothic" pitchFamily="34" charset="-120"/>
+              </a:rPr>
+              <a:t>確認の回数を増やすのではなく、置く場所を変えるだけです。手間は増えません。</a:t>
+            </a:r>
+            <a:endParaRPr lang="en-US" sz="1250" dirty="0"/>
+          </a:p>
+        </p:txBody>
+      </p:sp>
+      <p:sp>
+        <p:nvSpPr>
+          <p:cNvPr id="15" name="Shape 13"/>
+          <p:cNvSpPr/>
+          <p:nvPr/>
+        </p:nvSpPr>
+        <p:spPr>
+          <a:xfrm>
+            <a:off x="777240" y="4983480"/>
+            <a:ext cx="10607040" cy="685800"/>
+          </a:xfrm>
+          <a:prstGeom prst="rect">
+            <a:avLst/>
+          </a:prstGeom>
+          <a:solidFill>
+            <a:srgbClr val="3B6B4A"/>
+          </a:solidFill>
+          <a:ln w="12700">
+            <a:solidFill>
+              <a:srgbClr val="333333"/>
+            </a:solidFill>
+            <a:prstDash val="solid"/>
+          </a:ln>
+        </p:spPr>
+      </p:sp>
+      <p:sp>
+        <p:nvSpPr>
+          <p:cNvPr id="16" name="Text 14"/>
+          <p:cNvSpPr txBox="1"/>
+          <p:nvPr/>
+        </p:nvSpPr>
+        <p:spPr>
+          <a:xfrm>
+            <a:off x="1097280" y="4983480"/>
+            <a:ext cx="9966960" cy="685800"/>
+          </a:xfrm>
+          <a:prstGeom prst="rect">
+            <a:avLst/>
+          </a:prstGeom>
+          <a:noFill/>
+          <a:ln/>
+        </p:spPr>
+        <p:txBody>
+          <a:bodyPr wrap="square" lIns="0" tIns="0" rIns="0" bIns="0" rtlCol="0" anchor="ctr"/>
+          <a:lstStyle/>
+          <a:p>
+            <a:pPr indent="0" marL="0">
+              <a:buNone/>
+            </a:pPr>
+            <a:r>
+              <a:rPr lang="en-US" sz="1450" b="1" dirty="0">
+                <a:solidFill>
+                  <a:srgbClr val="FFFFFF"/>
+                </a:solidFill>
+                <a:latin typeface="Yu Gothic" pitchFamily="34" charset="0"/>
+                <a:ea typeface="Yu Gothic" pitchFamily="34" charset="-122"/>
+                <a:cs typeface="Yu Gothic" pitchFamily="34" charset="-120"/>
+              </a:rPr>
+              <a:t>確認は「回数」ではなく「位置」で効きます</a:t>
+            </a:r>
+            <a:endParaRPr lang="en-US" sz="1450" dirty="0"/>
+          </a:p>
+        </p:txBody>
+      </p:sp>
+      <p:sp>
+        <p:nvSpPr>
+          <p:cNvPr id="17" name="Text 15"/>
+          <p:cNvSpPr txBox="1"/>
+          <p:nvPr/>
+        </p:nvSpPr>
+        <p:spPr>
+          <a:xfrm>
+            <a:off x="777240" y="6382512"/>
+            <a:ext cx="7424928" cy="256032"/>
+          </a:xfrm>
+          <a:prstGeom prst="rect">
+            <a:avLst/>
+          </a:prstGeom>
+          <a:noFill/>
+          <a:ln/>
+        </p:spPr>
+        <p:txBody>
+          <a:bodyPr wrap="square" lIns="0" tIns="0" rIns="0" bIns="0" rtlCol="0" anchor="ctr"/>
+          <a:lstStyle/>
+          <a:p>
+            <a:pPr indent="0" marL="0">
+              <a:buNone/>
+            </a:pPr>
+            <a:r>
+              <a:rPr lang="en-US" sz="900" dirty="0">
+                <a:solidFill>
+                  <a:srgbClr val="8A8177"/>
+                </a:solidFill>
+                <a:latin typeface="Yu Gothic" pitchFamily="34" charset="0"/>
+                <a:ea typeface="Yu Gothic" pitchFamily="34" charset="-122"/>
+                <a:cs typeface="Yu Gothic" pitchFamily="34" charset="-120"/>
+              </a:rPr>
+              <a:t>第9回　複数の工程をまとめて任せる</a:t>
+            </a:r>
+            <a:endParaRPr lang="en-US" sz="900" dirty="0"/>
+          </a:p>
+        </p:txBody>
+      </p:sp>
+      <p:sp>
+        <p:nvSpPr>
+          <p:cNvPr id="18" name="Text 16"/>
+          <p:cNvSpPr txBox="1"/>
+          <p:nvPr/>
+        </p:nvSpPr>
+        <p:spPr>
+          <a:xfrm>
+            <a:off x="8202168" y="6382512"/>
+            <a:ext cx="3182112" cy="256032"/>
+          </a:xfrm>
+          <a:prstGeom prst="rect">
+            <a:avLst/>
+          </a:prstGeom>
+          <a:noFill/>
+          <a:ln/>
+        </p:spPr>
+        <p:txBody>
+          <a:bodyPr wrap="square" lIns="0" tIns="0" rIns="0" bIns="0" rtlCol="0" anchor="ctr"/>
+          <a:lstStyle/>
+          <a:p>
+            <a:pPr algn="r" indent="0" marL="0">
+              <a:buNone/>
+            </a:pPr>
+            <a:r>
+              <a:rPr lang="en-US" sz="900" dirty="0">
+                <a:solidFill>
+                  <a:srgbClr val="8A8177"/>
+                </a:solidFill>
+                <a:latin typeface="Yu Gothic" pitchFamily="34" charset="0"/>
+                <a:ea typeface="Yu Gothic" pitchFamily="34" charset="-122"/>
+                <a:cs typeface="Yu Gothic" pitchFamily="34" charset="-120"/>
+              </a:rPr>
+              <a:t>実演 ②</a:t>
+            </a:r>
+            <a:endParaRPr lang="en-US" sz="900" dirty="0"/>
+          </a:p>
+        </p:txBody>
+      </p:sp>
+    </p:spTree>
+  </p:cSld>
+  <p:clrMapOvr>
+    <a:masterClrMapping/>
+  </p:clrMapOvr>
+</p:sld>
+</file>
+
+<file path=ppt/slides/slide8.xml><?xml version="1.0" encoding="utf-8"?>
+<p:sld xmlns:a="http://schemas.openxmlformats.org/drawingml/2006/main" xmlns:r="http://schemas.openxmlformats.org/officeDocument/2006/relationships" xmlns:p="http://schemas.openxmlformats.org/presentationml/2006/main">
+  <p:cSld name="Slide 8">
+    <p:bg>
+      <p:bgPr>
+        <a:solidFill>
+          <a:srgbClr val="F6F2EA"/>
+        </a:solidFill>
+      </p:bgPr>
+    </p:bg>
+    <p:spTree>
+      <p:nvGrpSpPr>
+        <p:cNvPr id="1" name=""/>
+        <p:cNvGrpSpPr/>
+        <p:nvPr/>
+      </p:nvGrpSpPr>
+      <p:grpSpPr>
+        <a:xfrm>
+          <a:off x="0" y="0"/>
+          <a:ext cx="0" cy="0"/>
+          <a:chOff x="0" y="0"/>
+          <a:chExt cx="0" cy="0"/>
+        </a:xfrm>
+      </p:grpSpPr>
+      <p:sp>
+        <p:nvSpPr>
+          <p:cNvPr id="2" name="Text 0"/>
+          <p:cNvSpPr txBox="1"/>
+          <p:nvPr/>
+        </p:nvSpPr>
+        <p:spPr>
+          <a:xfrm>
+            <a:off x="777240" y="566928"/>
+            <a:ext cx="10607040" cy="274320"/>
+          </a:xfrm>
+          <a:prstGeom prst="rect">
+            <a:avLst/>
+          </a:prstGeom>
+          <a:noFill/>
+          <a:ln/>
+        </p:spPr>
+        <p:txBody>
+          <a:bodyPr wrap="square" lIns="0" tIns="0" rIns="0" bIns="0" rtlCol="0" anchor="ctr"/>
+          <a:lstStyle/>
+          <a:p>
+            <a:pPr indent="0" marL="0">
+              <a:buNone/>
+            </a:pPr>
+            <a:r>
+              <a:rPr lang="en-US" sz="1100" b="1" spc="250" kern="0" dirty="0">
+                <a:solidFill>
+                  <a:srgbClr val="B04A2F"/>
+                </a:solidFill>
+                <a:latin typeface="Yu Gothic" pitchFamily="34" charset="0"/>
+                <a:ea typeface="Yu Gothic" pitchFamily="34" charset="-122"/>
+                <a:cs typeface="Yu Gothic" pitchFamily="34" charset="-120"/>
+              </a:rPr>
+              <a:t>つまずきやすいところ</a:t>
+            </a:r>
+            <a:endParaRPr lang="en-US" sz="1100" dirty="0"/>
+          </a:p>
+        </p:txBody>
+      </p:sp>
+      <p:sp>
+        <p:nvSpPr>
+          <p:cNvPr id="3" name="Text 1"/>
+          <p:cNvSpPr txBox="1"/>
+          <p:nvPr/>
+        </p:nvSpPr>
+        <p:spPr>
+          <a:xfrm>
+            <a:off x="777240" y="896112"/>
+            <a:ext cx="10607040" cy="640080"/>
+          </a:xfrm>
+          <a:prstGeom prst="rect">
+            <a:avLst/>
+          </a:prstGeom>
+          <a:noFill/>
+          <a:ln/>
+        </p:spPr>
+        <p:txBody>
+          <a:bodyPr wrap="square" lIns="0" tIns="0" rIns="0" bIns="0" rtlCol="0" anchor="ctr"/>
+          <a:lstStyle/>
+          <a:p>
+            <a:pPr indent="0" marL="0">
+              <a:buNone/>
+            </a:pPr>
+            <a:r>
+              <a:rPr lang="en-US" sz="2600" b="1" dirty="0">
+                <a:solidFill>
+                  <a:srgbClr val="23201D"/>
+                </a:solidFill>
+                <a:latin typeface="Yu Gothic" pitchFamily="34" charset="0"/>
+                <a:ea typeface="Yu Gothic" pitchFamily="34" charset="-122"/>
+                <a:cs typeface="Yu Gothic" pitchFamily="34" charset="-120"/>
+              </a:rPr>
+              <a:t>この回で、よく起きること</a:t>
+            </a:r>
+            <a:endParaRPr lang="en-US" sz="2600" dirty="0"/>
+          </a:p>
+        </p:txBody>
+      </p:sp>
+      <p:sp>
+        <p:nvSpPr>
+          <p:cNvPr id="4" name="Shape 2"/>
+          <p:cNvSpPr/>
+          <p:nvPr/>
+        </p:nvSpPr>
+        <p:spPr>
+          <a:xfrm>
+            <a:off x="777240" y="1737360"/>
+            <a:ext cx="10607040" cy="1078992"/>
+          </a:xfrm>
+          <a:prstGeom prst="rect">
+            <a:avLst/>
+          </a:prstGeom>
+          <a:solidFill>
+            <a:srgbClr val="FFFFFF"/>
+          </a:solidFill>
+          <a:ln w="12700">
+            <a:solidFill>
+              <a:srgbClr val="EDE7DB"/>
+            </a:solidFill>
+            <a:prstDash val="solid"/>
+          </a:ln>
+        </p:spPr>
+      </p:sp>
+      <p:sp>
+        <p:nvSpPr>
           <p:cNvPr id="5" name="Text 3"/>
           <p:cNvSpPr txBox="1"/>
           <p:nvPr/>
         </p:nvSpPr>
         <p:spPr>
           <a:xfrm>
-            <a:off x="1234440" y="2880360"/>
-            <a:ext cx="9692640" cy="1188720"/>
+            <a:off x="1051560" y="1856232"/>
+            <a:ext cx="1463040" cy="256032"/>
+          </a:xfrm>
+          <a:prstGeom prst="rect">
+            <a:avLst/>
+          </a:prstGeom>
+          <a:noFill/>
+          <a:ln/>
+        </p:spPr>
+        <p:txBody>
+          <a:bodyPr wrap="square" lIns="0" tIns="0" rIns="0" bIns="0" rtlCol="0" anchor="ctr"/>
+          <a:lstStyle/>
+          <a:p>
+            <a:pPr indent="0" marL="0">
+              <a:buNone/>
+            </a:pPr>
+            <a:r>
+              <a:rPr lang="en-US" sz="900" b="1" spc="150" kern="0" dirty="0">
+                <a:solidFill>
+                  <a:srgbClr val="8A8177"/>
+                </a:solidFill>
+                <a:latin typeface="Yu Gothic" pitchFamily="34" charset="0"/>
+                <a:ea typeface="Yu Gothic" pitchFamily="34" charset="-122"/>
+                <a:cs typeface="Yu Gothic" pitchFamily="34" charset="-120"/>
+              </a:rPr>
+              <a:t>こうなったら</a:t>
+            </a:r>
+            <a:endParaRPr lang="en-US" sz="900" dirty="0"/>
+          </a:p>
+        </p:txBody>
+      </p:sp>
+      <p:sp>
+        <p:nvSpPr>
+          <p:cNvPr id="6" name="Text 4"/>
+          <p:cNvSpPr txBox="1"/>
+          <p:nvPr/>
+        </p:nvSpPr>
+        <p:spPr>
+          <a:xfrm>
+            <a:off x="1051560" y="2121408"/>
+            <a:ext cx="4454957" cy="566928"/>
           </a:xfrm>
           <a:prstGeom prst="rect">
             <a:avLst/>
@@ -4965,12 +7702,858 @@
           <a:p>
             <a:pPr indent="0" marL="0">
               <a:lnSpc>
-                <a:spcPct val="140000"/>
+                <a:spcPct val="120000"/>
               </a:lnSpc>
               <a:buNone/>
             </a:pPr>
             <a:r>
-              <a:rPr lang="en-US" sz="1900" b="1" dirty="0">
+              <a:rPr lang="en-US" sz="1350" b="1" dirty="0">
+                <a:solidFill>
+                  <a:srgbClr val="23201D"/>
+                </a:solidFill>
+                <a:latin typeface="Yu Gothic" pitchFamily="34" charset="0"/>
+                <a:ea typeface="Yu Gothic" pitchFamily="34" charset="-122"/>
+                <a:cs typeface="Yu Gothic" pitchFamily="34" charset="-120"/>
+              </a:rPr>
+              <a:t>一発でうまく動いてしまった</a:t>
+            </a:r>
+            <a:endParaRPr lang="en-US" sz="1350" dirty="0"/>
+          </a:p>
+        </p:txBody>
+      </p:sp>
+      <p:sp>
+        <p:nvSpPr>
+          <p:cNvPr id="7" name="Shape 5"/>
+          <p:cNvSpPr/>
+          <p:nvPr/>
+        </p:nvSpPr>
+        <p:spPr>
+          <a:xfrm>
+            <a:off x="5762549" y="1847088"/>
+            <a:ext cx="18288" cy="859536"/>
+          </a:xfrm>
+          <a:prstGeom prst="rect">
+            <a:avLst/>
+          </a:prstGeom>
+          <a:solidFill>
+            <a:srgbClr val="EDE7DB"/>
+          </a:solidFill>
+          <a:ln w="12700">
+            <a:solidFill>
+              <a:srgbClr val="333333"/>
+            </a:solidFill>
+            <a:prstDash val="solid"/>
+          </a:ln>
+        </p:spPr>
+      </p:sp>
+      <p:sp>
+        <p:nvSpPr>
+          <p:cNvPr id="8" name="Text 6"/>
+          <p:cNvSpPr txBox="1"/>
+          <p:nvPr/>
+        </p:nvSpPr>
+        <p:spPr>
+          <a:xfrm>
+            <a:off x="6080760" y="1856232"/>
+            <a:ext cx="1463040" cy="256032"/>
+          </a:xfrm>
+          <a:prstGeom prst="rect">
+            <a:avLst/>
+          </a:prstGeom>
+          <a:noFill/>
+          <a:ln/>
+        </p:spPr>
+        <p:txBody>
+          <a:bodyPr wrap="square" lIns="0" tIns="0" rIns="0" bIns="0" rtlCol="0" anchor="ctr"/>
+          <a:lstStyle/>
+          <a:p>
+            <a:pPr indent="0" marL="0">
+              <a:buNone/>
+            </a:pPr>
+            <a:r>
+              <a:rPr lang="en-US" sz="900" b="1" spc="150" kern="0" dirty="0">
+                <a:solidFill>
+                  <a:srgbClr val="B04A2F"/>
+                </a:solidFill>
+                <a:latin typeface="Yu Gothic" pitchFamily="34" charset="0"/>
+                <a:ea typeface="Yu Gothic" pitchFamily="34" charset="-122"/>
+                <a:cs typeface="Yu Gothic" pitchFamily="34" charset="-120"/>
+              </a:rPr>
+              <a:t>こうする</a:t>
+            </a:r>
+            <a:endParaRPr lang="en-US" sz="900" dirty="0"/>
+          </a:p>
+        </p:txBody>
+      </p:sp>
+      <p:sp>
+        <p:nvSpPr>
+          <p:cNvPr id="9" name="Text 7"/>
+          <p:cNvSpPr txBox="1"/>
+          <p:nvPr/>
+        </p:nvSpPr>
+        <p:spPr>
+          <a:xfrm>
+            <a:off x="6080760" y="2121408"/>
+            <a:ext cx="5091379" cy="566928"/>
+          </a:xfrm>
+          <a:prstGeom prst="rect">
+            <a:avLst/>
+          </a:prstGeom>
+          <a:noFill/>
+          <a:ln/>
+        </p:spPr>
+        <p:txBody>
+          <a:bodyPr wrap="square" lIns="0" tIns="0" rIns="0" bIns="0" rtlCol="0" anchor="ctr"/>
+          <a:lstStyle/>
+          <a:p>
+            <a:pPr indent="0" marL="0">
+              <a:lnSpc>
+                <a:spcPct val="125000"/>
+              </a:lnSpc>
+              <a:buNone/>
+            </a:pPr>
+            <a:r>
+              <a:rPr lang="en-US" sz="1250" dirty="0">
+                <a:solidFill>
+                  <a:srgbClr val="3F3933"/>
+                </a:solidFill>
+                <a:latin typeface="Yu Gothic" pitchFamily="34" charset="0"/>
+                <a:ea typeface="Yu Gothic" pitchFamily="34" charset="-122"/>
+                <a:cs typeface="Yu Gothic" pitchFamily="34" charset="-120"/>
+              </a:rPr>
+              <a:t>わざと壊します。入力を1つ欠けさせる、条件を矛盾させる。壊れ方を見ていない設計は、本番で壊れます</a:t>
+            </a:r>
+            <a:endParaRPr lang="en-US" sz="1250" dirty="0"/>
+          </a:p>
+        </p:txBody>
+      </p:sp>
+      <p:sp>
+        <p:nvSpPr>
+          <p:cNvPr id="10" name="Shape 8"/>
+          <p:cNvSpPr/>
+          <p:nvPr/>
+        </p:nvSpPr>
+        <p:spPr>
+          <a:xfrm>
+            <a:off x="777240" y="2944368"/>
+            <a:ext cx="10607040" cy="1078992"/>
+          </a:xfrm>
+          <a:prstGeom prst="rect">
+            <a:avLst/>
+          </a:prstGeom>
+          <a:solidFill>
+            <a:srgbClr val="FFFFFF"/>
+          </a:solidFill>
+          <a:ln w="12700">
+            <a:solidFill>
+              <a:srgbClr val="EDE7DB"/>
+            </a:solidFill>
+            <a:prstDash val="solid"/>
+          </a:ln>
+        </p:spPr>
+      </p:sp>
+      <p:sp>
+        <p:nvSpPr>
+          <p:cNvPr id="11" name="Text 9"/>
+          <p:cNvSpPr txBox="1"/>
+          <p:nvPr/>
+        </p:nvSpPr>
+        <p:spPr>
+          <a:xfrm>
+            <a:off x="1051560" y="3063240"/>
+            <a:ext cx="1463040" cy="256032"/>
+          </a:xfrm>
+          <a:prstGeom prst="rect">
+            <a:avLst/>
+          </a:prstGeom>
+          <a:noFill/>
+          <a:ln/>
+        </p:spPr>
+        <p:txBody>
+          <a:bodyPr wrap="square" lIns="0" tIns="0" rIns="0" bIns="0" rtlCol="0" anchor="ctr"/>
+          <a:lstStyle/>
+          <a:p>
+            <a:pPr indent="0" marL="0">
+              <a:buNone/>
+            </a:pPr>
+            <a:r>
+              <a:rPr lang="en-US" sz="900" b="1" spc="150" kern="0" dirty="0">
+                <a:solidFill>
+                  <a:srgbClr val="8A8177"/>
+                </a:solidFill>
+                <a:latin typeface="Yu Gothic" pitchFamily="34" charset="0"/>
+                <a:ea typeface="Yu Gothic" pitchFamily="34" charset="-122"/>
+                <a:cs typeface="Yu Gothic" pitchFamily="34" charset="-120"/>
+              </a:rPr>
+              <a:t>こうなったら</a:t>
+            </a:r>
+            <a:endParaRPr lang="en-US" sz="900" dirty="0"/>
+          </a:p>
+        </p:txBody>
+      </p:sp>
+      <p:sp>
+        <p:nvSpPr>
+          <p:cNvPr id="12" name="Text 10"/>
+          <p:cNvSpPr txBox="1"/>
+          <p:nvPr/>
+        </p:nvSpPr>
+        <p:spPr>
+          <a:xfrm>
+            <a:off x="1051560" y="3328416"/>
+            <a:ext cx="4454957" cy="566928"/>
+          </a:xfrm>
+          <a:prstGeom prst="rect">
+            <a:avLst/>
+          </a:prstGeom>
+          <a:noFill/>
+          <a:ln/>
+        </p:spPr>
+        <p:txBody>
+          <a:bodyPr wrap="square" lIns="0" tIns="0" rIns="0" bIns="0" rtlCol="0" anchor="ctr"/>
+          <a:lstStyle/>
+          <a:p>
+            <a:pPr indent="0" marL="0">
+              <a:lnSpc>
+                <a:spcPct val="120000"/>
+              </a:lnSpc>
+              <a:buNone/>
+            </a:pPr>
+            <a:r>
+              <a:rPr lang="en-US" sz="1350" b="1" dirty="0">
+                <a:solidFill>
+                  <a:srgbClr val="23201D"/>
+                </a:solidFill>
+                <a:latin typeface="Yu Gothic" pitchFamily="34" charset="0"/>
+                <a:ea typeface="Yu Gothic" pitchFamily="34" charset="-122"/>
+                <a:cs typeface="Yu Gothic" pitchFamily="34" charset="-120"/>
+              </a:rPr>
+              <a:t>工程を分けず、1つの長い指示にしたがる</a:t>
+            </a:r>
+            <a:endParaRPr lang="en-US" sz="1350" dirty="0"/>
+          </a:p>
+        </p:txBody>
+      </p:sp>
+      <p:sp>
+        <p:nvSpPr>
+          <p:cNvPr id="13" name="Shape 11"/>
+          <p:cNvSpPr/>
+          <p:nvPr/>
+        </p:nvSpPr>
+        <p:spPr>
+          <a:xfrm>
+            <a:off x="5762549" y="3054096"/>
+            <a:ext cx="18288" cy="859536"/>
+          </a:xfrm>
+          <a:prstGeom prst="rect">
+            <a:avLst/>
+          </a:prstGeom>
+          <a:solidFill>
+            <a:srgbClr val="EDE7DB"/>
+          </a:solidFill>
+          <a:ln w="12700">
+            <a:solidFill>
+              <a:srgbClr val="333333"/>
+            </a:solidFill>
+            <a:prstDash val="solid"/>
+          </a:ln>
+        </p:spPr>
+      </p:sp>
+      <p:sp>
+        <p:nvSpPr>
+          <p:cNvPr id="14" name="Text 12"/>
+          <p:cNvSpPr txBox="1"/>
+          <p:nvPr/>
+        </p:nvSpPr>
+        <p:spPr>
+          <a:xfrm>
+            <a:off x="6080760" y="3063240"/>
+            <a:ext cx="1463040" cy="256032"/>
+          </a:xfrm>
+          <a:prstGeom prst="rect">
+            <a:avLst/>
+          </a:prstGeom>
+          <a:noFill/>
+          <a:ln/>
+        </p:spPr>
+        <p:txBody>
+          <a:bodyPr wrap="square" lIns="0" tIns="0" rIns="0" bIns="0" rtlCol="0" anchor="ctr"/>
+          <a:lstStyle/>
+          <a:p>
+            <a:pPr indent="0" marL="0">
+              <a:buNone/>
+            </a:pPr>
+            <a:r>
+              <a:rPr lang="en-US" sz="900" b="1" spc="150" kern="0" dirty="0">
+                <a:solidFill>
+                  <a:srgbClr val="B04A2F"/>
+                </a:solidFill>
+                <a:latin typeface="Yu Gothic" pitchFamily="34" charset="0"/>
+                <a:ea typeface="Yu Gothic" pitchFamily="34" charset="-122"/>
+                <a:cs typeface="Yu Gothic" pitchFamily="34" charset="-120"/>
+              </a:rPr>
+              <a:t>こうする</a:t>
+            </a:r>
+            <a:endParaRPr lang="en-US" sz="900" dirty="0"/>
+          </a:p>
+        </p:txBody>
+      </p:sp>
+      <p:sp>
+        <p:nvSpPr>
+          <p:cNvPr id="15" name="Text 13"/>
+          <p:cNvSpPr txBox="1"/>
+          <p:nvPr/>
+        </p:nvSpPr>
+        <p:spPr>
+          <a:xfrm>
+            <a:off x="6080760" y="3328416"/>
+            <a:ext cx="5091379" cy="566928"/>
+          </a:xfrm>
+          <a:prstGeom prst="rect">
+            <a:avLst/>
+          </a:prstGeom>
+          <a:noFill/>
+          <a:ln/>
+        </p:spPr>
+        <p:txBody>
+          <a:bodyPr wrap="square" lIns="0" tIns="0" rIns="0" bIns="0" rtlCol="0" anchor="ctr"/>
+          <a:lstStyle/>
+          <a:p>
+            <a:pPr indent="0" marL="0">
+              <a:lnSpc>
+                <a:spcPct val="125000"/>
+              </a:lnSpc>
+              <a:buNone/>
+            </a:pPr>
+            <a:r>
+              <a:rPr lang="en-US" sz="1250" dirty="0">
+                <a:solidFill>
+                  <a:srgbClr val="3F3933"/>
+                </a:solidFill>
+                <a:latin typeface="Yu Gothic" pitchFamily="34" charset="0"/>
+                <a:ea typeface="Yu Gothic" pitchFamily="34" charset="-122"/>
+                <a:cs typeface="Yu Gothic" pitchFamily="34" charset="-120"/>
+              </a:rPr>
+              <a:t>やらせてみて、直しにくさを体験していただきます。説得より体験のほうが早く伝わります</a:t>
+            </a:r>
+            <a:endParaRPr lang="en-US" sz="1250" dirty="0"/>
+          </a:p>
+        </p:txBody>
+      </p:sp>
+      <p:sp>
+        <p:nvSpPr>
+          <p:cNvPr id="16" name="Shape 14"/>
+          <p:cNvSpPr/>
+          <p:nvPr/>
+        </p:nvSpPr>
+        <p:spPr>
+          <a:xfrm>
+            <a:off x="777240" y="4151376"/>
+            <a:ext cx="10607040" cy="1078992"/>
+          </a:xfrm>
+          <a:prstGeom prst="rect">
+            <a:avLst/>
+          </a:prstGeom>
+          <a:solidFill>
+            <a:srgbClr val="FFFFFF"/>
+          </a:solidFill>
+          <a:ln w="12700">
+            <a:solidFill>
+              <a:srgbClr val="EDE7DB"/>
+            </a:solidFill>
+            <a:prstDash val="solid"/>
+          </a:ln>
+        </p:spPr>
+      </p:sp>
+      <p:sp>
+        <p:nvSpPr>
+          <p:cNvPr id="17" name="Text 15"/>
+          <p:cNvSpPr txBox="1"/>
+          <p:nvPr/>
+        </p:nvSpPr>
+        <p:spPr>
+          <a:xfrm>
+            <a:off x="1051560" y="4270248"/>
+            <a:ext cx="1463040" cy="256032"/>
+          </a:xfrm>
+          <a:prstGeom prst="rect">
+            <a:avLst/>
+          </a:prstGeom>
+          <a:noFill/>
+          <a:ln/>
+        </p:spPr>
+        <p:txBody>
+          <a:bodyPr wrap="square" lIns="0" tIns="0" rIns="0" bIns="0" rtlCol="0" anchor="ctr"/>
+          <a:lstStyle/>
+          <a:p>
+            <a:pPr indent="0" marL="0">
+              <a:buNone/>
+            </a:pPr>
+            <a:r>
+              <a:rPr lang="en-US" sz="900" b="1" spc="150" kern="0" dirty="0">
+                <a:solidFill>
+                  <a:srgbClr val="8A8177"/>
+                </a:solidFill>
+                <a:latin typeface="Yu Gothic" pitchFamily="34" charset="0"/>
+                <a:ea typeface="Yu Gothic" pitchFamily="34" charset="-122"/>
+                <a:cs typeface="Yu Gothic" pitchFamily="34" charset="-120"/>
+              </a:rPr>
+              <a:t>こうなったら</a:t>
+            </a:r>
+            <a:endParaRPr lang="en-US" sz="900" dirty="0"/>
+          </a:p>
+        </p:txBody>
+      </p:sp>
+      <p:sp>
+        <p:nvSpPr>
+          <p:cNvPr id="18" name="Text 16"/>
+          <p:cNvSpPr txBox="1"/>
+          <p:nvPr/>
+        </p:nvSpPr>
+        <p:spPr>
+          <a:xfrm>
+            <a:off x="1051560" y="4535424"/>
+            <a:ext cx="4454957" cy="566928"/>
+          </a:xfrm>
+          <a:prstGeom prst="rect">
+            <a:avLst/>
+          </a:prstGeom>
+          <a:noFill/>
+          <a:ln/>
+        </p:spPr>
+        <p:txBody>
+          <a:bodyPr wrap="square" lIns="0" tIns="0" rIns="0" bIns="0" rtlCol="0" anchor="ctr"/>
+          <a:lstStyle/>
+          <a:p>
+            <a:pPr indent="0" marL="0">
+              <a:lnSpc>
+                <a:spcPct val="120000"/>
+              </a:lnSpc>
+              <a:buNone/>
+            </a:pPr>
+            <a:r>
+              <a:rPr lang="en-US" sz="1350" b="1" dirty="0">
+                <a:solidFill>
+                  <a:srgbClr val="23201D"/>
+                </a:solidFill>
+                <a:latin typeface="Yu Gothic" pitchFamily="34" charset="0"/>
+                <a:ea typeface="Yu Gothic" pitchFamily="34" charset="-122"/>
+                <a:cs typeface="Yu Gothic" pitchFamily="34" charset="-120"/>
+              </a:rPr>
+              <a:t>「作る」時間が少なく満足度が下がる</a:t>
+            </a:r>
+            <a:endParaRPr lang="en-US" sz="1350" dirty="0"/>
+          </a:p>
+        </p:txBody>
+      </p:sp>
+      <p:sp>
+        <p:nvSpPr>
+          <p:cNvPr id="19" name="Shape 17"/>
+          <p:cNvSpPr/>
+          <p:nvPr/>
+        </p:nvSpPr>
+        <p:spPr>
+          <a:xfrm>
+            <a:off x="5762549" y="4261104"/>
+            <a:ext cx="18288" cy="859536"/>
+          </a:xfrm>
+          <a:prstGeom prst="rect">
+            <a:avLst/>
+          </a:prstGeom>
+          <a:solidFill>
+            <a:srgbClr val="EDE7DB"/>
+          </a:solidFill>
+          <a:ln w="12700">
+            <a:solidFill>
+              <a:srgbClr val="333333"/>
+            </a:solidFill>
+            <a:prstDash val="solid"/>
+          </a:ln>
+        </p:spPr>
+      </p:sp>
+      <p:sp>
+        <p:nvSpPr>
+          <p:cNvPr id="20" name="Text 18"/>
+          <p:cNvSpPr txBox="1"/>
+          <p:nvPr/>
+        </p:nvSpPr>
+        <p:spPr>
+          <a:xfrm>
+            <a:off x="6080760" y="4270248"/>
+            <a:ext cx="1463040" cy="256032"/>
+          </a:xfrm>
+          <a:prstGeom prst="rect">
+            <a:avLst/>
+          </a:prstGeom>
+          <a:noFill/>
+          <a:ln/>
+        </p:spPr>
+        <p:txBody>
+          <a:bodyPr wrap="square" lIns="0" tIns="0" rIns="0" bIns="0" rtlCol="0" anchor="ctr"/>
+          <a:lstStyle/>
+          <a:p>
+            <a:pPr indent="0" marL="0">
+              <a:buNone/>
+            </a:pPr>
+            <a:r>
+              <a:rPr lang="en-US" sz="900" b="1" spc="150" kern="0" dirty="0">
+                <a:solidFill>
+                  <a:srgbClr val="B04A2F"/>
+                </a:solidFill>
+                <a:latin typeface="Yu Gothic" pitchFamily="34" charset="0"/>
+                <a:ea typeface="Yu Gothic" pitchFamily="34" charset="-122"/>
+                <a:cs typeface="Yu Gothic" pitchFamily="34" charset="-120"/>
+              </a:rPr>
+              <a:t>こうする</a:t>
+            </a:r>
+            <a:endParaRPr lang="en-US" sz="900" dirty="0"/>
+          </a:p>
+        </p:txBody>
+      </p:sp>
+      <p:sp>
+        <p:nvSpPr>
+          <p:cNvPr id="21" name="Text 19"/>
+          <p:cNvSpPr txBox="1"/>
+          <p:nvPr/>
+        </p:nvSpPr>
+        <p:spPr>
+          <a:xfrm>
+            <a:off x="6080760" y="4535424"/>
+            <a:ext cx="5091379" cy="566928"/>
+          </a:xfrm>
+          <a:prstGeom prst="rect">
+            <a:avLst/>
+          </a:prstGeom>
+          <a:noFill/>
+          <a:ln/>
+        </p:spPr>
+        <p:txBody>
+          <a:bodyPr wrap="square" lIns="0" tIns="0" rIns="0" bIns="0" rtlCol="0" anchor="ctr"/>
+          <a:lstStyle/>
+          <a:p>
+            <a:pPr indent="0" marL="0">
+              <a:lnSpc>
+                <a:spcPct val="125000"/>
+              </a:lnSpc>
+              <a:buNone/>
+            </a:pPr>
+            <a:r>
+              <a:rPr lang="en-US" sz="1250" dirty="0">
+                <a:solidFill>
+                  <a:srgbClr val="3F3933"/>
+                </a:solidFill>
+                <a:latin typeface="Yu Gothic" pitchFamily="34" charset="0"/>
+                <a:ea typeface="Yu Gothic" pitchFamily="34" charset="-122"/>
+                <a:cs typeface="Yu Gothic" pitchFamily="34" charset="-120"/>
+              </a:rPr>
+              <a:t>工程図を画面共有で一緒に描き、常に手が動いている状態を保ちます</a:t>
+            </a:r>
+            <a:endParaRPr lang="en-US" sz="1250" dirty="0"/>
+          </a:p>
+        </p:txBody>
+      </p:sp>
+      <p:sp>
+        <p:nvSpPr>
+          <p:cNvPr id="22" name="Text 20"/>
+          <p:cNvSpPr txBox="1"/>
+          <p:nvPr/>
+        </p:nvSpPr>
+        <p:spPr>
+          <a:xfrm>
+            <a:off x="777240" y="6382512"/>
+            <a:ext cx="7424928" cy="256032"/>
+          </a:xfrm>
+          <a:prstGeom prst="rect">
+            <a:avLst/>
+          </a:prstGeom>
+          <a:noFill/>
+          <a:ln/>
+        </p:spPr>
+        <p:txBody>
+          <a:bodyPr wrap="square" lIns="0" tIns="0" rIns="0" bIns="0" rtlCol="0" anchor="ctr"/>
+          <a:lstStyle/>
+          <a:p>
+            <a:pPr indent="0" marL="0">
+              <a:buNone/>
+            </a:pPr>
+            <a:r>
+              <a:rPr lang="en-US" sz="900" dirty="0">
+                <a:solidFill>
+                  <a:srgbClr val="8A8177"/>
+                </a:solidFill>
+                <a:latin typeface="Yu Gothic" pitchFamily="34" charset="0"/>
+                <a:ea typeface="Yu Gothic" pitchFamily="34" charset="-122"/>
+                <a:cs typeface="Yu Gothic" pitchFamily="34" charset="-120"/>
+              </a:rPr>
+              <a:t>第9回　複数の工程をまとめて任せる</a:t>
+            </a:r>
+            <a:endParaRPr lang="en-US" sz="900" dirty="0"/>
+          </a:p>
+        </p:txBody>
+      </p:sp>
+      <p:sp>
+        <p:nvSpPr>
+          <p:cNvPr id="23" name="Text 21"/>
+          <p:cNvSpPr txBox="1"/>
+          <p:nvPr/>
+        </p:nvSpPr>
+        <p:spPr>
+          <a:xfrm>
+            <a:off x="8202168" y="6382512"/>
+            <a:ext cx="3182112" cy="256032"/>
+          </a:xfrm>
+          <a:prstGeom prst="rect">
+            <a:avLst/>
+          </a:prstGeom>
+          <a:noFill/>
+          <a:ln/>
+        </p:spPr>
+        <p:txBody>
+          <a:bodyPr wrap="square" lIns="0" tIns="0" rIns="0" bIns="0" rtlCol="0" anchor="ctr"/>
+          <a:lstStyle/>
+          <a:p>
+            <a:pPr algn="r" indent="0" marL="0">
+              <a:buNone/>
+            </a:pPr>
+            <a:r>
+              <a:rPr lang="en-US" sz="900" dirty="0">
+                <a:solidFill>
+                  <a:srgbClr val="8A8177"/>
+                </a:solidFill>
+                <a:latin typeface="Yu Gothic" pitchFamily="34" charset="0"/>
+                <a:ea typeface="Yu Gothic" pitchFamily="34" charset="-122"/>
+                <a:cs typeface="Yu Gothic" pitchFamily="34" charset="-120"/>
+              </a:rPr>
+              <a:t>つまずき</a:t>
+            </a:r>
+            <a:endParaRPr lang="en-US" sz="900" dirty="0"/>
+          </a:p>
+        </p:txBody>
+      </p:sp>
+    </p:spTree>
+  </p:cSld>
+  <p:clrMapOvr>
+    <a:masterClrMapping/>
+  </p:clrMapOvr>
+</p:sld>
+</file>
+
+<file path=ppt/slides/slide9.xml><?xml version="1.0" encoding="utf-8"?>
+<p:sld xmlns:a="http://schemas.openxmlformats.org/drawingml/2006/main" xmlns:r="http://schemas.openxmlformats.org/officeDocument/2006/relationships" xmlns:p="http://schemas.openxmlformats.org/presentationml/2006/main">
+  <p:cSld name="Slide 9">
+    <p:bg>
+      <p:bgPr>
+        <a:solidFill>
+          <a:srgbClr val="F6F2EA"/>
+        </a:solidFill>
+      </p:bgPr>
+    </p:bg>
+    <p:spTree>
+      <p:nvGrpSpPr>
+        <p:cNvPr id="1" name=""/>
+        <p:cNvGrpSpPr/>
+        <p:nvPr/>
+      </p:nvGrpSpPr>
+      <p:grpSpPr>
+        <a:xfrm>
+          <a:off x="0" y="0"/>
+          <a:ext cx="0" cy="0"/>
+          <a:chOff x="0" y="0"/>
+          <a:chExt cx="0" cy="0"/>
+        </a:xfrm>
+      </p:grpSpPr>
+      <p:sp>
+        <p:nvSpPr>
+          <p:cNvPr id="2" name="Text 0"/>
+          <p:cNvSpPr txBox="1"/>
+          <p:nvPr/>
+        </p:nvSpPr>
+        <p:spPr>
+          <a:xfrm>
+            <a:off x="777240" y="566928"/>
+            <a:ext cx="10607040" cy="274320"/>
+          </a:xfrm>
+          <a:prstGeom prst="rect">
+            <a:avLst/>
+          </a:prstGeom>
+          <a:noFill/>
+          <a:ln/>
+        </p:spPr>
+        <p:txBody>
+          <a:bodyPr wrap="square" lIns="0" tIns="0" rIns="0" bIns="0" rtlCol="0" anchor="ctr"/>
+          <a:lstStyle/>
+          <a:p>
+            <a:pPr indent="0" marL="0">
+              <a:buNone/>
+            </a:pPr>
+            <a:r>
+              <a:rPr lang="en-US" sz="1100" b="1" spc="250" kern="0" dirty="0">
+                <a:solidFill>
+                  <a:srgbClr val="2F4F6B"/>
+                </a:solidFill>
+                <a:latin typeface="Yu Gothic" pitchFamily="34" charset="0"/>
+                <a:ea typeface="Yu Gothic" pitchFamily="34" charset="-122"/>
+                <a:cs typeface="Yu Gothic" pitchFamily="34" charset="-120"/>
+              </a:rPr>
+              <a:t>演習</a:t>
+            </a:r>
+            <a:endParaRPr lang="en-US" sz="1100" dirty="0"/>
+          </a:p>
+        </p:txBody>
+      </p:sp>
+      <p:sp>
+        <p:nvSpPr>
+          <p:cNvPr id="3" name="Text 1"/>
+          <p:cNvSpPr txBox="1"/>
+          <p:nvPr/>
+        </p:nvSpPr>
+        <p:spPr>
+          <a:xfrm>
+            <a:off x="777240" y="896112"/>
+            <a:ext cx="10607040" cy="640080"/>
+          </a:xfrm>
+          <a:prstGeom prst="rect">
+            <a:avLst/>
+          </a:prstGeom>
+          <a:noFill/>
+          <a:ln/>
+        </p:spPr>
+        <p:txBody>
+          <a:bodyPr wrap="square" lIns="0" tIns="0" rIns="0" bIns="0" rtlCol="0" anchor="ctr"/>
+          <a:lstStyle/>
+          <a:p>
+            <a:pPr indent="0" marL="0">
+              <a:buNone/>
+            </a:pPr>
+            <a:r>
+              <a:rPr lang="en-US" sz="2600" b="1" dirty="0">
+                <a:solidFill>
+                  <a:srgbClr val="23201D"/>
+                </a:solidFill>
+                <a:latin typeface="Yu Gothic" pitchFamily="34" charset="0"/>
+                <a:ea typeface="Yu Gothic" pitchFamily="34" charset="-122"/>
+                <a:cs typeface="Yu Gothic" pitchFamily="34" charset="-120"/>
+              </a:rPr>
+              <a:t>今日、一緒にやること</a:t>
+            </a:r>
+            <a:endParaRPr lang="en-US" sz="2600" dirty="0"/>
+          </a:p>
+        </p:txBody>
+      </p:sp>
+      <p:sp>
+        <p:nvSpPr>
+          <p:cNvPr id="4" name="Text 2"/>
+          <p:cNvSpPr txBox="1"/>
+          <p:nvPr/>
+        </p:nvSpPr>
+        <p:spPr>
+          <a:xfrm>
+            <a:off x="777240" y="1572768"/>
+            <a:ext cx="10607040" cy="320040"/>
+          </a:xfrm>
+          <a:prstGeom prst="rect">
+            <a:avLst/>
+          </a:prstGeom>
+          <a:noFill/>
+          <a:ln/>
+        </p:spPr>
+        <p:txBody>
+          <a:bodyPr wrap="square" lIns="0" tIns="0" rIns="0" bIns="0" rtlCol="0" anchor="ctr"/>
+          <a:lstStyle/>
+          <a:p>
+            <a:pPr indent="0" marL="0">
+              <a:buNone/>
+            </a:pPr>
+            <a:r>
+              <a:rPr lang="en-US" sz="1250" b="1" dirty="0">
+                <a:solidFill>
+                  <a:srgbClr val="2F4F6B"/>
+                </a:solidFill>
+                <a:latin typeface="Yu Gothic" pitchFamily="34" charset="0"/>
+                <a:ea typeface="Yu Gothic" pitchFamily="34" charset="-122"/>
+                <a:cs typeface="Yu Gothic" pitchFamily="34" charset="-120"/>
+              </a:rPr>
+              <a:t>55分。操作するのはご自身です。</a:t>
+            </a:r>
+            <a:endParaRPr lang="en-US" sz="1250" dirty="0"/>
+          </a:p>
+        </p:txBody>
+      </p:sp>
+      <p:sp>
+        <p:nvSpPr>
+          <p:cNvPr id="5" name="Shape 3"/>
+          <p:cNvSpPr/>
+          <p:nvPr/>
+        </p:nvSpPr>
+        <p:spPr>
+          <a:xfrm>
+            <a:off x="777240" y="2148840"/>
+            <a:ext cx="3383280" cy="2880360"/>
+          </a:xfrm>
+          <a:prstGeom prst="rect">
+            <a:avLst/>
+          </a:prstGeom>
+          <a:solidFill>
+            <a:srgbClr val="FFFFFF"/>
+          </a:solidFill>
+          <a:ln w="12700">
+            <a:solidFill>
+              <a:srgbClr val="EDE7DB"/>
+            </a:solidFill>
+            <a:prstDash val="solid"/>
+          </a:ln>
+        </p:spPr>
+      </p:sp>
+      <p:sp>
+        <p:nvSpPr>
+          <p:cNvPr id="6" name="Shape 4"/>
+          <p:cNvSpPr/>
+          <p:nvPr/>
+        </p:nvSpPr>
+        <p:spPr>
+          <a:xfrm>
+            <a:off x="1051560" y="2395728"/>
+            <a:ext cx="438912" cy="438912"/>
+          </a:xfrm>
+          <a:prstGeom prst="ellipse">
+            <a:avLst/>
+          </a:prstGeom>
+          <a:solidFill>
+            <a:srgbClr val="2F4F6B"/>
+          </a:solidFill>
+          <a:ln w="12700">
+            <a:solidFill>
+              <a:srgbClr val="333333"/>
+            </a:solidFill>
+            <a:prstDash val="solid"/>
+          </a:ln>
+        </p:spPr>
+      </p:sp>
+      <p:sp>
+        <p:nvSpPr>
+          <p:cNvPr id="7" name="Text 5"/>
+          <p:cNvSpPr txBox="1"/>
+          <p:nvPr/>
+        </p:nvSpPr>
+        <p:spPr>
+          <a:xfrm>
+            <a:off x="1051560" y="2395728"/>
+            <a:ext cx="438912" cy="438912"/>
+          </a:xfrm>
+          <a:prstGeom prst="rect">
+            <a:avLst/>
+          </a:prstGeom>
+          <a:noFill/>
+          <a:ln/>
+        </p:spPr>
+        <p:txBody>
+          <a:bodyPr wrap="square" lIns="0" tIns="0" rIns="0" bIns="0" rtlCol="0" anchor="ctr"/>
+          <a:lstStyle/>
+          <a:p>
+            <a:pPr algn="ctr" indent="0" marL="0">
+              <a:buNone/>
+            </a:pPr>
+            <a:r>
+              <a:rPr lang="en-US" sz="1300" b="1" dirty="0">
                 <a:solidFill>
                   <a:srgbClr val="FFFFFF"/>
                 </a:solidFill>
@@ -4978,22 +8561,22 @@
                 <a:ea typeface="Yu Gothic" pitchFamily="34" charset="-122"/>
                 <a:cs typeface="Yu Gothic" pitchFamily="34" charset="-120"/>
               </a:rPr>
-              <a:t>設計した多工程の仕事を、1回だけ本番で流す。確認ポイントで必ず人が見る。</a:t>
-            </a:r>
-            <a:endParaRPr lang="en-US" sz="1900" dirty="0"/>
-          </a:p>
-        </p:txBody>
-      </p:sp>
-      <p:sp>
-        <p:nvSpPr>
-          <p:cNvPr id="6" name="Text 4"/>
-          <p:cNvSpPr txBox="1"/>
-          <p:nvPr/>
-        </p:nvSpPr>
-        <p:spPr>
-          <a:xfrm>
-            <a:off x="777240" y="4572000"/>
-            <a:ext cx="10607040" cy="822960"/>
+              <a:t>1</a:t>
+            </a:r>
+            <a:endParaRPr lang="en-US" sz="1300" dirty="0"/>
+          </a:p>
+        </p:txBody>
+      </p:sp>
+      <p:sp>
+        <p:nvSpPr>
+          <p:cNvPr id="8" name="Text 6"/>
+          <p:cNvSpPr txBox="1"/>
+          <p:nvPr/>
+        </p:nvSpPr>
+        <p:spPr>
+          <a:xfrm>
+            <a:off x="1051560" y="2944368"/>
+            <a:ext cx="2834640" cy="731520"/>
           </a:xfrm>
           <a:prstGeom prst="rect">
             <a:avLst/>
@@ -5007,40 +8590,324 @@
           <a:p>
             <a:pPr indent="0" marL="0">
               <a:lnSpc>
-                <a:spcPct val="145000"/>
+                <a:spcPct val="125000"/>
               </a:lnSpc>
               <a:buNone/>
             </a:pPr>
             <a:r>
-              <a:rPr lang="en-US" sz="1300" dirty="0">
-                <a:solidFill>
-                  <a:srgbClr val="B9B0A4"/>
-                </a:solidFill>
-                <a:latin typeface="Yu Gothic" pitchFamily="34" charset="0"/>
-                <a:ea typeface="Yu Gothic" pitchFamily="34" charset="-122"/>
-                <a:cs typeface="Yu Gothic" pitchFamily="34" charset="-120"/>
-              </a:rPr>
-              <a:t>15分で終わる大きさにしてあります。できなかった回があっても構いません。</a:t>
+              <a:rPr lang="en-US" sz="1450" b="1" dirty="0">
+                <a:solidFill>
+                  <a:srgbClr val="23201D"/>
+                </a:solidFill>
+                <a:latin typeface="Yu Gothic" pitchFamily="34" charset="0"/>
+                <a:ea typeface="Yu Gothic" pitchFamily="34" charset="-122"/>
+                <a:cs typeface="Yu Gothic" pitchFamily="34" charset="-120"/>
+              </a:rPr>
+              <a:t>工程図を描く</a:t>
+            </a:r>
+            <a:endParaRPr lang="en-US" sz="1450" dirty="0"/>
+          </a:p>
+        </p:txBody>
+      </p:sp>
+      <p:sp>
+        <p:nvSpPr>
+          <p:cNvPr id="9" name="Text 7"/>
+          <p:cNvSpPr txBox="1"/>
+          <p:nvPr/>
+        </p:nvSpPr>
+        <p:spPr>
+          <a:xfrm>
+            <a:off x="1051560" y="3703320"/>
+            <a:ext cx="2834640" cy="1188720"/>
+          </a:xfrm>
+          <a:prstGeom prst="rect">
+            <a:avLst/>
+          </a:prstGeom>
+          <a:noFill/>
+          <a:ln/>
+        </p:spPr>
+        <p:txBody>
+          <a:bodyPr wrap="square" lIns="0" tIns="0" rIns="0" bIns="0" rtlCol="0" anchor="ctr"/>
+          <a:lstStyle/>
+          <a:p>
+            <a:pPr indent="0" marL="0">
+              <a:lnSpc>
+                <a:spcPct val="130000"/>
+              </a:lnSpc>
+              <a:buNone/>
+            </a:pPr>
+            <a:r>
+              <a:rPr lang="en-US" sz="1150" dirty="0">
+                <a:solidFill>
+                  <a:srgbClr val="5A534A"/>
+                </a:solidFill>
+                <a:latin typeface="Yu Gothic" pitchFamily="34" charset="0"/>
+                <a:ea typeface="Yu Gothic" pitchFamily="34" charset="-122"/>
+                <a:cs typeface="Yu Gothic" pitchFamily="34" charset="-120"/>
+              </a:rPr>
+              <a:t>AIに任せる／人が確認する／人がやる、に仕分けます</a:t>
+            </a:r>
+            <a:endParaRPr lang="en-US" sz="1150" dirty="0"/>
+          </a:p>
+        </p:txBody>
+      </p:sp>
+      <p:sp>
+        <p:nvSpPr>
+          <p:cNvPr id="10" name="Shape 8"/>
+          <p:cNvSpPr/>
+          <p:nvPr/>
+        </p:nvSpPr>
+        <p:spPr>
+          <a:xfrm>
+            <a:off x="4389120" y="2148840"/>
+            <a:ext cx="3383280" cy="2880360"/>
+          </a:xfrm>
+          <a:prstGeom prst="rect">
+            <a:avLst/>
+          </a:prstGeom>
+          <a:solidFill>
+            <a:srgbClr val="FFFFFF"/>
+          </a:solidFill>
+          <a:ln w="12700">
+            <a:solidFill>
+              <a:srgbClr val="EDE7DB"/>
+            </a:solidFill>
+            <a:prstDash val="solid"/>
+          </a:ln>
+        </p:spPr>
+      </p:sp>
+      <p:sp>
+        <p:nvSpPr>
+          <p:cNvPr id="11" name="Shape 9"/>
+          <p:cNvSpPr/>
+          <p:nvPr/>
+        </p:nvSpPr>
+        <p:spPr>
+          <a:xfrm>
+            <a:off x="4663440" y="2395728"/>
+            <a:ext cx="438912" cy="438912"/>
+          </a:xfrm>
+          <a:prstGeom prst="ellipse">
+            <a:avLst/>
+          </a:prstGeom>
+          <a:solidFill>
+            <a:srgbClr val="2F4F6B"/>
+          </a:solidFill>
+          <a:ln w="12700">
+            <a:solidFill>
+              <a:srgbClr val="333333"/>
+            </a:solidFill>
+            <a:prstDash val="solid"/>
+          </a:ln>
+        </p:spPr>
+      </p:sp>
+      <p:sp>
+        <p:nvSpPr>
+          <p:cNvPr id="12" name="Text 10"/>
+          <p:cNvSpPr txBox="1"/>
+          <p:nvPr/>
+        </p:nvSpPr>
+        <p:spPr>
+          <a:xfrm>
+            <a:off x="4663440" y="2395728"/>
+            <a:ext cx="438912" cy="438912"/>
+          </a:xfrm>
+          <a:prstGeom prst="rect">
+            <a:avLst/>
+          </a:prstGeom>
+          <a:noFill/>
+          <a:ln/>
+        </p:spPr>
+        <p:txBody>
+          <a:bodyPr wrap="square" lIns="0" tIns="0" rIns="0" bIns="0" rtlCol="0" anchor="ctr"/>
+          <a:lstStyle/>
+          <a:p>
+            <a:pPr algn="ctr" indent="0" marL="0">
+              <a:buNone/>
+            </a:pPr>
+            <a:r>
+              <a:rPr lang="en-US" sz="1300" b="1" dirty="0">
+                <a:solidFill>
+                  <a:srgbClr val="FFFFFF"/>
+                </a:solidFill>
+                <a:latin typeface="Yu Gothic" pitchFamily="34" charset="0"/>
+                <a:ea typeface="Yu Gothic" pitchFamily="34" charset="-122"/>
+                <a:cs typeface="Yu Gothic" pitchFamily="34" charset="-120"/>
+              </a:rPr>
+              <a:t>2</a:t>
             </a:r>
             <a:endParaRPr lang="en-US" sz="1300" dirty="0"/>
           </a:p>
+        </p:txBody>
+      </p:sp>
+      <p:sp>
+        <p:nvSpPr>
+          <p:cNvPr id="13" name="Text 11"/>
+          <p:cNvSpPr txBox="1"/>
+          <p:nvPr/>
+        </p:nvSpPr>
+        <p:spPr>
+          <a:xfrm>
+            <a:off x="4663440" y="2944368"/>
+            <a:ext cx="2834640" cy="731520"/>
+          </a:xfrm>
+          <a:prstGeom prst="rect">
+            <a:avLst/>
+          </a:prstGeom>
+          <a:noFill/>
+          <a:ln/>
+        </p:spPr>
+        <p:txBody>
+          <a:bodyPr wrap="square" lIns="0" tIns="0" rIns="0" bIns="0" rtlCol="0" anchor="ctr"/>
+          <a:lstStyle/>
           <a:p>
             <a:pPr indent="0" marL="0">
               <a:lnSpc>
-                <a:spcPct val="145000"/>
+                <a:spcPct val="125000"/>
               </a:lnSpc>
               <a:buNone/>
             </a:pPr>
             <a:r>
-              <a:rPr lang="en-US" sz="1300" dirty="0">
-                <a:solidFill>
-                  <a:srgbClr val="B9B0A4"/>
-                </a:solidFill>
-                <a:latin typeface="Yu Gothic" pitchFamily="34" charset="0"/>
-                <a:ea typeface="Yu Gothic" pitchFamily="34" charset="-122"/>
-                <a:cs typeface="Yu Gothic" pitchFamily="34" charset="-120"/>
-              </a:rPr>
-              <a:t>2回続いたら、宿題の出し方を見直します。</a:t>
+              <a:rPr lang="en-US" sz="1450" b="1" dirty="0">
+                <a:solidFill>
+                  <a:srgbClr val="23201D"/>
+                </a:solidFill>
+                <a:latin typeface="Yu Gothic" pitchFamily="34" charset="0"/>
+                <a:ea typeface="Yu Gothic" pitchFamily="34" charset="-122"/>
+                <a:cs typeface="Yu Gothic" pitchFamily="34" charset="-120"/>
+              </a:rPr>
+              <a:t>実際に流す</a:t>
+            </a:r>
+            <a:endParaRPr lang="en-US" sz="1450" dirty="0"/>
+          </a:p>
+        </p:txBody>
+      </p:sp>
+      <p:sp>
+        <p:nvSpPr>
+          <p:cNvPr id="14" name="Text 12"/>
+          <p:cNvSpPr txBox="1"/>
+          <p:nvPr/>
+        </p:nvSpPr>
+        <p:spPr>
+          <a:xfrm>
+            <a:off x="4663440" y="3703320"/>
+            <a:ext cx="2834640" cy="1188720"/>
+          </a:xfrm>
+          <a:prstGeom prst="rect">
+            <a:avLst/>
+          </a:prstGeom>
+          <a:noFill/>
+          <a:ln/>
+        </p:spPr>
+        <p:txBody>
+          <a:bodyPr wrap="square" lIns="0" tIns="0" rIns="0" bIns="0" rtlCol="0" anchor="ctr"/>
+          <a:lstStyle/>
+          <a:p>
+            <a:pPr indent="0" marL="0">
+              <a:lnSpc>
+                <a:spcPct val="130000"/>
+              </a:lnSpc>
+              <a:buNone/>
+            </a:pPr>
+            <a:r>
+              <a:rPr lang="en-US" sz="1150" dirty="0">
+                <a:solidFill>
+                  <a:srgbClr val="5A534A"/>
+                </a:solidFill>
+                <a:latin typeface="Yu Gothic" pitchFamily="34" charset="0"/>
+                <a:ea typeface="Yu Gothic" pitchFamily="34" charset="-122"/>
+                <a:cs typeface="Yu Gothic" pitchFamily="34" charset="-120"/>
+              </a:rPr>
+              <a:t>設計どおりに動かしてみます</a:t>
+            </a:r>
+            <a:endParaRPr lang="en-US" sz="1150" dirty="0"/>
+          </a:p>
+        </p:txBody>
+      </p:sp>
+      <p:sp>
+        <p:nvSpPr>
+          <p:cNvPr id="15" name="Shape 13"/>
+          <p:cNvSpPr/>
+          <p:nvPr/>
+        </p:nvSpPr>
+        <p:spPr>
+          <a:xfrm>
+            <a:off x="8001000" y="2148840"/>
+            <a:ext cx="3383280" cy="2880360"/>
+          </a:xfrm>
+          <a:prstGeom prst="rect">
+            <a:avLst/>
+          </a:prstGeom>
+          <a:solidFill>
+            <a:srgbClr val="FFFFFF"/>
+          </a:solidFill>
+          <a:ln w="12700">
+            <a:solidFill>
+              <a:srgbClr val="EDE7DB"/>
+            </a:solidFill>
+            <a:prstDash val="solid"/>
+          </a:ln>
+        </p:spPr>
+      </p:sp>
+      <p:sp>
+        <p:nvSpPr>
+          <p:cNvPr id="16" name="Shape 14"/>
+          <p:cNvSpPr/>
+          <p:nvPr/>
+        </p:nvSpPr>
+        <p:spPr>
+          <a:xfrm>
+            <a:off x="8275320" y="2395728"/>
+            <a:ext cx="438912" cy="438912"/>
+          </a:xfrm>
+          <a:prstGeom prst="ellipse">
+            <a:avLst/>
+          </a:prstGeom>
+          <a:solidFill>
+            <a:srgbClr val="2F4F6B"/>
+          </a:solidFill>
+          <a:ln w="12700">
+            <a:solidFill>
+              <a:srgbClr val="333333"/>
+            </a:solidFill>
+            <a:prstDash val="solid"/>
+          </a:ln>
+        </p:spPr>
+      </p:sp>
+      <p:sp>
+        <p:nvSpPr>
+          <p:cNvPr id="17" name="Text 15"/>
+          <p:cNvSpPr txBox="1"/>
+          <p:nvPr/>
+        </p:nvSpPr>
+        <p:spPr>
+          <a:xfrm>
+            <a:off x="8275320" y="2395728"/>
+            <a:ext cx="438912" cy="438912"/>
+          </a:xfrm>
+          <a:prstGeom prst="rect">
+            <a:avLst/>
+          </a:prstGeom>
+          <a:noFill/>
+          <a:ln/>
+        </p:spPr>
+        <p:txBody>
+          <a:bodyPr wrap="square" lIns="0" tIns="0" rIns="0" bIns="0" rtlCol="0" anchor="ctr"/>
+          <a:lstStyle/>
+          <a:p>
+            <a:pPr algn="ctr" indent="0" marL="0">
+              <a:buNone/>
+            </a:pPr>
+            <a:r>
+              <a:rPr lang="en-US" sz="1300" b="1" dirty="0">
+                <a:solidFill>
+                  <a:srgbClr val="FFFFFF"/>
+                </a:solidFill>
+                <a:latin typeface="Yu Gothic" pitchFamily="34" charset="0"/>
+                <a:ea typeface="Yu Gothic" pitchFamily="34" charset="-122"/>
+                <a:cs typeface="Yu Gothic" pitchFamily="34" charset="-120"/>
+              </a:rPr>
+              <a:t>3</a:t>
             </a:r>
             <a:endParaRPr lang="en-US" sz="1300" dirty="0"/>
           </a:p>
@@ -5048,14 +8915,98 @@
       </p:sp>
       <p:sp>
         <p:nvSpPr>
-          <p:cNvPr id="7" name="Text 5"/>
-          <p:cNvSpPr txBox="1"/>
-          <p:nvPr/>
-        </p:nvSpPr>
-        <p:spPr>
-          <a:xfrm>
-            <a:off x="777240" y="6355080"/>
-            <a:ext cx="10607040" cy="274320"/>
+          <p:cNvPr id="18" name="Text 16"/>
+          <p:cNvSpPr txBox="1"/>
+          <p:nvPr/>
+        </p:nvSpPr>
+        <p:spPr>
+          <a:xfrm>
+            <a:off x="8275320" y="2944368"/>
+            <a:ext cx="2834640" cy="731520"/>
+          </a:xfrm>
+          <a:prstGeom prst="rect">
+            <a:avLst/>
+          </a:prstGeom>
+          <a:noFill/>
+          <a:ln/>
+        </p:spPr>
+        <p:txBody>
+          <a:bodyPr wrap="square" lIns="0" tIns="0" rIns="0" bIns="0" rtlCol="0" anchor="ctr"/>
+          <a:lstStyle/>
+          <a:p>
+            <a:pPr indent="0" marL="0">
+              <a:lnSpc>
+                <a:spcPct val="125000"/>
+              </a:lnSpc>
+              <a:buNone/>
+            </a:pPr>
+            <a:r>
+              <a:rPr lang="en-US" sz="1450" b="1" dirty="0">
+                <a:solidFill>
+                  <a:srgbClr val="23201D"/>
+                </a:solidFill>
+                <a:latin typeface="Yu Gothic" pitchFamily="34" charset="0"/>
+                <a:ea typeface="Yu Gothic" pitchFamily="34" charset="-122"/>
+                <a:cs typeface="Yu Gothic" pitchFamily="34" charset="-120"/>
+              </a:rPr>
+              <a:t>わざと壊す</a:t>
+            </a:r>
+            <a:endParaRPr lang="en-US" sz="1450" dirty="0"/>
+          </a:p>
+        </p:txBody>
+      </p:sp>
+      <p:sp>
+        <p:nvSpPr>
+          <p:cNvPr id="19" name="Text 17"/>
+          <p:cNvSpPr txBox="1"/>
+          <p:nvPr/>
+        </p:nvSpPr>
+        <p:spPr>
+          <a:xfrm>
+            <a:off x="8275320" y="3703320"/>
+            <a:ext cx="2834640" cy="1188720"/>
+          </a:xfrm>
+          <a:prstGeom prst="rect">
+            <a:avLst/>
+          </a:prstGeom>
+          <a:noFill/>
+          <a:ln/>
+        </p:spPr>
+        <p:txBody>
+          <a:bodyPr wrap="square" lIns="0" tIns="0" rIns="0" bIns="0" rtlCol="0" anchor="ctr"/>
+          <a:lstStyle/>
+          <a:p>
+            <a:pPr indent="0" marL="0">
+              <a:lnSpc>
+                <a:spcPct val="130000"/>
+              </a:lnSpc>
+              <a:buNone/>
+            </a:pPr>
+            <a:r>
+              <a:rPr lang="en-US" sz="1150" dirty="0">
+                <a:solidFill>
+                  <a:srgbClr val="5A534A"/>
+                </a:solidFill>
+                <a:latin typeface="Yu Gothic" pitchFamily="34" charset="0"/>
+                <a:ea typeface="Yu Gothic" pitchFamily="34" charset="-122"/>
+                <a:cs typeface="Yu Gothic" pitchFamily="34" charset="-120"/>
+              </a:rPr>
+              <a:t>入力を1つ欠けさせて、どこで止まるか・どこで気づけるかを確かめます</a:t>
+            </a:r>
+            <a:endParaRPr lang="en-US" sz="1150" dirty="0"/>
+          </a:p>
+        </p:txBody>
+      </p:sp>
+      <p:sp>
+        <p:nvSpPr>
+          <p:cNvPr id="20" name="Text 18"/>
+          <p:cNvSpPr txBox="1"/>
+          <p:nvPr/>
+        </p:nvSpPr>
+        <p:spPr>
+          <a:xfrm>
+            <a:off x="777240" y="6382512"/>
+            <a:ext cx="7424928" cy="256032"/>
           </a:xfrm>
           <a:prstGeom prst="rect">
             <a:avLst/>
@@ -5073,13 +9024,52 @@
             <a:r>
               <a:rPr lang="en-US" sz="900" dirty="0">
                 <a:solidFill>
-                  <a:srgbClr val="6E6558"/>
+                  <a:srgbClr val="8A8177"/>
                 </a:solidFill>
                 <a:latin typeface="Yu Gothic" pitchFamily="34" charset="0"/>
                 <a:ea typeface="Yu Gothic" pitchFamily="34" charset="-122"/>
                 <a:cs typeface="Yu Gothic" pitchFamily="34" charset="-120"/>
               </a:rPr>
               <a:t>第9回　複数の工程をまとめて任せる</a:t>
+            </a:r>
+            <a:endParaRPr lang="en-US" sz="900" dirty="0"/>
+          </a:p>
+        </p:txBody>
+      </p:sp>
+      <p:sp>
+        <p:nvSpPr>
+          <p:cNvPr id="21" name="Text 19"/>
+          <p:cNvSpPr txBox="1"/>
+          <p:nvPr/>
+        </p:nvSpPr>
+        <p:spPr>
+          <a:xfrm>
+            <a:off x="8202168" y="6382512"/>
+            <a:ext cx="3182112" cy="256032"/>
+          </a:xfrm>
+          <a:prstGeom prst="rect">
+            <a:avLst/>
+          </a:prstGeom>
+          <a:noFill/>
+          <a:ln/>
+        </p:spPr>
+        <p:txBody>
+          <a:bodyPr wrap="square" lIns="0" tIns="0" rIns="0" bIns="0" rtlCol="0" anchor="ctr"/>
+          <a:lstStyle/>
+          <a:p>
+            <a:pPr algn="r" indent="0" marL="0">
+              <a:buNone/>
+            </a:pPr>
+            <a:r>
+              <a:rPr lang="en-US" sz="900" dirty="0">
+                <a:solidFill>
+                  <a:srgbClr val="8A8177"/>
+                </a:solidFill>
+                <a:latin typeface="Yu Gothic" pitchFamily="34" charset="0"/>
+                <a:ea typeface="Yu Gothic" pitchFamily="34" charset="-122"/>
+                <a:cs typeface="Yu Gothic" pitchFamily="34" charset="-120"/>
+              </a:rPr>
+              <a:t>演習</a:t>
             </a:r>
             <a:endParaRPr lang="en-US" sz="900" dirty="0"/>
           </a:p>

--- a/slides/pptx/第09回_複数の工程をまとめて任せる.pptx
+++ b/slides/pptx/第09回_複数の工程をまとめて任せる.pptx
@@ -17,9 +17,12 @@
     <p:sldId id="265" r:id="rId11"/>
     <p:sldId id="266" r:id="rId12"/>
     <p:sldId id="267" r:id="rId13"/>
+    <p:sldId id="268" r:id="rId14"/>
+    <p:sldId id="269" r:id="rId15"/>
+    <p:sldId id="270" r:id="rId16"/>
   </p:sldIdLst>
   <p:notesMasterIdLst>
-    <p:notesMasterId r:id="rId14"/>
+    <p:notesMasterId r:id="rId17"/>
   </p:notesMasterIdLst>
   <p:sldSz cx="12192000" cy="6858000"/>
   <p:notesSz cx="6858000" cy="12192000"/>
@@ -601,7 +604,7 @@
           <a:p>
             <a:r>
               <a:rPr lang="en-US" dirty="0"/>
-              <a:t>確認役を社長以外にできるかを検討する。ここで人に渡せると、第11回の体制設計が楽になる。</a:t>
+              <a:t>確認ポイントの『回数ではなく位置』は、この回の要約。ここだけ持ち帰ってもらえれば成功。</a:t>
             </a:r>
             <a:endParaRPr lang="en-US" dirty="0"/>
           </a:p>
@@ -689,7 +692,7 @@
           <a:p>
             <a:r>
               <a:rPr lang="en-US" dirty="0"/>
-              <a:t>「発注できるようになることが目的」を明言する。作れない自分を責める必要はない、というメッセージが効く。</a:t>
+              <a:t>工程図は画面共有で一緒に描く。講師が描いてしまわない。受講者の手が止まると、この回は退屈になる。</a:t>
             </a:r>
             <a:endParaRPr lang="en-US" dirty="0"/>
           </a:p>
@@ -777,7 +780,7 @@
           <a:p>
             <a:r>
               <a:rPr lang="en-US" dirty="0"/>
-              <a:t>1回だけ、を強調する。運用に載せるのは確認ポイントが機能してから。</a:t>
+              <a:t>確認役を社長以外にできるかを検討する。ここで人に渡せると、第11回の体制設計が楽になる。</a:t>
             </a:r>
             <a:endParaRPr lang="en-US" dirty="0"/>
           </a:p>
@@ -801,6 +804,270 @@
             <a:fld id="{F7021451-1387-4CA6-816F-3879F97B5CBC}" type="slidenum">
               <a:rPr lang="en-US"/>
               <a:t>12</a:t>
+            </a:fld>
+            <a:endParaRPr lang="en-US"/>
+          </a:p>
+        </p:txBody>
+      </p:sp>
+    </p:spTree>
+    <p:extLst>
+      <p:ext uri="{BB962C8B-B14F-4D97-AF65-F5344CB8AC3E}">
+        <p14:creationId xmlns:p14="http://schemas.microsoft.com/office/powerpoint/2010/main" val="1024086991"/>
+      </p:ext>
+    </p:extLst>
+  </p:cSld>
+  <p:clrMapOvr>
+    <a:masterClrMapping/>
+  </p:clrMapOvr>
+</p:notes>
+</file>
+
+<file path=ppt/notesSlides/notesSlide13.xml><?xml version="1.0" encoding="utf-8"?>
+<p:notes xmlns:a="http://schemas.openxmlformats.org/drawingml/2006/main" xmlns:r="http://schemas.openxmlformats.org/officeDocument/2006/relationships" xmlns:p="http://schemas.openxmlformats.org/presentationml/2006/main">
+  <p:cSld>
+    <p:spTree>
+      <p:nvGrpSpPr>
+        <p:cNvPr id="1" name=""/>
+        <p:cNvGrpSpPr/>
+        <p:nvPr/>
+      </p:nvGrpSpPr>
+      <p:grpSpPr>
+        <a:xfrm>
+          <a:off x="0" y="0"/>
+          <a:ext cx="0" cy="0"/>
+          <a:chOff x="0" y="0"/>
+          <a:chExt cx="0" cy="0"/>
+        </a:xfrm>
+      </p:grpSpPr>
+      <p:sp>
+        <p:nvSpPr>
+          <p:cNvPr id="2" name="Slide Image Placeholder 1"/>
+          <p:cNvSpPr>
+            <a:spLocks noGrp="1" noRot="1" noChangeAspect="1"/>
+          </p:cNvSpPr>
+          <p:nvPr>
+            <p:ph type="sldImg"/>
+          </p:nvPr>
+        </p:nvSpPr>
+        <p:spPr/>
+      </p:sp>
+      <p:sp>
+        <p:nvSpPr>
+          <p:cNvPr id="3" name="Notes Placeholder 2"/>
+          <p:cNvSpPr>
+            <a:spLocks noGrp="1"/>
+          </p:cNvSpPr>
+          <p:nvPr>
+            <p:ph type="body" idx="1"/>
+          </p:nvPr>
+        </p:nvSpPr>
+        <p:spPr/>
+        <p:txBody>
+          <a:bodyPr/>
+          <a:lstStyle/>
+          <a:p>
+            <a:r>
+              <a:rPr lang="en-US" dirty="0"/>
+              <a:t>「発注できるようになることが目的」を明言する。作れない自分を責める必要はない、というメッセージが効く。</a:t>
+            </a:r>
+            <a:endParaRPr lang="en-US" dirty="0"/>
+          </a:p>
+        </p:txBody>
+      </p:sp>
+      <p:sp>
+        <p:nvSpPr>
+          <p:cNvPr id="4" name="Slide Number Placeholder 3"/>
+          <p:cNvSpPr>
+            <a:spLocks noGrp="1"/>
+          </p:cNvSpPr>
+          <p:nvPr>
+            <p:ph type="sldNum" sz="quarter" idx="10"/>
+          </p:nvPr>
+        </p:nvSpPr>
+        <p:spPr/>
+        <p:txBody>
+          <a:bodyPr/>
+          <a:lstStyle/>
+          <a:p>
+            <a:fld id="{F7021451-1387-4CA6-816F-3879F97B5CBC}" type="slidenum">
+              <a:rPr lang="en-US"/>
+              <a:t>13</a:t>
+            </a:fld>
+            <a:endParaRPr lang="en-US"/>
+          </a:p>
+        </p:txBody>
+      </p:sp>
+    </p:spTree>
+    <p:extLst>
+      <p:ext uri="{BB962C8B-B14F-4D97-AF65-F5344CB8AC3E}">
+        <p14:creationId xmlns:p14="http://schemas.microsoft.com/office/powerpoint/2010/main" val="1024086991"/>
+      </p:ext>
+    </p:extLst>
+  </p:cSld>
+  <p:clrMapOvr>
+    <a:masterClrMapping/>
+  </p:clrMapOvr>
+</p:notes>
+</file>
+
+<file path=ppt/notesSlides/notesSlide14.xml><?xml version="1.0" encoding="utf-8"?>
+<p:notes xmlns:a="http://schemas.openxmlformats.org/drawingml/2006/main" xmlns:r="http://schemas.openxmlformats.org/officeDocument/2006/relationships" xmlns:p="http://schemas.openxmlformats.org/presentationml/2006/main">
+  <p:cSld>
+    <p:spTree>
+      <p:nvGrpSpPr>
+        <p:cNvPr id="1" name=""/>
+        <p:cNvGrpSpPr/>
+        <p:nvPr/>
+      </p:nvGrpSpPr>
+      <p:grpSpPr>
+        <a:xfrm>
+          <a:off x="0" y="0"/>
+          <a:ext cx="0" cy="0"/>
+          <a:chOff x="0" y="0"/>
+          <a:chExt cx="0" cy="0"/>
+        </a:xfrm>
+      </p:grpSpPr>
+      <p:sp>
+        <p:nvSpPr>
+          <p:cNvPr id="2" name="Slide Image Placeholder 1"/>
+          <p:cNvSpPr>
+            <a:spLocks noGrp="1" noRot="1" noChangeAspect="1"/>
+          </p:cNvSpPr>
+          <p:nvPr>
+            <p:ph type="sldImg"/>
+          </p:nvPr>
+        </p:nvSpPr>
+        <p:spPr/>
+      </p:sp>
+      <p:sp>
+        <p:nvSpPr>
+          <p:cNvPr id="3" name="Notes Placeholder 2"/>
+          <p:cNvSpPr>
+            <a:spLocks noGrp="1"/>
+          </p:cNvSpPr>
+          <p:nvPr>
+            <p:ph type="body" idx="1"/>
+          </p:nvPr>
+        </p:nvSpPr>
+        <p:spPr/>
+        <p:txBody>
+          <a:bodyPr/>
+          <a:lstStyle/>
+          <a:p>
+            <a:r>
+              <a:rPr lang="en-US" dirty="0"/>
+              <a:t>次回の10件は第8回のものを流用できる。負担が小さいことを伝えておく。</a:t>
+            </a:r>
+            <a:endParaRPr lang="en-US" dirty="0"/>
+          </a:p>
+        </p:txBody>
+      </p:sp>
+      <p:sp>
+        <p:nvSpPr>
+          <p:cNvPr id="4" name="Slide Number Placeholder 3"/>
+          <p:cNvSpPr>
+            <a:spLocks noGrp="1"/>
+          </p:cNvSpPr>
+          <p:nvPr>
+            <p:ph type="sldNum" sz="quarter" idx="10"/>
+          </p:nvPr>
+        </p:nvSpPr>
+        <p:spPr/>
+        <p:txBody>
+          <a:bodyPr/>
+          <a:lstStyle/>
+          <a:p>
+            <a:fld id="{F7021451-1387-4CA6-816F-3879F97B5CBC}" type="slidenum">
+              <a:rPr lang="en-US"/>
+              <a:t>14</a:t>
+            </a:fld>
+            <a:endParaRPr lang="en-US"/>
+          </a:p>
+        </p:txBody>
+      </p:sp>
+    </p:spTree>
+    <p:extLst>
+      <p:ext uri="{BB962C8B-B14F-4D97-AF65-F5344CB8AC3E}">
+        <p14:creationId xmlns:p14="http://schemas.microsoft.com/office/powerpoint/2010/main" val="1024086991"/>
+      </p:ext>
+    </p:extLst>
+  </p:cSld>
+  <p:clrMapOvr>
+    <a:masterClrMapping/>
+  </p:clrMapOvr>
+</p:notes>
+</file>
+
+<file path=ppt/notesSlides/notesSlide15.xml><?xml version="1.0" encoding="utf-8"?>
+<p:notes xmlns:a="http://schemas.openxmlformats.org/drawingml/2006/main" xmlns:r="http://schemas.openxmlformats.org/officeDocument/2006/relationships" xmlns:p="http://schemas.openxmlformats.org/presentationml/2006/main">
+  <p:cSld>
+    <p:spTree>
+      <p:nvGrpSpPr>
+        <p:cNvPr id="1" name=""/>
+        <p:cNvGrpSpPr/>
+        <p:nvPr/>
+      </p:nvGrpSpPr>
+      <p:grpSpPr>
+        <a:xfrm>
+          <a:off x="0" y="0"/>
+          <a:ext cx="0" cy="0"/>
+          <a:chOff x="0" y="0"/>
+          <a:chExt cx="0" cy="0"/>
+        </a:xfrm>
+      </p:grpSpPr>
+      <p:sp>
+        <p:nvSpPr>
+          <p:cNvPr id="2" name="Slide Image Placeholder 1"/>
+          <p:cNvSpPr>
+            <a:spLocks noGrp="1" noRot="1" noChangeAspect="1"/>
+          </p:cNvSpPr>
+          <p:nvPr>
+            <p:ph type="sldImg"/>
+          </p:nvPr>
+        </p:nvSpPr>
+        <p:spPr/>
+      </p:sp>
+      <p:sp>
+        <p:nvSpPr>
+          <p:cNvPr id="3" name="Notes Placeholder 2"/>
+          <p:cNvSpPr>
+            <a:spLocks noGrp="1"/>
+          </p:cNvSpPr>
+          <p:nvPr>
+            <p:ph type="body" idx="1"/>
+          </p:nvPr>
+        </p:nvSpPr>
+        <p:spPr/>
+        <p:txBody>
+          <a:bodyPr/>
+          <a:lstStyle/>
+          <a:p>
+            <a:r>
+              <a:rPr lang="en-US" dirty="0"/>
+              <a:t>1回だけ、を強調する。運用に載せるのは確認ポイントが機能してから。</a:t>
+            </a:r>
+            <a:endParaRPr lang="en-US" dirty="0"/>
+          </a:p>
+        </p:txBody>
+      </p:sp>
+      <p:sp>
+        <p:nvSpPr>
+          <p:cNvPr id="4" name="Slide Number Placeholder 3"/>
+          <p:cNvSpPr>
+            <a:spLocks noGrp="1"/>
+          </p:cNvSpPr>
+          <p:nvPr>
+            <p:ph type="sldNum" sz="quarter" idx="10"/>
+          </p:nvPr>
+        </p:nvSpPr>
+        <p:spPr/>
+        <p:txBody>
+          <a:bodyPr/>
+          <a:lstStyle/>
+          <a:p>
+            <a:fld id="{F7021451-1387-4CA6-816F-3879F97B5CBC}" type="slidenum">
+              <a:rPr lang="en-US"/>
+              <a:t>15</a:t>
             </a:fld>
             <a:endParaRPr lang="en-US"/>
           </a:p>
@@ -1481,7 +1748,7 @@
           <a:p>
             <a:r>
               <a:rPr lang="en-US" dirty="0"/>
-              <a:t>工程図は画面共有で一緒に描く。講師が描いてしまわない。受講者の手が止まると、この回は退屈になる。</a:t>
+              <a:t>1つ目は最重要。3つの境界（金額・社外・不可逆）は、この講座を通しての判断基準になる。板書してでも残す。</a:t>
             </a:r>
             <a:endParaRPr lang="en-US" dirty="0"/>
           </a:p>
@@ -2175,13 +2442,13 @@
             <a:r>
               <a:rPr lang="en-US" sz="1100" b="1" spc="250" kern="0" dirty="0">
                 <a:solidFill>
-                  <a:srgbClr val="3B6B4A"/>
-                </a:solidFill>
-                <a:latin typeface="Yu Gothic" pitchFamily="34" charset="0"/>
-                <a:ea typeface="Yu Gothic" pitchFamily="34" charset="-122"/>
-                <a:cs typeface="Yu Gothic" pitchFamily="34" charset="-120"/>
-              </a:rPr>
-              <a:t>業務への組み込み</a:t>
+                  <a:srgbClr val="8A8177"/>
+                </a:solidFill>
+                <a:latin typeface="Yu Gothic" pitchFamily="34" charset="0"/>
+                <a:ea typeface="Yu Gothic" pitchFamily="34" charset="-122"/>
+                <a:cs typeface="Yu Gothic" pitchFamily="34" charset="-120"/>
+              </a:rPr>
+              <a:t>用語</a:t>
             </a:r>
             <a:endParaRPr lang="en-US" sz="1100" dirty="0"/>
           </a:p>
@@ -2220,7 +2487,7 @@
                 <a:ea typeface="Yu Gothic" pitchFamily="34" charset="-122"/>
                 <a:cs typeface="Yu Gothic" pitchFamily="34" charset="-120"/>
               </a:rPr>
-              <a:t>帰る前に決めること</a:t>
+              <a:t>今日出てきた言葉</a:t>
             </a:r>
             <a:endParaRPr lang="en-US" sz="2600" dirty="0"/>
           </a:p>
@@ -2228,53 +2495,14 @@
       </p:sp>
       <p:sp>
         <p:nvSpPr>
-          <p:cNvPr id="4" name="Text 2"/>
-          <p:cNvSpPr txBox="1"/>
-          <p:nvPr/>
-        </p:nvSpPr>
-        <p:spPr>
-          <a:xfrm>
-            <a:off x="777240" y="1572768"/>
-            <a:ext cx="10607040" cy="320040"/>
-          </a:xfrm>
-          <a:prstGeom prst="rect">
-            <a:avLst/>
-          </a:prstGeom>
-          <a:noFill/>
-          <a:ln/>
-        </p:spPr>
-        <p:txBody>
-          <a:bodyPr wrap="square" lIns="0" tIns="0" rIns="0" bIns="0" rtlCol="0" anchor="ctr"/>
-          <a:lstStyle/>
-          <a:p>
-            <a:pPr indent="0" marL="0">
-              <a:buNone/>
-            </a:pPr>
-            <a:r>
-              <a:rPr lang="en-US" sz="1250" b="1" dirty="0">
-                <a:solidFill>
-                  <a:srgbClr val="3B6B4A"/>
-                </a:solidFill>
-                <a:latin typeface="Yu Gothic" pitchFamily="34" charset="0"/>
-                <a:ea typeface="Yu Gothic" pitchFamily="34" charset="-122"/>
-                <a:cs typeface="Yu Gothic" pitchFamily="34" charset="-120"/>
-              </a:rPr>
-              <a:t>ここを決めないと、持ち帰っても使われません。紙に書きます。</a:t>
-            </a:r>
-            <a:endParaRPr lang="en-US" sz="1250" dirty="0"/>
-          </a:p>
-        </p:txBody>
-      </p:sp>
-      <p:sp>
-        <p:nvSpPr>
-          <p:cNvPr id="5" name="Shape 3"/>
+          <p:cNvPr id="4" name="Shape 2"/>
           <p:cNvSpPr/>
           <p:nvPr/>
         </p:nvSpPr>
         <p:spPr>
           <a:xfrm>
-            <a:off x="777240" y="2103120"/>
-            <a:ext cx="10607040" cy="914400"/>
+            <a:off x="777240" y="1828800"/>
+            <a:ext cx="10607040" cy="1078992"/>
           </a:xfrm>
           <a:prstGeom prst="rect">
             <a:avLst/>
@@ -2292,20 +2520,59 @@
       </p:sp>
       <p:sp>
         <p:nvSpPr>
+          <p:cNvPr id="5" name="Text 3"/>
+          <p:cNvSpPr txBox="1"/>
+          <p:nvPr/>
+        </p:nvSpPr>
+        <p:spPr>
+          <a:xfrm>
+            <a:off x="1097280" y="1920240"/>
+            <a:ext cx="2969971" cy="896112"/>
+          </a:xfrm>
+          <a:prstGeom prst="rect">
+            <a:avLst/>
+          </a:prstGeom>
+          <a:noFill/>
+          <a:ln/>
+        </p:spPr>
+        <p:txBody>
+          <a:bodyPr wrap="square" lIns="0" tIns="0" rIns="0" bIns="0" rtlCol="0" anchor="ctr"/>
+          <a:lstStyle/>
+          <a:p>
+            <a:pPr indent="0" marL="0">
+              <a:buNone/>
+            </a:pPr>
+            <a:r>
+              <a:rPr lang="en-US" sz="1500" b="1" dirty="0">
+                <a:solidFill>
+                  <a:srgbClr val="23201D"/>
+                </a:solidFill>
+                <a:latin typeface="Yu Gothic" pitchFamily="34" charset="0"/>
+                <a:ea typeface="Yu Gothic" pitchFamily="34" charset="-122"/>
+                <a:cs typeface="Yu Gothic" pitchFamily="34" charset="-120"/>
+              </a:rPr>
+              <a:t>多工程</a:t>
+            </a:r>
+            <a:endParaRPr lang="en-US" sz="1500" dirty="0"/>
+          </a:p>
+        </p:txBody>
+      </p:sp>
+      <p:sp>
+        <p:nvSpPr>
           <p:cNvPr id="6" name="Shape 4"/>
           <p:cNvSpPr/>
           <p:nvPr/>
         </p:nvSpPr>
         <p:spPr>
           <a:xfrm>
-            <a:off x="777240" y="2103120"/>
-            <a:ext cx="54864" cy="914400"/>
+            <a:off x="4065422" y="1956816"/>
+            <a:ext cx="18288" cy="822960"/>
           </a:xfrm>
           <a:prstGeom prst="rect">
             <a:avLst/>
           </a:prstGeom>
           <a:solidFill>
-            <a:srgbClr val="3B6B4A"/>
+            <a:srgbClr val="EDE7DB"/>
           </a:solidFill>
           <a:ln w="12700">
             <a:solidFill>
@@ -2323,47 +2590,8 @@
         </p:nvSpPr>
         <p:spPr>
           <a:xfrm>
-            <a:off x="1143000" y="2176272"/>
-            <a:ext cx="2757830" cy="768096"/>
-          </a:xfrm>
-          <a:prstGeom prst="rect">
-            <a:avLst/>
-          </a:prstGeom>
-          <a:noFill/>
-          <a:ln/>
-        </p:spPr>
-        <p:txBody>
-          <a:bodyPr wrap="square" lIns="0" tIns="0" rIns="0" bIns="0" rtlCol="0" anchor="ctr"/>
-          <a:lstStyle/>
-          <a:p>
-            <a:pPr indent="0" marL="0">
-              <a:buNone/>
-            </a:pPr>
-            <a:r>
-              <a:rPr lang="en-US" sz="1400" b="1" dirty="0">
-                <a:solidFill>
-                  <a:srgbClr val="3B6B4A"/>
-                </a:solidFill>
-                <a:latin typeface="Yu Gothic" pitchFamily="34" charset="0"/>
-                <a:ea typeface="Yu Gothic" pitchFamily="34" charset="-122"/>
-                <a:cs typeface="Yu Gothic" pitchFamily="34" charset="-120"/>
-              </a:rPr>
-              <a:t>確認役は誰か</a:t>
-            </a:r>
-            <a:endParaRPr lang="en-US" sz="1400" dirty="0"/>
-          </a:p>
-        </p:txBody>
-      </p:sp>
-      <p:sp>
-        <p:nvSpPr>
-          <p:cNvPr id="8" name="Text 6"/>
-          <p:cNvSpPr txBox="1"/>
-          <p:nvPr/>
-        </p:nvSpPr>
-        <p:spPr>
-          <a:xfrm>
-            <a:off x="4006901" y="2176272"/>
-            <a:ext cx="7011619" cy="768096"/>
+            <a:off x="4383634" y="1920240"/>
+            <a:ext cx="6682435" cy="896112"/>
           </a:xfrm>
           <a:prstGeom prst="rect">
             <a:avLst/>
@@ -2384,13 +2612,13 @@
             <a:r>
               <a:rPr lang="en-US" sz="1250" dirty="0">
                 <a:solidFill>
-                  <a:srgbClr val="3F3933"/>
-                </a:solidFill>
-                <a:latin typeface="Yu Gothic" pitchFamily="34" charset="0"/>
-                <a:ea typeface="Yu Gothic" pitchFamily="34" charset="-122"/>
-                <a:cs typeface="Yu Gothic" pitchFamily="34" charset="-120"/>
-              </a:rPr>
-              <a:t>最上流の確認を、誰がやるか。社長でなくても構いません</a:t>
+                  <a:srgbClr val="5A534A"/>
+                </a:solidFill>
+                <a:latin typeface="Yu Gothic" pitchFamily="34" charset="0"/>
+                <a:ea typeface="Yu Gothic" pitchFamily="34" charset="-122"/>
+                <a:cs typeface="Yu Gothic" pitchFamily="34" charset="-120"/>
+              </a:rPr>
+              <a:t>複数の手順がつながった仕事。途中で判断が挟まるので設計が要ります</a:t>
             </a:r>
             <a:endParaRPr lang="en-US" sz="1250" dirty="0"/>
           </a:p>
@@ -2398,14 +2626,14 @@
       </p:sp>
       <p:sp>
         <p:nvSpPr>
-          <p:cNvPr id="9" name="Shape 7"/>
+          <p:cNvPr id="8" name="Shape 6"/>
           <p:cNvSpPr/>
           <p:nvPr/>
         </p:nvSpPr>
         <p:spPr>
           <a:xfrm>
-            <a:off x="777240" y="3154680"/>
-            <a:ext cx="10607040" cy="914400"/>
+            <a:off x="777240" y="3063240"/>
+            <a:ext cx="10607040" cy="1078992"/>
           </a:xfrm>
           <a:prstGeom prst="rect">
             <a:avLst/>
@@ -2423,20 +2651,59 @@
       </p:sp>
       <p:sp>
         <p:nvSpPr>
+          <p:cNvPr id="9" name="Text 7"/>
+          <p:cNvSpPr txBox="1"/>
+          <p:nvPr/>
+        </p:nvSpPr>
+        <p:spPr>
+          <a:xfrm>
+            <a:off x="1097280" y="3154680"/>
+            <a:ext cx="2969971" cy="896112"/>
+          </a:xfrm>
+          <a:prstGeom prst="rect">
+            <a:avLst/>
+          </a:prstGeom>
+          <a:noFill/>
+          <a:ln/>
+        </p:spPr>
+        <p:txBody>
+          <a:bodyPr wrap="square" lIns="0" tIns="0" rIns="0" bIns="0" rtlCol="0" anchor="ctr"/>
+          <a:lstStyle/>
+          <a:p>
+            <a:pPr indent="0" marL="0">
+              <a:buNone/>
+            </a:pPr>
+            <a:r>
+              <a:rPr lang="en-US" sz="1500" b="1" dirty="0">
+                <a:solidFill>
+                  <a:srgbClr val="23201D"/>
+                </a:solidFill>
+                <a:latin typeface="Yu Gothic" pitchFamily="34" charset="0"/>
+                <a:ea typeface="Yu Gothic" pitchFamily="34" charset="-122"/>
+                <a:cs typeface="Yu Gothic" pitchFamily="34" charset="-120"/>
+              </a:rPr>
+              <a:t>確認ポイント</a:t>
+            </a:r>
+            <a:endParaRPr lang="en-US" sz="1500" dirty="0"/>
+          </a:p>
+        </p:txBody>
+      </p:sp>
+      <p:sp>
+        <p:nvSpPr>
           <p:cNvPr id="10" name="Shape 8"/>
           <p:cNvSpPr/>
           <p:nvPr/>
         </p:nvSpPr>
         <p:spPr>
           <a:xfrm>
-            <a:off x="777240" y="3154680"/>
-            <a:ext cx="54864" cy="914400"/>
+            <a:off x="4065422" y="3191256"/>
+            <a:ext cx="18288" cy="822960"/>
           </a:xfrm>
           <a:prstGeom prst="rect">
             <a:avLst/>
           </a:prstGeom>
           <a:solidFill>
-            <a:srgbClr val="3B6B4A"/>
+            <a:srgbClr val="EDE7DB"/>
           </a:solidFill>
           <a:ln w="12700">
             <a:solidFill>
@@ -2454,47 +2721,8 @@
         </p:nvSpPr>
         <p:spPr>
           <a:xfrm>
-            <a:off x="1143000" y="3227832"/>
-            <a:ext cx="2757830" cy="768096"/>
-          </a:xfrm>
-          <a:prstGeom prst="rect">
-            <a:avLst/>
-          </a:prstGeom>
-          <a:noFill/>
-          <a:ln/>
-        </p:spPr>
-        <p:txBody>
-          <a:bodyPr wrap="square" lIns="0" tIns="0" rIns="0" bIns="0" rtlCol="0" anchor="ctr"/>
-          <a:lstStyle/>
-          <a:p>
-            <a:pPr indent="0" marL="0">
-              <a:buNone/>
-            </a:pPr>
-            <a:r>
-              <a:rPr lang="en-US" sz="1400" b="1" dirty="0">
-                <a:solidFill>
-                  <a:srgbClr val="3B6B4A"/>
-                </a:solidFill>
-                <a:latin typeface="Yu Gothic" pitchFamily="34" charset="0"/>
-                <a:ea typeface="Yu Gothic" pitchFamily="34" charset="-122"/>
-                <a:cs typeface="Yu Gothic" pitchFamily="34" charset="-120"/>
-              </a:rPr>
-              <a:t>いつ本番で流すか</a:t>
-            </a:r>
-            <a:endParaRPr lang="en-US" sz="1400" dirty="0"/>
-          </a:p>
-        </p:txBody>
-      </p:sp>
-      <p:sp>
-        <p:nvSpPr>
-          <p:cNvPr id="12" name="Text 10"/>
-          <p:cNvSpPr txBox="1"/>
-          <p:nvPr/>
-        </p:nvSpPr>
-        <p:spPr>
-          <a:xfrm>
-            <a:off x="4006901" y="3227832"/>
-            <a:ext cx="7011619" cy="768096"/>
+            <a:off x="4383634" y="3154680"/>
+            <a:ext cx="6682435" cy="896112"/>
           </a:xfrm>
           <a:prstGeom prst="rect">
             <a:avLst/>
@@ -2515,13 +2743,13 @@
             <a:r>
               <a:rPr lang="en-US" sz="1250" dirty="0">
                 <a:solidFill>
-                  <a:srgbClr val="3F3933"/>
-                </a:solidFill>
-                <a:latin typeface="Yu Gothic" pitchFamily="34" charset="0"/>
-                <a:ea typeface="Yu Gothic" pitchFamily="34" charset="-122"/>
-                <a:cs typeface="Yu Gothic" pitchFamily="34" charset="-120"/>
-              </a:rPr>
-              <a:t>来週の実案件で1回。テストのままにしません</a:t>
+                  <a:srgbClr val="5A534A"/>
+                </a:solidFill>
+                <a:latin typeface="Yu Gothic" pitchFamily="34" charset="0"/>
+                <a:ea typeface="Yu Gothic" pitchFamily="34" charset="-122"/>
+                <a:cs typeface="Yu Gothic" pitchFamily="34" charset="-120"/>
+              </a:rPr>
+              <a:t>人が止める場所。最も上流に置きます。回数ではなく位置で効きます</a:t>
             </a:r>
             <a:endParaRPr lang="en-US" sz="1250" dirty="0"/>
           </a:p>
@@ -2529,14 +2757,14 @@
       </p:sp>
       <p:sp>
         <p:nvSpPr>
-          <p:cNvPr id="13" name="Shape 11"/>
+          <p:cNvPr id="12" name="Shape 10"/>
           <p:cNvSpPr/>
           <p:nvPr/>
         </p:nvSpPr>
         <p:spPr>
           <a:xfrm>
-            <a:off x="777240" y="4206240"/>
-            <a:ext cx="10607040" cy="914400"/>
+            <a:off x="777240" y="4297680"/>
+            <a:ext cx="10607040" cy="1078992"/>
           </a:xfrm>
           <a:prstGeom prst="rect">
             <a:avLst/>
@@ -2554,20 +2782,59 @@
       </p:sp>
       <p:sp>
         <p:nvSpPr>
+          <p:cNvPr id="13" name="Text 11"/>
+          <p:cNvSpPr txBox="1"/>
+          <p:nvPr/>
+        </p:nvSpPr>
+        <p:spPr>
+          <a:xfrm>
+            <a:off x="1097280" y="4389120"/>
+            <a:ext cx="2969971" cy="896112"/>
+          </a:xfrm>
+          <a:prstGeom prst="rect">
+            <a:avLst/>
+          </a:prstGeom>
+          <a:noFill/>
+          <a:ln/>
+        </p:spPr>
+        <p:txBody>
+          <a:bodyPr wrap="square" lIns="0" tIns="0" rIns="0" bIns="0" rtlCol="0" anchor="ctr"/>
+          <a:lstStyle/>
+          <a:p>
+            <a:pPr indent="0" marL="0">
+              <a:buNone/>
+            </a:pPr>
+            <a:r>
+              <a:rPr lang="en-US" sz="1500" b="1" dirty="0">
+                <a:solidFill>
+                  <a:srgbClr val="23201D"/>
+                </a:solidFill>
+                <a:latin typeface="Yu Gothic" pitchFamily="34" charset="0"/>
+                <a:ea typeface="Yu Gothic" pitchFamily="34" charset="-122"/>
+                <a:cs typeface="Yu Gothic" pitchFamily="34" charset="-120"/>
+              </a:rPr>
+              <a:t>エージェント</a:t>
+            </a:r>
+            <a:endParaRPr lang="en-US" sz="1500" dirty="0"/>
+          </a:p>
+        </p:txBody>
+      </p:sp>
+      <p:sp>
+        <p:nvSpPr>
           <p:cNvPr id="14" name="Shape 12"/>
           <p:cNvSpPr/>
           <p:nvPr/>
         </p:nvSpPr>
         <p:spPr>
           <a:xfrm>
-            <a:off x="777240" y="4206240"/>
-            <a:ext cx="54864" cy="914400"/>
+            <a:off x="4065422" y="4425696"/>
+            <a:ext cx="18288" cy="822960"/>
           </a:xfrm>
           <a:prstGeom prst="rect">
             <a:avLst/>
           </a:prstGeom>
           <a:solidFill>
-            <a:srgbClr val="3B6B4A"/>
+            <a:srgbClr val="EDE7DB"/>
           </a:solidFill>
           <a:ln w="12700">
             <a:solidFill>
@@ -2585,47 +2852,8 @@
         </p:nvSpPr>
         <p:spPr>
           <a:xfrm>
-            <a:off x="1143000" y="4279392"/>
-            <a:ext cx="2757830" cy="768096"/>
-          </a:xfrm>
-          <a:prstGeom prst="rect">
-            <a:avLst/>
-          </a:prstGeom>
-          <a:noFill/>
-          <a:ln/>
-        </p:spPr>
-        <p:txBody>
-          <a:bodyPr wrap="square" lIns="0" tIns="0" rIns="0" bIns="0" rtlCol="0" anchor="ctr"/>
-          <a:lstStyle/>
-          <a:p>
-            <a:pPr indent="0" marL="0">
-              <a:buNone/>
-            </a:pPr>
-            <a:r>
-              <a:rPr lang="en-US" sz="1400" b="1" dirty="0">
-                <a:solidFill>
-                  <a:srgbClr val="3B6B4A"/>
-                </a:solidFill>
-                <a:latin typeface="Yu Gothic" pitchFamily="34" charset="0"/>
-                <a:ea typeface="Yu Gothic" pitchFamily="34" charset="-122"/>
-                <a:cs typeface="Yu Gothic" pitchFamily="34" charset="-120"/>
-              </a:rPr>
-              <a:t>壊れたらどうするか</a:t>
-            </a:r>
-            <a:endParaRPr lang="en-US" sz="1400" dirty="0"/>
-          </a:p>
-        </p:txBody>
-      </p:sp>
-      <p:sp>
-        <p:nvSpPr>
-          <p:cNvPr id="16" name="Text 14"/>
-          <p:cNvSpPr txBox="1"/>
-          <p:nvPr/>
-        </p:nvSpPr>
-        <p:spPr>
-          <a:xfrm>
-            <a:off x="4006901" y="4279392"/>
-            <a:ext cx="7011619" cy="768096"/>
+            <a:off x="4383634" y="4389120"/>
+            <a:ext cx="6682435" cy="896112"/>
           </a:xfrm>
           <a:prstGeom prst="rect">
             <a:avLst/>
@@ -2646,15 +2874,54 @@
             <a:r>
               <a:rPr lang="en-US" sz="1250" dirty="0">
                 <a:solidFill>
-                  <a:srgbClr val="3F3933"/>
-                </a:solidFill>
-                <a:latin typeface="Yu Gothic" pitchFamily="34" charset="0"/>
-                <a:ea typeface="Yu Gothic" pitchFamily="34" charset="-122"/>
-                <a:cs typeface="Yu Gothic" pitchFamily="34" charset="-120"/>
-              </a:rPr>
-              <a:t>手動に戻す手順を、確認役の方に共有します</a:t>
+                  <a:srgbClr val="5A534A"/>
+                </a:solidFill>
+                <a:latin typeface="Yu Gothic" pitchFamily="34" charset="0"/>
+                <a:ea typeface="Yu Gothic" pitchFamily="34" charset="-122"/>
+                <a:cs typeface="Yu Gothic" pitchFamily="34" charset="-120"/>
+              </a:rPr>
+              <a:t>複数の工程を続けて実行させる使い方。設計の考え方は同じです</a:t>
             </a:r>
             <a:endParaRPr lang="en-US" sz="1250" dirty="0"/>
+          </a:p>
+        </p:txBody>
+      </p:sp>
+      <p:sp>
+        <p:nvSpPr>
+          <p:cNvPr id="16" name="Text 14"/>
+          <p:cNvSpPr txBox="1"/>
+          <p:nvPr/>
+        </p:nvSpPr>
+        <p:spPr>
+          <a:xfrm>
+            <a:off x="777240" y="5623560"/>
+            <a:ext cx="10607040" cy="411480"/>
+          </a:xfrm>
+          <a:prstGeom prst="rect">
+            <a:avLst/>
+          </a:prstGeom>
+          <a:noFill/>
+          <a:ln/>
+        </p:spPr>
+        <p:txBody>
+          <a:bodyPr wrap="square" lIns="0" tIns="0" rIns="0" bIns="0" rtlCol="0" anchor="ctr"/>
+          <a:lstStyle/>
+          <a:p>
+            <a:pPr indent="0" marL="0">
+              <a:buNone/>
+            </a:pPr>
+            <a:r>
+              <a:rPr lang="en-US" sz="1150" dirty="0">
+                <a:solidFill>
+                  <a:srgbClr val="8A8177"/>
+                </a:solidFill>
+                <a:latin typeface="Yu Gothic" pitchFamily="34" charset="0"/>
+                <a:ea typeface="Yu Gothic" pitchFamily="34" charset="-122"/>
+                <a:cs typeface="Yu Gothic" pitchFamily="34" charset="-120"/>
+              </a:rPr>
+              <a:t>配布した用語辞典にも同じものが載っています。覚える必要はありません。</a:t>
+            </a:r>
+            <a:endParaRPr lang="en-US" sz="1150" dirty="0"/>
           </a:p>
         </p:txBody>
       </p:sp>
@@ -2730,7 +2997,7 @@
                 <a:ea typeface="Yu Gothic" pitchFamily="34" charset="-122"/>
                 <a:cs typeface="Yu Gothic" pitchFamily="34" charset="-120"/>
               </a:rPr>
-              <a:t>組み込み</a:t>
+              <a:t>用語</a:t>
             </a:r>
             <a:endParaRPr lang="en-US" sz="900" dirty="0"/>
           </a:p>
@@ -2795,13 +3062,13 @@
             <a:r>
               <a:rPr lang="en-US" sz="1100" b="1" spc="250" kern="0" dirty="0">
                 <a:solidFill>
-                  <a:srgbClr val="B04A2F"/>
-                </a:solidFill>
-                <a:latin typeface="Yu Gothic" pitchFamily="34" charset="0"/>
-                <a:ea typeface="Yu Gothic" pitchFamily="34" charset="-122"/>
-                <a:cs typeface="Yu Gothic" pitchFamily="34" charset="-120"/>
-              </a:rPr>
-              <a:t>ここだけは</a:t>
+                  <a:srgbClr val="2F4F6B"/>
+                </a:solidFill>
+                <a:latin typeface="Yu Gothic" pitchFamily="34" charset="0"/>
+                <a:ea typeface="Yu Gothic" pitchFamily="34" charset="-122"/>
+                <a:cs typeface="Yu Gothic" pitchFamily="34" charset="-120"/>
+              </a:rPr>
+              <a:t>演習</a:t>
             </a:r>
             <a:endParaRPr lang="en-US" sz="1100" dirty="0"/>
           </a:p>
@@ -2815,7 +3082,7 @@
         </p:nvSpPr>
         <p:spPr>
           <a:xfrm>
-            <a:off x="777240" y="1097280"/>
+            <a:off x="777240" y="896112"/>
             <a:ext cx="10607040" cy="640080"/>
           </a:xfrm>
           <a:prstGeom prst="rect">
@@ -2840,7 +3107,7 @@
                 <a:ea typeface="Yu Gothic" pitchFamily="34" charset="-122"/>
                 <a:cs typeface="Yu Gothic" pitchFamily="34" charset="-120"/>
               </a:rPr>
-              <a:t>実装は、外に頼んでも構いません</a:t>
+              <a:t>今日、一緒にやること</a:t>
             </a:r>
             <a:endParaRPr lang="en-US" sz="2600" dirty="0"/>
           </a:p>
@@ -2848,20 +3115,84 @@
       </p:sp>
       <p:sp>
         <p:nvSpPr>
-          <p:cNvPr id="4" name="Shape 2"/>
+          <p:cNvPr id="4" name="Text 2"/>
+          <p:cNvSpPr txBox="1"/>
+          <p:nvPr/>
+        </p:nvSpPr>
+        <p:spPr>
+          <a:xfrm>
+            <a:off x="777240" y="1572768"/>
+            <a:ext cx="10607040" cy="320040"/>
+          </a:xfrm>
+          <a:prstGeom prst="rect">
+            <a:avLst/>
+          </a:prstGeom>
+          <a:noFill/>
+          <a:ln/>
+        </p:spPr>
+        <p:txBody>
+          <a:bodyPr wrap="square" lIns="0" tIns="0" rIns="0" bIns="0" rtlCol="0" anchor="ctr"/>
+          <a:lstStyle/>
+          <a:p>
+            <a:pPr indent="0" marL="0">
+              <a:buNone/>
+            </a:pPr>
+            <a:r>
+              <a:rPr lang="en-US" sz="1250" b="1" dirty="0">
+                <a:solidFill>
+                  <a:srgbClr val="2F4F6B"/>
+                </a:solidFill>
+                <a:latin typeface="Yu Gothic" pitchFamily="34" charset="0"/>
+                <a:ea typeface="Yu Gothic" pitchFamily="34" charset="-122"/>
+                <a:cs typeface="Yu Gothic" pitchFamily="34" charset="-120"/>
+              </a:rPr>
+              <a:t>55分。操作するのはご自身です。</a:t>
+            </a:r>
+            <a:endParaRPr lang="en-US" sz="1250" dirty="0"/>
+          </a:p>
+        </p:txBody>
+      </p:sp>
+      <p:sp>
+        <p:nvSpPr>
+          <p:cNvPr id="5" name="Shape 3"/>
           <p:cNvSpPr/>
           <p:nvPr/>
         </p:nvSpPr>
         <p:spPr>
           <a:xfrm>
             <a:off x="777240" y="2148840"/>
-            <a:ext cx="64008" cy="2194560"/>
+            <a:ext cx="3383280" cy="2880360"/>
           </a:xfrm>
           <a:prstGeom prst="rect">
             <a:avLst/>
           </a:prstGeom>
           <a:solidFill>
-            <a:srgbClr val="B04A2F"/>
+            <a:srgbClr val="FFFFFF"/>
+          </a:solidFill>
+          <a:ln w="12700">
+            <a:solidFill>
+              <a:srgbClr val="EDE7DB"/>
+            </a:solidFill>
+            <a:prstDash val="solid"/>
+          </a:ln>
+        </p:spPr>
+      </p:sp>
+      <p:sp>
+        <p:nvSpPr>
+          <p:cNvPr id="6" name="Shape 4"/>
+          <p:cNvSpPr/>
+          <p:nvPr/>
+        </p:nvSpPr>
+        <p:spPr>
+          <a:xfrm>
+            <a:off x="1051560" y="2395728"/>
+            <a:ext cx="438912" cy="438912"/>
+          </a:xfrm>
+          <a:prstGeom prst="ellipse">
+            <a:avLst/>
+          </a:prstGeom>
+          <a:solidFill>
+            <a:srgbClr val="2F4F6B"/>
           </a:solidFill>
           <a:ln w="12700">
             <a:solidFill>
@@ -2873,14 +3204,53 @@
       </p:sp>
       <p:sp>
         <p:nvSpPr>
-          <p:cNvPr id="5" name="Text 3"/>
-          <p:cNvSpPr txBox="1"/>
-          <p:nvPr/>
-        </p:nvSpPr>
-        <p:spPr>
-          <a:xfrm>
-            <a:off x="1188720" y="2148840"/>
-            <a:ext cx="9966960" cy="2194560"/>
+          <p:cNvPr id="7" name="Text 5"/>
+          <p:cNvSpPr txBox="1"/>
+          <p:nvPr/>
+        </p:nvSpPr>
+        <p:spPr>
+          <a:xfrm>
+            <a:off x="1051560" y="2395728"/>
+            <a:ext cx="438912" cy="438912"/>
+          </a:xfrm>
+          <a:prstGeom prst="rect">
+            <a:avLst/>
+          </a:prstGeom>
+          <a:noFill/>
+          <a:ln/>
+        </p:spPr>
+        <p:txBody>
+          <a:bodyPr wrap="square" lIns="0" tIns="0" rIns="0" bIns="0" rtlCol="0" anchor="ctr"/>
+          <a:lstStyle/>
+          <a:p>
+            <a:pPr algn="ctr" indent="0" marL="0">
+              <a:buNone/>
+            </a:pPr>
+            <a:r>
+              <a:rPr lang="en-US" sz="1300" b="1" dirty="0">
+                <a:solidFill>
+                  <a:srgbClr val="FFFFFF"/>
+                </a:solidFill>
+                <a:latin typeface="Yu Gothic" pitchFamily="34" charset="0"/>
+                <a:ea typeface="Yu Gothic" pitchFamily="34" charset="-122"/>
+                <a:cs typeface="Yu Gothic" pitchFamily="34" charset="-120"/>
+              </a:rPr>
+              <a:t>1</a:t>
+            </a:r>
+            <a:endParaRPr lang="en-US" sz="1300" dirty="0"/>
+          </a:p>
+        </p:txBody>
+      </p:sp>
+      <p:sp>
+        <p:nvSpPr>
+          <p:cNvPr id="8" name="Text 6"/>
+          <p:cNvSpPr txBox="1"/>
+          <p:nvPr/>
+        </p:nvSpPr>
+        <p:spPr>
+          <a:xfrm>
+            <a:off x="1051560" y="2944368"/>
+            <a:ext cx="2834640" cy="731520"/>
           </a:xfrm>
           <a:prstGeom prst="rect">
             <a:avLst/>
@@ -2894,41 +3264,108 @@
           <a:p>
             <a:pPr indent="0" marL="0">
               <a:lnSpc>
-                <a:spcPct val="160000"/>
+                <a:spcPct val="125000"/>
               </a:lnSpc>
               <a:buNone/>
             </a:pPr>
             <a:r>
-              <a:rPr lang="en-US" sz="1650" dirty="0">
-                <a:solidFill>
-                  <a:srgbClr val="3F3933"/>
-                </a:solidFill>
-                <a:latin typeface="Yu Gothic" pitchFamily="34" charset="0"/>
-                <a:ea typeface="Yu Gothic" pitchFamily="34" charset="-122"/>
-                <a:cs typeface="Yu Gothic" pitchFamily="34" charset="-120"/>
-              </a:rPr>
-              <a:t>設計ができることが目的です。工程を分け、確認ポイントを置ける。それができれば、実装を外注する判断も正解のひとつです。むしろ、何をどう頼めばよいかが分かっている発注者は、外注先から見ても仕事がしやすい相手です。</a:t>
-            </a:r>
-            <a:endParaRPr lang="en-US" sz="1650" dirty="0"/>
-          </a:p>
-        </p:txBody>
-      </p:sp>
-      <p:sp>
-        <p:nvSpPr>
-          <p:cNvPr id="6" name="Shape 4"/>
+              <a:rPr lang="en-US" sz="1450" b="1" dirty="0">
+                <a:solidFill>
+                  <a:srgbClr val="23201D"/>
+                </a:solidFill>
+                <a:latin typeface="Yu Gothic" pitchFamily="34" charset="0"/>
+                <a:ea typeface="Yu Gothic" pitchFamily="34" charset="-122"/>
+                <a:cs typeface="Yu Gothic" pitchFamily="34" charset="-120"/>
+              </a:rPr>
+              <a:t>工程図を描く</a:t>
+            </a:r>
+            <a:endParaRPr lang="en-US" sz="1450" dirty="0"/>
+          </a:p>
+        </p:txBody>
+      </p:sp>
+      <p:sp>
+        <p:nvSpPr>
+          <p:cNvPr id="9" name="Text 7"/>
+          <p:cNvSpPr txBox="1"/>
+          <p:nvPr/>
+        </p:nvSpPr>
+        <p:spPr>
+          <a:xfrm>
+            <a:off x="1051560" y="3703320"/>
+            <a:ext cx="2834640" cy="1188720"/>
+          </a:xfrm>
+          <a:prstGeom prst="rect">
+            <a:avLst/>
+          </a:prstGeom>
+          <a:noFill/>
+          <a:ln/>
+        </p:spPr>
+        <p:txBody>
+          <a:bodyPr wrap="square" lIns="0" tIns="0" rIns="0" bIns="0" rtlCol="0" anchor="ctr"/>
+          <a:lstStyle/>
+          <a:p>
+            <a:pPr indent="0" marL="0">
+              <a:lnSpc>
+                <a:spcPct val="130000"/>
+              </a:lnSpc>
+              <a:buNone/>
+            </a:pPr>
+            <a:r>
+              <a:rPr lang="en-US" sz="1150" dirty="0">
+                <a:solidFill>
+                  <a:srgbClr val="5A534A"/>
+                </a:solidFill>
+                <a:latin typeface="Yu Gothic" pitchFamily="34" charset="0"/>
+                <a:ea typeface="Yu Gothic" pitchFamily="34" charset="-122"/>
+                <a:cs typeface="Yu Gothic" pitchFamily="34" charset="-120"/>
+              </a:rPr>
+              <a:t>AIに任せる／人が確認する／人がやる、に仕分けます</a:t>
+            </a:r>
+            <a:endParaRPr lang="en-US" sz="1150" dirty="0"/>
+          </a:p>
+        </p:txBody>
+      </p:sp>
+      <p:sp>
+        <p:nvSpPr>
+          <p:cNvPr id="10" name="Shape 8"/>
           <p:cNvSpPr/>
           <p:nvPr/>
         </p:nvSpPr>
         <p:spPr>
           <a:xfrm>
-            <a:off x="777240" y="4709160"/>
-            <a:ext cx="10607040" cy="960120"/>
+            <a:off x="4389120" y="2148840"/>
+            <a:ext cx="3383280" cy="2880360"/>
           </a:xfrm>
           <a:prstGeom prst="rect">
             <a:avLst/>
           </a:prstGeom>
           <a:solidFill>
-            <a:srgbClr val="EDE7DB"/>
+            <a:srgbClr val="FFFFFF"/>
+          </a:solidFill>
+          <a:ln w="12700">
+            <a:solidFill>
+              <a:srgbClr val="EDE7DB"/>
+            </a:solidFill>
+            <a:prstDash val="solid"/>
+          </a:ln>
+        </p:spPr>
+      </p:sp>
+      <p:sp>
+        <p:nvSpPr>
+          <p:cNvPr id="11" name="Shape 9"/>
+          <p:cNvSpPr/>
+          <p:nvPr/>
+        </p:nvSpPr>
+        <p:spPr>
+          <a:xfrm>
+            <a:off x="4663440" y="2395728"/>
+            <a:ext cx="438912" cy="438912"/>
+          </a:xfrm>
+          <a:prstGeom prst="ellipse">
+            <a:avLst/>
+          </a:prstGeom>
+          <a:solidFill>
+            <a:srgbClr val="2F4F6B"/>
           </a:solidFill>
           <a:ln w="12700">
             <a:solidFill>
@@ -2940,53 +3377,95 @@
       </p:sp>
       <p:sp>
         <p:nvSpPr>
-          <p:cNvPr id="7" name="Text 5"/>
-          <p:cNvSpPr txBox="1"/>
-          <p:nvPr/>
-        </p:nvSpPr>
-        <p:spPr>
-          <a:xfrm>
-            <a:off x="1051560" y="4800600"/>
-            <a:ext cx="1463040" cy="256032"/>
-          </a:xfrm>
-          <a:prstGeom prst="rect">
-            <a:avLst/>
-          </a:prstGeom>
-          <a:noFill/>
-          <a:ln/>
-        </p:spPr>
-        <p:txBody>
-          <a:bodyPr wrap="square" lIns="0" tIns="0" rIns="0" bIns="0" rtlCol="0" anchor="ctr"/>
-          <a:lstStyle/>
-          <a:p>
-            <a:pPr indent="0" marL="0">
-              <a:buNone/>
-            </a:pPr>
-            <a:r>
-              <a:rPr lang="en-US" sz="900" b="1" spc="150" kern="0" dirty="0">
-                <a:solidFill>
-                  <a:srgbClr val="B04A2F"/>
-                </a:solidFill>
-                <a:latin typeface="Yu Gothic" pitchFamily="34" charset="0"/>
-                <a:ea typeface="Yu Gothic" pitchFamily="34" charset="-122"/>
-                <a:cs typeface="Yu Gothic" pitchFamily="34" charset="-120"/>
-              </a:rPr>
-              <a:t>他社では</a:t>
-            </a:r>
-            <a:endParaRPr lang="en-US" sz="900" dirty="0"/>
-          </a:p>
-        </p:txBody>
-      </p:sp>
-      <p:sp>
-        <p:nvSpPr>
-          <p:cNvPr id="8" name="Text 6"/>
-          <p:cNvSpPr txBox="1"/>
-          <p:nvPr/>
-        </p:nvSpPr>
-        <p:spPr>
-          <a:xfrm>
-            <a:off x="1051560" y="5029200"/>
-            <a:ext cx="10058400" cy="566928"/>
+          <p:cNvPr id="12" name="Text 10"/>
+          <p:cNvSpPr txBox="1"/>
+          <p:nvPr/>
+        </p:nvSpPr>
+        <p:spPr>
+          <a:xfrm>
+            <a:off x="4663440" y="2395728"/>
+            <a:ext cx="438912" cy="438912"/>
+          </a:xfrm>
+          <a:prstGeom prst="rect">
+            <a:avLst/>
+          </a:prstGeom>
+          <a:noFill/>
+          <a:ln/>
+        </p:spPr>
+        <p:txBody>
+          <a:bodyPr wrap="square" lIns="0" tIns="0" rIns="0" bIns="0" rtlCol="0" anchor="ctr"/>
+          <a:lstStyle/>
+          <a:p>
+            <a:pPr algn="ctr" indent="0" marL="0">
+              <a:buNone/>
+            </a:pPr>
+            <a:r>
+              <a:rPr lang="en-US" sz="1300" b="1" dirty="0">
+                <a:solidFill>
+                  <a:srgbClr val="FFFFFF"/>
+                </a:solidFill>
+                <a:latin typeface="Yu Gothic" pitchFamily="34" charset="0"/>
+                <a:ea typeface="Yu Gothic" pitchFamily="34" charset="-122"/>
+                <a:cs typeface="Yu Gothic" pitchFamily="34" charset="-120"/>
+              </a:rPr>
+              <a:t>2</a:t>
+            </a:r>
+            <a:endParaRPr lang="en-US" sz="1300" dirty="0"/>
+          </a:p>
+        </p:txBody>
+      </p:sp>
+      <p:sp>
+        <p:nvSpPr>
+          <p:cNvPr id="13" name="Text 11"/>
+          <p:cNvSpPr txBox="1"/>
+          <p:nvPr/>
+        </p:nvSpPr>
+        <p:spPr>
+          <a:xfrm>
+            <a:off x="4663440" y="2944368"/>
+            <a:ext cx="2834640" cy="731520"/>
+          </a:xfrm>
+          <a:prstGeom prst="rect">
+            <a:avLst/>
+          </a:prstGeom>
+          <a:noFill/>
+          <a:ln/>
+        </p:spPr>
+        <p:txBody>
+          <a:bodyPr wrap="square" lIns="0" tIns="0" rIns="0" bIns="0" rtlCol="0" anchor="ctr"/>
+          <a:lstStyle/>
+          <a:p>
+            <a:pPr indent="0" marL="0">
+              <a:lnSpc>
+                <a:spcPct val="125000"/>
+              </a:lnSpc>
+              <a:buNone/>
+            </a:pPr>
+            <a:r>
+              <a:rPr lang="en-US" sz="1450" b="1" dirty="0">
+                <a:solidFill>
+                  <a:srgbClr val="23201D"/>
+                </a:solidFill>
+                <a:latin typeface="Yu Gothic" pitchFamily="34" charset="0"/>
+                <a:ea typeface="Yu Gothic" pitchFamily="34" charset="-122"/>
+                <a:cs typeface="Yu Gothic" pitchFamily="34" charset="-120"/>
+              </a:rPr>
+              <a:t>実際に流す</a:t>
+            </a:r>
+            <a:endParaRPr lang="en-US" sz="1450" dirty="0"/>
+          </a:p>
+        </p:txBody>
+      </p:sp>
+      <p:sp>
+        <p:nvSpPr>
+          <p:cNvPr id="14" name="Text 12"/>
+          <p:cNvSpPr txBox="1"/>
+          <p:nvPr/>
+        </p:nvSpPr>
+        <p:spPr>
+          <a:xfrm>
+            <a:off x="4663440" y="3703320"/>
+            <a:ext cx="2834640" cy="1188720"/>
           </a:xfrm>
           <a:prstGeom prst="rect">
             <a:avLst/>
@@ -3005,23 +3484,196 @@
               <a:buNone/>
             </a:pPr>
             <a:r>
-              <a:rPr lang="en-US" sz="1250" dirty="0">
-                <a:solidFill>
-                  <a:srgbClr val="3F3933"/>
-                </a:solidFill>
-                <a:latin typeface="Yu Gothic" pitchFamily="34" charset="0"/>
-                <a:ea typeface="Yu Gothic" pitchFamily="34" charset="-122"/>
-                <a:cs typeface="Yu Gothic" pitchFamily="34" charset="-120"/>
-              </a:rPr>
-              <a:t>見積作成を3工程に分けて任せた会社では、最初の版は工程1の商品名の取り違えが最後まで残り、危うく誤った金額を出すところでした。工程1の直後に確認を1つ置いただけで、以後は事故が起きていません。</a:t>
-            </a:r>
-            <a:endParaRPr lang="en-US" sz="1250" dirty="0"/>
-          </a:p>
-        </p:txBody>
-      </p:sp>
-      <p:sp>
-        <p:nvSpPr>
-          <p:cNvPr id="9" name="Text 7"/>
+              <a:rPr lang="en-US" sz="1150" dirty="0">
+                <a:solidFill>
+                  <a:srgbClr val="5A534A"/>
+                </a:solidFill>
+                <a:latin typeface="Yu Gothic" pitchFamily="34" charset="0"/>
+                <a:ea typeface="Yu Gothic" pitchFamily="34" charset="-122"/>
+                <a:cs typeface="Yu Gothic" pitchFamily="34" charset="-120"/>
+              </a:rPr>
+              <a:t>設計どおりに動かしてみます</a:t>
+            </a:r>
+            <a:endParaRPr lang="en-US" sz="1150" dirty="0"/>
+          </a:p>
+        </p:txBody>
+      </p:sp>
+      <p:sp>
+        <p:nvSpPr>
+          <p:cNvPr id="15" name="Shape 13"/>
+          <p:cNvSpPr/>
+          <p:nvPr/>
+        </p:nvSpPr>
+        <p:spPr>
+          <a:xfrm>
+            <a:off x="8001000" y="2148840"/>
+            <a:ext cx="3383280" cy="2880360"/>
+          </a:xfrm>
+          <a:prstGeom prst="rect">
+            <a:avLst/>
+          </a:prstGeom>
+          <a:solidFill>
+            <a:srgbClr val="FFFFFF"/>
+          </a:solidFill>
+          <a:ln w="12700">
+            <a:solidFill>
+              <a:srgbClr val="EDE7DB"/>
+            </a:solidFill>
+            <a:prstDash val="solid"/>
+          </a:ln>
+        </p:spPr>
+      </p:sp>
+      <p:sp>
+        <p:nvSpPr>
+          <p:cNvPr id="16" name="Shape 14"/>
+          <p:cNvSpPr/>
+          <p:nvPr/>
+        </p:nvSpPr>
+        <p:spPr>
+          <a:xfrm>
+            <a:off x="8275320" y="2395728"/>
+            <a:ext cx="438912" cy="438912"/>
+          </a:xfrm>
+          <a:prstGeom prst="ellipse">
+            <a:avLst/>
+          </a:prstGeom>
+          <a:solidFill>
+            <a:srgbClr val="2F4F6B"/>
+          </a:solidFill>
+          <a:ln w="12700">
+            <a:solidFill>
+              <a:srgbClr val="333333"/>
+            </a:solidFill>
+            <a:prstDash val="solid"/>
+          </a:ln>
+        </p:spPr>
+      </p:sp>
+      <p:sp>
+        <p:nvSpPr>
+          <p:cNvPr id="17" name="Text 15"/>
+          <p:cNvSpPr txBox="1"/>
+          <p:nvPr/>
+        </p:nvSpPr>
+        <p:spPr>
+          <a:xfrm>
+            <a:off x="8275320" y="2395728"/>
+            <a:ext cx="438912" cy="438912"/>
+          </a:xfrm>
+          <a:prstGeom prst="rect">
+            <a:avLst/>
+          </a:prstGeom>
+          <a:noFill/>
+          <a:ln/>
+        </p:spPr>
+        <p:txBody>
+          <a:bodyPr wrap="square" lIns="0" tIns="0" rIns="0" bIns="0" rtlCol="0" anchor="ctr"/>
+          <a:lstStyle/>
+          <a:p>
+            <a:pPr algn="ctr" indent="0" marL="0">
+              <a:buNone/>
+            </a:pPr>
+            <a:r>
+              <a:rPr lang="en-US" sz="1300" b="1" dirty="0">
+                <a:solidFill>
+                  <a:srgbClr val="FFFFFF"/>
+                </a:solidFill>
+                <a:latin typeface="Yu Gothic" pitchFamily="34" charset="0"/>
+                <a:ea typeface="Yu Gothic" pitchFamily="34" charset="-122"/>
+                <a:cs typeface="Yu Gothic" pitchFamily="34" charset="-120"/>
+              </a:rPr>
+              <a:t>3</a:t>
+            </a:r>
+            <a:endParaRPr lang="en-US" sz="1300" dirty="0"/>
+          </a:p>
+        </p:txBody>
+      </p:sp>
+      <p:sp>
+        <p:nvSpPr>
+          <p:cNvPr id="18" name="Text 16"/>
+          <p:cNvSpPr txBox="1"/>
+          <p:nvPr/>
+        </p:nvSpPr>
+        <p:spPr>
+          <a:xfrm>
+            <a:off x="8275320" y="2944368"/>
+            <a:ext cx="2834640" cy="731520"/>
+          </a:xfrm>
+          <a:prstGeom prst="rect">
+            <a:avLst/>
+          </a:prstGeom>
+          <a:noFill/>
+          <a:ln/>
+        </p:spPr>
+        <p:txBody>
+          <a:bodyPr wrap="square" lIns="0" tIns="0" rIns="0" bIns="0" rtlCol="0" anchor="ctr"/>
+          <a:lstStyle/>
+          <a:p>
+            <a:pPr indent="0" marL="0">
+              <a:lnSpc>
+                <a:spcPct val="125000"/>
+              </a:lnSpc>
+              <a:buNone/>
+            </a:pPr>
+            <a:r>
+              <a:rPr lang="en-US" sz="1450" b="1" dirty="0">
+                <a:solidFill>
+                  <a:srgbClr val="23201D"/>
+                </a:solidFill>
+                <a:latin typeface="Yu Gothic" pitchFamily="34" charset="0"/>
+                <a:ea typeface="Yu Gothic" pitchFamily="34" charset="-122"/>
+                <a:cs typeface="Yu Gothic" pitchFamily="34" charset="-120"/>
+              </a:rPr>
+              <a:t>わざと壊す</a:t>
+            </a:r>
+            <a:endParaRPr lang="en-US" sz="1450" dirty="0"/>
+          </a:p>
+        </p:txBody>
+      </p:sp>
+      <p:sp>
+        <p:nvSpPr>
+          <p:cNvPr id="19" name="Text 17"/>
+          <p:cNvSpPr txBox="1"/>
+          <p:nvPr/>
+        </p:nvSpPr>
+        <p:spPr>
+          <a:xfrm>
+            <a:off x="8275320" y="3703320"/>
+            <a:ext cx="2834640" cy="1188720"/>
+          </a:xfrm>
+          <a:prstGeom prst="rect">
+            <a:avLst/>
+          </a:prstGeom>
+          <a:noFill/>
+          <a:ln/>
+        </p:spPr>
+        <p:txBody>
+          <a:bodyPr wrap="square" lIns="0" tIns="0" rIns="0" bIns="0" rtlCol="0" anchor="ctr"/>
+          <a:lstStyle/>
+          <a:p>
+            <a:pPr indent="0" marL="0">
+              <a:lnSpc>
+                <a:spcPct val="130000"/>
+              </a:lnSpc>
+              <a:buNone/>
+            </a:pPr>
+            <a:r>
+              <a:rPr lang="en-US" sz="1150" dirty="0">
+                <a:solidFill>
+                  <a:srgbClr val="5A534A"/>
+                </a:solidFill>
+                <a:latin typeface="Yu Gothic" pitchFamily="34" charset="0"/>
+                <a:ea typeface="Yu Gothic" pitchFamily="34" charset="-122"/>
+                <a:cs typeface="Yu Gothic" pitchFamily="34" charset="-120"/>
+              </a:rPr>
+              <a:t>入力を1つ欠けさせて、どこで止まるか・どこで気づけるかを確かめます</a:t>
+            </a:r>
+            <a:endParaRPr lang="en-US" sz="1150" dirty="0"/>
+          </a:p>
+        </p:txBody>
+      </p:sp>
+      <p:sp>
+        <p:nvSpPr>
+          <p:cNvPr id="20" name="Text 18"/>
           <p:cNvSpPr txBox="1"/>
           <p:nvPr/>
         </p:nvSpPr>
@@ -3060,7 +3712,7 @@
       </p:sp>
       <p:sp>
         <p:nvSpPr>
-          <p:cNvPr id="10" name="Text 8"/>
+          <p:cNvPr id="21" name="Text 19"/>
           <p:cNvSpPr txBox="1"/>
           <p:nvPr/>
         </p:nvSpPr>
@@ -3091,7 +3743,7 @@
                 <a:ea typeface="Yu Gothic" pitchFamily="34" charset="-122"/>
                 <a:cs typeface="Yu Gothic" pitchFamily="34" charset="-120"/>
               </a:rPr>
-              <a:t>ここだけは</a:t>
+              <a:t>演習</a:t>
             </a:r>
             <a:endParaRPr lang="en-US" sz="900" dirty="0"/>
           </a:p>
@@ -3108,6 +3760,1490 @@
 <file path=ppt/slides/slide12.xml><?xml version="1.0" encoding="utf-8"?>
 <p:sld xmlns:a="http://schemas.openxmlformats.org/drawingml/2006/main" xmlns:r="http://schemas.openxmlformats.org/officeDocument/2006/relationships" xmlns:p="http://schemas.openxmlformats.org/presentationml/2006/main">
   <p:cSld name="Slide 12">
+    <p:bg>
+      <p:bgPr>
+        <a:solidFill>
+          <a:srgbClr val="F6F2EA"/>
+        </a:solidFill>
+      </p:bgPr>
+    </p:bg>
+    <p:spTree>
+      <p:nvGrpSpPr>
+        <p:cNvPr id="1" name=""/>
+        <p:cNvGrpSpPr/>
+        <p:nvPr/>
+      </p:nvGrpSpPr>
+      <p:grpSpPr>
+        <a:xfrm>
+          <a:off x="0" y="0"/>
+          <a:ext cx="0" cy="0"/>
+          <a:chOff x="0" y="0"/>
+          <a:chExt cx="0" cy="0"/>
+        </a:xfrm>
+      </p:grpSpPr>
+      <p:sp>
+        <p:nvSpPr>
+          <p:cNvPr id="2" name="Text 0"/>
+          <p:cNvSpPr txBox="1"/>
+          <p:nvPr/>
+        </p:nvSpPr>
+        <p:spPr>
+          <a:xfrm>
+            <a:off x="777240" y="566928"/>
+            <a:ext cx="10607040" cy="274320"/>
+          </a:xfrm>
+          <a:prstGeom prst="rect">
+            <a:avLst/>
+          </a:prstGeom>
+          <a:noFill/>
+          <a:ln/>
+        </p:spPr>
+        <p:txBody>
+          <a:bodyPr wrap="square" lIns="0" tIns="0" rIns="0" bIns="0" rtlCol="0" anchor="ctr"/>
+          <a:lstStyle/>
+          <a:p>
+            <a:pPr indent="0" marL="0">
+              <a:buNone/>
+            </a:pPr>
+            <a:r>
+              <a:rPr lang="en-US" sz="1100" b="1" spc="250" kern="0" dirty="0">
+                <a:solidFill>
+                  <a:srgbClr val="3B6B4A"/>
+                </a:solidFill>
+                <a:latin typeface="Yu Gothic" pitchFamily="34" charset="0"/>
+                <a:ea typeface="Yu Gothic" pitchFamily="34" charset="-122"/>
+                <a:cs typeface="Yu Gothic" pitchFamily="34" charset="-120"/>
+              </a:rPr>
+              <a:t>業務への組み込み</a:t>
+            </a:r>
+            <a:endParaRPr lang="en-US" sz="1100" dirty="0"/>
+          </a:p>
+        </p:txBody>
+      </p:sp>
+      <p:sp>
+        <p:nvSpPr>
+          <p:cNvPr id="3" name="Text 1"/>
+          <p:cNvSpPr txBox="1"/>
+          <p:nvPr/>
+        </p:nvSpPr>
+        <p:spPr>
+          <a:xfrm>
+            <a:off x="777240" y="896112"/>
+            <a:ext cx="10607040" cy="640080"/>
+          </a:xfrm>
+          <a:prstGeom prst="rect">
+            <a:avLst/>
+          </a:prstGeom>
+          <a:noFill/>
+          <a:ln/>
+        </p:spPr>
+        <p:txBody>
+          <a:bodyPr wrap="square" lIns="0" tIns="0" rIns="0" bIns="0" rtlCol="0" anchor="ctr"/>
+          <a:lstStyle/>
+          <a:p>
+            <a:pPr indent="0" marL="0">
+              <a:buNone/>
+            </a:pPr>
+            <a:r>
+              <a:rPr lang="en-US" sz="2600" b="1" dirty="0">
+                <a:solidFill>
+                  <a:srgbClr val="23201D"/>
+                </a:solidFill>
+                <a:latin typeface="Yu Gothic" pitchFamily="34" charset="0"/>
+                <a:ea typeface="Yu Gothic" pitchFamily="34" charset="-122"/>
+                <a:cs typeface="Yu Gothic" pitchFamily="34" charset="-120"/>
+              </a:rPr>
+              <a:t>帰る前に決めること</a:t>
+            </a:r>
+            <a:endParaRPr lang="en-US" sz="2600" dirty="0"/>
+          </a:p>
+        </p:txBody>
+      </p:sp>
+      <p:sp>
+        <p:nvSpPr>
+          <p:cNvPr id="4" name="Text 2"/>
+          <p:cNvSpPr txBox="1"/>
+          <p:nvPr/>
+        </p:nvSpPr>
+        <p:spPr>
+          <a:xfrm>
+            <a:off x="777240" y="1572768"/>
+            <a:ext cx="10607040" cy="320040"/>
+          </a:xfrm>
+          <a:prstGeom prst="rect">
+            <a:avLst/>
+          </a:prstGeom>
+          <a:noFill/>
+          <a:ln/>
+        </p:spPr>
+        <p:txBody>
+          <a:bodyPr wrap="square" lIns="0" tIns="0" rIns="0" bIns="0" rtlCol="0" anchor="ctr"/>
+          <a:lstStyle/>
+          <a:p>
+            <a:pPr indent="0" marL="0">
+              <a:buNone/>
+            </a:pPr>
+            <a:r>
+              <a:rPr lang="en-US" sz="1250" b="1" dirty="0">
+                <a:solidFill>
+                  <a:srgbClr val="3B6B4A"/>
+                </a:solidFill>
+                <a:latin typeface="Yu Gothic" pitchFamily="34" charset="0"/>
+                <a:ea typeface="Yu Gothic" pitchFamily="34" charset="-122"/>
+                <a:cs typeface="Yu Gothic" pitchFamily="34" charset="-120"/>
+              </a:rPr>
+              <a:t>ここを決めないと、持ち帰っても使われません。紙に書きます。</a:t>
+            </a:r>
+            <a:endParaRPr lang="en-US" sz="1250" dirty="0"/>
+          </a:p>
+        </p:txBody>
+      </p:sp>
+      <p:sp>
+        <p:nvSpPr>
+          <p:cNvPr id="5" name="Shape 3"/>
+          <p:cNvSpPr/>
+          <p:nvPr/>
+        </p:nvSpPr>
+        <p:spPr>
+          <a:xfrm>
+            <a:off x="777240" y="2103120"/>
+            <a:ext cx="10607040" cy="914400"/>
+          </a:xfrm>
+          <a:prstGeom prst="rect">
+            <a:avLst/>
+          </a:prstGeom>
+          <a:solidFill>
+            <a:srgbClr val="FFFFFF"/>
+          </a:solidFill>
+          <a:ln w="12700">
+            <a:solidFill>
+              <a:srgbClr val="EDE7DB"/>
+            </a:solidFill>
+            <a:prstDash val="solid"/>
+          </a:ln>
+        </p:spPr>
+      </p:sp>
+      <p:sp>
+        <p:nvSpPr>
+          <p:cNvPr id="6" name="Shape 4"/>
+          <p:cNvSpPr/>
+          <p:nvPr/>
+        </p:nvSpPr>
+        <p:spPr>
+          <a:xfrm>
+            <a:off x="777240" y="2103120"/>
+            <a:ext cx="54864" cy="914400"/>
+          </a:xfrm>
+          <a:prstGeom prst="rect">
+            <a:avLst/>
+          </a:prstGeom>
+          <a:solidFill>
+            <a:srgbClr val="3B6B4A"/>
+          </a:solidFill>
+          <a:ln w="12700">
+            <a:solidFill>
+              <a:srgbClr val="333333"/>
+            </a:solidFill>
+            <a:prstDash val="solid"/>
+          </a:ln>
+        </p:spPr>
+      </p:sp>
+      <p:sp>
+        <p:nvSpPr>
+          <p:cNvPr id="7" name="Text 5"/>
+          <p:cNvSpPr txBox="1"/>
+          <p:nvPr/>
+        </p:nvSpPr>
+        <p:spPr>
+          <a:xfrm>
+            <a:off x="1143000" y="2176272"/>
+            <a:ext cx="2757830" cy="768096"/>
+          </a:xfrm>
+          <a:prstGeom prst="rect">
+            <a:avLst/>
+          </a:prstGeom>
+          <a:noFill/>
+          <a:ln/>
+        </p:spPr>
+        <p:txBody>
+          <a:bodyPr wrap="square" lIns="0" tIns="0" rIns="0" bIns="0" rtlCol="0" anchor="ctr"/>
+          <a:lstStyle/>
+          <a:p>
+            <a:pPr indent="0" marL="0">
+              <a:buNone/>
+            </a:pPr>
+            <a:r>
+              <a:rPr lang="en-US" sz="1400" b="1" dirty="0">
+                <a:solidFill>
+                  <a:srgbClr val="3B6B4A"/>
+                </a:solidFill>
+                <a:latin typeface="Yu Gothic" pitchFamily="34" charset="0"/>
+                <a:ea typeface="Yu Gothic" pitchFamily="34" charset="-122"/>
+                <a:cs typeface="Yu Gothic" pitchFamily="34" charset="-120"/>
+              </a:rPr>
+              <a:t>確認役は誰か</a:t>
+            </a:r>
+            <a:endParaRPr lang="en-US" sz="1400" dirty="0"/>
+          </a:p>
+        </p:txBody>
+      </p:sp>
+      <p:sp>
+        <p:nvSpPr>
+          <p:cNvPr id="8" name="Text 6"/>
+          <p:cNvSpPr txBox="1"/>
+          <p:nvPr/>
+        </p:nvSpPr>
+        <p:spPr>
+          <a:xfrm>
+            <a:off x="4006901" y="2176272"/>
+            <a:ext cx="7011619" cy="768096"/>
+          </a:xfrm>
+          <a:prstGeom prst="rect">
+            <a:avLst/>
+          </a:prstGeom>
+          <a:noFill/>
+          <a:ln/>
+        </p:spPr>
+        <p:txBody>
+          <a:bodyPr wrap="square" lIns="0" tIns="0" rIns="0" bIns="0" rtlCol="0" anchor="ctr"/>
+          <a:lstStyle/>
+          <a:p>
+            <a:pPr indent="0" marL="0">
+              <a:lnSpc>
+                <a:spcPct val="130000"/>
+              </a:lnSpc>
+              <a:buNone/>
+            </a:pPr>
+            <a:r>
+              <a:rPr lang="en-US" sz="1250" dirty="0">
+                <a:solidFill>
+                  <a:srgbClr val="3F3933"/>
+                </a:solidFill>
+                <a:latin typeface="Yu Gothic" pitchFamily="34" charset="0"/>
+                <a:ea typeface="Yu Gothic" pitchFamily="34" charset="-122"/>
+                <a:cs typeface="Yu Gothic" pitchFamily="34" charset="-120"/>
+              </a:rPr>
+              <a:t>最上流の確認を、誰がやるか。社長でなくても構いません</a:t>
+            </a:r>
+            <a:endParaRPr lang="en-US" sz="1250" dirty="0"/>
+          </a:p>
+        </p:txBody>
+      </p:sp>
+      <p:sp>
+        <p:nvSpPr>
+          <p:cNvPr id="9" name="Shape 7"/>
+          <p:cNvSpPr/>
+          <p:nvPr/>
+        </p:nvSpPr>
+        <p:spPr>
+          <a:xfrm>
+            <a:off x="777240" y="3154680"/>
+            <a:ext cx="10607040" cy="914400"/>
+          </a:xfrm>
+          <a:prstGeom prst="rect">
+            <a:avLst/>
+          </a:prstGeom>
+          <a:solidFill>
+            <a:srgbClr val="FFFFFF"/>
+          </a:solidFill>
+          <a:ln w="12700">
+            <a:solidFill>
+              <a:srgbClr val="EDE7DB"/>
+            </a:solidFill>
+            <a:prstDash val="solid"/>
+          </a:ln>
+        </p:spPr>
+      </p:sp>
+      <p:sp>
+        <p:nvSpPr>
+          <p:cNvPr id="10" name="Shape 8"/>
+          <p:cNvSpPr/>
+          <p:nvPr/>
+        </p:nvSpPr>
+        <p:spPr>
+          <a:xfrm>
+            <a:off x="777240" y="3154680"/>
+            <a:ext cx="54864" cy="914400"/>
+          </a:xfrm>
+          <a:prstGeom prst="rect">
+            <a:avLst/>
+          </a:prstGeom>
+          <a:solidFill>
+            <a:srgbClr val="3B6B4A"/>
+          </a:solidFill>
+          <a:ln w="12700">
+            <a:solidFill>
+              <a:srgbClr val="333333"/>
+            </a:solidFill>
+            <a:prstDash val="solid"/>
+          </a:ln>
+        </p:spPr>
+      </p:sp>
+      <p:sp>
+        <p:nvSpPr>
+          <p:cNvPr id="11" name="Text 9"/>
+          <p:cNvSpPr txBox="1"/>
+          <p:nvPr/>
+        </p:nvSpPr>
+        <p:spPr>
+          <a:xfrm>
+            <a:off x="1143000" y="3227832"/>
+            <a:ext cx="2757830" cy="768096"/>
+          </a:xfrm>
+          <a:prstGeom prst="rect">
+            <a:avLst/>
+          </a:prstGeom>
+          <a:noFill/>
+          <a:ln/>
+        </p:spPr>
+        <p:txBody>
+          <a:bodyPr wrap="square" lIns="0" tIns="0" rIns="0" bIns="0" rtlCol="0" anchor="ctr"/>
+          <a:lstStyle/>
+          <a:p>
+            <a:pPr indent="0" marL="0">
+              <a:buNone/>
+            </a:pPr>
+            <a:r>
+              <a:rPr lang="en-US" sz="1400" b="1" dirty="0">
+                <a:solidFill>
+                  <a:srgbClr val="3B6B4A"/>
+                </a:solidFill>
+                <a:latin typeface="Yu Gothic" pitchFamily="34" charset="0"/>
+                <a:ea typeface="Yu Gothic" pitchFamily="34" charset="-122"/>
+                <a:cs typeface="Yu Gothic" pitchFamily="34" charset="-120"/>
+              </a:rPr>
+              <a:t>いつ本番で流すか</a:t>
+            </a:r>
+            <a:endParaRPr lang="en-US" sz="1400" dirty="0"/>
+          </a:p>
+        </p:txBody>
+      </p:sp>
+      <p:sp>
+        <p:nvSpPr>
+          <p:cNvPr id="12" name="Text 10"/>
+          <p:cNvSpPr txBox="1"/>
+          <p:nvPr/>
+        </p:nvSpPr>
+        <p:spPr>
+          <a:xfrm>
+            <a:off x="4006901" y="3227832"/>
+            <a:ext cx="7011619" cy="768096"/>
+          </a:xfrm>
+          <a:prstGeom prst="rect">
+            <a:avLst/>
+          </a:prstGeom>
+          <a:noFill/>
+          <a:ln/>
+        </p:spPr>
+        <p:txBody>
+          <a:bodyPr wrap="square" lIns="0" tIns="0" rIns="0" bIns="0" rtlCol="0" anchor="ctr"/>
+          <a:lstStyle/>
+          <a:p>
+            <a:pPr indent="0" marL="0">
+              <a:lnSpc>
+                <a:spcPct val="130000"/>
+              </a:lnSpc>
+              <a:buNone/>
+            </a:pPr>
+            <a:r>
+              <a:rPr lang="en-US" sz="1250" dirty="0">
+                <a:solidFill>
+                  <a:srgbClr val="3F3933"/>
+                </a:solidFill>
+                <a:latin typeface="Yu Gothic" pitchFamily="34" charset="0"/>
+                <a:ea typeface="Yu Gothic" pitchFamily="34" charset="-122"/>
+                <a:cs typeface="Yu Gothic" pitchFamily="34" charset="-120"/>
+              </a:rPr>
+              <a:t>来週の実案件で1回。テストのままにしません</a:t>
+            </a:r>
+            <a:endParaRPr lang="en-US" sz="1250" dirty="0"/>
+          </a:p>
+        </p:txBody>
+      </p:sp>
+      <p:sp>
+        <p:nvSpPr>
+          <p:cNvPr id="13" name="Shape 11"/>
+          <p:cNvSpPr/>
+          <p:nvPr/>
+        </p:nvSpPr>
+        <p:spPr>
+          <a:xfrm>
+            <a:off x="777240" y="4206240"/>
+            <a:ext cx="10607040" cy="914400"/>
+          </a:xfrm>
+          <a:prstGeom prst="rect">
+            <a:avLst/>
+          </a:prstGeom>
+          <a:solidFill>
+            <a:srgbClr val="FFFFFF"/>
+          </a:solidFill>
+          <a:ln w="12700">
+            <a:solidFill>
+              <a:srgbClr val="EDE7DB"/>
+            </a:solidFill>
+            <a:prstDash val="solid"/>
+          </a:ln>
+        </p:spPr>
+      </p:sp>
+      <p:sp>
+        <p:nvSpPr>
+          <p:cNvPr id="14" name="Shape 12"/>
+          <p:cNvSpPr/>
+          <p:nvPr/>
+        </p:nvSpPr>
+        <p:spPr>
+          <a:xfrm>
+            <a:off x="777240" y="4206240"/>
+            <a:ext cx="54864" cy="914400"/>
+          </a:xfrm>
+          <a:prstGeom prst="rect">
+            <a:avLst/>
+          </a:prstGeom>
+          <a:solidFill>
+            <a:srgbClr val="3B6B4A"/>
+          </a:solidFill>
+          <a:ln w="12700">
+            <a:solidFill>
+              <a:srgbClr val="333333"/>
+            </a:solidFill>
+            <a:prstDash val="solid"/>
+          </a:ln>
+        </p:spPr>
+      </p:sp>
+      <p:sp>
+        <p:nvSpPr>
+          <p:cNvPr id="15" name="Text 13"/>
+          <p:cNvSpPr txBox="1"/>
+          <p:nvPr/>
+        </p:nvSpPr>
+        <p:spPr>
+          <a:xfrm>
+            <a:off x="1143000" y="4279392"/>
+            <a:ext cx="2757830" cy="768096"/>
+          </a:xfrm>
+          <a:prstGeom prst="rect">
+            <a:avLst/>
+          </a:prstGeom>
+          <a:noFill/>
+          <a:ln/>
+        </p:spPr>
+        <p:txBody>
+          <a:bodyPr wrap="square" lIns="0" tIns="0" rIns="0" bIns="0" rtlCol="0" anchor="ctr"/>
+          <a:lstStyle/>
+          <a:p>
+            <a:pPr indent="0" marL="0">
+              <a:buNone/>
+            </a:pPr>
+            <a:r>
+              <a:rPr lang="en-US" sz="1400" b="1" dirty="0">
+                <a:solidFill>
+                  <a:srgbClr val="3B6B4A"/>
+                </a:solidFill>
+                <a:latin typeface="Yu Gothic" pitchFamily="34" charset="0"/>
+                <a:ea typeface="Yu Gothic" pitchFamily="34" charset="-122"/>
+                <a:cs typeface="Yu Gothic" pitchFamily="34" charset="-120"/>
+              </a:rPr>
+              <a:t>壊れたらどうするか</a:t>
+            </a:r>
+            <a:endParaRPr lang="en-US" sz="1400" dirty="0"/>
+          </a:p>
+        </p:txBody>
+      </p:sp>
+      <p:sp>
+        <p:nvSpPr>
+          <p:cNvPr id="16" name="Text 14"/>
+          <p:cNvSpPr txBox="1"/>
+          <p:nvPr/>
+        </p:nvSpPr>
+        <p:spPr>
+          <a:xfrm>
+            <a:off x="4006901" y="4279392"/>
+            <a:ext cx="7011619" cy="768096"/>
+          </a:xfrm>
+          <a:prstGeom prst="rect">
+            <a:avLst/>
+          </a:prstGeom>
+          <a:noFill/>
+          <a:ln/>
+        </p:spPr>
+        <p:txBody>
+          <a:bodyPr wrap="square" lIns="0" tIns="0" rIns="0" bIns="0" rtlCol="0" anchor="ctr"/>
+          <a:lstStyle/>
+          <a:p>
+            <a:pPr indent="0" marL="0">
+              <a:lnSpc>
+                <a:spcPct val="130000"/>
+              </a:lnSpc>
+              <a:buNone/>
+            </a:pPr>
+            <a:r>
+              <a:rPr lang="en-US" sz="1250" dirty="0">
+                <a:solidFill>
+                  <a:srgbClr val="3F3933"/>
+                </a:solidFill>
+                <a:latin typeface="Yu Gothic" pitchFamily="34" charset="0"/>
+                <a:ea typeface="Yu Gothic" pitchFamily="34" charset="-122"/>
+                <a:cs typeface="Yu Gothic" pitchFamily="34" charset="-120"/>
+              </a:rPr>
+              <a:t>手動に戻す手順を、確認役の方に共有します</a:t>
+            </a:r>
+            <a:endParaRPr lang="en-US" sz="1250" dirty="0"/>
+          </a:p>
+        </p:txBody>
+      </p:sp>
+      <p:sp>
+        <p:nvSpPr>
+          <p:cNvPr id="17" name="Text 15"/>
+          <p:cNvSpPr txBox="1"/>
+          <p:nvPr/>
+        </p:nvSpPr>
+        <p:spPr>
+          <a:xfrm>
+            <a:off x="777240" y="6382512"/>
+            <a:ext cx="7424928" cy="256032"/>
+          </a:xfrm>
+          <a:prstGeom prst="rect">
+            <a:avLst/>
+          </a:prstGeom>
+          <a:noFill/>
+          <a:ln/>
+        </p:spPr>
+        <p:txBody>
+          <a:bodyPr wrap="square" lIns="0" tIns="0" rIns="0" bIns="0" rtlCol="0" anchor="ctr"/>
+          <a:lstStyle/>
+          <a:p>
+            <a:pPr indent="0" marL="0">
+              <a:buNone/>
+            </a:pPr>
+            <a:r>
+              <a:rPr lang="en-US" sz="900" dirty="0">
+                <a:solidFill>
+                  <a:srgbClr val="8A8177"/>
+                </a:solidFill>
+                <a:latin typeface="Yu Gothic" pitchFamily="34" charset="0"/>
+                <a:ea typeface="Yu Gothic" pitchFamily="34" charset="-122"/>
+                <a:cs typeface="Yu Gothic" pitchFamily="34" charset="-120"/>
+              </a:rPr>
+              <a:t>第9回　複数の工程をまとめて任せる</a:t>
+            </a:r>
+            <a:endParaRPr lang="en-US" sz="900" dirty="0"/>
+          </a:p>
+        </p:txBody>
+      </p:sp>
+      <p:sp>
+        <p:nvSpPr>
+          <p:cNvPr id="18" name="Text 16"/>
+          <p:cNvSpPr txBox="1"/>
+          <p:nvPr/>
+        </p:nvSpPr>
+        <p:spPr>
+          <a:xfrm>
+            <a:off x="8202168" y="6382512"/>
+            <a:ext cx="3182112" cy="256032"/>
+          </a:xfrm>
+          <a:prstGeom prst="rect">
+            <a:avLst/>
+          </a:prstGeom>
+          <a:noFill/>
+          <a:ln/>
+        </p:spPr>
+        <p:txBody>
+          <a:bodyPr wrap="square" lIns="0" tIns="0" rIns="0" bIns="0" rtlCol="0" anchor="ctr"/>
+          <a:lstStyle/>
+          <a:p>
+            <a:pPr algn="r" indent="0" marL="0">
+              <a:buNone/>
+            </a:pPr>
+            <a:r>
+              <a:rPr lang="en-US" sz="900" dirty="0">
+                <a:solidFill>
+                  <a:srgbClr val="8A8177"/>
+                </a:solidFill>
+                <a:latin typeface="Yu Gothic" pitchFamily="34" charset="0"/>
+                <a:ea typeface="Yu Gothic" pitchFamily="34" charset="-122"/>
+                <a:cs typeface="Yu Gothic" pitchFamily="34" charset="-120"/>
+              </a:rPr>
+              <a:t>組み込み</a:t>
+            </a:r>
+            <a:endParaRPr lang="en-US" sz="900" dirty="0"/>
+          </a:p>
+        </p:txBody>
+      </p:sp>
+    </p:spTree>
+  </p:cSld>
+  <p:clrMapOvr>
+    <a:masterClrMapping/>
+  </p:clrMapOvr>
+</p:sld>
+</file>
+
+<file path=ppt/slides/slide13.xml><?xml version="1.0" encoding="utf-8"?>
+<p:sld xmlns:a="http://schemas.openxmlformats.org/drawingml/2006/main" xmlns:r="http://schemas.openxmlformats.org/officeDocument/2006/relationships" xmlns:p="http://schemas.openxmlformats.org/presentationml/2006/main">
+  <p:cSld name="Slide 13">
+    <p:bg>
+      <p:bgPr>
+        <a:solidFill>
+          <a:srgbClr val="F6F2EA"/>
+        </a:solidFill>
+      </p:bgPr>
+    </p:bg>
+    <p:spTree>
+      <p:nvGrpSpPr>
+        <p:cNvPr id="1" name=""/>
+        <p:cNvGrpSpPr/>
+        <p:nvPr/>
+      </p:nvGrpSpPr>
+      <p:grpSpPr>
+        <a:xfrm>
+          <a:off x="0" y="0"/>
+          <a:ext cx="0" cy="0"/>
+          <a:chOff x="0" y="0"/>
+          <a:chExt cx="0" cy="0"/>
+        </a:xfrm>
+      </p:grpSpPr>
+      <p:sp>
+        <p:nvSpPr>
+          <p:cNvPr id="2" name="Text 0"/>
+          <p:cNvSpPr txBox="1"/>
+          <p:nvPr/>
+        </p:nvSpPr>
+        <p:spPr>
+          <a:xfrm>
+            <a:off x="777240" y="566928"/>
+            <a:ext cx="10607040" cy="274320"/>
+          </a:xfrm>
+          <a:prstGeom prst="rect">
+            <a:avLst/>
+          </a:prstGeom>
+          <a:noFill/>
+          <a:ln/>
+        </p:spPr>
+        <p:txBody>
+          <a:bodyPr wrap="square" lIns="0" tIns="0" rIns="0" bIns="0" rtlCol="0" anchor="ctr"/>
+          <a:lstStyle/>
+          <a:p>
+            <a:pPr indent="0" marL="0">
+              <a:buNone/>
+            </a:pPr>
+            <a:r>
+              <a:rPr lang="en-US" sz="1100" b="1" spc="250" kern="0" dirty="0">
+                <a:solidFill>
+                  <a:srgbClr val="B04A2F"/>
+                </a:solidFill>
+                <a:latin typeface="Yu Gothic" pitchFamily="34" charset="0"/>
+                <a:ea typeface="Yu Gothic" pitchFamily="34" charset="-122"/>
+                <a:cs typeface="Yu Gothic" pitchFamily="34" charset="-120"/>
+              </a:rPr>
+              <a:t>ここだけは</a:t>
+            </a:r>
+            <a:endParaRPr lang="en-US" sz="1100" dirty="0"/>
+          </a:p>
+        </p:txBody>
+      </p:sp>
+      <p:sp>
+        <p:nvSpPr>
+          <p:cNvPr id="3" name="Text 1"/>
+          <p:cNvSpPr txBox="1"/>
+          <p:nvPr/>
+        </p:nvSpPr>
+        <p:spPr>
+          <a:xfrm>
+            <a:off x="777240" y="1097280"/>
+            <a:ext cx="10607040" cy="640080"/>
+          </a:xfrm>
+          <a:prstGeom prst="rect">
+            <a:avLst/>
+          </a:prstGeom>
+          <a:noFill/>
+          <a:ln/>
+        </p:spPr>
+        <p:txBody>
+          <a:bodyPr wrap="square" lIns="0" tIns="0" rIns="0" bIns="0" rtlCol="0" anchor="ctr"/>
+          <a:lstStyle/>
+          <a:p>
+            <a:pPr indent="0" marL="0">
+              <a:buNone/>
+            </a:pPr>
+            <a:r>
+              <a:rPr lang="en-US" sz="2600" b="1" dirty="0">
+                <a:solidFill>
+                  <a:srgbClr val="23201D"/>
+                </a:solidFill>
+                <a:latin typeface="Yu Gothic" pitchFamily="34" charset="0"/>
+                <a:ea typeface="Yu Gothic" pitchFamily="34" charset="-122"/>
+                <a:cs typeface="Yu Gothic" pitchFamily="34" charset="-120"/>
+              </a:rPr>
+              <a:t>実装は、外に頼んでも構いません</a:t>
+            </a:r>
+            <a:endParaRPr lang="en-US" sz="2600" dirty="0"/>
+          </a:p>
+        </p:txBody>
+      </p:sp>
+      <p:sp>
+        <p:nvSpPr>
+          <p:cNvPr id="4" name="Shape 2"/>
+          <p:cNvSpPr/>
+          <p:nvPr/>
+        </p:nvSpPr>
+        <p:spPr>
+          <a:xfrm>
+            <a:off x="777240" y="2148840"/>
+            <a:ext cx="64008" cy="2194560"/>
+          </a:xfrm>
+          <a:prstGeom prst="rect">
+            <a:avLst/>
+          </a:prstGeom>
+          <a:solidFill>
+            <a:srgbClr val="B04A2F"/>
+          </a:solidFill>
+          <a:ln w="12700">
+            <a:solidFill>
+              <a:srgbClr val="333333"/>
+            </a:solidFill>
+            <a:prstDash val="solid"/>
+          </a:ln>
+        </p:spPr>
+      </p:sp>
+      <p:sp>
+        <p:nvSpPr>
+          <p:cNvPr id="5" name="Text 3"/>
+          <p:cNvSpPr txBox="1"/>
+          <p:nvPr/>
+        </p:nvSpPr>
+        <p:spPr>
+          <a:xfrm>
+            <a:off x="1188720" y="2148840"/>
+            <a:ext cx="9966960" cy="2194560"/>
+          </a:xfrm>
+          <a:prstGeom prst="rect">
+            <a:avLst/>
+          </a:prstGeom>
+          <a:noFill/>
+          <a:ln/>
+        </p:spPr>
+        <p:txBody>
+          <a:bodyPr wrap="square" lIns="0" tIns="0" rIns="0" bIns="0" rtlCol="0" anchor="ctr"/>
+          <a:lstStyle/>
+          <a:p>
+            <a:pPr indent="0" marL="0">
+              <a:lnSpc>
+                <a:spcPct val="160000"/>
+              </a:lnSpc>
+              <a:buNone/>
+            </a:pPr>
+            <a:r>
+              <a:rPr lang="en-US" sz="1650" dirty="0">
+                <a:solidFill>
+                  <a:srgbClr val="3F3933"/>
+                </a:solidFill>
+                <a:latin typeface="Yu Gothic" pitchFamily="34" charset="0"/>
+                <a:ea typeface="Yu Gothic" pitchFamily="34" charset="-122"/>
+                <a:cs typeface="Yu Gothic" pitchFamily="34" charset="-120"/>
+              </a:rPr>
+              <a:t>設計ができることが目的です。工程を分け、確認ポイントを置ける。それができれば、実装を外注する判断も正解のひとつです。むしろ、何をどう頼めばよいかが分かっている発注者は、外注先から見ても仕事がしやすい相手です。</a:t>
+            </a:r>
+            <a:endParaRPr lang="en-US" sz="1650" dirty="0"/>
+          </a:p>
+        </p:txBody>
+      </p:sp>
+      <p:sp>
+        <p:nvSpPr>
+          <p:cNvPr id="6" name="Shape 4"/>
+          <p:cNvSpPr/>
+          <p:nvPr/>
+        </p:nvSpPr>
+        <p:spPr>
+          <a:xfrm>
+            <a:off x="777240" y="4709160"/>
+            <a:ext cx="10607040" cy="960120"/>
+          </a:xfrm>
+          <a:prstGeom prst="rect">
+            <a:avLst/>
+          </a:prstGeom>
+          <a:solidFill>
+            <a:srgbClr val="EDE7DB"/>
+          </a:solidFill>
+          <a:ln w="12700">
+            <a:solidFill>
+              <a:srgbClr val="333333"/>
+            </a:solidFill>
+            <a:prstDash val="solid"/>
+          </a:ln>
+        </p:spPr>
+      </p:sp>
+      <p:sp>
+        <p:nvSpPr>
+          <p:cNvPr id="7" name="Text 5"/>
+          <p:cNvSpPr txBox="1"/>
+          <p:nvPr/>
+        </p:nvSpPr>
+        <p:spPr>
+          <a:xfrm>
+            <a:off x="1051560" y="4800600"/>
+            <a:ext cx="1463040" cy="256032"/>
+          </a:xfrm>
+          <a:prstGeom prst="rect">
+            <a:avLst/>
+          </a:prstGeom>
+          <a:noFill/>
+          <a:ln/>
+        </p:spPr>
+        <p:txBody>
+          <a:bodyPr wrap="square" lIns="0" tIns="0" rIns="0" bIns="0" rtlCol="0" anchor="ctr"/>
+          <a:lstStyle/>
+          <a:p>
+            <a:pPr indent="0" marL="0">
+              <a:buNone/>
+            </a:pPr>
+            <a:r>
+              <a:rPr lang="en-US" sz="900" b="1" spc="150" kern="0" dirty="0">
+                <a:solidFill>
+                  <a:srgbClr val="B04A2F"/>
+                </a:solidFill>
+                <a:latin typeface="Yu Gothic" pitchFamily="34" charset="0"/>
+                <a:ea typeface="Yu Gothic" pitchFamily="34" charset="-122"/>
+                <a:cs typeface="Yu Gothic" pitchFamily="34" charset="-120"/>
+              </a:rPr>
+              <a:t>他社では</a:t>
+            </a:r>
+            <a:endParaRPr lang="en-US" sz="900" dirty="0"/>
+          </a:p>
+        </p:txBody>
+      </p:sp>
+      <p:sp>
+        <p:nvSpPr>
+          <p:cNvPr id="8" name="Text 6"/>
+          <p:cNvSpPr txBox="1"/>
+          <p:nvPr/>
+        </p:nvSpPr>
+        <p:spPr>
+          <a:xfrm>
+            <a:off x="1051560" y="5029200"/>
+            <a:ext cx="10058400" cy="566928"/>
+          </a:xfrm>
+          <a:prstGeom prst="rect">
+            <a:avLst/>
+          </a:prstGeom>
+          <a:noFill/>
+          <a:ln/>
+        </p:spPr>
+        <p:txBody>
+          <a:bodyPr wrap="square" lIns="0" tIns="0" rIns="0" bIns="0" rtlCol="0" anchor="ctr"/>
+          <a:lstStyle/>
+          <a:p>
+            <a:pPr indent="0" marL="0">
+              <a:lnSpc>
+                <a:spcPct val="130000"/>
+              </a:lnSpc>
+              <a:buNone/>
+            </a:pPr>
+            <a:r>
+              <a:rPr lang="en-US" sz="1250" dirty="0">
+                <a:solidFill>
+                  <a:srgbClr val="3F3933"/>
+                </a:solidFill>
+                <a:latin typeface="Yu Gothic" pitchFamily="34" charset="0"/>
+                <a:ea typeface="Yu Gothic" pitchFamily="34" charset="-122"/>
+                <a:cs typeface="Yu Gothic" pitchFamily="34" charset="-120"/>
+              </a:rPr>
+              <a:t>見積作成を3工程に分けて任せた会社では、最初の版は工程1の商品名の取り違えが最後まで残り、危うく誤った金額を出すところでした。工程1の直後に確認を1つ置いただけで、以後は事故が起きていません。</a:t>
+            </a:r>
+            <a:endParaRPr lang="en-US" sz="1250" dirty="0"/>
+          </a:p>
+        </p:txBody>
+      </p:sp>
+      <p:sp>
+        <p:nvSpPr>
+          <p:cNvPr id="9" name="Text 7"/>
+          <p:cNvSpPr txBox="1"/>
+          <p:nvPr/>
+        </p:nvSpPr>
+        <p:spPr>
+          <a:xfrm>
+            <a:off x="777240" y="6382512"/>
+            <a:ext cx="7424928" cy="256032"/>
+          </a:xfrm>
+          <a:prstGeom prst="rect">
+            <a:avLst/>
+          </a:prstGeom>
+          <a:noFill/>
+          <a:ln/>
+        </p:spPr>
+        <p:txBody>
+          <a:bodyPr wrap="square" lIns="0" tIns="0" rIns="0" bIns="0" rtlCol="0" anchor="ctr"/>
+          <a:lstStyle/>
+          <a:p>
+            <a:pPr indent="0" marL="0">
+              <a:buNone/>
+            </a:pPr>
+            <a:r>
+              <a:rPr lang="en-US" sz="900" dirty="0">
+                <a:solidFill>
+                  <a:srgbClr val="8A8177"/>
+                </a:solidFill>
+                <a:latin typeface="Yu Gothic" pitchFamily="34" charset="0"/>
+                <a:ea typeface="Yu Gothic" pitchFamily="34" charset="-122"/>
+                <a:cs typeface="Yu Gothic" pitchFamily="34" charset="-120"/>
+              </a:rPr>
+              <a:t>第9回　複数の工程をまとめて任せる</a:t>
+            </a:r>
+            <a:endParaRPr lang="en-US" sz="900" dirty="0"/>
+          </a:p>
+        </p:txBody>
+      </p:sp>
+      <p:sp>
+        <p:nvSpPr>
+          <p:cNvPr id="10" name="Text 8"/>
+          <p:cNvSpPr txBox="1"/>
+          <p:nvPr/>
+        </p:nvSpPr>
+        <p:spPr>
+          <a:xfrm>
+            <a:off x="8202168" y="6382512"/>
+            <a:ext cx="3182112" cy="256032"/>
+          </a:xfrm>
+          <a:prstGeom prst="rect">
+            <a:avLst/>
+          </a:prstGeom>
+          <a:noFill/>
+          <a:ln/>
+        </p:spPr>
+        <p:txBody>
+          <a:bodyPr wrap="square" lIns="0" tIns="0" rIns="0" bIns="0" rtlCol="0" anchor="ctr"/>
+          <a:lstStyle/>
+          <a:p>
+            <a:pPr algn="r" indent="0" marL="0">
+              <a:buNone/>
+            </a:pPr>
+            <a:r>
+              <a:rPr lang="en-US" sz="900" dirty="0">
+                <a:solidFill>
+                  <a:srgbClr val="8A8177"/>
+                </a:solidFill>
+                <a:latin typeface="Yu Gothic" pitchFamily="34" charset="0"/>
+                <a:ea typeface="Yu Gothic" pitchFamily="34" charset="-122"/>
+                <a:cs typeface="Yu Gothic" pitchFamily="34" charset="-120"/>
+              </a:rPr>
+              <a:t>ここだけは</a:t>
+            </a:r>
+            <a:endParaRPr lang="en-US" sz="900" dirty="0"/>
+          </a:p>
+        </p:txBody>
+      </p:sp>
+    </p:spTree>
+  </p:cSld>
+  <p:clrMapOvr>
+    <a:masterClrMapping/>
+  </p:clrMapOvr>
+</p:sld>
+</file>
+
+<file path=ppt/slides/slide14.xml><?xml version="1.0" encoding="utf-8"?>
+<p:sld xmlns:a="http://schemas.openxmlformats.org/drawingml/2006/main" xmlns:r="http://schemas.openxmlformats.org/officeDocument/2006/relationships" xmlns:p="http://schemas.openxmlformats.org/presentationml/2006/main">
+  <p:cSld name="Slide 14">
+    <p:bg>
+      <p:bgPr>
+        <a:solidFill>
+          <a:srgbClr val="F6F2EA"/>
+        </a:solidFill>
+      </p:bgPr>
+    </p:bg>
+    <p:spTree>
+      <p:nvGrpSpPr>
+        <p:cNvPr id="1" name=""/>
+        <p:cNvGrpSpPr/>
+        <p:nvPr/>
+      </p:nvGrpSpPr>
+      <p:grpSpPr>
+        <a:xfrm>
+          <a:off x="0" y="0"/>
+          <a:ext cx="0" cy="0"/>
+          <a:chOff x="0" y="0"/>
+          <a:chExt cx="0" cy="0"/>
+        </a:xfrm>
+      </p:grpSpPr>
+      <p:sp>
+        <p:nvSpPr>
+          <p:cNvPr id="2" name="Text 0"/>
+          <p:cNvSpPr txBox="1"/>
+          <p:nvPr/>
+        </p:nvSpPr>
+        <p:spPr>
+          <a:xfrm>
+            <a:off x="777240" y="566928"/>
+            <a:ext cx="10607040" cy="274320"/>
+          </a:xfrm>
+          <a:prstGeom prst="rect">
+            <a:avLst/>
+          </a:prstGeom>
+          <a:noFill/>
+          <a:ln/>
+        </p:spPr>
+        <p:txBody>
+          <a:bodyPr wrap="square" lIns="0" tIns="0" rIns="0" bIns="0" rtlCol="0" anchor="ctr"/>
+          <a:lstStyle/>
+          <a:p>
+            <a:pPr indent="0" marL="0">
+              <a:buNone/>
+            </a:pPr>
+            <a:r>
+              <a:rPr lang="en-US" sz="1100" b="1" spc="250" kern="0" dirty="0">
+                <a:solidFill>
+                  <a:srgbClr val="3B6B4A"/>
+                </a:solidFill>
+                <a:latin typeface="Yu Gothic" pitchFamily="34" charset="0"/>
+                <a:ea typeface="Yu Gothic" pitchFamily="34" charset="-122"/>
+                <a:cs typeface="Yu Gothic" pitchFamily="34" charset="-120"/>
+              </a:rPr>
+              <a:t>次回まで</a:t>
+            </a:r>
+            <a:endParaRPr lang="en-US" sz="1100" dirty="0"/>
+          </a:p>
+        </p:txBody>
+      </p:sp>
+      <p:sp>
+        <p:nvSpPr>
+          <p:cNvPr id="3" name="Text 1"/>
+          <p:cNvSpPr txBox="1"/>
+          <p:nvPr/>
+        </p:nvSpPr>
+        <p:spPr>
+          <a:xfrm>
+            <a:off x="777240" y="896112"/>
+            <a:ext cx="10607040" cy="640080"/>
+          </a:xfrm>
+          <a:prstGeom prst="rect">
+            <a:avLst/>
+          </a:prstGeom>
+          <a:noFill/>
+          <a:ln/>
+        </p:spPr>
+        <p:txBody>
+          <a:bodyPr wrap="square" lIns="0" tIns="0" rIns="0" bIns="0" rtlCol="0" anchor="ctr"/>
+          <a:lstStyle/>
+          <a:p>
+            <a:pPr indent="0" marL="0">
+              <a:buNone/>
+            </a:pPr>
+            <a:r>
+              <a:rPr lang="en-US" sz="2600" b="1" dirty="0">
+                <a:solidFill>
+                  <a:srgbClr val="23201D"/>
+                </a:solidFill>
+                <a:latin typeface="Yu Gothic" pitchFamily="34" charset="0"/>
+                <a:ea typeface="Yu Gothic" pitchFamily="34" charset="-122"/>
+                <a:cs typeface="Yu Gothic" pitchFamily="34" charset="-120"/>
+              </a:rPr>
+              <a:t>次回は「品質を測る・壊れたら気づく」</a:t>
+            </a:r>
+            <a:endParaRPr lang="en-US" sz="2600" dirty="0"/>
+          </a:p>
+        </p:txBody>
+      </p:sp>
+      <p:sp>
+        <p:nvSpPr>
+          <p:cNvPr id="4" name="Text 2"/>
+          <p:cNvSpPr txBox="1"/>
+          <p:nvPr/>
+        </p:nvSpPr>
+        <p:spPr>
+          <a:xfrm>
+            <a:off x="777240" y="1572768"/>
+            <a:ext cx="9546336" cy="457200"/>
+          </a:xfrm>
+          <a:prstGeom prst="rect">
+            <a:avLst/>
+          </a:prstGeom>
+          <a:noFill/>
+          <a:ln/>
+        </p:spPr>
+        <p:txBody>
+          <a:bodyPr wrap="square" lIns="0" tIns="0" rIns="0" bIns="0" rtlCol="0" anchor="ctr"/>
+          <a:lstStyle/>
+          <a:p>
+            <a:pPr indent="0" marL="0">
+              <a:buNone/>
+            </a:pPr>
+            <a:r>
+              <a:rPr lang="en-US" sz="1400" b="1" dirty="0">
+                <a:solidFill>
+                  <a:srgbClr val="3B6B4A"/>
+                </a:solidFill>
+                <a:latin typeface="Yu Gothic" pitchFamily="34" charset="0"/>
+                <a:ea typeface="Yu Gothic" pitchFamily="34" charset="-122"/>
+                <a:cs typeface="Yu Gothic" pitchFamily="34" charset="-120"/>
+              </a:rPr>
+              <a:t>次回は、上級編でいちばん差がつく回です。「なんとなく良くなった」を終わらせます。</a:t>
+            </a:r>
+            <a:endParaRPr lang="en-US" sz="1400" dirty="0"/>
+          </a:p>
+        </p:txBody>
+      </p:sp>
+      <p:sp>
+        <p:nvSpPr>
+          <p:cNvPr id="5" name="Shape 3"/>
+          <p:cNvSpPr/>
+          <p:nvPr/>
+        </p:nvSpPr>
+        <p:spPr>
+          <a:xfrm>
+            <a:off x="777240" y="2240280"/>
+            <a:ext cx="4985309" cy="2286000"/>
+          </a:xfrm>
+          <a:prstGeom prst="rect">
+            <a:avLst/>
+          </a:prstGeom>
+          <a:solidFill>
+            <a:srgbClr val="FFFFFF"/>
+          </a:solidFill>
+          <a:ln w="12700">
+            <a:solidFill>
+              <a:srgbClr val="EDE7DB"/>
+            </a:solidFill>
+            <a:prstDash val="solid"/>
+          </a:ln>
+        </p:spPr>
+      </p:sp>
+      <p:sp>
+        <p:nvSpPr>
+          <p:cNvPr id="6" name="Text 4"/>
+          <p:cNvSpPr txBox="1"/>
+          <p:nvPr/>
+        </p:nvSpPr>
+        <p:spPr>
+          <a:xfrm>
+            <a:off x="1051560" y="2377440"/>
+            <a:ext cx="4242816" cy="274320"/>
+          </a:xfrm>
+          <a:prstGeom prst="rect">
+            <a:avLst/>
+          </a:prstGeom>
+          <a:noFill/>
+          <a:ln/>
+        </p:spPr>
+        <p:txBody>
+          <a:bodyPr wrap="square" lIns="0" tIns="0" rIns="0" bIns="0" rtlCol="0" anchor="ctr"/>
+          <a:lstStyle/>
+          <a:p>
+            <a:pPr indent="0" marL="0">
+              <a:buNone/>
+            </a:pPr>
+            <a:r>
+              <a:rPr lang="en-US" sz="1000" b="1" spc="150" kern="0" dirty="0">
+                <a:solidFill>
+                  <a:srgbClr val="B04A2F"/>
+                </a:solidFill>
+                <a:latin typeface="Yu Gothic" pitchFamily="34" charset="0"/>
+                <a:ea typeface="Yu Gothic" pitchFamily="34" charset="-122"/>
+                <a:cs typeface="Yu Gothic" pitchFamily="34" charset="-120"/>
+              </a:rPr>
+              <a:t>次回までにやること</a:t>
+            </a:r>
+            <a:endParaRPr lang="en-US" sz="1000" dirty="0"/>
+          </a:p>
+        </p:txBody>
+      </p:sp>
+      <p:sp>
+        <p:nvSpPr>
+          <p:cNvPr id="7" name="Text 5"/>
+          <p:cNvSpPr txBox="1"/>
+          <p:nvPr/>
+        </p:nvSpPr>
+        <p:spPr>
+          <a:xfrm>
+            <a:off x="1051560" y="2743200"/>
+            <a:ext cx="4436669" cy="1554480"/>
+          </a:xfrm>
+          <a:prstGeom prst="rect">
+            <a:avLst/>
+          </a:prstGeom>
+          <a:noFill/>
+          <a:ln/>
+        </p:spPr>
+        <p:txBody>
+          <a:bodyPr wrap="square" lIns="0" tIns="0" rIns="0" bIns="0" rtlCol="0" anchor="ctr"/>
+          <a:lstStyle/>
+          <a:p>
+            <a:pPr indent="0" marL="0">
+              <a:lnSpc>
+                <a:spcPct val="140000"/>
+              </a:lnSpc>
+              <a:buNone/>
+            </a:pPr>
+            <a:r>
+              <a:rPr lang="en-US" sz="1400" dirty="0">
+                <a:solidFill>
+                  <a:srgbClr val="23201D"/>
+                </a:solidFill>
+                <a:latin typeface="Yu Gothic" pitchFamily="34" charset="0"/>
+                <a:ea typeface="Yu Gothic" pitchFamily="34" charset="-122"/>
+                <a:cs typeface="Yu Gothic" pitchFamily="34" charset="-120"/>
+              </a:rPr>
+              <a:t>設計した多工程の仕事を、1回だけ本番で流す</a:t>
+            </a:r>
+            <a:endParaRPr lang="en-US" sz="1400" dirty="0"/>
+          </a:p>
+        </p:txBody>
+      </p:sp>
+      <p:sp>
+        <p:nvSpPr>
+          <p:cNvPr id="8" name="Shape 6"/>
+          <p:cNvSpPr/>
+          <p:nvPr/>
+        </p:nvSpPr>
+        <p:spPr>
+          <a:xfrm>
+            <a:off x="6398971" y="2240280"/>
+            <a:ext cx="4985309" cy="2286000"/>
+          </a:xfrm>
+          <a:prstGeom prst="rect">
+            <a:avLst/>
+          </a:prstGeom>
+          <a:solidFill>
+            <a:srgbClr val="FFFFFF"/>
+          </a:solidFill>
+          <a:ln w="12700">
+            <a:solidFill>
+              <a:srgbClr val="EDE7DB"/>
+            </a:solidFill>
+            <a:prstDash val="solid"/>
+          </a:ln>
+        </p:spPr>
+      </p:sp>
+      <p:sp>
+        <p:nvSpPr>
+          <p:cNvPr id="9" name="Text 7"/>
+          <p:cNvSpPr txBox="1"/>
+          <p:nvPr/>
+        </p:nvSpPr>
+        <p:spPr>
+          <a:xfrm>
+            <a:off x="6673291" y="2377440"/>
+            <a:ext cx="4242816" cy="274320"/>
+          </a:xfrm>
+          <a:prstGeom prst="rect">
+            <a:avLst/>
+          </a:prstGeom>
+          <a:noFill/>
+          <a:ln/>
+        </p:spPr>
+        <p:txBody>
+          <a:bodyPr wrap="square" lIns="0" tIns="0" rIns="0" bIns="0" rtlCol="0" anchor="ctr"/>
+          <a:lstStyle/>
+          <a:p>
+            <a:pPr indent="0" marL="0">
+              <a:buNone/>
+            </a:pPr>
+            <a:r>
+              <a:rPr lang="en-US" sz="1000" b="1" spc="150" kern="0" dirty="0">
+                <a:solidFill>
+                  <a:srgbClr val="3B6B4A"/>
+                </a:solidFill>
+                <a:latin typeface="Yu Gothic" pitchFamily="34" charset="0"/>
+                <a:ea typeface="Yu Gothic" pitchFamily="34" charset="-122"/>
+                <a:cs typeface="Yu Gothic" pitchFamily="34" charset="-120"/>
+              </a:rPr>
+              <a:t>次回の持ち物</a:t>
+            </a:r>
+            <a:endParaRPr lang="en-US" sz="1000" dirty="0"/>
+          </a:p>
+        </p:txBody>
+      </p:sp>
+      <p:sp>
+        <p:nvSpPr>
+          <p:cNvPr id="10" name="Text 8"/>
+          <p:cNvSpPr txBox="1"/>
+          <p:nvPr/>
+        </p:nvSpPr>
+        <p:spPr>
+          <a:xfrm>
+            <a:off x="6673291" y="2743200"/>
+            <a:ext cx="4436669" cy="694944"/>
+          </a:xfrm>
+          <a:prstGeom prst="rect">
+            <a:avLst/>
+          </a:prstGeom>
+          <a:noFill/>
+          <a:ln/>
+        </p:spPr>
+        <p:txBody>
+          <a:bodyPr wrap="square" lIns="0" tIns="0" rIns="0" bIns="0" rtlCol="0" anchor="ctr"/>
+          <a:lstStyle/>
+          <a:p>
+            <a:pPr indent="0" marL="0">
+              <a:lnSpc>
+                <a:spcPct val="130000"/>
+              </a:lnSpc>
+              <a:buNone/>
+            </a:pPr>
+            <a:r>
+              <a:rPr lang="en-US" sz="1250" dirty="0">
+                <a:solidFill>
+                  <a:srgbClr val="23201D"/>
+                </a:solidFill>
+                <a:latin typeface="Yu Gothic" pitchFamily="34" charset="0"/>
+                <a:ea typeface="Yu Gothic" pitchFamily="34" charset="-122"/>
+                <a:cs typeface="Yu Gothic" pitchFamily="34" charset="-120"/>
+              </a:rPr>
+              <a:t>・社内で実際に出た質問・依頼 10件（第8回で集めたものでも構いません）</a:t>
+            </a:r>
+            <a:endParaRPr lang="en-US" sz="1250" dirty="0"/>
+          </a:p>
+        </p:txBody>
+      </p:sp>
+      <p:sp>
+        <p:nvSpPr>
+          <p:cNvPr id="11" name="Shape 9"/>
+          <p:cNvSpPr/>
+          <p:nvPr/>
+        </p:nvSpPr>
+        <p:spPr>
+          <a:xfrm>
+            <a:off x="777240" y="4800600"/>
+            <a:ext cx="10607040" cy="777240"/>
+          </a:xfrm>
+          <a:prstGeom prst="rect">
+            <a:avLst/>
+          </a:prstGeom>
+          <a:solidFill>
+            <a:srgbClr val="EDE7DB"/>
+          </a:solidFill>
+          <a:ln w="12700">
+            <a:solidFill>
+              <a:srgbClr val="333333"/>
+            </a:solidFill>
+            <a:prstDash val="solid"/>
+          </a:ln>
+        </p:spPr>
+      </p:sp>
+      <p:sp>
+        <p:nvSpPr>
+          <p:cNvPr id="12" name="Text 10"/>
+          <p:cNvSpPr txBox="1"/>
+          <p:nvPr/>
+        </p:nvSpPr>
+        <p:spPr>
+          <a:xfrm>
+            <a:off x="1097280" y="4800600"/>
+            <a:ext cx="9966960" cy="777240"/>
+          </a:xfrm>
+          <a:prstGeom prst="rect">
+            <a:avLst/>
+          </a:prstGeom>
+          <a:noFill/>
+          <a:ln/>
+        </p:spPr>
+        <p:txBody>
+          <a:bodyPr wrap="square" lIns="0" tIns="0" rIns="0" bIns="0" rtlCol="0" anchor="ctr"/>
+          <a:lstStyle/>
+          <a:p>
+            <a:pPr indent="0" marL="0">
+              <a:buNone/>
+            </a:pPr>
+            <a:r>
+              <a:rPr lang="en-US" sz="1250" dirty="0">
+                <a:solidFill>
+                  <a:srgbClr val="5A534A"/>
+                </a:solidFill>
+                <a:latin typeface="Yu Gothic" pitchFamily="34" charset="0"/>
+                <a:ea typeface="Yu Gothic" pitchFamily="34" charset="-122"/>
+                <a:cs typeface="Yu Gothic" pitchFamily="34" charset="-120"/>
+              </a:rPr>
+              <a:t>この内容は、次回の3日前にあらためてお送りします。</a:t>
+            </a:r>
+            <a:endParaRPr lang="en-US" sz="1250" dirty="0"/>
+          </a:p>
+        </p:txBody>
+      </p:sp>
+      <p:sp>
+        <p:nvSpPr>
+          <p:cNvPr id="13" name="Text 11"/>
+          <p:cNvSpPr txBox="1"/>
+          <p:nvPr/>
+        </p:nvSpPr>
+        <p:spPr>
+          <a:xfrm>
+            <a:off x="777240" y="6382512"/>
+            <a:ext cx="7424928" cy="256032"/>
+          </a:xfrm>
+          <a:prstGeom prst="rect">
+            <a:avLst/>
+          </a:prstGeom>
+          <a:noFill/>
+          <a:ln/>
+        </p:spPr>
+        <p:txBody>
+          <a:bodyPr wrap="square" lIns="0" tIns="0" rIns="0" bIns="0" rtlCol="0" anchor="ctr"/>
+          <a:lstStyle/>
+          <a:p>
+            <a:pPr indent="0" marL="0">
+              <a:buNone/>
+            </a:pPr>
+            <a:r>
+              <a:rPr lang="en-US" sz="900" dirty="0">
+                <a:solidFill>
+                  <a:srgbClr val="8A8177"/>
+                </a:solidFill>
+                <a:latin typeface="Yu Gothic" pitchFamily="34" charset="0"/>
+                <a:ea typeface="Yu Gothic" pitchFamily="34" charset="-122"/>
+                <a:cs typeface="Yu Gothic" pitchFamily="34" charset="-120"/>
+              </a:rPr>
+              <a:t>第9回　複数の工程をまとめて任せる</a:t>
+            </a:r>
+            <a:endParaRPr lang="en-US" sz="900" dirty="0"/>
+          </a:p>
+        </p:txBody>
+      </p:sp>
+      <p:sp>
+        <p:nvSpPr>
+          <p:cNvPr id="14" name="Text 12"/>
+          <p:cNvSpPr txBox="1"/>
+          <p:nvPr/>
+        </p:nvSpPr>
+        <p:spPr>
+          <a:xfrm>
+            <a:off x="8202168" y="6382512"/>
+            <a:ext cx="3182112" cy="256032"/>
+          </a:xfrm>
+          <a:prstGeom prst="rect">
+            <a:avLst/>
+          </a:prstGeom>
+          <a:noFill/>
+          <a:ln/>
+        </p:spPr>
+        <p:txBody>
+          <a:bodyPr wrap="square" lIns="0" tIns="0" rIns="0" bIns="0" rtlCol="0" anchor="ctr"/>
+          <a:lstStyle/>
+          <a:p>
+            <a:pPr algn="r" indent="0" marL="0">
+              <a:buNone/>
+            </a:pPr>
+            <a:r>
+              <a:rPr lang="en-US" sz="900" dirty="0">
+                <a:solidFill>
+                  <a:srgbClr val="8A8177"/>
+                </a:solidFill>
+                <a:latin typeface="Yu Gothic" pitchFamily="34" charset="0"/>
+                <a:ea typeface="Yu Gothic" pitchFamily="34" charset="-122"/>
+                <a:cs typeface="Yu Gothic" pitchFamily="34" charset="-120"/>
+              </a:rPr>
+              <a:t>次回まで</a:t>
+            </a:r>
+            <a:endParaRPr lang="en-US" sz="900" dirty="0"/>
+          </a:p>
+        </p:txBody>
+      </p:sp>
+    </p:spTree>
+  </p:cSld>
+  <p:clrMapOvr>
+    <a:masterClrMapping/>
+  </p:clrMapOvr>
+</p:sld>
+</file>
+
+<file path=ppt/slides/slide15.xml><?xml version="1.0" encoding="utf-8"?>
+<p:sld xmlns:a="http://schemas.openxmlformats.org/drawingml/2006/main" xmlns:r="http://schemas.openxmlformats.org/officeDocument/2006/relationships" xmlns:p="http://schemas.openxmlformats.org/presentationml/2006/main">
+  <p:cSld name="Slide 15">
     <p:bg>
       <p:bgPr>
         <a:solidFill>
@@ -8388,13 +10524,13 @@
             <a:r>
               <a:rPr lang="en-US" sz="1100" b="1" spc="250" kern="0" dirty="0">
                 <a:solidFill>
-                  <a:srgbClr val="2F4F6B"/>
-                </a:solidFill>
-                <a:latin typeface="Yu Gothic" pitchFamily="34" charset="0"/>
-                <a:ea typeface="Yu Gothic" pitchFamily="34" charset="-122"/>
-                <a:cs typeface="Yu Gothic" pitchFamily="34" charset="-120"/>
-              </a:rPr>
-              <a:t>演習</a:t>
+                  <a:srgbClr val="B04A2F"/>
+                </a:solidFill>
+                <a:latin typeface="Yu Gothic" pitchFamily="34" charset="0"/>
+                <a:ea typeface="Yu Gothic" pitchFamily="34" charset="-122"/>
+                <a:cs typeface="Yu Gothic" pitchFamily="34" charset="-120"/>
+              </a:rPr>
+              <a:t>想定問答</a:t>
             </a:r>
             <a:endParaRPr lang="en-US" sz="1100" dirty="0"/>
           </a:p>
@@ -8433,7 +10569,7 @@
                 <a:ea typeface="Yu Gothic" pitchFamily="34" charset="-122"/>
                 <a:cs typeface="Yu Gothic" pitchFamily="34" charset="-120"/>
               </a:rPr>
-              <a:t>今日、一緒にやること</a:t>
+              <a:t>この回で、よく聞かれること</a:t>
             </a:r>
             <a:endParaRPr lang="en-US" sz="2600" dirty="0"/>
           </a:p>
@@ -8441,53 +10577,14 @@
       </p:sp>
       <p:sp>
         <p:nvSpPr>
-          <p:cNvPr id="4" name="Text 2"/>
-          <p:cNvSpPr txBox="1"/>
-          <p:nvPr/>
-        </p:nvSpPr>
-        <p:spPr>
-          <a:xfrm>
-            <a:off x="777240" y="1572768"/>
-            <a:ext cx="10607040" cy="320040"/>
-          </a:xfrm>
-          <a:prstGeom prst="rect">
-            <a:avLst/>
-          </a:prstGeom>
-          <a:noFill/>
-          <a:ln/>
-        </p:spPr>
-        <p:txBody>
-          <a:bodyPr wrap="square" lIns="0" tIns="0" rIns="0" bIns="0" rtlCol="0" anchor="ctr"/>
-          <a:lstStyle/>
-          <a:p>
-            <a:pPr indent="0" marL="0">
-              <a:buNone/>
-            </a:pPr>
-            <a:r>
-              <a:rPr lang="en-US" sz="1250" b="1" dirty="0">
-                <a:solidFill>
-                  <a:srgbClr val="2F4F6B"/>
-                </a:solidFill>
-                <a:latin typeface="Yu Gothic" pitchFamily="34" charset="0"/>
-                <a:ea typeface="Yu Gothic" pitchFamily="34" charset="-122"/>
-                <a:cs typeface="Yu Gothic" pitchFamily="34" charset="-120"/>
-              </a:rPr>
-              <a:t>55分。操作するのはご自身です。</a:t>
-            </a:r>
-            <a:endParaRPr lang="en-US" sz="1250" dirty="0"/>
-          </a:p>
-        </p:txBody>
-      </p:sp>
-      <p:sp>
-        <p:nvSpPr>
-          <p:cNvPr id="5" name="Shape 3"/>
+          <p:cNvPr id="4" name="Shape 2"/>
           <p:cNvSpPr/>
           <p:nvPr/>
         </p:nvSpPr>
         <p:spPr>
           <a:xfrm>
-            <a:off x="777240" y="2148840"/>
-            <a:ext cx="3383280" cy="2880360"/>
+            <a:off x="777240" y="1737360"/>
+            <a:ext cx="10607040" cy="1170432"/>
           </a:xfrm>
           <a:prstGeom prst="rect">
             <a:avLst/>
@@ -8505,16 +10602,16 @@
       </p:sp>
       <p:sp>
         <p:nvSpPr>
-          <p:cNvPr id="6" name="Shape 4"/>
+          <p:cNvPr id="5" name="Shape 3"/>
           <p:cNvSpPr/>
           <p:nvPr/>
         </p:nvSpPr>
         <p:spPr>
           <a:xfrm>
-            <a:off x="1051560" y="2395728"/>
-            <a:ext cx="438912" cy="438912"/>
-          </a:xfrm>
-          <a:prstGeom prst="ellipse">
+            <a:off x="777240" y="1737360"/>
+            <a:ext cx="54864" cy="1170432"/>
+          </a:xfrm>
+          <a:prstGeom prst="rect">
             <a:avLst/>
           </a:prstGeom>
           <a:solidFill>
@@ -8530,95 +10627,53 @@
       </p:sp>
       <p:sp>
         <p:nvSpPr>
+          <p:cNvPr id="6" name="Text 4"/>
+          <p:cNvSpPr txBox="1"/>
+          <p:nvPr/>
+        </p:nvSpPr>
+        <p:spPr>
+          <a:xfrm>
+            <a:off x="1097280" y="1828800"/>
+            <a:ext cx="9966960" cy="384048"/>
+          </a:xfrm>
+          <a:prstGeom prst="rect">
+            <a:avLst/>
+          </a:prstGeom>
+          <a:noFill/>
+          <a:ln/>
+        </p:spPr>
+        <p:txBody>
+          <a:bodyPr wrap="square" lIns="0" tIns="0" rIns="0" bIns="0" rtlCol="0" anchor="ctr"/>
+          <a:lstStyle/>
+          <a:p>
+            <a:pPr indent="0" marL="0">
+              <a:buNone/>
+            </a:pPr>
+            <a:r>
+              <a:rPr lang="en-US" sz="1400" b="1" dirty="0">
+                <a:solidFill>
+                  <a:srgbClr val="2F4F6B"/>
+                </a:solidFill>
+                <a:latin typeface="Yu Gothic" pitchFamily="34" charset="0"/>
+                <a:ea typeface="Yu Gothic" pitchFamily="34" charset="-122"/>
+                <a:cs typeface="Yu Gothic" pitchFamily="34" charset="-120"/>
+              </a:rPr>
+              <a:t>「どこまで任せていいのか、基準はありますか」</a:t>
+            </a:r>
+            <a:endParaRPr lang="en-US" sz="1400" dirty="0"/>
+          </a:p>
+        </p:txBody>
+      </p:sp>
+      <p:sp>
+        <p:nvSpPr>
           <p:cNvPr id="7" name="Text 5"/>
           <p:cNvSpPr txBox="1"/>
           <p:nvPr/>
         </p:nvSpPr>
         <p:spPr>
           <a:xfrm>
-            <a:off x="1051560" y="2395728"/>
-            <a:ext cx="438912" cy="438912"/>
-          </a:xfrm>
-          <a:prstGeom prst="rect">
-            <a:avLst/>
-          </a:prstGeom>
-          <a:noFill/>
-          <a:ln/>
-        </p:spPr>
-        <p:txBody>
-          <a:bodyPr wrap="square" lIns="0" tIns="0" rIns="0" bIns="0" rtlCol="0" anchor="ctr"/>
-          <a:lstStyle/>
-          <a:p>
-            <a:pPr algn="ctr" indent="0" marL="0">
-              <a:buNone/>
-            </a:pPr>
-            <a:r>
-              <a:rPr lang="en-US" sz="1300" b="1" dirty="0">
-                <a:solidFill>
-                  <a:srgbClr val="FFFFFF"/>
-                </a:solidFill>
-                <a:latin typeface="Yu Gothic" pitchFamily="34" charset="0"/>
-                <a:ea typeface="Yu Gothic" pitchFamily="34" charset="-122"/>
-                <a:cs typeface="Yu Gothic" pitchFamily="34" charset="-120"/>
-              </a:rPr>
-              <a:t>1</a:t>
-            </a:r>
-            <a:endParaRPr lang="en-US" sz="1300" dirty="0"/>
-          </a:p>
-        </p:txBody>
-      </p:sp>
-      <p:sp>
-        <p:nvSpPr>
-          <p:cNvPr id="8" name="Text 6"/>
-          <p:cNvSpPr txBox="1"/>
-          <p:nvPr/>
-        </p:nvSpPr>
-        <p:spPr>
-          <a:xfrm>
-            <a:off x="1051560" y="2944368"/>
-            <a:ext cx="2834640" cy="731520"/>
-          </a:xfrm>
-          <a:prstGeom prst="rect">
-            <a:avLst/>
-          </a:prstGeom>
-          <a:noFill/>
-          <a:ln/>
-        </p:spPr>
-        <p:txBody>
-          <a:bodyPr wrap="square" lIns="0" tIns="0" rIns="0" bIns="0" rtlCol="0" anchor="ctr"/>
-          <a:lstStyle/>
-          <a:p>
-            <a:pPr indent="0" marL="0">
-              <a:lnSpc>
-                <a:spcPct val="125000"/>
-              </a:lnSpc>
-              <a:buNone/>
-            </a:pPr>
-            <a:r>
-              <a:rPr lang="en-US" sz="1450" b="1" dirty="0">
-                <a:solidFill>
-                  <a:srgbClr val="23201D"/>
-                </a:solidFill>
-                <a:latin typeface="Yu Gothic" pitchFamily="34" charset="0"/>
-                <a:ea typeface="Yu Gothic" pitchFamily="34" charset="-122"/>
-                <a:cs typeface="Yu Gothic" pitchFamily="34" charset="-120"/>
-              </a:rPr>
-              <a:t>工程図を描く</a:t>
-            </a:r>
-            <a:endParaRPr lang="en-US" sz="1450" dirty="0"/>
-          </a:p>
-        </p:txBody>
-      </p:sp>
-      <p:sp>
-        <p:nvSpPr>
-          <p:cNvPr id="9" name="Text 7"/>
-          <p:cNvSpPr txBox="1"/>
-          <p:nvPr/>
-        </p:nvSpPr>
-        <p:spPr>
-          <a:xfrm>
-            <a:off x="1051560" y="3703320"/>
-            <a:ext cx="2834640" cy="1188720"/>
+            <a:off x="1097280" y="2231136"/>
+            <a:ext cx="9966960" cy="603504"/>
           </a:xfrm>
           <a:prstGeom prst="rect">
             <a:avLst/>
@@ -8637,30 +10692,30 @@
               <a:buNone/>
             </a:pPr>
             <a:r>
-              <a:rPr lang="en-US" sz="1150" dirty="0">
-                <a:solidFill>
-                  <a:srgbClr val="5A534A"/>
-                </a:solidFill>
-                <a:latin typeface="Yu Gothic" pitchFamily="34" charset="0"/>
-                <a:ea typeface="Yu Gothic" pitchFamily="34" charset="-122"/>
-                <a:cs typeface="Yu Gothic" pitchFamily="34" charset="-120"/>
-              </a:rPr>
-              <a:t>AIに任せる／人が確認する／人がやる、に仕分けます</a:t>
-            </a:r>
-            <a:endParaRPr lang="en-US" sz="1150" dirty="0"/>
-          </a:p>
-        </p:txBody>
-      </p:sp>
-      <p:sp>
-        <p:nvSpPr>
-          <p:cNvPr id="10" name="Shape 8"/>
+              <a:rPr lang="en-US" sz="1250" dirty="0">
+                <a:solidFill>
+                  <a:srgbClr val="3F3933"/>
+                </a:solidFill>
+                <a:latin typeface="Yu Gothic" pitchFamily="34" charset="0"/>
+                <a:ea typeface="Yu Gothic" pitchFamily="34" charset="-122"/>
+                <a:cs typeface="Yu Gothic" pitchFamily="34" charset="-120"/>
+              </a:rPr>
+              <a:t>失敗したときの損害で決めます。取り返しがつくものは任せ、つかないものは任せません。金額・社外・不可逆の3つが境界です。</a:t>
+            </a:r>
+            <a:endParaRPr lang="en-US" sz="1250" dirty="0"/>
+          </a:p>
+        </p:txBody>
+      </p:sp>
+      <p:sp>
+        <p:nvSpPr>
+          <p:cNvPr id="8" name="Shape 6"/>
           <p:cNvSpPr/>
           <p:nvPr/>
         </p:nvSpPr>
         <p:spPr>
           <a:xfrm>
-            <a:off x="4389120" y="2148840"/>
-            <a:ext cx="3383280" cy="2880360"/>
+            <a:off x="777240" y="3035808"/>
+            <a:ext cx="10607040" cy="1170432"/>
           </a:xfrm>
           <a:prstGeom prst="rect">
             <a:avLst/>
@@ -8678,16 +10733,16 @@
       </p:sp>
       <p:sp>
         <p:nvSpPr>
-          <p:cNvPr id="11" name="Shape 9"/>
+          <p:cNvPr id="9" name="Shape 7"/>
           <p:cNvSpPr/>
           <p:nvPr/>
         </p:nvSpPr>
         <p:spPr>
           <a:xfrm>
-            <a:off x="4663440" y="2395728"/>
-            <a:ext cx="438912" cy="438912"/>
-          </a:xfrm>
-          <a:prstGeom prst="ellipse">
+            <a:off x="777240" y="3035808"/>
+            <a:ext cx="54864" cy="1170432"/>
+          </a:xfrm>
+          <a:prstGeom prst="rect">
             <a:avLst/>
           </a:prstGeom>
           <a:solidFill>
@@ -8703,95 +10758,53 @@
       </p:sp>
       <p:sp>
         <p:nvSpPr>
-          <p:cNvPr id="12" name="Text 10"/>
-          <p:cNvSpPr txBox="1"/>
-          <p:nvPr/>
-        </p:nvSpPr>
-        <p:spPr>
-          <a:xfrm>
-            <a:off x="4663440" y="2395728"/>
-            <a:ext cx="438912" cy="438912"/>
-          </a:xfrm>
-          <a:prstGeom prst="rect">
-            <a:avLst/>
-          </a:prstGeom>
-          <a:noFill/>
-          <a:ln/>
-        </p:spPr>
-        <p:txBody>
-          <a:bodyPr wrap="square" lIns="0" tIns="0" rIns="0" bIns="0" rtlCol="0" anchor="ctr"/>
-          <a:lstStyle/>
-          <a:p>
-            <a:pPr algn="ctr" indent="0" marL="0">
-              <a:buNone/>
-            </a:pPr>
-            <a:r>
-              <a:rPr lang="en-US" sz="1300" b="1" dirty="0">
-                <a:solidFill>
-                  <a:srgbClr val="FFFFFF"/>
-                </a:solidFill>
-                <a:latin typeface="Yu Gothic" pitchFamily="34" charset="0"/>
-                <a:ea typeface="Yu Gothic" pitchFamily="34" charset="-122"/>
-                <a:cs typeface="Yu Gothic" pitchFamily="34" charset="-120"/>
-              </a:rPr>
-              <a:t>2</a:t>
-            </a:r>
-            <a:endParaRPr lang="en-US" sz="1300" dirty="0"/>
-          </a:p>
-        </p:txBody>
-      </p:sp>
-      <p:sp>
-        <p:nvSpPr>
-          <p:cNvPr id="13" name="Text 11"/>
-          <p:cNvSpPr txBox="1"/>
-          <p:nvPr/>
-        </p:nvSpPr>
-        <p:spPr>
-          <a:xfrm>
-            <a:off x="4663440" y="2944368"/>
-            <a:ext cx="2834640" cy="731520"/>
-          </a:xfrm>
-          <a:prstGeom prst="rect">
-            <a:avLst/>
-          </a:prstGeom>
-          <a:noFill/>
-          <a:ln/>
-        </p:spPr>
-        <p:txBody>
-          <a:bodyPr wrap="square" lIns="0" tIns="0" rIns="0" bIns="0" rtlCol="0" anchor="ctr"/>
-          <a:lstStyle/>
-          <a:p>
-            <a:pPr indent="0" marL="0">
-              <a:lnSpc>
-                <a:spcPct val="125000"/>
-              </a:lnSpc>
-              <a:buNone/>
-            </a:pPr>
-            <a:r>
-              <a:rPr lang="en-US" sz="1450" b="1" dirty="0">
-                <a:solidFill>
-                  <a:srgbClr val="23201D"/>
-                </a:solidFill>
-                <a:latin typeface="Yu Gothic" pitchFamily="34" charset="0"/>
-                <a:ea typeface="Yu Gothic" pitchFamily="34" charset="-122"/>
-                <a:cs typeface="Yu Gothic" pitchFamily="34" charset="-120"/>
-              </a:rPr>
-              <a:t>実際に流す</a:t>
-            </a:r>
-            <a:endParaRPr lang="en-US" sz="1450" dirty="0"/>
-          </a:p>
-        </p:txBody>
-      </p:sp>
-      <p:sp>
-        <p:nvSpPr>
-          <p:cNvPr id="14" name="Text 12"/>
-          <p:cNvSpPr txBox="1"/>
-          <p:nvPr/>
-        </p:nvSpPr>
-        <p:spPr>
-          <a:xfrm>
-            <a:off x="4663440" y="3703320"/>
-            <a:ext cx="2834640" cy="1188720"/>
+          <p:cNvPr id="10" name="Text 8"/>
+          <p:cNvSpPr txBox="1"/>
+          <p:nvPr/>
+        </p:nvSpPr>
+        <p:spPr>
+          <a:xfrm>
+            <a:off x="1097280" y="3127248"/>
+            <a:ext cx="9966960" cy="384048"/>
+          </a:xfrm>
+          <a:prstGeom prst="rect">
+            <a:avLst/>
+          </a:prstGeom>
+          <a:noFill/>
+          <a:ln/>
+        </p:spPr>
+        <p:txBody>
+          <a:bodyPr wrap="square" lIns="0" tIns="0" rIns="0" bIns="0" rtlCol="0" anchor="ctr"/>
+          <a:lstStyle/>
+          <a:p>
+            <a:pPr indent="0" marL="0">
+              <a:buNone/>
+            </a:pPr>
+            <a:r>
+              <a:rPr lang="en-US" sz="1400" b="1" dirty="0">
+                <a:solidFill>
+                  <a:srgbClr val="2F4F6B"/>
+                </a:solidFill>
+                <a:latin typeface="Yu Gothic" pitchFamily="34" charset="0"/>
+                <a:ea typeface="Yu Gothic" pitchFamily="34" charset="-122"/>
+                <a:cs typeface="Yu Gothic" pitchFamily="34" charset="-120"/>
+              </a:rPr>
+              <a:t>「エージェント機能を使えばいいのでは」</a:t>
+            </a:r>
+            <a:endParaRPr lang="en-US" sz="1400" dirty="0"/>
+          </a:p>
+        </p:txBody>
+      </p:sp>
+      <p:sp>
+        <p:nvSpPr>
+          <p:cNvPr id="11" name="Text 9"/>
+          <p:cNvSpPr txBox="1"/>
+          <p:nvPr/>
+        </p:nvSpPr>
+        <p:spPr>
+          <a:xfrm>
+            <a:off x="1097280" y="3529584"/>
+            <a:ext cx="9966960" cy="603504"/>
           </a:xfrm>
           <a:prstGeom prst="rect">
             <a:avLst/>
@@ -8810,30 +10823,30 @@
               <a:buNone/>
             </a:pPr>
             <a:r>
-              <a:rPr lang="en-US" sz="1150" dirty="0">
-                <a:solidFill>
-                  <a:srgbClr val="5A534A"/>
-                </a:solidFill>
-                <a:latin typeface="Yu Gothic" pitchFamily="34" charset="0"/>
-                <a:ea typeface="Yu Gothic" pitchFamily="34" charset="-122"/>
-                <a:cs typeface="Yu Gothic" pitchFamily="34" charset="-120"/>
-              </a:rPr>
-              <a:t>設計どおりに動かしてみます</a:t>
-            </a:r>
-            <a:endParaRPr lang="en-US" sz="1150" dirty="0"/>
-          </a:p>
-        </p:txBody>
-      </p:sp>
-      <p:sp>
-        <p:nvSpPr>
-          <p:cNvPr id="15" name="Shape 13"/>
+              <a:rPr lang="en-US" sz="1250" dirty="0">
+                <a:solidFill>
+                  <a:srgbClr val="3F3933"/>
+                </a:solidFill>
+                <a:latin typeface="Yu Gothic" pitchFamily="34" charset="0"/>
+                <a:ea typeface="Yu Gothic" pitchFamily="34" charset="-122"/>
+                <a:cs typeface="Yu Gothic" pitchFamily="34" charset="-120"/>
+              </a:rPr>
+              <a:t>使って構いません。ただし任せる範囲と確認ポイントの設計は同じです。機能が変わっても、設計は変わりません。</a:t>
+            </a:r>
+            <a:endParaRPr lang="en-US" sz="1250" dirty="0"/>
+          </a:p>
+        </p:txBody>
+      </p:sp>
+      <p:sp>
+        <p:nvSpPr>
+          <p:cNvPr id="12" name="Shape 10"/>
           <p:cNvSpPr/>
           <p:nvPr/>
         </p:nvSpPr>
         <p:spPr>
           <a:xfrm>
-            <a:off x="8001000" y="2148840"/>
-            <a:ext cx="3383280" cy="2880360"/>
+            <a:off x="777240" y="4334256"/>
+            <a:ext cx="10607040" cy="1170432"/>
           </a:xfrm>
           <a:prstGeom prst="rect">
             <a:avLst/>
@@ -8851,16 +10864,16 @@
       </p:sp>
       <p:sp>
         <p:nvSpPr>
-          <p:cNvPr id="16" name="Shape 14"/>
+          <p:cNvPr id="13" name="Shape 11"/>
           <p:cNvSpPr/>
           <p:nvPr/>
         </p:nvSpPr>
         <p:spPr>
           <a:xfrm>
-            <a:off x="8275320" y="2395728"/>
-            <a:ext cx="438912" cy="438912"/>
-          </a:xfrm>
-          <a:prstGeom prst="ellipse">
+            <a:off x="777240" y="4334256"/>
+            <a:ext cx="54864" cy="1170432"/>
+          </a:xfrm>
+          <a:prstGeom prst="rect">
             <a:avLst/>
           </a:prstGeom>
           <a:solidFill>
@@ -8876,95 +10889,53 @@
       </p:sp>
       <p:sp>
         <p:nvSpPr>
-          <p:cNvPr id="17" name="Text 15"/>
-          <p:cNvSpPr txBox="1"/>
-          <p:nvPr/>
-        </p:nvSpPr>
-        <p:spPr>
-          <a:xfrm>
-            <a:off x="8275320" y="2395728"/>
-            <a:ext cx="438912" cy="438912"/>
-          </a:xfrm>
-          <a:prstGeom prst="rect">
-            <a:avLst/>
-          </a:prstGeom>
-          <a:noFill/>
-          <a:ln/>
-        </p:spPr>
-        <p:txBody>
-          <a:bodyPr wrap="square" lIns="0" tIns="0" rIns="0" bIns="0" rtlCol="0" anchor="ctr"/>
-          <a:lstStyle/>
-          <a:p>
-            <a:pPr algn="ctr" indent="0" marL="0">
-              <a:buNone/>
-            </a:pPr>
-            <a:r>
-              <a:rPr lang="en-US" sz="1300" b="1" dirty="0">
-                <a:solidFill>
-                  <a:srgbClr val="FFFFFF"/>
-                </a:solidFill>
-                <a:latin typeface="Yu Gothic" pitchFamily="34" charset="0"/>
-                <a:ea typeface="Yu Gothic" pitchFamily="34" charset="-122"/>
-                <a:cs typeface="Yu Gothic" pitchFamily="34" charset="-120"/>
-              </a:rPr>
-              <a:t>3</a:t>
-            </a:r>
-            <a:endParaRPr lang="en-US" sz="1300" dirty="0"/>
-          </a:p>
-        </p:txBody>
-      </p:sp>
-      <p:sp>
-        <p:nvSpPr>
-          <p:cNvPr id="18" name="Text 16"/>
-          <p:cNvSpPr txBox="1"/>
-          <p:nvPr/>
-        </p:nvSpPr>
-        <p:spPr>
-          <a:xfrm>
-            <a:off x="8275320" y="2944368"/>
-            <a:ext cx="2834640" cy="731520"/>
-          </a:xfrm>
-          <a:prstGeom prst="rect">
-            <a:avLst/>
-          </a:prstGeom>
-          <a:noFill/>
-          <a:ln/>
-        </p:spPr>
-        <p:txBody>
-          <a:bodyPr wrap="square" lIns="0" tIns="0" rIns="0" bIns="0" rtlCol="0" anchor="ctr"/>
-          <a:lstStyle/>
-          <a:p>
-            <a:pPr indent="0" marL="0">
-              <a:lnSpc>
-                <a:spcPct val="125000"/>
-              </a:lnSpc>
-              <a:buNone/>
-            </a:pPr>
-            <a:r>
-              <a:rPr lang="en-US" sz="1450" b="1" dirty="0">
-                <a:solidFill>
-                  <a:srgbClr val="23201D"/>
-                </a:solidFill>
-                <a:latin typeface="Yu Gothic" pitchFamily="34" charset="0"/>
-                <a:ea typeface="Yu Gothic" pitchFamily="34" charset="-122"/>
-                <a:cs typeface="Yu Gothic" pitchFamily="34" charset="-120"/>
-              </a:rPr>
-              <a:t>わざと壊す</a:t>
-            </a:r>
-            <a:endParaRPr lang="en-US" sz="1450" dirty="0"/>
-          </a:p>
-        </p:txBody>
-      </p:sp>
-      <p:sp>
-        <p:nvSpPr>
-          <p:cNvPr id="19" name="Text 17"/>
-          <p:cNvSpPr txBox="1"/>
-          <p:nvPr/>
-        </p:nvSpPr>
-        <p:spPr>
-          <a:xfrm>
-            <a:off x="8275320" y="3703320"/>
-            <a:ext cx="2834640" cy="1188720"/>
+          <p:cNvPr id="14" name="Text 12"/>
+          <p:cNvSpPr txBox="1"/>
+          <p:nvPr/>
+        </p:nvSpPr>
+        <p:spPr>
+          <a:xfrm>
+            <a:off x="1097280" y="4425696"/>
+            <a:ext cx="9966960" cy="384048"/>
+          </a:xfrm>
+          <a:prstGeom prst="rect">
+            <a:avLst/>
+          </a:prstGeom>
+          <a:noFill/>
+          <a:ln/>
+        </p:spPr>
+        <p:txBody>
+          <a:bodyPr wrap="square" lIns="0" tIns="0" rIns="0" bIns="0" rtlCol="0" anchor="ctr"/>
+          <a:lstStyle/>
+          <a:p>
+            <a:pPr indent="0" marL="0">
+              <a:buNone/>
+            </a:pPr>
+            <a:r>
+              <a:rPr lang="en-US" sz="1400" b="1" dirty="0">
+                <a:solidFill>
+                  <a:srgbClr val="2F4F6B"/>
+                </a:solidFill>
+                <a:latin typeface="Yu Gothic" pitchFamily="34" charset="0"/>
+                <a:ea typeface="Yu Gothic" pitchFamily="34" charset="-122"/>
+                <a:cs typeface="Yu Gothic" pitchFamily="34" charset="-120"/>
+              </a:rPr>
+              <a:t>「設計書は誰のために書くのですか」</a:t>
+            </a:r>
+            <a:endParaRPr lang="en-US" sz="1400" dirty="0"/>
+          </a:p>
+        </p:txBody>
+      </p:sp>
+      <p:sp>
+        <p:nvSpPr>
+          <p:cNvPr id="15" name="Text 13"/>
+          <p:cNvSpPr txBox="1"/>
+          <p:nvPr/>
+        </p:nvSpPr>
+        <p:spPr>
+          <a:xfrm>
+            <a:off x="1097280" y="4828032"/>
+            <a:ext cx="9966960" cy="603504"/>
           </a:xfrm>
           <a:prstGeom prst="rect">
             <a:avLst/>
@@ -8983,23 +10954,23 @@
               <a:buNone/>
             </a:pPr>
             <a:r>
-              <a:rPr lang="en-US" sz="1150" dirty="0">
-                <a:solidFill>
-                  <a:srgbClr val="5A534A"/>
-                </a:solidFill>
-                <a:latin typeface="Yu Gothic" pitchFamily="34" charset="0"/>
-                <a:ea typeface="Yu Gothic" pitchFamily="34" charset="-122"/>
-                <a:cs typeface="Yu Gothic" pitchFamily="34" charset="-120"/>
-              </a:rPr>
-              <a:t>入力を1つ欠けさせて、どこで止まるか・どこで気づけるかを確かめます</a:t>
-            </a:r>
-            <a:endParaRPr lang="en-US" sz="1150" dirty="0"/>
-          </a:p>
-        </p:txBody>
-      </p:sp>
-      <p:sp>
-        <p:nvSpPr>
-          <p:cNvPr id="20" name="Text 18"/>
+              <a:rPr lang="en-US" sz="1250" dirty="0">
+                <a:solidFill>
+                  <a:srgbClr val="3F3933"/>
+                </a:solidFill>
+                <a:latin typeface="Yu Gothic" pitchFamily="34" charset="0"/>
+                <a:ea typeface="Yu Gothic" pitchFamily="34" charset="-122"/>
+                <a:cs typeface="Yu Gothic" pitchFamily="34" charset="-120"/>
+              </a:rPr>
+              <a:t>担当者が替わったときのためです。頭の中にしかない設計は、引き継げません。第11回の体制設計でも使います。</a:t>
+            </a:r>
+            <a:endParaRPr lang="en-US" sz="1250" dirty="0"/>
+          </a:p>
+        </p:txBody>
+      </p:sp>
+      <p:sp>
+        <p:nvSpPr>
+          <p:cNvPr id="16" name="Text 14"/>
           <p:cNvSpPr txBox="1"/>
           <p:nvPr/>
         </p:nvSpPr>
@@ -9038,7 +11009,7 @@
       </p:sp>
       <p:sp>
         <p:nvSpPr>
-          <p:cNvPr id="21" name="Text 19"/>
+          <p:cNvPr id="17" name="Text 15"/>
           <p:cNvSpPr txBox="1"/>
           <p:nvPr/>
         </p:nvSpPr>
@@ -9069,7 +11040,7 @@
                 <a:ea typeface="Yu Gothic" pitchFamily="34" charset="-122"/>
                 <a:cs typeface="Yu Gothic" pitchFamily="34" charset="-120"/>
               </a:rPr>
-              <a:t>演習</a:t>
+              <a:t>想定問答</a:t>
             </a:r>
             <a:endParaRPr lang="en-US" sz="900" dirty="0"/>
           </a:p>

--- a/slides/pptx/第09回_複数の工程をまとめて任せる.pptx
+++ b/slides/pptx/第09回_複数の工程をまとめて任せる.pptx
@@ -4604,7 +4604,7 @@
                 <a:ea typeface="Yu Gothic" pitchFamily="34" charset="-122"/>
                 <a:cs typeface="Yu Gothic" pitchFamily="34" charset="-120"/>
               </a:rPr>
-              <a:t>他社では</a:t>
+              <a:t>よくある型</a:t>
             </a:r>
             <a:endParaRPr lang="en-US" sz="900" dirty="0"/>
           </a:p>
@@ -4646,7 +4646,7 @@
                 <a:ea typeface="Yu Gothic" pitchFamily="34" charset="-122"/>
                 <a:cs typeface="Yu Gothic" pitchFamily="34" charset="-120"/>
               </a:rPr>
-              <a:t>見積作成を3工程に分けて任せた会社では、最初の版は工程1の商品名の取り違えが最後まで残り、危うく誤った金額を出すところでした。工程1の直後に確認を1つ置いただけで、以後は事故が起きていません。</a:t>
+              <a:t>多工程では、上流の取り違え（品番・商品名）が最後まで残る。工程1の直後に確認を1つ置くだけで、事故はほぼ止まる。</a:t>
             </a:r>
             <a:endParaRPr lang="en-US" sz="1250" dirty="0"/>
           </a:p>

--- a/slides/pptx/第09回_複数の工程をまとめて任せる.pptx
+++ b/slides/pptx/第09回_複数の工程をまとめて任せる.pptx
@@ -3450,7 +3450,7 @@
                 <a:ea typeface="Yu Gothic" pitchFamily="34" charset="-122"/>
                 <a:cs typeface="Yu Gothic" pitchFamily="34" charset="-120"/>
               </a:rPr>
-              <a:t>実際に流す</a:t>
+              <a:t>通しで流す</a:t>
             </a:r>
             <a:endParaRPr lang="en-US" sz="1450" dirty="0"/>
           </a:p>
@@ -3492,7 +3492,7 @@
                 <a:ea typeface="Yu Gothic" pitchFamily="34" charset="-122"/>
                 <a:cs typeface="Yu Gothic" pitchFamily="34" charset="-120"/>
               </a:rPr>
-              <a:t>設計どおりに動かしてみます</a:t>
+              <a:t>工程ごとに会話を分け、前の出力を次の冒頭に貼って順に流します</a:t>
             </a:r>
             <a:endParaRPr lang="en-US" sz="1150" dirty="0"/>
           </a:p>
@@ -3673,7 +3673,180 @@
       </p:sp>
       <p:sp>
         <p:nvSpPr>
-          <p:cNvPr id="20" name="Text 18"/>
+          <p:cNvPr id="20" name="Shape 18"/>
+          <p:cNvSpPr/>
+          <p:nvPr/>
+        </p:nvSpPr>
+        <p:spPr>
+          <a:xfrm>
+            <a:off x="11612880" y="2148840"/>
+            <a:ext cx="3383280" cy="2880360"/>
+          </a:xfrm>
+          <a:prstGeom prst="rect">
+            <a:avLst/>
+          </a:prstGeom>
+          <a:solidFill>
+            <a:srgbClr val="FFFFFF"/>
+          </a:solidFill>
+          <a:ln w="12700">
+            <a:solidFill>
+              <a:srgbClr val="EDE7DB"/>
+            </a:solidFill>
+            <a:prstDash val="solid"/>
+          </a:ln>
+        </p:spPr>
+      </p:sp>
+      <p:sp>
+        <p:nvSpPr>
+          <p:cNvPr id="21" name="Shape 19"/>
+          <p:cNvSpPr/>
+          <p:nvPr/>
+        </p:nvSpPr>
+        <p:spPr>
+          <a:xfrm>
+            <a:off x="11887200" y="2395728"/>
+            <a:ext cx="438912" cy="438912"/>
+          </a:xfrm>
+          <a:prstGeom prst="ellipse">
+            <a:avLst/>
+          </a:prstGeom>
+          <a:solidFill>
+            <a:srgbClr val="2F4F6B"/>
+          </a:solidFill>
+          <a:ln w="12700">
+            <a:solidFill>
+              <a:srgbClr val="333333"/>
+            </a:solidFill>
+            <a:prstDash val="solid"/>
+          </a:ln>
+        </p:spPr>
+      </p:sp>
+      <p:sp>
+        <p:nvSpPr>
+          <p:cNvPr id="22" name="Text 20"/>
+          <p:cNvSpPr txBox="1"/>
+          <p:nvPr/>
+        </p:nvSpPr>
+        <p:spPr>
+          <a:xfrm>
+            <a:off x="11887200" y="2395728"/>
+            <a:ext cx="438912" cy="438912"/>
+          </a:xfrm>
+          <a:prstGeom prst="rect">
+            <a:avLst/>
+          </a:prstGeom>
+          <a:noFill/>
+          <a:ln/>
+        </p:spPr>
+        <p:txBody>
+          <a:bodyPr wrap="square" lIns="0" tIns="0" rIns="0" bIns="0" rtlCol="0" anchor="ctr"/>
+          <a:lstStyle/>
+          <a:p>
+            <a:pPr algn="ctr" indent="0" marL="0">
+              <a:buNone/>
+            </a:pPr>
+            <a:r>
+              <a:rPr lang="en-US" sz="1300" b="1" dirty="0">
+                <a:solidFill>
+                  <a:srgbClr val="FFFFFF"/>
+                </a:solidFill>
+                <a:latin typeface="Yu Gothic" pitchFamily="34" charset="0"/>
+                <a:ea typeface="Yu Gothic" pitchFamily="34" charset="-122"/>
+                <a:cs typeface="Yu Gothic" pitchFamily="34" charset="-120"/>
+              </a:rPr>
+              <a:t>4</a:t>
+            </a:r>
+            <a:endParaRPr lang="en-US" sz="1300" dirty="0"/>
+          </a:p>
+        </p:txBody>
+      </p:sp>
+      <p:sp>
+        <p:nvSpPr>
+          <p:cNvPr id="23" name="Text 21"/>
+          <p:cNvSpPr txBox="1"/>
+          <p:nvPr/>
+        </p:nvSpPr>
+        <p:spPr>
+          <a:xfrm>
+            <a:off x="11887200" y="2944368"/>
+            <a:ext cx="2834640" cy="731520"/>
+          </a:xfrm>
+          <a:prstGeom prst="rect">
+            <a:avLst/>
+          </a:prstGeom>
+          <a:noFill/>
+          <a:ln/>
+        </p:spPr>
+        <p:txBody>
+          <a:bodyPr wrap="square" lIns="0" tIns="0" rIns="0" bIns="0" rtlCol="0" anchor="ctr"/>
+          <a:lstStyle/>
+          <a:p>
+            <a:pPr indent="0" marL="0">
+              <a:lnSpc>
+                <a:spcPct val="125000"/>
+              </a:lnSpc>
+              <a:buNone/>
+            </a:pPr>
+            <a:r>
+              <a:rPr lang="en-US" sz="1450" b="1" dirty="0">
+                <a:solidFill>
+                  <a:srgbClr val="23201D"/>
+                </a:solidFill>
+                <a:latin typeface="Yu Gothic" pitchFamily="34" charset="0"/>
+                <a:ea typeface="Yu Gothic" pitchFamily="34" charset="-122"/>
+                <a:cs typeface="Yu Gothic" pitchFamily="34" charset="-120"/>
+              </a:rPr>
+              <a:t>確認ポイントを入れる</a:t>
+            </a:r>
+            <a:endParaRPr lang="en-US" sz="1450" dirty="0"/>
+          </a:p>
+        </p:txBody>
+      </p:sp>
+      <p:sp>
+        <p:nvSpPr>
+          <p:cNvPr id="24" name="Text 22"/>
+          <p:cNvSpPr txBox="1"/>
+          <p:nvPr/>
+        </p:nvSpPr>
+        <p:spPr>
+          <a:xfrm>
+            <a:off x="11887200" y="3703320"/>
+            <a:ext cx="2834640" cy="1188720"/>
+          </a:xfrm>
+          <a:prstGeom prst="rect">
+            <a:avLst/>
+          </a:prstGeom>
+          <a:noFill/>
+          <a:ln/>
+        </p:spPr>
+        <p:txBody>
+          <a:bodyPr wrap="square" lIns="0" tIns="0" rIns="0" bIns="0" rtlCol="0" anchor="ctr"/>
+          <a:lstStyle/>
+          <a:p>
+            <a:pPr indent="0" marL="0">
+              <a:lnSpc>
+                <a:spcPct val="130000"/>
+              </a:lnSpc>
+              <a:buNone/>
+            </a:pPr>
+            <a:r>
+              <a:rPr lang="en-US" sz="1150" dirty="0">
+                <a:solidFill>
+                  <a:srgbClr val="5A534A"/>
+                </a:solidFill>
+                <a:latin typeface="Yu Gothic" pitchFamily="34" charset="0"/>
+                <a:ea typeface="Yu Gothic" pitchFamily="34" charset="-122"/>
+                <a:cs typeface="Yu Gothic" pitchFamily="34" charset="-120"/>
+              </a:rPr>
+              <a:t>いちばん上流に、人が見る場所を1つ置き直します</a:t>
+            </a:r>
+            <a:endParaRPr lang="en-US" sz="1150" dirty="0"/>
+          </a:p>
+        </p:txBody>
+      </p:sp>
+      <p:sp>
+        <p:nvSpPr>
+          <p:cNvPr id="25" name="Text 23"/>
           <p:cNvSpPr txBox="1"/>
           <p:nvPr/>
         </p:nvSpPr>
@@ -3712,7 +3885,7 @@
       </p:sp>
       <p:sp>
         <p:nvSpPr>
-          <p:cNvPr id="21" name="Text 19"/>
+          <p:cNvPr id="26" name="Text 24"/>
           <p:cNvSpPr txBox="1"/>
           <p:nvPr/>
         </p:nvSpPr>

--- a/slides/pptx/第09回_複数の工程をまとめて任せる.pptx
+++ b/slides/pptx/第09回_複数の工程をまとめて任せる.pptx
@@ -3161,7 +3161,7 @@
         <p:spPr>
           <a:xfrm>
             <a:off x="777240" y="2148840"/>
-            <a:ext cx="3383280" cy="2880360"/>
+            <a:ext cx="2528316" cy="2880360"/>
           </a:xfrm>
           <a:prstGeom prst="rect">
             <a:avLst/>
@@ -3250,7 +3250,7 @@
         <p:spPr>
           <a:xfrm>
             <a:off x="1051560" y="2944368"/>
-            <a:ext cx="2834640" cy="731520"/>
+            <a:ext cx="1979676" cy="731520"/>
           </a:xfrm>
           <a:prstGeom prst="rect">
             <a:avLst/>
@@ -3269,7 +3269,7 @@
               <a:buNone/>
             </a:pPr>
             <a:r>
-              <a:rPr lang="en-US" sz="1450" b="1" dirty="0">
+              <a:rPr lang="en-US" sz="1300" b="1" dirty="0">
                 <a:solidFill>
                   <a:srgbClr val="23201D"/>
                 </a:solidFill>
@@ -3279,7 +3279,7 @@
               </a:rPr>
               <a:t>工程図を描く</a:t>
             </a:r>
-            <a:endParaRPr lang="en-US" sz="1450" dirty="0"/>
+            <a:endParaRPr lang="en-US" sz="1300" dirty="0"/>
           </a:p>
         </p:txBody>
       </p:sp>
@@ -3292,7 +3292,7 @@
         <p:spPr>
           <a:xfrm>
             <a:off x="1051560" y="3703320"/>
-            <a:ext cx="2834640" cy="1188720"/>
+            <a:ext cx="1979676" cy="1188720"/>
           </a:xfrm>
           <a:prstGeom prst="rect">
             <a:avLst/>
@@ -3311,7 +3311,7 @@
               <a:buNone/>
             </a:pPr>
             <a:r>
-              <a:rPr lang="en-US" sz="1150" dirty="0">
+              <a:rPr lang="en-US" sz="1050" dirty="0">
                 <a:solidFill>
                   <a:srgbClr val="5A534A"/>
                 </a:solidFill>
@@ -3321,7 +3321,7 @@
               </a:rPr>
               <a:t>AIに任せる／人が確認する／人がやる、に仕分けます</a:t>
             </a:r>
-            <a:endParaRPr lang="en-US" sz="1150" dirty="0"/>
+            <a:endParaRPr lang="en-US" sz="1050" dirty="0"/>
           </a:p>
         </p:txBody>
       </p:sp>
@@ -3333,8 +3333,8 @@
         </p:nvSpPr>
         <p:spPr>
           <a:xfrm>
-            <a:off x="4389120" y="2148840"/>
-            <a:ext cx="3383280" cy="2880360"/>
+            <a:off x="3470148" y="2148840"/>
+            <a:ext cx="2528316" cy="2880360"/>
           </a:xfrm>
           <a:prstGeom prst="rect">
             <a:avLst/>
@@ -3358,7 +3358,7 @@
         </p:nvSpPr>
         <p:spPr>
           <a:xfrm>
-            <a:off x="4663440" y="2395728"/>
+            <a:off x="3744468" y="2395728"/>
             <a:ext cx="438912" cy="438912"/>
           </a:xfrm>
           <a:prstGeom prst="ellipse">
@@ -3383,7 +3383,7 @@
         </p:nvSpPr>
         <p:spPr>
           <a:xfrm>
-            <a:off x="4663440" y="2395728"/>
+            <a:off x="3744468" y="2395728"/>
             <a:ext cx="438912" cy="438912"/>
           </a:xfrm>
           <a:prstGeom prst="rect">
@@ -3422,8 +3422,8 @@
         </p:nvSpPr>
         <p:spPr>
           <a:xfrm>
-            <a:off x="4663440" y="2944368"/>
-            <a:ext cx="2834640" cy="731520"/>
+            <a:off x="3744468" y="2944368"/>
+            <a:ext cx="1979676" cy="731520"/>
           </a:xfrm>
           <a:prstGeom prst="rect">
             <a:avLst/>
@@ -3442,7 +3442,7 @@
               <a:buNone/>
             </a:pPr>
             <a:r>
-              <a:rPr lang="en-US" sz="1450" b="1" dirty="0">
+              <a:rPr lang="en-US" sz="1300" b="1" dirty="0">
                 <a:solidFill>
                   <a:srgbClr val="23201D"/>
                 </a:solidFill>
@@ -3452,7 +3452,7 @@
               </a:rPr>
               <a:t>通しで流す</a:t>
             </a:r>
-            <a:endParaRPr lang="en-US" sz="1450" dirty="0"/>
+            <a:endParaRPr lang="en-US" sz="1300" dirty="0"/>
           </a:p>
         </p:txBody>
       </p:sp>
@@ -3464,8 +3464,8 @@
         </p:nvSpPr>
         <p:spPr>
           <a:xfrm>
-            <a:off x="4663440" y="3703320"/>
-            <a:ext cx="2834640" cy="1188720"/>
+            <a:off x="3744468" y="3703320"/>
+            <a:ext cx="1979676" cy="1188720"/>
           </a:xfrm>
           <a:prstGeom prst="rect">
             <a:avLst/>
@@ -3484,7 +3484,7 @@
               <a:buNone/>
             </a:pPr>
             <a:r>
-              <a:rPr lang="en-US" sz="1150" dirty="0">
+              <a:rPr lang="en-US" sz="1050" dirty="0">
                 <a:solidFill>
                   <a:srgbClr val="5A534A"/>
                 </a:solidFill>
@@ -3494,7 +3494,7 @@
               </a:rPr>
               <a:t>工程ごとに会話を分け、前の出力を次の冒頭に貼って順に流します</a:t>
             </a:r>
-            <a:endParaRPr lang="en-US" sz="1150" dirty="0"/>
+            <a:endParaRPr lang="en-US" sz="1050" dirty="0"/>
           </a:p>
         </p:txBody>
       </p:sp>
@@ -3506,8 +3506,8 @@
         </p:nvSpPr>
         <p:spPr>
           <a:xfrm>
-            <a:off x="8001000" y="2148840"/>
-            <a:ext cx="3383280" cy="2880360"/>
+            <a:off x="6163056" y="2148840"/>
+            <a:ext cx="2528316" cy="2880360"/>
           </a:xfrm>
           <a:prstGeom prst="rect">
             <a:avLst/>
@@ -3531,7 +3531,7 @@
         </p:nvSpPr>
         <p:spPr>
           <a:xfrm>
-            <a:off x="8275320" y="2395728"/>
+            <a:off x="6437376" y="2395728"/>
             <a:ext cx="438912" cy="438912"/>
           </a:xfrm>
           <a:prstGeom prst="ellipse">
@@ -3556,7 +3556,7 @@
         </p:nvSpPr>
         <p:spPr>
           <a:xfrm>
-            <a:off x="8275320" y="2395728"/>
+            <a:off x="6437376" y="2395728"/>
             <a:ext cx="438912" cy="438912"/>
           </a:xfrm>
           <a:prstGeom prst="rect">
@@ -3595,8 +3595,8 @@
         </p:nvSpPr>
         <p:spPr>
           <a:xfrm>
-            <a:off x="8275320" y="2944368"/>
-            <a:ext cx="2834640" cy="731520"/>
+            <a:off x="6437376" y="2944368"/>
+            <a:ext cx="1979676" cy="731520"/>
           </a:xfrm>
           <a:prstGeom prst="rect">
             <a:avLst/>
@@ -3615,7 +3615,7 @@
               <a:buNone/>
             </a:pPr>
             <a:r>
-              <a:rPr lang="en-US" sz="1450" b="1" dirty="0">
+              <a:rPr lang="en-US" sz="1300" b="1" dirty="0">
                 <a:solidFill>
                   <a:srgbClr val="23201D"/>
                 </a:solidFill>
@@ -3625,7 +3625,7 @@
               </a:rPr>
               <a:t>わざと壊す</a:t>
             </a:r>
-            <a:endParaRPr lang="en-US" sz="1450" dirty="0"/>
+            <a:endParaRPr lang="en-US" sz="1300" dirty="0"/>
           </a:p>
         </p:txBody>
       </p:sp>
@@ -3637,8 +3637,8 @@
         </p:nvSpPr>
         <p:spPr>
           <a:xfrm>
-            <a:off x="8275320" y="3703320"/>
-            <a:ext cx="2834640" cy="1188720"/>
+            <a:off x="6437376" y="3703320"/>
+            <a:ext cx="1979676" cy="1188720"/>
           </a:xfrm>
           <a:prstGeom prst="rect">
             <a:avLst/>
@@ -3657,7 +3657,7 @@
               <a:buNone/>
             </a:pPr>
             <a:r>
-              <a:rPr lang="en-US" sz="1150" dirty="0">
+              <a:rPr lang="en-US" sz="1050" dirty="0">
                 <a:solidFill>
                   <a:srgbClr val="5A534A"/>
                 </a:solidFill>
@@ -3667,7 +3667,7 @@
               </a:rPr>
               <a:t>入力を1つ欠けさせて、どこで止まるか・どこで気づけるかを確かめます</a:t>
             </a:r>
-            <a:endParaRPr lang="en-US" sz="1150" dirty="0"/>
+            <a:endParaRPr lang="en-US" sz="1050" dirty="0"/>
           </a:p>
         </p:txBody>
       </p:sp>
@@ -3679,8 +3679,8 @@
         </p:nvSpPr>
         <p:spPr>
           <a:xfrm>
-            <a:off x="11612880" y="2148840"/>
-            <a:ext cx="3383280" cy="2880360"/>
+            <a:off x="8855964" y="2148840"/>
+            <a:ext cx="2528316" cy="2880360"/>
           </a:xfrm>
           <a:prstGeom prst="rect">
             <a:avLst/>
@@ -3704,7 +3704,7 @@
         </p:nvSpPr>
         <p:spPr>
           <a:xfrm>
-            <a:off x="11887200" y="2395728"/>
+            <a:off x="9130284" y="2395728"/>
             <a:ext cx="438912" cy="438912"/>
           </a:xfrm>
           <a:prstGeom prst="ellipse">
@@ -3729,7 +3729,7 @@
         </p:nvSpPr>
         <p:spPr>
           <a:xfrm>
-            <a:off x="11887200" y="2395728"/>
+            <a:off x="9130284" y="2395728"/>
             <a:ext cx="438912" cy="438912"/>
           </a:xfrm>
           <a:prstGeom prst="rect">
@@ -3768,8 +3768,8 @@
         </p:nvSpPr>
         <p:spPr>
           <a:xfrm>
-            <a:off x="11887200" y="2944368"/>
-            <a:ext cx="2834640" cy="731520"/>
+            <a:off x="9130284" y="2944368"/>
+            <a:ext cx="1979676" cy="731520"/>
           </a:xfrm>
           <a:prstGeom prst="rect">
             <a:avLst/>
@@ -3788,7 +3788,7 @@
               <a:buNone/>
             </a:pPr>
             <a:r>
-              <a:rPr lang="en-US" sz="1450" b="1" dirty="0">
+              <a:rPr lang="en-US" sz="1300" b="1" dirty="0">
                 <a:solidFill>
                   <a:srgbClr val="23201D"/>
                 </a:solidFill>
@@ -3798,7 +3798,7 @@
               </a:rPr>
               <a:t>確認ポイントを入れる</a:t>
             </a:r>
-            <a:endParaRPr lang="en-US" sz="1450" dirty="0"/>
+            <a:endParaRPr lang="en-US" sz="1300" dirty="0"/>
           </a:p>
         </p:txBody>
       </p:sp>
@@ -3810,8 +3810,8 @@
         </p:nvSpPr>
         <p:spPr>
           <a:xfrm>
-            <a:off x="11887200" y="3703320"/>
-            <a:ext cx="2834640" cy="1188720"/>
+            <a:off x="9130284" y="3703320"/>
+            <a:ext cx="1979676" cy="1188720"/>
           </a:xfrm>
           <a:prstGeom prst="rect">
             <a:avLst/>
@@ -3830,7 +3830,7 @@
               <a:buNone/>
             </a:pPr>
             <a:r>
-              <a:rPr lang="en-US" sz="1150" dirty="0">
+              <a:rPr lang="en-US" sz="1050" dirty="0">
                 <a:solidFill>
                   <a:srgbClr val="5A534A"/>
                 </a:solidFill>
@@ -3840,7 +3840,7 @@
               </a:rPr>
               <a:t>いちばん上流に、人が見る場所を1つ置き直します</a:t>
             </a:r>
-            <a:endParaRPr lang="en-US" sz="1150" dirty="0"/>
+            <a:endParaRPr lang="en-US" sz="1050" dirty="0"/>
           </a:p>
         </p:txBody>
       </p:sp>

--- a/slides/pptx/第09回_複数の工程をまとめて任せる.pptx
+++ b/slides/pptx/第09回_複数の工程をまとめて任せる.pptx
@@ -1220,7 +1220,7 @@
           <a:p>
             <a:r>
               <a:rPr lang="en-US" dirty="0"/>
-              <a:t>「決める比重が高い回」と先に断る。手を動かす時間が減ると満足度が下がりやすいので、工程図を一緒に描くことで手を動かし続ける。</a:t>
+              <a:t>「決める比重が高い回」と先に断る。操作の場面が減る分、工程図を講師が画面で描きながら、受講者と一緒に決めていく。</a:t>
             </a:r>
             <a:endParaRPr lang="en-US" dirty="0"/>
           </a:p>
@@ -2304,6 +2304,10 @@
             <a:prstDash val="solid"/>
           </a:ln>
         </p:spPr>
+        <p:txBody>
+          <a:bodyPr/>
+          <a:p/>
+        </p:txBody>
       </p:sp>
       <p:sp>
         <p:nvSpPr>
@@ -2517,6 +2521,10 @@
             <a:prstDash val="solid"/>
           </a:ln>
         </p:spPr>
+        <p:txBody>
+          <a:bodyPr/>
+          <a:p/>
+        </p:txBody>
       </p:sp>
       <p:sp>
         <p:nvSpPr>
@@ -2581,6 +2589,10 @@
             <a:prstDash val="solid"/>
           </a:ln>
         </p:spPr>
+        <p:txBody>
+          <a:bodyPr/>
+          <a:p/>
+        </p:txBody>
       </p:sp>
       <p:sp>
         <p:nvSpPr>
@@ -2648,6 +2660,10 @@
             <a:prstDash val="solid"/>
           </a:ln>
         </p:spPr>
+        <p:txBody>
+          <a:bodyPr/>
+          <a:p/>
+        </p:txBody>
       </p:sp>
       <p:sp>
         <p:nvSpPr>
@@ -2712,6 +2728,10 @@
             <a:prstDash val="solid"/>
           </a:ln>
         </p:spPr>
+        <p:txBody>
+          <a:bodyPr/>
+          <a:p/>
+        </p:txBody>
       </p:sp>
       <p:sp>
         <p:nvSpPr>
@@ -2779,6 +2799,10 @@
             <a:prstDash val="solid"/>
           </a:ln>
         </p:spPr>
+        <p:txBody>
+          <a:bodyPr/>
+          <a:p/>
+        </p:txBody>
       </p:sp>
       <p:sp>
         <p:nvSpPr>
@@ -2843,6 +2867,10 @@
             <a:prstDash val="solid"/>
           </a:ln>
         </p:spPr>
+        <p:txBody>
+          <a:bodyPr/>
+          <a:p/>
+        </p:txBody>
       </p:sp>
       <p:sp>
         <p:nvSpPr>
@@ -3068,7 +3096,7 @@
                 <a:ea typeface="Yu Gothic" pitchFamily="34" charset="-122"/>
                 <a:cs typeface="Yu Gothic" pitchFamily="34" charset="-120"/>
               </a:rPr>
-              <a:t>演習</a:t>
+              <a:t>実演</a:t>
             </a:r>
             <a:endParaRPr lang="en-US" sz="1100" dirty="0"/>
           </a:p>
@@ -3107,7 +3135,7 @@
                 <a:ea typeface="Yu Gothic" pitchFamily="34" charset="-122"/>
                 <a:cs typeface="Yu Gothic" pitchFamily="34" charset="-120"/>
               </a:rPr>
-              <a:t>今日、一緒にやること</a:t>
+              <a:t>今日、画面でお見せすること</a:t>
             </a:r>
             <a:endParaRPr lang="en-US" sz="2600" dirty="0"/>
           </a:p>
@@ -3146,7 +3174,7 @@
                 <a:ea typeface="Yu Gothic" pitchFamily="34" charset="-122"/>
                 <a:cs typeface="Yu Gothic" pitchFamily="34" charset="-120"/>
               </a:rPr>
-              <a:t>55分。操作するのはご自身です。</a:t>
+              <a:t>55分。講師の画面でお見せします。</a:t>
             </a:r>
             <a:endParaRPr lang="en-US" sz="1250" dirty="0"/>
           </a:p>
@@ -3176,6 +3204,10 @@
             <a:prstDash val="solid"/>
           </a:ln>
         </p:spPr>
+        <p:txBody>
+          <a:bodyPr/>
+          <a:p/>
+        </p:txBody>
       </p:sp>
       <p:sp>
         <p:nvSpPr>
@@ -3201,6 +3233,10 @@
             <a:prstDash val="solid"/>
           </a:ln>
         </p:spPr>
+        <p:txBody>
+          <a:bodyPr/>
+          <a:p/>
+        </p:txBody>
       </p:sp>
       <p:sp>
         <p:nvSpPr>
@@ -3349,6 +3385,10 @@
             <a:prstDash val="solid"/>
           </a:ln>
         </p:spPr>
+        <p:txBody>
+          <a:bodyPr/>
+          <a:p/>
+        </p:txBody>
       </p:sp>
       <p:sp>
         <p:nvSpPr>
@@ -3374,6 +3414,10 @@
             <a:prstDash val="solid"/>
           </a:ln>
         </p:spPr>
+        <p:txBody>
+          <a:bodyPr/>
+          <a:p/>
+        </p:txBody>
       </p:sp>
       <p:sp>
         <p:nvSpPr>
@@ -3522,6 +3566,10 @@
             <a:prstDash val="solid"/>
           </a:ln>
         </p:spPr>
+        <p:txBody>
+          <a:bodyPr/>
+          <a:p/>
+        </p:txBody>
       </p:sp>
       <p:sp>
         <p:nvSpPr>
@@ -3547,6 +3595,10 @@
             <a:prstDash val="solid"/>
           </a:ln>
         </p:spPr>
+        <p:txBody>
+          <a:bodyPr/>
+          <a:p/>
+        </p:txBody>
       </p:sp>
       <p:sp>
         <p:nvSpPr>
@@ -3695,6 +3747,10 @@
             <a:prstDash val="solid"/>
           </a:ln>
         </p:spPr>
+        <p:txBody>
+          <a:bodyPr/>
+          <a:p/>
+        </p:txBody>
       </p:sp>
       <p:sp>
         <p:nvSpPr>
@@ -3720,6 +3776,10 @@
             <a:prstDash val="solid"/>
           </a:ln>
         </p:spPr>
+        <p:txBody>
+          <a:bodyPr/>
+          <a:p/>
+        </p:txBody>
       </p:sp>
       <p:sp>
         <p:nvSpPr>
@@ -3916,7 +3976,7 @@
                 <a:ea typeface="Yu Gothic" pitchFamily="34" charset="-122"/>
                 <a:cs typeface="Yu Gothic" pitchFamily="34" charset="-120"/>
               </a:rPr>
-              <a:t>演習</a:t>
+              <a:t>実演</a:t>
             </a:r>
             <a:endParaRPr lang="en-US" sz="900" dirty="0"/>
           </a:p>
@@ -4095,6 +4155,10 @@
             <a:prstDash val="solid"/>
           </a:ln>
         </p:spPr>
+        <p:txBody>
+          <a:bodyPr/>
+          <a:p/>
+        </p:txBody>
       </p:sp>
       <p:sp>
         <p:nvSpPr>
@@ -4120,6 +4184,10 @@
             <a:prstDash val="solid"/>
           </a:ln>
         </p:spPr>
+        <p:txBody>
+          <a:bodyPr/>
+          <a:p/>
+        </p:txBody>
       </p:sp>
       <p:sp>
         <p:nvSpPr>
@@ -4226,6 +4294,10 @@
             <a:prstDash val="solid"/>
           </a:ln>
         </p:spPr>
+        <p:txBody>
+          <a:bodyPr/>
+          <a:p/>
+        </p:txBody>
       </p:sp>
       <p:sp>
         <p:nvSpPr>
@@ -4251,6 +4323,10 @@
             <a:prstDash val="solid"/>
           </a:ln>
         </p:spPr>
+        <p:txBody>
+          <a:bodyPr/>
+          <a:p/>
+        </p:txBody>
       </p:sp>
       <p:sp>
         <p:nvSpPr>
@@ -4357,6 +4433,10 @@
             <a:prstDash val="solid"/>
           </a:ln>
         </p:spPr>
+        <p:txBody>
+          <a:bodyPr/>
+          <a:p/>
+        </p:txBody>
       </p:sp>
       <p:sp>
         <p:nvSpPr>
@@ -4382,6 +4462,10 @@
             <a:prstDash val="solid"/>
           </a:ln>
         </p:spPr>
+        <p:txBody>
+          <a:bodyPr/>
+          <a:p/>
+        </p:txBody>
       </p:sp>
       <p:sp>
         <p:nvSpPr>
@@ -4676,6 +4760,10 @@
             <a:prstDash val="solid"/>
           </a:ln>
         </p:spPr>
+        <p:txBody>
+          <a:bodyPr/>
+          <a:p/>
+        </p:txBody>
       </p:sp>
       <p:sp>
         <p:nvSpPr>
@@ -4743,6 +4831,10 @@
             <a:prstDash val="solid"/>
           </a:ln>
         </p:spPr>
+        <p:txBody>
+          <a:bodyPr/>
+          <a:p/>
+        </p:txBody>
       </p:sp>
       <p:sp>
         <p:nvSpPr>
@@ -5076,6 +5168,10 @@
             <a:prstDash val="solid"/>
           </a:ln>
         </p:spPr>
+        <p:txBody>
+          <a:bodyPr/>
+          <a:p/>
+        </p:txBody>
       </p:sp>
       <p:sp>
         <p:nvSpPr>
@@ -5182,6 +5278,10 @@
             <a:prstDash val="solid"/>
           </a:ln>
         </p:spPr>
+        <p:txBody>
+          <a:bodyPr/>
+          <a:p/>
+        </p:txBody>
       </p:sp>
       <p:sp>
         <p:nvSpPr>
@@ -5288,6 +5388,10 @@
             <a:prstDash val="solid"/>
           </a:ln>
         </p:spPr>
+        <p:txBody>
+          <a:bodyPr/>
+          <a:p/>
+        </p:txBody>
       </p:sp>
       <p:sp>
         <p:nvSpPr>
@@ -5540,6 +5644,10 @@
             <a:prstDash val="solid"/>
           </a:ln>
         </p:spPr>
+        <p:txBody>
+          <a:bodyPr/>
+          <a:p/>
+        </p:txBody>
       </p:sp>
       <p:sp>
         <p:nvSpPr>
@@ -5837,6 +5945,10 @@
             <a:prstDash val="solid"/>
           </a:ln>
         </p:spPr>
+        <p:txBody>
+          <a:bodyPr/>
+          <a:p/>
+        </p:txBody>
       </p:sp>
       <p:sp>
         <p:nvSpPr>
@@ -5940,6 +6052,10 @@
             <a:prstDash val="solid"/>
           </a:ln>
         </p:spPr>
+        <p:txBody>
+          <a:bodyPr/>
+          <a:p/>
+        </p:txBody>
       </p:sp>
       <p:sp>
         <p:nvSpPr>
@@ -6043,6 +6159,10 @@
             <a:prstDash val="solid"/>
           </a:ln>
         </p:spPr>
+        <p:txBody>
+          <a:bodyPr/>
+          <a:p/>
+        </p:txBody>
       </p:sp>
       <p:sp>
         <p:nvSpPr>
@@ -6146,6 +6266,10 @@
             <a:prstDash val="solid"/>
           </a:ln>
         </p:spPr>
+        <p:txBody>
+          <a:bodyPr/>
+          <a:p/>
+        </p:txBody>
       </p:sp>
       <p:sp>
         <p:nvSpPr>
@@ -6404,6 +6528,10 @@
             <a:prstDash val="solid"/>
           </a:ln>
         </p:spPr>
+        <p:txBody>
+          <a:bodyPr/>
+          <a:p/>
+        </p:txBody>
       </p:sp>
       <p:sp>
         <p:nvSpPr>
@@ -6471,6 +6599,10 @@
             <a:prstDash val="solid"/>
           </a:ln>
         </p:spPr>
+        <p:txBody>
+          <a:bodyPr/>
+          <a:p/>
+        </p:txBody>
       </p:sp>
       <p:sp>
         <p:nvSpPr>
@@ -6700,7 +6832,7 @@
                 <a:ea typeface="Yu Gothic" pitchFamily="34" charset="-122"/>
                 <a:cs typeface="Yu Gothic" pitchFamily="34" charset="-120"/>
               </a:rPr>
-              <a:t>一緒に手を動かす</a:t>
+              <a:t>画面で順にお見せする</a:t>
             </a:r>
             <a:endParaRPr lang="en-US" sz="1100" dirty="0"/>
           </a:p>
@@ -7074,6 +7206,10 @@
             <a:prstDash val="solid"/>
           </a:ln>
         </p:spPr>
+        <p:txBody>
+          <a:bodyPr/>
+          <a:p/>
+        </p:txBody>
       </p:sp>
       <p:sp>
         <p:nvSpPr>
@@ -7099,6 +7235,10 @@
             <a:prstDash val="solid"/>
           </a:ln>
         </p:spPr>
+        <p:txBody>
+          <a:bodyPr/>
+          <a:p/>
+        </p:txBody>
       </p:sp>
       <p:sp>
         <p:nvSpPr>
@@ -7244,6 +7384,10 @@
             <a:prstDash val="solid"/>
           </a:ln>
         </p:spPr>
+        <p:txBody>
+          <a:bodyPr/>
+          <a:p/>
+        </p:txBody>
       </p:sp>
       <p:sp>
         <p:nvSpPr>
@@ -7269,6 +7413,10 @@
             <a:prstDash val="solid"/>
           </a:ln>
         </p:spPr>
+        <p:txBody>
+          <a:bodyPr/>
+          <a:p/>
+        </p:txBody>
       </p:sp>
       <p:sp>
         <p:nvSpPr>
@@ -7414,6 +7562,10 @@
             <a:prstDash val="solid"/>
           </a:ln>
         </p:spPr>
+        <p:txBody>
+          <a:bodyPr/>
+          <a:p/>
+        </p:txBody>
       </p:sp>
       <p:sp>
         <p:nvSpPr>
@@ -7439,6 +7591,10 @@
             <a:prstDash val="solid"/>
           </a:ln>
         </p:spPr>
+        <p:txBody>
+          <a:bodyPr/>
+          <a:p/>
+        </p:txBody>
       </p:sp>
       <p:sp>
         <p:nvSpPr>
@@ -7811,6 +7967,10 @@
             <a:prstDash val="solid"/>
           </a:ln>
         </p:spPr>
+        <p:txBody>
+          <a:bodyPr/>
+          <a:p/>
+        </p:txBody>
       </p:sp>
       <p:sp>
         <p:nvSpPr>
@@ -7836,6 +7996,10 @@
             <a:prstDash val="solid"/>
           </a:ln>
         </p:spPr>
+        <p:txBody>
+          <a:bodyPr/>
+          <a:p/>
+        </p:txBody>
       </p:sp>
       <p:sp>
         <p:nvSpPr>
@@ -8634,6 +8798,10 @@
             <a:prstDash val="solid"/>
           </a:ln>
         </p:spPr>
+        <p:txBody>
+          <a:bodyPr/>
+          <a:p/>
+        </p:txBody>
       </p:sp>
       <p:sp>
         <p:nvSpPr>
@@ -8740,6 +8908,10 @@
             <a:prstDash val="solid"/>
           </a:ln>
         </p:spPr>
+        <p:txBody>
+          <a:bodyPr/>
+          <a:p/>
+        </p:txBody>
       </p:sp>
       <p:sp>
         <p:nvSpPr>
@@ -8972,6 +9144,10 @@
             <a:prstDash val="solid"/>
           </a:ln>
         </p:spPr>
+        <p:txBody>
+          <a:bodyPr/>
+          <a:p/>
+        </p:txBody>
       </p:sp>
       <p:sp>
         <p:nvSpPr>
@@ -9039,6 +9215,10 @@
             <a:prstDash val="solid"/>
           </a:ln>
         </p:spPr>
+        <p:txBody>
+          <a:bodyPr/>
+          <a:p/>
+        </p:txBody>
       </p:sp>
       <p:sp>
         <p:nvSpPr>
@@ -9291,6 +9471,10 @@
             <a:prstDash val="solid"/>
           </a:ln>
         </p:spPr>
+        <p:txBody>
+          <a:bodyPr/>
+          <a:p/>
+        </p:txBody>
       </p:sp>
       <p:sp>
         <p:nvSpPr>
@@ -9397,6 +9581,10 @@
             <a:prstDash val="solid"/>
           </a:ln>
         </p:spPr>
+        <p:txBody>
+          <a:bodyPr/>
+          <a:p/>
+        </p:txBody>
       </p:sp>
       <p:sp>
         <p:nvSpPr>
@@ -9629,6 +9817,10 @@
             <a:prstDash val="solid"/>
           </a:ln>
         </p:spPr>
+        <p:txBody>
+          <a:bodyPr/>
+          <a:p/>
+        </p:txBody>
       </p:sp>
       <p:sp>
         <p:nvSpPr>
@@ -9696,6 +9888,10 @@
             <a:prstDash val="solid"/>
           </a:ln>
         </p:spPr>
+        <p:txBody>
+          <a:bodyPr/>
+          <a:p/>
+        </p:txBody>
       </p:sp>
       <p:sp>
         <p:nvSpPr>
@@ -9948,6 +10144,10 @@
             <a:prstDash val="solid"/>
           </a:ln>
         </p:spPr>
+        <p:txBody>
+          <a:bodyPr/>
+          <a:p/>
+        </p:txBody>
       </p:sp>
       <p:sp>
         <p:nvSpPr>
@@ -10054,6 +10254,10 @@
             <a:prstDash val="solid"/>
           </a:ln>
         </p:spPr>
+        <p:txBody>
+          <a:bodyPr/>
+          <a:p/>
+        </p:txBody>
       </p:sp>
       <p:sp>
         <p:nvSpPr>
@@ -10160,6 +10364,10 @@
             <a:prstDash val="solid"/>
           </a:ln>
         </p:spPr>
+        <p:txBody>
+          <a:bodyPr/>
+          <a:p/>
+        </p:txBody>
       </p:sp>
       <p:sp>
         <p:nvSpPr>
@@ -10266,6 +10474,10 @@
             <a:prstDash val="solid"/>
           </a:ln>
         </p:spPr>
+        <p:txBody>
+          <a:bodyPr/>
+          <a:p/>
+        </p:txBody>
       </p:sp>
       <p:sp>
         <p:nvSpPr>
@@ -10372,6 +10584,10 @@
             <a:prstDash val="solid"/>
           </a:ln>
         </p:spPr>
+        <p:txBody>
+          <a:bodyPr/>
+          <a:p/>
+        </p:txBody>
       </p:sp>
       <p:sp>
         <p:nvSpPr>
@@ -10478,6 +10694,10 @@
             <a:prstDash val="solid"/>
           </a:ln>
         </p:spPr>
+        <p:txBody>
+          <a:bodyPr/>
+          <a:p/>
+        </p:txBody>
       </p:sp>
       <p:sp>
         <p:nvSpPr>
@@ -10772,6 +10992,10 @@
             <a:prstDash val="solid"/>
           </a:ln>
         </p:spPr>
+        <p:txBody>
+          <a:bodyPr/>
+          <a:p/>
+        </p:txBody>
       </p:sp>
       <p:sp>
         <p:nvSpPr>
@@ -10797,6 +11021,10 @@
             <a:prstDash val="solid"/>
           </a:ln>
         </p:spPr>
+        <p:txBody>
+          <a:bodyPr/>
+          <a:p/>
+        </p:txBody>
       </p:sp>
       <p:sp>
         <p:nvSpPr>
@@ -10903,6 +11131,10 @@
             <a:prstDash val="solid"/>
           </a:ln>
         </p:spPr>
+        <p:txBody>
+          <a:bodyPr/>
+          <a:p/>
+        </p:txBody>
       </p:sp>
       <p:sp>
         <p:nvSpPr>
@@ -10928,6 +11160,10 @@
             <a:prstDash val="solid"/>
           </a:ln>
         </p:spPr>
+        <p:txBody>
+          <a:bodyPr/>
+          <a:p/>
+        </p:txBody>
       </p:sp>
       <p:sp>
         <p:nvSpPr>
@@ -11034,6 +11270,10 @@
             <a:prstDash val="solid"/>
           </a:ln>
         </p:spPr>
+        <p:txBody>
+          <a:bodyPr/>
+          <a:p/>
+        </p:txBody>
       </p:sp>
       <p:sp>
         <p:nvSpPr>
@@ -11059,6 +11299,10 @@
             <a:prstDash val="solid"/>
           </a:ln>
         </p:spPr>
+        <p:txBody>
+          <a:bodyPr/>
+          <a:p/>
+        </p:txBody>
       </p:sp>
       <p:sp>
         <p:nvSpPr>
